--- a/output/benchmark_hotels.pptx
+++ b/output/benchmark_hotels.pptx
@@ -3236,7 +3236,7 @@
                 <a:latin typeface="Meiryo"/>
                 <a:ea typeface="Meiryo"/>
               </a:rPr>
-              <a:t>作成日: 2026-07-04</a:t>
+              <a:t>作成日: 2026-07-06</a:t>
             </a:r>
           </a:p>
           <a:p>
@@ -3361,7 +3361,7 @@
         <p:spPr>
           <a:xfrm>
             <a:off x="228600" y="914400"/>
-            <a:ext cx="7133007" cy="5715000"/>
+            <a:ext cx="7313833" cy="5669280"/>
           </a:xfrm>
           <a:prstGeom prst="rect">
             <a:avLst/>
@@ -3376,7 +3376,7 @@
         </p:nvSpPr>
         <p:spPr>
           <a:xfrm>
-            <a:off x="3463947" y="2817555"/>
+            <a:off x="3400597" y="2146988"/>
             <a:ext cx="274320" cy="274320"/>
           </a:xfrm>
           <a:prstGeom prst="ellipse">
@@ -3432,119 +3432,7 @@
         </p:nvSpPr>
         <p:spPr>
           <a:xfrm>
-            <a:off x="5226986" y="2699466"/>
-            <a:ext cx="274320" cy="274320"/>
-          </a:xfrm>
-          <a:prstGeom prst="ellipse">
-            <a:avLst/>
-          </a:prstGeom>
-          <a:solidFill>
-            <a:srgbClr val="F59E0B"/>
-          </a:solidFill>
-          <a:ln w="15875">
-            <a:solidFill>
-              <a:srgbClr val="FFFFFF"/>
-            </a:solidFill>
-          </a:ln>
-          <a:effectLst/>
-        </p:spPr>
-        <p:style>
-          <a:lnRef idx="1">
-            <a:schemeClr val="accent1"/>
-          </a:lnRef>
-          <a:fillRef idx="3">
-            <a:schemeClr val="accent1"/>
-          </a:fillRef>
-          <a:effectRef idx="2">
-            <a:schemeClr val="accent1"/>
-          </a:effectRef>
-          <a:fontRef idx="minor">
-            <a:schemeClr val="lt1"/>
-          </a:fontRef>
-        </p:style>
-        <p:txBody>
-          <a:bodyPr rtlCol="0" anchor="ctr" lIns="0" rIns="0" tIns="0" bIns="0" wrap="none"/>
-          <a:lstStyle/>
-          <a:p>
-            <a:pPr algn="ctr"/>
-            <a:r>
-              <a:rPr sz="1000" b="1">
-                <a:solidFill>
-                  <a:srgbClr val="FFFFFF"/>
-                </a:solidFill>
-                <a:latin typeface="Meiryo"/>
-                <a:ea typeface="Meiryo"/>
-              </a:rPr>
-              <a:t>2</a:t>
-            </a:r>
-          </a:p>
-        </p:txBody>
-      </p:sp>
-      <p:sp>
-        <p:nvSpPr>
-          <p:cNvPr id="7" name="Oval 6"/>
-          <p:cNvSpPr/>
-          <p:nvPr/>
-        </p:nvSpPr>
-        <p:spPr>
-          <a:xfrm>
-            <a:off x="2778676" y="4570013"/>
-            <a:ext cx="274320" cy="274320"/>
-          </a:xfrm>
-          <a:prstGeom prst="ellipse">
-            <a:avLst/>
-          </a:prstGeom>
-          <a:solidFill>
-            <a:srgbClr val="F59E0B"/>
-          </a:solidFill>
-          <a:ln w="15875">
-            <a:solidFill>
-              <a:srgbClr val="FFFFFF"/>
-            </a:solidFill>
-          </a:ln>
-          <a:effectLst/>
-        </p:spPr>
-        <p:style>
-          <a:lnRef idx="1">
-            <a:schemeClr val="accent1"/>
-          </a:lnRef>
-          <a:fillRef idx="3">
-            <a:schemeClr val="accent1"/>
-          </a:fillRef>
-          <a:effectRef idx="2">
-            <a:schemeClr val="accent1"/>
-          </a:effectRef>
-          <a:fontRef idx="minor">
-            <a:schemeClr val="lt1"/>
-          </a:fontRef>
-        </p:style>
-        <p:txBody>
-          <a:bodyPr rtlCol="0" anchor="ctr" lIns="0" rIns="0" tIns="0" bIns="0" wrap="none"/>
-          <a:lstStyle/>
-          <a:p>
-            <a:pPr algn="ctr"/>
-            <a:r>
-              <a:rPr sz="1000" b="1">
-                <a:solidFill>
-                  <a:srgbClr val="FFFFFF"/>
-                </a:solidFill>
-                <a:latin typeface="Meiryo"/>
-                <a:ea typeface="Meiryo"/>
-              </a:rPr>
-              <a:t>3</a:t>
-            </a:r>
-          </a:p>
-        </p:txBody>
-      </p:sp>
-      <p:sp>
-        <p:nvSpPr>
-          <p:cNvPr id="8" name="Oval 7"/>
-          <p:cNvSpPr/>
-          <p:nvPr/>
-        </p:nvSpPr>
-        <p:spPr>
-          <a:xfrm>
-            <a:off x="4751883" y="3394479"/>
+            <a:off x="6561036" y="1935300"/>
             <a:ext cx="274320" cy="274320"/>
           </a:xfrm>
           <a:prstGeom prst="ellipse">
@@ -3587,20 +3475,20 @@
                 <a:latin typeface="Meiryo"/>
                 <a:ea typeface="Meiryo"/>
               </a:rPr>
-              <a:t>4</a:t>
-            </a:r>
-          </a:p>
-        </p:txBody>
-      </p:sp>
-      <p:sp>
-        <p:nvSpPr>
-          <p:cNvPr id="9" name="Oval 8"/>
+              <a:t>2</a:t>
+            </a:r>
+          </a:p>
+        </p:txBody>
+      </p:sp>
+      <p:sp>
+        <p:nvSpPr>
+          <p:cNvPr id="7" name="Oval 6"/>
           <p:cNvSpPr/>
           <p:nvPr/>
         </p:nvSpPr>
         <p:spPr>
           <a:xfrm>
-            <a:off x="4068915" y="3635220"/>
+            <a:off x="2172175" y="5288459"/>
             <a:ext cx="274320" cy="274320"/>
           </a:xfrm>
           <a:prstGeom prst="ellipse">
@@ -3643,20 +3531,20 @@
                 <a:latin typeface="Meiryo"/>
                 <a:ea typeface="Meiryo"/>
               </a:rPr>
-              <a:t>5</a:t>
-            </a:r>
-          </a:p>
-        </p:txBody>
-      </p:sp>
-      <p:sp>
-        <p:nvSpPr>
-          <p:cNvPr id="10" name="Oval 9"/>
+              <a:t>3</a:t>
+            </a:r>
+          </a:p>
+        </p:txBody>
+      </p:sp>
+      <p:sp>
+        <p:nvSpPr>
+          <p:cNvPr id="8" name="Oval 7"/>
           <p:cNvSpPr/>
           <p:nvPr/>
         </p:nvSpPr>
         <p:spPr>
           <a:xfrm>
-            <a:off x="3440217" y="3000491"/>
+            <a:off x="5709362" y="3181187"/>
             <a:ext cx="274320" cy="274320"/>
           </a:xfrm>
           <a:prstGeom prst="ellipse">
@@ -3699,20 +3587,20 @@
                 <a:latin typeface="Meiryo"/>
                 <a:ea typeface="Meiryo"/>
               </a:rPr>
-              <a:t>6</a:t>
-            </a:r>
-          </a:p>
-        </p:txBody>
-      </p:sp>
-      <p:sp>
-        <p:nvSpPr>
-          <p:cNvPr id="11" name="Oval 10"/>
+              <a:t>4</a:t>
+            </a:r>
+          </a:p>
+        </p:txBody>
+      </p:sp>
+      <p:sp>
+        <p:nvSpPr>
+          <p:cNvPr id="9" name="Oval 8"/>
           <p:cNvSpPr/>
           <p:nvPr/>
         </p:nvSpPr>
         <p:spPr>
           <a:xfrm>
-            <a:off x="3696943" y="3366019"/>
+            <a:off x="4485068" y="3612740"/>
             <a:ext cx="274320" cy="274320"/>
           </a:xfrm>
           <a:prstGeom prst="ellipse">
@@ -3755,20 +3643,20 @@
                 <a:latin typeface="Meiryo"/>
                 <a:ea typeface="Meiryo"/>
               </a:rPr>
-              <a:t>7</a:t>
-            </a:r>
-          </a:p>
-        </p:txBody>
-      </p:sp>
-      <p:sp>
-        <p:nvSpPr>
-          <p:cNvPr id="12" name="Oval 11"/>
+              <a:t>5</a:t>
+            </a:r>
+          </a:p>
+        </p:txBody>
+      </p:sp>
+      <p:sp>
+        <p:nvSpPr>
+          <p:cNvPr id="10" name="Oval 9"/>
           <p:cNvSpPr/>
           <p:nvPr/>
         </p:nvSpPr>
         <p:spPr>
           <a:xfrm>
-            <a:off x="3177483" y="4258981"/>
+            <a:off x="3358058" y="2474919"/>
             <a:ext cx="274320" cy="274320"/>
           </a:xfrm>
           <a:prstGeom prst="ellipse">
@@ -3811,20 +3699,20 @@
                 <a:latin typeface="Meiryo"/>
                 <a:ea typeface="Meiryo"/>
               </a:rPr>
-              <a:t>8</a:t>
-            </a:r>
-          </a:p>
-        </p:txBody>
-      </p:sp>
-      <p:sp>
-        <p:nvSpPr>
-          <p:cNvPr id="13" name="Oval 12"/>
+              <a:t>6</a:t>
+            </a:r>
+          </a:p>
+        </p:txBody>
+      </p:sp>
+      <p:sp>
+        <p:nvSpPr>
+          <p:cNvPr id="11" name="Oval 10"/>
           <p:cNvSpPr/>
           <p:nvPr/>
         </p:nvSpPr>
         <p:spPr>
           <a:xfrm>
-            <a:off x="2088900" y="3826179"/>
+            <a:off x="3818267" y="3130168"/>
             <a:ext cx="274320" cy="274320"/>
           </a:xfrm>
           <a:prstGeom prst="ellipse">
@@ -3867,20 +3755,20 @@
                 <a:latin typeface="Meiryo"/>
                 <a:ea typeface="Meiryo"/>
               </a:rPr>
-              <a:t>9</a:t>
-            </a:r>
-          </a:p>
-        </p:txBody>
-      </p:sp>
-      <p:sp>
-        <p:nvSpPr>
-          <p:cNvPr id="14" name="Oval 13"/>
+              <a:t>7</a:t>
+            </a:r>
+          </a:p>
+        </p:txBody>
+      </p:sp>
+      <p:sp>
+        <p:nvSpPr>
+          <p:cNvPr id="12" name="Oval 11"/>
           <p:cNvSpPr/>
           <p:nvPr/>
         </p:nvSpPr>
         <p:spPr>
           <a:xfrm>
-            <a:off x="3153052" y="3162887"/>
+            <a:off x="2887079" y="4730900"/>
             <a:ext cx="274320" cy="274320"/>
           </a:xfrm>
           <a:prstGeom prst="ellipse">
@@ -3923,20 +3811,20 @@
                 <a:latin typeface="Meiryo"/>
                 <a:ea typeface="Meiryo"/>
               </a:rPr>
-              <a:t>10</a:t>
-            </a:r>
-          </a:p>
-        </p:txBody>
-      </p:sp>
-      <p:sp>
-        <p:nvSpPr>
-          <p:cNvPr id="15" name="Oval 14"/>
+              <a:t>8</a:t>
+            </a:r>
+          </a:p>
+        </p:txBody>
+      </p:sp>
+      <p:sp>
+        <p:nvSpPr>
+          <p:cNvPr id="13" name="Oval 12"/>
           <p:cNvSpPr/>
           <p:nvPr/>
         </p:nvSpPr>
         <p:spPr>
           <a:xfrm>
-            <a:off x="3695341" y="2867670"/>
+            <a:off x="935676" y="3955056"/>
             <a:ext cx="274320" cy="274320"/>
           </a:xfrm>
           <a:prstGeom prst="ellipse">
@@ -3979,1225 +3867,21 @@
                 <a:latin typeface="Meiryo"/>
                 <a:ea typeface="Meiryo"/>
               </a:rPr>
-              <a:t>11</a:t>
-            </a:r>
-          </a:p>
-        </p:txBody>
-      </p:sp>
-      <p:graphicFrame>
-        <p:nvGraphicFramePr>
-          <p:cNvPr id="16" name="Table 15"/>
-          <p:cNvGraphicFramePr>
-            <a:graphicFrameLocks noGrp="1"/>
-          </p:cNvGraphicFramePr>
-          <p:nvPr/>
-        </p:nvGraphicFramePr>
-        <p:xfrm>
-          <a:off x="7590207" y="914400"/>
-          <a:ext cx="4418607" cy="3072384"/>
-        </p:xfrm>
-        <a:graphic>
-          <a:graphicData uri="http://schemas.openxmlformats.org/drawingml/2006/table">
-            <a:tbl>
-              <a:tblPr firstRow="1" bandRow="1">
-                <a:tableStyleId>{5C22544A-7EE6-4342-B048-85BDC9FD1C3A}</a:tableStyleId>
-              </a:tblPr>
-              <a:tblGrid>
-                <a:gridCol w="457200"/>
-                <a:gridCol w="2315487"/>
-                <a:gridCol w="777240"/>
-                <a:gridCol w="868680"/>
-              </a:tblGrid>
-              <a:tr h="256032">
-                <a:tc>
-                  <a:txBody>
-                    <a:bodyPr/>
-                    <a:lstStyle/>
-                    <a:p>
-                      <a:pPr algn="ctr"/>
-                      <a:r>
-                        <a:rPr sz="900" b="1">
-                          <a:solidFill>
-                            <a:srgbClr val="FFFFFF"/>
-                          </a:solidFill>
-                          <a:latin typeface="Meiryo"/>
-                          <a:ea typeface="Meiryo"/>
-                        </a:rPr>
-                        <a:t>No</a:t>
-                      </a:r>
-                    </a:p>
-                  </a:txBody>
-                  <a:tcPr marL="36576" marR="36576" marT="9144" marB="9144" anchor="ctr">
-                    <a:solidFill>
-                      <a:srgbClr val="1F2937"/>
-                    </a:solidFill>
-                  </a:tcPr>
-                </a:tc>
-                <a:tc>
-                  <a:txBody>
-                    <a:bodyPr/>
-                    <a:lstStyle/>
-                    <a:p>
-                      <a:pPr algn="ctr"/>
-                      <a:r>
-                        <a:rPr sz="900" b="1">
-                          <a:solidFill>
-                            <a:srgbClr val="FFFFFF"/>
-                          </a:solidFill>
-                          <a:latin typeface="Meiryo"/>
-                          <a:ea typeface="Meiryo"/>
-                        </a:rPr>
-                        <a:t>ホテル名</a:t>
-                      </a:r>
-                    </a:p>
-                  </a:txBody>
-                  <a:tcPr marL="36576" marR="36576" marT="9144" marB="9144" anchor="ctr">
-                    <a:solidFill>
-                      <a:srgbClr val="1F2937"/>
-                    </a:solidFill>
-                  </a:tcPr>
-                </a:tc>
-                <a:tc>
-                  <a:txBody>
-                    <a:bodyPr/>
-                    <a:lstStyle/>
-                    <a:p>
-                      <a:pPr algn="ctr"/>
-                      <a:r>
-                        <a:rPr sz="900" b="1">
-                          <a:solidFill>
-                            <a:srgbClr val="FFFFFF"/>
-                          </a:solidFill>
-                          <a:latin typeface="Meiryo"/>
-                          <a:ea typeface="Meiryo"/>
-                        </a:rPr>
-                        <a:t>客室数</a:t>
-                      </a:r>
-                    </a:p>
-                  </a:txBody>
-                  <a:tcPr marL="36576" marR="36576" marT="9144" marB="9144" anchor="ctr">
-                    <a:solidFill>
-                      <a:srgbClr val="1F2937"/>
-                    </a:solidFill>
-                  </a:tcPr>
-                </a:tc>
-                <a:tc>
-                  <a:txBody>
-                    <a:bodyPr/>
-                    <a:lstStyle/>
-                    <a:p>
-                      <a:pPr algn="ctr"/>
-                      <a:r>
-                        <a:rPr sz="900" b="1">
-                          <a:solidFill>
-                            <a:srgbClr val="FFFFFF"/>
-                          </a:solidFill>
-                          <a:latin typeface="Meiryo"/>
-                          <a:ea typeface="Meiryo"/>
-                        </a:rPr>
-                        <a:t>開業年</a:t>
-                      </a:r>
-                    </a:p>
-                  </a:txBody>
-                  <a:tcPr marL="36576" marR="36576" marT="9144" marB="9144" anchor="ctr">
-                    <a:solidFill>
-                      <a:srgbClr val="1F2937"/>
-                    </a:solidFill>
-                  </a:tcPr>
-                </a:tc>
-              </a:tr>
-              <a:tr h="256032">
-                <a:tc>
-                  <a:txBody>
-                    <a:bodyPr/>
-                    <a:lstStyle/>
-                    <a:p>
-                      <a:pPr algn="ctr"/>
-                      <a:r>
-                        <a:rPr sz="850" b="1">
-                          <a:solidFill>
-                            <a:srgbClr val="FFFFFF"/>
-                          </a:solidFill>
-                          <a:latin typeface="Meiryo"/>
-                          <a:ea typeface="Meiryo"/>
-                        </a:rPr>
-                        <a:t>1</a:t>
-                      </a:r>
-                    </a:p>
-                  </a:txBody>
-                  <a:tcPr marL="36576" marR="36576" marT="9144" marB="9144" anchor="ctr">
-                    <a:solidFill>
-                      <a:srgbClr val="2563EB"/>
-                    </a:solidFill>
-                  </a:tcPr>
-                </a:tc>
-                <a:tc>
-                  <a:txBody>
-                    <a:bodyPr/>
-                    <a:lstStyle/>
-                    <a:p>
-                      <a:pPr algn="l"/>
-                      <a:r>
-                        <a:rPr sz="850" b="0">
-                          <a:solidFill>
-                            <a:srgbClr val="1F2937"/>
-                          </a:solidFill>
-                          <a:latin typeface="Meiryo"/>
-                          <a:ea typeface="Meiryo"/>
-                        </a:rPr>
-                        <a:t>ホテルピースアイランド那覇</a:t>
-                      </a:r>
-                    </a:p>
-                  </a:txBody>
-                  <a:tcPr marL="36576" marR="36576" marT="9144" marB="9144" anchor="ctr">
-                    <a:solidFill>
-                      <a:srgbClr val="FFFFFF"/>
-                    </a:solidFill>
-                  </a:tcPr>
-                </a:tc>
-                <a:tc>
-                  <a:txBody>
-                    <a:bodyPr/>
-                    <a:lstStyle/>
-                    <a:p>
-                      <a:pPr algn="ctr"/>
-                      <a:r>
-                        <a:rPr sz="850" b="0">
-                          <a:solidFill>
-                            <a:srgbClr val="1F2937"/>
-                          </a:solidFill>
-                          <a:latin typeface="Meiryo"/>
-                          <a:ea typeface="Meiryo"/>
-                        </a:rPr>
-                        <a:t>23室</a:t>
-                      </a:r>
-                    </a:p>
-                  </a:txBody>
-                  <a:tcPr marL="36576" marR="36576" marT="9144" marB="9144" anchor="ctr">
-                    <a:solidFill>
-                      <a:srgbClr val="FFFFFF"/>
-                    </a:solidFill>
-                  </a:tcPr>
-                </a:tc>
-                <a:tc>
-                  <a:txBody>
-                    <a:bodyPr/>
-                    <a:lstStyle/>
-                    <a:p>
-                      <a:pPr algn="ctr"/>
-                      <a:r>
-                        <a:rPr sz="850" b="0">
-                          <a:solidFill>
-                            <a:srgbClr val="1F2937"/>
-                          </a:solidFill>
-                          <a:latin typeface="Meiryo"/>
-                          <a:ea typeface="Meiryo"/>
-                        </a:rPr>
-                        <a:t>1988年</a:t>
-                      </a:r>
-                    </a:p>
-                  </a:txBody>
-                  <a:tcPr marL="36576" marR="36576" marT="9144" marB="9144" anchor="ctr">
-                    <a:solidFill>
-                      <a:srgbClr val="FFFFFF"/>
-                    </a:solidFill>
-                  </a:tcPr>
-                </a:tc>
-              </a:tr>
-              <a:tr h="256032">
-                <a:tc>
-                  <a:txBody>
-                    <a:bodyPr/>
-                    <a:lstStyle/>
-                    <a:p>
-                      <a:pPr algn="ctr"/>
-                      <a:r>
-                        <a:rPr sz="850" b="1">
-                          <a:solidFill>
-                            <a:srgbClr val="FFFFFF"/>
-                          </a:solidFill>
-                          <a:latin typeface="Meiryo"/>
-                          <a:ea typeface="Meiryo"/>
-                        </a:rPr>
-                        <a:t>2</a:t>
-                      </a:r>
-                    </a:p>
-                  </a:txBody>
-                  <a:tcPr marL="36576" marR="36576" marT="9144" marB="9144" anchor="ctr">
-                    <a:solidFill>
-                      <a:srgbClr val="F59E0B"/>
-                    </a:solidFill>
-                  </a:tcPr>
-                </a:tc>
-                <a:tc>
-                  <a:txBody>
-                    <a:bodyPr/>
-                    <a:lstStyle/>
-                    <a:p>
-                      <a:pPr algn="l"/>
-                      <a:r>
-                        <a:rPr sz="850" b="0">
-                          <a:solidFill>
-                            <a:srgbClr val="1F2937"/>
-                          </a:solidFill>
-                          <a:latin typeface="Meiryo"/>
-                          <a:ea typeface="Meiryo"/>
-                        </a:rPr>
-                        <a:t>コスモスおもろまちステーション</a:t>
-                      </a:r>
-                    </a:p>
-                  </a:txBody>
-                  <a:tcPr marL="36576" marR="36576" marT="9144" marB="9144" anchor="ctr">
-                    <a:solidFill>
-                      <a:srgbClr val="F3F4F6"/>
-                    </a:solidFill>
-                  </a:tcPr>
-                </a:tc>
-                <a:tc>
-                  <a:txBody>
-                    <a:bodyPr/>
-                    <a:lstStyle/>
-                    <a:p>
-                      <a:pPr algn="ctr"/>
-                      <a:r>
-                        <a:rPr sz="850" b="0">
-                          <a:solidFill>
-                            <a:srgbClr val="1F2937"/>
-                          </a:solidFill>
-                          <a:latin typeface="Meiryo"/>
-                          <a:ea typeface="Meiryo"/>
-                        </a:rPr>
-                        <a:t>24室</a:t>
-                      </a:r>
-                    </a:p>
-                  </a:txBody>
-                  <a:tcPr marL="36576" marR="36576" marT="9144" marB="9144" anchor="ctr">
-                    <a:solidFill>
-                      <a:srgbClr val="F3F4F6"/>
-                    </a:solidFill>
-                  </a:tcPr>
-                </a:tc>
-                <a:tc>
-                  <a:txBody>
-                    <a:bodyPr/>
-                    <a:lstStyle/>
-                    <a:p>
-                      <a:pPr algn="ctr"/>
-                      <a:r>
-                        <a:rPr sz="850" b="0">
-                          <a:solidFill>
-                            <a:srgbClr val="1F2937"/>
-                          </a:solidFill>
-                          <a:latin typeface="Meiryo"/>
-                          <a:ea typeface="Meiryo"/>
-                        </a:rPr>
-                        <a:t>2016年</a:t>
-                      </a:r>
-                    </a:p>
-                  </a:txBody>
-                  <a:tcPr marL="36576" marR="36576" marT="9144" marB="9144" anchor="ctr">
-                    <a:solidFill>
-                      <a:srgbClr val="F3F4F6"/>
-                    </a:solidFill>
-                  </a:tcPr>
-                </a:tc>
-              </a:tr>
-              <a:tr h="256032">
-                <a:tc>
-                  <a:txBody>
-                    <a:bodyPr/>
-                    <a:lstStyle/>
-                    <a:p>
-                      <a:pPr algn="ctr"/>
-                      <a:r>
-                        <a:rPr sz="850" b="1">
-                          <a:solidFill>
-                            <a:srgbClr val="FFFFFF"/>
-                          </a:solidFill>
-                          <a:latin typeface="Meiryo"/>
-                          <a:ea typeface="Meiryo"/>
-                        </a:rPr>
-                        <a:t>3</a:t>
-                      </a:r>
-                    </a:p>
-                  </a:txBody>
-                  <a:tcPr marL="36576" marR="36576" marT="9144" marB="9144" anchor="ctr">
-                    <a:solidFill>
-                      <a:srgbClr val="F59E0B"/>
-                    </a:solidFill>
-                  </a:tcPr>
-                </a:tc>
-                <a:tc>
-                  <a:txBody>
-                    <a:bodyPr/>
-                    <a:lstStyle/>
-                    <a:p>
-                      <a:pPr algn="l"/>
-                      <a:r>
-                        <a:rPr sz="850" b="0">
-                          <a:solidFill>
-                            <a:srgbClr val="1F2937"/>
-                          </a:solidFill>
-                          <a:latin typeface="Meiryo"/>
-                          <a:ea typeface="Meiryo"/>
-                        </a:rPr>
-                        <a:t>沖縄国際ユースホステル</a:t>
-                      </a:r>
-                    </a:p>
-                  </a:txBody>
-                  <a:tcPr marL="36576" marR="36576" marT="9144" marB="9144" anchor="ctr">
-                    <a:solidFill>
-                      <a:srgbClr val="FFFFFF"/>
-                    </a:solidFill>
-                  </a:tcPr>
-                </a:tc>
-                <a:tc>
-                  <a:txBody>
-                    <a:bodyPr/>
-                    <a:lstStyle/>
-                    <a:p>
-                      <a:pPr algn="ctr"/>
-                      <a:r>
-                        <a:rPr sz="850" b="0">
-                          <a:solidFill>
-                            <a:srgbClr val="1F2937"/>
-                          </a:solidFill>
-                          <a:latin typeface="Meiryo"/>
-                          <a:ea typeface="Meiryo"/>
-                        </a:rPr>
-                        <a:t>38室</a:t>
-                      </a:r>
-                    </a:p>
-                  </a:txBody>
-                  <a:tcPr marL="36576" marR="36576" marT="9144" marB="9144" anchor="ctr">
-                    <a:solidFill>
-                      <a:srgbClr val="FFFFFF"/>
-                    </a:solidFill>
-                  </a:tcPr>
-                </a:tc>
-                <a:tc>
-                  <a:txBody>
-                    <a:bodyPr/>
-                    <a:lstStyle/>
-                    <a:p>
-                      <a:pPr algn="ctr"/>
-                      <a:r>
-                        <a:rPr sz="850" b="0">
-                          <a:solidFill>
-                            <a:srgbClr val="1F2937"/>
-                          </a:solidFill>
-                          <a:latin typeface="Meiryo"/>
-                          <a:ea typeface="Meiryo"/>
-                        </a:rPr>
-                        <a:t>1995年</a:t>
-                      </a:r>
-                    </a:p>
-                  </a:txBody>
-                  <a:tcPr marL="36576" marR="36576" marT="9144" marB="9144" anchor="ctr">
-                    <a:solidFill>
-                      <a:srgbClr val="FFFFFF"/>
-                    </a:solidFill>
-                  </a:tcPr>
-                </a:tc>
-              </a:tr>
-              <a:tr h="256032">
-                <a:tc>
-                  <a:txBody>
-                    <a:bodyPr/>
-                    <a:lstStyle/>
-                    <a:p>
-                      <a:pPr algn="ctr"/>
-                      <a:r>
-                        <a:rPr sz="850" b="1">
-                          <a:solidFill>
-                            <a:srgbClr val="FFFFFF"/>
-                          </a:solidFill>
-                          <a:latin typeface="Meiryo"/>
-                          <a:ea typeface="Meiryo"/>
-                        </a:rPr>
-                        <a:t>4</a:t>
-                      </a:r>
-                    </a:p>
-                  </a:txBody>
-                  <a:tcPr marL="36576" marR="36576" marT="9144" marB="9144" anchor="ctr">
-                    <a:solidFill>
-                      <a:srgbClr val="2563EB"/>
-                    </a:solidFill>
-                  </a:tcPr>
-                </a:tc>
-                <a:tc>
-                  <a:txBody>
-                    <a:bodyPr/>
-                    <a:lstStyle/>
-                    <a:p>
-                      <a:pPr algn="l"/>
-                      <a:r>
-                        <a:rPr sz="850" b="0">
-                          <a:solidFill>
-                            <a:srgbClr val="1F2937"/>
-                          </a:solidFill>
-                          <a:latin typeface="Meiryo"/>
-                          <a:ea typeface="Meiryo"/>
-                        </a:rPr>
-                        <a:t>ホテル サン・クイーン</a:t>
-                      </a:r>
-                    </a:p>
-                  </a:txBody>
-                  <a:tcPr marL="36576" marR="36576" marT="9144" marB="9144" anchor="ctr">
-                    <a:solidFill>
-                      <a:srgbClr val="F3F4F6"/>
-                    </a:solidFill>
-                  </a:tcPr>
-                </a:tc>
-                <a:tc>
-                  <a:txBody>
-                    <a:bodyPr/>
-                    <a:lstStyle/>
-                    <a:p>
-                      <a:pPr algn="ctr"/>
-                      <a:r>
-                        <a:rPr sz="850" b="0">
-                          <a:solidFill>
-                            <a:srgbClr val="1F2937"/>
-                          </a:solidFill>
-                          <a:latin typeface="Meiryo"/>
-                          <a:ea typeface="Meiryo"/>
-                        </a:rPr>
-                        <a:t>60室</a:t>
-                      </a:r>
-                    </a:p>
-                  </a:txBody>
-                  <a:tcPr marL="36576" marR="36576" marT="9144" marB="9144" anchor="ctr">
-                    <a:solidFill>
-                      <a:srgbClr val="F3F4F6"/>
-                    </a:solidFill>
-                  </a:tcPr>
-                </a:tc>
-                <a:tc>
-                  <a:txBody>
-                    <a:bodyPr/>
-                    <a:lstStyle/>
-                    <a:p>
-                      <a:pPr algn="ctr"/>
-                      <a:r>
-                        <a:rPr sz="850" b="0">
-                          <a:solidFill>
-                            <a:srgbClr val="1F2937"/>
-                          </a:solidFill>
-                          <a:latin typeface="Meiryo"/>
-                          <a:ea typeface="Meiryo"/>
-                        </a:rPr>
-                        <a:t>2006年</a:t>
-                      </a:r>
-                    </a:p>
-                  </a:txBody>
-                  <a:tcPr marL="36576" marR="36576" marT="9144" marB="9144" anchor="ctr">
-                    <a:solidFill>
-                      <a:srgbClr val="F3F4F6"/>
-                    </a:solidFill>
-                  </a:tcPr>
-                </a:tc>
-              </a:tr>
-              <a:tr h="256032">
-                <a:tc>
-                  <a:txBody>
-                    <a:bodyPr/>
-                    <a:lstStyle/>
-                    <a:p>
-                      <a:pPr algn="ctr"/>
-                      <a:r>
-                        <a:rPr sz="850" b="1">
-                          <a:solidFill>
-                            <a:srgbClr val="FFFFFF"/>
-                          </a:solidFill>
-                          <a:latin typeface="Meiryo"/>
-                          <a:ea typeface="Meiryo"/>
-                        </a:rPr>
-                        <a:t>5</a:t>
-                      </a:r>
-                    </a:p>
-                  </a:txBody>
-                  <a:tcPr marL="36576" marR="36576" marT="9144" marB="9144" anchor="ctr">
-                    <a:solidFill>
-                      <a:srgbClr val="2563EB"/>
-                    </a:solidFill>
-                  </a:tcPr>
-                </a:tc>
-                <a:tc>
-                  <a:txBody>
-                    <a:bodyPr/>
-                    <a:lstStyle/>
-                    <a:p>
-                      <a:pPr algn="l"/>
-                      <a:r>
-                        <a:rPr sz="850" b="0">
-                          <a:solidFill>
-                            <a:srgbClr val="1F2937"/>
-                          </a:solidFill>
-                          <a:latin typeface="Meiryo"/>
-                          <a:ea typeface="Meiryo"/>
-                        </a:rPr>
-                        <a:t>ホテル山の内</a:t>
-                      </a:r>
-                    </a:p>
-                  </a:txBody>
-                  <a:tcPr marL="36576" marR="36576" marT="9144" marB="9144" anchor="ctr">
-                    <a:solidFill>
-                      <a:srgbClr val="FFFFFF"/>
-                    </a:solidFill>
-                  </a:tcPr>
-                </a:tc>
-                <a:tc>
-                  <a:txBody>
-                    <a:bodyPr/>
-                    <a:lstStyle/>
-                    <a:p>
-                      <a:pPr algn="ctr"/>
-                      <a:r>
-                        <a:rPr sz="850" b="0">
-                          <a:solidFill>
-                            <a:srgbClr val="1F2937"/>
-                          </a:solidFill>
-                          <a:latin typeface="Meiryo"/>
-                          <a:ea typeface="Meiryo"/>
-                        </a:rPr>
-                        <a:t>63室</a:t>
-                      </a:r>
-                    </a:p>
-                  </a:txBody>
-                  <a:tcPr marL="36576" marR="36576" marT="9144" marB="9144" anchor="ctr">
-                    <a:solidFill>
-                      <a:srgbClr val="FFFFFF"/>
-                    </a:solidFill>
-                  </a:tcPr>
-                </a:tc>
-                <a:tc>
-                  <a:txBody>
-                    <a:bodyPr/>
-                    <a:lstStyle/>
-                    <a:p>
-                      <a:pPr algn="ctr"/>
-                      <a:r>
-                        <a:rPr sz="850" b="0">
-                          <a:solidFill>
-                            <a:srgbClr val="1F2937"/>
-                          </a:solidFill>
-                          <a:latin typeface="Meiryo"/>
-                          <a:ea typeface="Meiryo"/>
-                        </a:rPr>
-                        <a:t>1973年</a:t>
-                      </a:r>
-                    </a:p>
-                  </a:txBody>
-                  <a:tcPr marL="36576" marR="36576" marT="9144" marB="9144" anchor="ctr">
-                    <a:solidFill>
-                      <a:srgbClr val="FFFFFF"/>
-                    </a:solidFill>
-                  </a:tcPr>
-                </a:tc>
-              </a:tr>
-              <a:tr h="256032">
-                <a:tc>
-                  <a:txBody>
-                    <a:bodyPr/>
-                    <a:lstStyle/>
-                    <a:p>
-                      <a:pPr algn="ctr"/>
-                      <a:r>
-                        <a:rPr sz="850" b="1">
-                          <a:solidFill>
-                            <a:srgbClr val="FFFFFF"/>
-                          </a:solidFill>
-                          <a:latin typeface="Meiryo"/>
-                          <a:ea typeface="Meiryo"/>
-                        </a:rPr>
-                        <a:t>6</a:t>
-                      </a:r>
-                    </a:p>
-                  </a:txBody>
-                  <a:tcPr marL="36576" marR="36576" marT="9144" marB="9144" anchor="ctr">
-                    <a:solidFill>
-                      <a:srgbClr val="2563EB"/>
-                    </a:solidFill>
-                  </a:tcPr>
-                </a:tc>
-                <a:tc>
-                  <a:txBody>
-                    <a:bodyPr/>
-                    <a:lstStyle/>
-                    <a:p>
-                      <a:pPr algn="l"/>
-                      <a:r>
-                        <a:rPr sz="850" b="0">
-                          <a:solidFill>
-                            <a:srgbClr val="1F2937"/>
-                          </a:solidFill>
-                          <a:latin typeface="Meiryo"/>
-                          <a:ea typeface="Meiryo"/>
-                        </a:rPr>
-                        <a:t>ホテルリゾネックス那覇</a:t>
-                      </a:r>
-                    </a:p>
-                  </a:txBody>
-                  <a:tcPr marL="36576" marR="36576" marT="9144" marB="9144" anchor="ctr">
-                    <a:solidFill>
-                      <a:srgbClr val="F3F4F6"/>
-                    </a:solidFill>
-                  </a:tcPr>
-                </a:tc>
-                <a:tc>
-                  <a:txBody>
-                    <a:bodyPr/>
-                    <a:lstStyle/>
-                    <a:p>
-                      <a:pPr algn="ctr"/>
-                      <a:r>
-                        <a:rPr sz="850" b="0">
-                          <a:solidFill>
-                            <a:srgbClr val="1F2937"/>
-                          </a:solidFill>
-                          <a:latin typeface="Meiryo"/>
-                          <a:ea typeface="Meiryo"/>
-                        </a:rPr>
-                        <a:t>84室</a:t>
-                      </a:r>
-                    </a:p>
-                  </a:txBody>
-                  <a:tcPr marL="36576" marR="36576" marT="9144" marB="9144" anchor="ctr">
-                    <a:solidFill>
-                      <a:srgbClr val="F3F4F6"/>
-                    </a:solidFill>
-                  </a:tcPr>
-                </a:tc>
-                <a:tc>
-                  <a:txBody>
-                    <a:bodyPr/>
-                    <a:lstStyle/>
-                    <a:p>
-                      <a:pPr algn="ctr"/>
-                      <a:r>
-                        <a:rPr sz="850" b="0">
-                          <a:solidFill>
-                            <a:srgbClr val="1F2937"/>
-                          </a:solidFill>
-                          <a:latin typeface="Meiryo"/>
-                          <a:ea typeface="Meiryo"/>
-                        </a:rPr>
-                        <a:t>2014年</a:t>
-                      </a:r>
-                    </a:p>
-                  </a:txBody>
-                  <a:tcPr marL="36576" marR="36576" marT="9144" marB="9144" anchor="ctr">
-                    <a:solidFill>
-                      <a:srgbClr val="F3F4F6"/>
-                    </a:solidFill>
-                  </a:tcPr>
-                </a:tc>
-              </a:tr>
-              <a:tr h="256032">
-                <a:tc>
-                  <a:txBody>
-                    <a:bodyPr/>
-                    <a:lstStyle/>
-                    <a:p>
-                      <a:pPr algn="ctr"/>
-                      <a:r>
-                        <a:rPr sz="850" b="1">
-                          <a:solidFill>
-                            <a:srgbClr val="FFFFFF"/>
-                          </a:solidFill>
-                          <a:latin typeface="Meiryo"/>
-                          <a:ea typeface="Meiryo"/>
-                        </a:rPr>
-                        <a:t>7</a:t>
-                      </a:r>
-                    </a:p>
-                  </a:txBody>
-                  <a:tcPr marL="36576" marR="36576" marT="9144" marB="9144" anchor="ctr">
-                    <a:solidFill>
-                      <a:srgbClr val="2563EB"/>
-                    </a:solidFill>
-                  </a:tcPr>
-                </a:tc>
-                <a:tc>
-                  <a:txBody>
-                    <a:bodyPr/>
-                    <a:lstStyle/>
-                    <a:p>
-                      <a:pPr algn="l"/>
-                      <a:r>
-                        <a:rPr sz="850" b="0">
-                          <a:solidFill>
-                            <a:srgbClr val="1F2937"/>
-                          </a:solidFill>
-                          <a:latin typeface="Meiryo"/>
-                          <a:ea typeface="Meiryo"/>
-                        </a:rPr>
-                        <a:t>東横INN那覇国際通り美栄橋駅</a:t>
-                      </a:r>
-                    </a:p>
-                  </a:txBody>
-                  <a:tcPr marL="36576" marR="36576" marT="9144" marB="9144" anchor="ctr">
-                    <a:solidFill>
-                      <a:srgbClr val="FFFFFF"/>
-                    </a:solidFill>
-                  </a:tcPr>
-                </a:tc>
-                <a:tc>
-                  <a:txBody>
-                    <a:bodyPr/>
-                    <a:lstStyle/>
-                    <a:p>
-                      <a:pPr algn="ctr"/>
-                      <a:r>
-                        <a:rPr sz="850" b="0">
-                          <a:solidFill>
-                            <a:srgbClr val="1F2937"/>
-                          </a:solidFill>
-                          <a:latin typeface="Meiryo"/>
-                          <a:ea typeface="Meiryo"/>
-                        </a:rPr>
-                        <a:t>94室</a:t>
-                      </a:r>
-                    </a:p>
-                  </a:txBody>
-                  <a:tcPr marL="36576" marR="36576" marT="9144" marB="9144" anchor="ctr">
-                    <a:solidFill>
-                      <a:srgbClr val="FFFFFF"/>
-                    </a:solidFill>
-                  </a:tcPr>
-                </a:tc>
-                <a:tc>
-                  <a:txBody>
-                    <a:bodyPr/>
-                    <a:lstStyle/>
-                    <a:p>
-                      <a:pPr algn="ctr"/>
-                      <a:r>
-                        <a:rPr sz="850" b="0">
-                          <a:solidFill>
-                            <a:srgbClr val="1F2937"/>
-                          </a:solidFill>
-                          <a:latin typeface="Meiryo"/>
-                          <a:ea typeface="Meiryo"/>
-                        </a:rPr>
-                        <a:t>2002年</a:t>
-                      </a:r>
-                    </a:p>
-                  </a:txBody>
-                  <a:tcPr marL="36576" marR="36576" marT="9144" marB="9144" anchor="ctr">
-                    <a:solidFill>
-                      <a:srgbClr val="FFFFFF"/>
-                    </a:solidFill>
-                  </a:tcPr>
-                </a:tc>
-              </a:tr>
-              <a:tr h="256032">
-                <a:tc>
-                  <a:txBody>
-                    <a:bodyPr/>
-                    <a:lstStyle/>
-                    <a:p>
-                      <a:pPr algn="ctr"/>
-                      <a:r>
-                        <a:rPr sz="850" b="1">
-                          <a:solidFill>
-                            <a:srgbClr val="FFFFFF"/>
-                          </a:solidFill>
-                          <a:latin typeface="Meiryo"/>
-                          <a:ea typeface="Meiryo"/>
-                        </a:rPr>
-                        <a:t>8</a:t>
-                      </a:r>
-                    </a:p>
-                  </a:txBody>
-                  <a:tcPr marL="36576" marR="36576" marT="9144" marB="9144" anchor="ctr">
-                    <a:solidFill>
-                      <a:srgbClr val="2563EB"/>
-                    </a:solidFill>
-                  </a:tcPr>
-                </a:tc>
-                <a:tc>
-                  <a:txBody>
-                    <a:bodyPr/>
-                    <a:lstStyle/>
-                    <a:p>
-                      <a:pPr algn="l"/>
-                      <a:r>
-                        <a:rPr sz="850" b="0">
-                          <a:solidFill>
-                            <a:srgbClr val="1F2937"/>
-                          </a:solidFill>
-                          <a:latin typeface="Meiryo"/>
-                          <a:ea typeface="Meiryo"/>
-                        </a:rPr>
-                        <a:t>ホテルルートイン那覇旭橋駅東</a:t>
-                      </a:r>
-                    </a:p>
-                  </a:txBody>
-                  <a:tcPr marL="36576" marR="36576" marT="9144" marB="9144" anchor="ctr">
-                    <a:solidFill>
-                      <a:srgbClr val="F3F4F6"/>
-                    </a:solidFill>
-                  </a:tcPr>
-                </a:tc>
-                <a:tc>
-                  <a:txBody>
-                    <a:bodyPr/>
-                    <a:lstStyle/>
-                    <a:p>
-                      <a:pPr algn="ctr"/>
-                      <a:r>
-                        <a:rPr sz="850" b="0">
-                          <a:solidFill>
-                            <a:srgbClr val="1F2937"/>
-                          </a:solidFill>
-                          <a:latin typeface="Meiryo"/>
-                          <a:ea typeface="Meiryo"/>
-                        </a:rPr>
-                        <a:t>118室</a:t>
-                      </a:r>
-                    </a:p>
-                  </a:txBody>
-                  <a:tcPr marL="36576" marR="36576" marT="9144" marB="9144" anchor="ctr">
-                    <a:solidFill>
-                      <a:srgbClr val="F3F4F6"/>
-                    </a:solidFill>
-                  </a:tcPr>
-                </a:tc>
-                <a:tc>
-                  <a:txBody>
-                    <a:bodyPr/>
-                    <a:lstStyle/>
-                    <a:p>
-                      <a:pPr algn="ctr"/>
-                      <a:r>
-                        <a:rPr sz="850" b="0">
-                          <a:solidFill>
-                            <a:srgbClr val="1F2937"/>
-                          </a:solidFill>
-                          <a:latin typeface="Meiryo"/>
-                          <a:ea typeface="Meiryo"/>
-                        </a:rPr>
-                        <a:t>2002年</a:t>
-                      </a:r>
-                    </a:p>
-                  </a:txBody>
-                  <a:tcPr marL="36576" marR="36576" marT="9144" marB="9144" anchor="ctr">
-                    <a:solidFill>
-                      <a:srgbClr val="F3F4F6"/>
-                    </a:solidFill>
-                  </a:tcPr>
-                </a:tc>
-              </a:tr>
-              <a:tr h="256032">
-                <a:tc>
-                  <a:txBody>
-                    <a:bodyPr/>
-                    <a:lstStyle/>
-                    <a:p>
-                      <a:pPr algn="ctr"/>
-                      <a:r>
-                        <a:rPr sz="850" b="1">
-                          <a:solidFill>
-                            <a:srgbClr val="FFFFFF"/>
-                          </a:solidFill>
-                          <a:latin typeface="Meiryo"/>
-                          <a:ea typeface="Meiryo"/>
-                        </a:rPr>
-                        <a:t>9</a:t>
-                      </a:r>
-                    </a:p>
-                  </a:txBody>
-                  <a:tcPr marL="36576" marR="36576" marT="9144" marB="9144" anchor="ctr">
-                    <a:solidFill>
-                      <a:srgbClr val="2563EB"/>
-                    </a:solidFill>
-                  </a:tcPr>
-                </a:tc>
-                <a:tc>
-                  <a:txBody>
-                    <a:bodyPr/>
-                    <a:lstStyle/>
-                    <a:p>
-                      <a:pPr algn="l"/>
-                      <a:r>
-                        <a:rPr sz="850" b="0">
-                          <a:solidFill>
-                            <a:srgbClr val="1F2937"/>
-                          </a:solidFill>
-                          <a:latin typeface="Meiryo"/>
-                          <a:ea typeface="Meiryo"/>
-                        </a:rPr>
-                        <a:t>ルートイングランティア那覇</a:t>
-                      </a:r>
-                    </a:p>
-                  </a:txBody>
-                  <a:tcPr marL="36576" marR="36576" marT="9144" marB="9144" anchor="ctr">
-                    <a:solidFill>
-                      <a:srgbClr val="FFFFFF"/>
-                    </a:solidFill>
-                  </a:tcPr>
-                </a:tc>
-                <a:tc>
-                  <a:txBody>
-                    <a:bodyPr/>
-                    <a:lstStyle/>
-                    <a:p>
-                      <a:pPr algn="ctr"/>
-                      <a:r>
-                        <a:rPr sz="850" b="0">
-                          <a:solidFill>
-                            <a:srgbClr val="1F2937"/>
-                          </a:solidFill>
-                          <a:latin typeface="Meiryo"/>
-                          <a:ea typeface="Meiryo"/>
-                        </a:rPr>
-                        <a:t>120室</a:t>
-                      </a:r>
-                    </a:p>
-                  </a:txBody>
-                  <a:tcPr marL="36576" marR="36576" marT="9144" marB="9144" anchor="ctr">
-                    <a:solidFill>
-                      <a:srgbClr val="FFFFFF"/>
-                    </a:solidFill>
-                  </a:tcPr>
-                </a:tc>
-                <a:tc>
-                  <a:txBody>
-                    <a:bodyPr/>
-                    <a:lstStyle/>
-                    <a:p>
-                      <a:pPr algn="ctr"/>
-                      <a:r>
-                        <a:rPr sz="850" b="0">
-                          <a:solidFill>
-                            <a:srgbClr val="1F2937"/>
-                          </a:solidFill>
-                          <a:latin typeface="Meiryo"/>
-                          <a:ea typeface="Meiryo"/>
-                        </a:rPr>
-                        <a:t>2000年</a:t>
-                      </a:r>
-                    </a:p>
-                  </a:txBody>
-                  <a:tcPr marL="36576" marR="36576" marT="9144" marB="9144" anchor="ctr">
-                    <a:solidFill>
-                      <a:srgbClr val="FFFFFF"/>
-                    </a:solidFill>
-                  </a:tcPr>
-                </a:tc>
-              </a:tr>
-              <a:tr h="256032">
-                <a:tc>
-                  <a:txBody>
-                    <a:bodyPr/>
-                    <a:lstStyle/>
-                    <a:p>
-                      <a:pPr algn="ctr"/>
-                      <a:r>
-                        <a:rPr sz="850" b="1">
-                          <a:solidFill>
-                            <a:srgbClr val="FFFFFF"/>
-                          </a:solidFill>
-                          <a:latin typeface="Meiryo"/>
-                          <a:ea typeface="Meiryo"/>
-                        </a:rPr>
-                        <a:t>10</a:t>
-                      </a:r>
-                    </a:p>
-                  </a:txBody>
-                  <a:tcPr marL="36576" marR="36576" marT="9144" marB="9144" anchor="ctr">
-                    <a:solidFill>
-                      <a:srgbClr val="2563EB"/>
-                    </a:solidFill>
-                  </a:tcPr>
-                </a:tc>
-                <a:tc>
-                  <a:txBody>
-                    <a:bodyPr/>
-                    <a:lstStyle/>
-                    <a:p>
-                      <a:pPr algn="l"/>
-                      <a:r>
-                        <a:rPr sz="850" b="0">
-                          <a:solidFill>
-                            <a:srgbClr val="1F2937"/>
-                          </a:solidFill>
-                          <a:latin typeface="Meiryo"/>
-                          <a:ea typeface="Meiryo"/>
-                        </a:rPr>
-                        <a:t>ロコイン沖縄</a:t>
-                      </a:r>
-                    </a:p>
-                  </a:txBody>
-                  <a:tcPr marL="36576" marR="36576" marT="9144" marB="9144" anchor="ctr">
-                    <a:solidFill>
-                      <a:srgbClr val="F3F4F6"/>
-                    </a:solidFill>
-                  </a:tcPr>
-                </a:tc>
-                <a:tc>
-                  <a:txBody>
-                    <a:bodyPr/>
-                    <a:lstStyle/>
-                    <a:p>
-                      <a:pPr algn="ctr"/>
-                      <a:r>
-                        <a:rPr sz="850" b="0">
-                          <a:solidFill>
-                            <a:srgbClr val="1F2937"/>
-                          </a:solidFill>
-                          <a:latin typeface="Meiryo"/>
-                          <a:ea typeface="Meiryo"/>
-                        </a:rPr>
-                        <a:t>128室</a:t>
-                      </a:r>
-                    </a:p>
-                  </a:txBody>
-                  <a:tcPr marL="36576" marR="36576" marT="9144" marB="9144" anchor="ctr">
-                    <a:solidFill>
-                      <a:srgbClr val="F3F4F6"/>
-                    </a:solidFill>
-                  </a:tcPr>
-                </a:tc>
-                <a:tc>
-                  <a:txBody>
-                    <a:bodyPr/>
-                    <a:lstStyle/>
-                    <a:p>
-                      <a:pPr algn="ctr"/>
-                      <a:r>
-                        <a:rPr sz="850" b="0">
-                          <a:solidFill>
-                            <a:srgbClr val="1F2937"/>
-                          </a:solidFill>
-                          <a:latin typeface="Meiryo"/>
-                          <a:ea typeface="Meiryo"/>
-                        </a:rPr>
-                        <a:t>2001年</a:t>
-                      </a:r>
-                    </a:p>
-                  </a:txBody>
-                  <a:tcPr marL="36576" marR="36576" marT="9144" marB="9144" anchor="ctr">
-                    <a:solidFill>
-                      <a:srgbClr val="F3F4F6"/>
-                    </a:solidFill>
-                  </a:tcPr>
-                </a:tc>
-              </a:tr>
-              <a:tr h="256032">
-                <a:tc>
-                  <a:txBody>
-                    <a:bodyPr/>
-                    <a:lstStyle/>
-                    <a:p>
-                      <a:pPr algn="ctr"/>
-                      <a:r>
-                        <a:rPr sz="850" b="1">
-                          <a:solidFill>
-                            <a:srgbClr val="FFFFFF"/>
-                          </a:solidFill>
-                          <a:latin typeface="Meiryo"/>
-                          <a:ea typeface="Meiryo"/>
-                        </a:rPr>
-                        <a:t>11</a:t>
-                      </a:r>
-                    </a:p>
-                  </a:txBody>
-                  <a:tcPr marL="36576" marR="36576" marT="9144" marB="9144" anchor="ctr">
-                    <a:solidFill>
-                      <a:srgbClr val="2563EB"/>
-                    </a:solidFill>
-                  </a:tcPr>
-                </a:tc>
-                <a:tc>
-                  <a:txBody>
-                    <a:bodyPr/>
-                    <a:lstStyle/>
-                    <a:p>
-                      <a:pPr algn="l"/>
-                      <a:r>
-                        <a:rPr sz="850" b="0">
-                          <a:solidFill>
-                            <a:srgbClr val="1F2937"/>
-                          </a:solidFill>
-                          <a:latin typeface="Meiryo"/>
-                          <a:ea typeface="Meiryo"/>
-                        </a:rPr>
-                        <a:t>スマイルホテル沖縄那覇</a:t>
-                      </a:r>
-                    </a:p>
-                  </a:txBody>
-                  <a:tcPr marL="36576" marR="36576" marT="9144" marB="9144" anchor="ctr">
-                    <a:solidFill>
-                      <a:srgbClr val="FFFFFF"/>
-                    </a:solidFill>
-                  </a:tcPr>
-                </a:tc>
-                <a:tc>
-                  <a:txBody>
-                    <a:bodyPr/>
-                    <a:lstStyle/>
-                    <a:p>
-                      <a:pPr algn="ctr"/>
-                      <a:r>
-                        <a:rPr sz="850" b="0">
-                          <a:solidFill>
-                            <a:srgbClr val="1F2937"/>
-                          </a:solidFill>
-                          <a:latin typeface="Meiryo"/>
-                          <a:ea typeface="Meiryo"/>
-                        </a:rPr>
-                        <a:t>128室</a:t>
-                      </a:r>
-                    </a:p>
-                  </a:txBody>
-                  <a:tcPr marL="36576" marR="36576" marT="9144" marB="9144" anchor="ctr">
-                    <a:solidFill>
-                      <a:srgbClr val="FFFFFF"/>
-                    </a:solidFill>
-                  </a:tcPr>
-                </a:tc>
-                <a:tc>
-                  <a:txBody>
-                    <a:bodyPr/>
-                    <a:lstStyle/>
-                    <a:p>
-                      <a:pPr algn="ctr"/>
-                      <a:r>
-                        <a:rPr sz="850" b="0">
-                          <a:solidFill>
-                            <a:srgbClr val="1F2937"/>
-                          </a:solidFill>
-                          <a:latin typeface="Meiryo"/>
-                          <a:ea typeface="Meiryo"/>
-                        </a:rPr>
-                        <a:t>2007年</a:t>
-                      </a:r>
-                    </a:p>
-                  </a:txBody>
-                  <a:tcPr marL="36576" marR="36576" marT="9144" marB="9144" anchor="ctr">
-                    <a:solidFill>
-                      <a:srgbClr val="FFFFFF"/>
-                    </a:solidFill>
-                  </a:tcPr>
-                </a:tc>
-              </a:tr>
-            </a:tbl>
-          </a:graphicData>
-        </a:graphic>
-      </p:graphicFrame>
-      <p:sp>
-        <p:nvSpPr>
-          <p:cNvPr id="17" name="Oval 16"/>
+              <a:t>9</a:t>
+            </a:r>
+          </a:p>
+        </p:txBody>
+      </p:sp>
+      <p:sp>
+        <p:nvSpPr>
+          <p:cNvPr id="14" name="Oval 13"/>
           <p:cNvSpPr/>
           <p:nvPr/>
         </p:nvSpPr>
         <p:spPr>
           <a:xfrm>
-            <a:off x="7590207" y="4215384"/>
-            <a:ext cx="164592" cy="164592"/>
+            <a:off x="2843284" y="2766032"/>
+            <a:ext cx="274320" cy="274320"/>
           </a:xfrm>
           <a:prstGeom prst="ellipse">
             <a:avLst/>
@@ -5205,8 +3889,10 @@
           <a:solidFill>
             <a:srgbClr val="2563EB"/>
           </a:solidFill>
-          <a:ln>
-            <a:noFill/>
+          <a:ln w="15875">
+            <a:solidFill>
+              <a:srgbClr val="FFFFFF"/>
+            </a:solidFill>
           </a:ln>
           <a:effectLst/>
         </p:spPr>
@@ -5225,68 +3911,44 @@
           </a:fontRef>
         </p:style>
         <p:txBody>
-          <a:bodyPr rtlCol="0" anchor="ctr"/>
+          <a:bodyPr rtlCol="0" anchor="ctr" lIns="0" rIns="0" tIns="0" bIns="0" wrap="none"/>
           <a:lstStyle/>
           <a:p>
             <a:pPr algn="ctr"/>
-          </a:p>
-        </p:txBody>
-      </p:sp>
-      <p:sp>
-        <p:nvSpPr>
-          <p:cNvPr id="18" name="TextBox 17"/>
-          <p:cNvSpPr txBox="1"/>
-          <p:nvPr/>
-        </p:nvSpPr>
-        <p:spPr>
-          <a:xfrm>
-            <a:off x="7846239" y="4197096"/>
-            <a:ext cx="2743200" cy="228600"/>
-          </a:xfrm>
-          <a:prstGeom prst="rect">
-            <a:avLst/>
-          </a:prstGeom>
-          <a:noFill/>
-        </p:spPr>
-        <p:txBody>
-          <a:bodyPr wrap="square" lIns="0" rIns="0" tIns="0" bIns="0">
-            <a:spAutoFit/>
-          </a:bodyPr>
-          <a:lstStyle/>
-          <a:p>
-            <a:pPr algn="l"/>
-            <a:r>
-              <a:rPr sz="1000" b="0">
+            <a:r>
+              <a:rPr sz="1000" b="1">
                 <a:solidFill>
-                  <a:srgbClr val="1F2937"/>
+                  <a:srgbClr val="FFFFFF"/>
                 </a:solidFill>
                 <a:latin typeface="Meiryo"/>
                 <a:ea typeface="Meiryo"/>
               </a:rPr>
-              <a:t>ビジネスホテル</a:t>
-            </a:r>
-          </a:p>
-        </p:txBody>
-      </p:sp>
-      <p:sp>
-        <p:nvSpPr>
-          <p:cNvPr id="19" name="Oval 18"/>
+              <a:t>10</a:t>
+            </a:r>
+          </a:p>
+        </p:txBody>
+      </p:sp>
+      <p:sp>
+        <p:nvSpPr>
+          <p:cNvPr id="15" name="Oval 14"/>
           <p:cNvSpPr/>
           <p:nvPr/>
         </p:nvSpPr>
         <p:spPr>
           <a:xfrm>
-            <a:off x="7590207" y="4489704"/>
-            <a:ext cx="164592" cy="164592"/>
+            <a:off x="3815395" y="2236824"/>
+            <a:ext cx="274320" cy="274320"/>
           </a:xfrm>
           <a:prstGeom prst="ellipse">
             <a:avLst/>
           </a:prstGeom>
           <a:solidFill>
-            <a:srgbClr val="F59E0B"/>
+            <a:srgbClr val="2563EB"/>
           </a:solidFill>
-          <a:ln>
-            <a:noFill/>
+          <a:ln w="15875">
+            <a:solidFill>
+              <a:srgbClr val="FFFFFF"/>
+            </a:solidFill>
           </a:ln>
           <a:effectLst/>
         </p:spPr>
@@ -5305,49 +3967,1227 @@
           </a:fontRef>
         </p:style>
         <p:txBody>
-          <a:bodyPr rtlCol="0" anchor="ctr"/>
+          <a:bodyPr rtlCol="0" anchor="ctr" lIns="0" rIns="0" tIns="0" bIns="0" wrap="none"/>
           <a:lstStyle/>
           <a:p>
             <a:pPr algn="ctr"/>
-          </a:p>
-        </p:txBody>
-      </p:sp>
-      <p:sp>
-        <p:nvSpPr>
-          <p:cNvPr id="20" name="TextBox 19"/>
-          <p:cNvSpPr txBox="1"/>
-          <p:nvPr/>
-        </p:nvSpPr>
-        <p:spPr>
-          <a:xfrm>
-            <a:off x="7846239" y="4471416"/>
-            <a:ext cx="2743200" cy="228600"/>
-          </a:xfrm>
-          <a:prstGeom prst="rect">
-            <a:avLst/>
-          </a:prstGeom>
-          <a:noFill/>
-        </p:spPr>
-        <p:txBody>
-          <a:bodyPr wrap="square" lIns="0" rIns="0" tIns="0" bIns="0">
-            <a:spAutoFit/>
-          </a:bodyPr>
-          <a:lstStyle/>
-          <a:p>
-            <a:pPr algn="l"/>
-            <a:r>
-              <a:rPr sz="1000" b="0">
+            <a:r>
+              <a:rPr sz="1000" b="1">
                 <a:solidFill>
-                  <a:srgbClr val="1F2937"/>
+                  <a:srgbClr val="FFFFFF"/>
                 </a:solidFill>
                 <a:latin typeface="Meiryo"/>
                 <a:ea typeface="Meiryo"/>
               </a:rPr>
-              <a:t>ホステル</a:t>
-            </a:r>
-          </a:p>
-        </p:txBody>
-      </p:sp>
+              <a:t>11</a:t>
+            </a:r>
+          </a:p>
+        </p:txBody>
+      </p:sp>
+      <p:graphicFrame>
+        <p:nvGraphicFramePr>
+          <p:cNvPr id="16" name="Table 15"/>
+          <p:cNvGraphicFramePr>
+            <a:graphicFrameLocks noGrp="1"/>
+          </p:cNvGraphicFramePr>
+          <p:nvPr/>
+        </p:nvGraphicFramePr>
+        <p:xfrm>
+          <a:off x="7771033" y="914400"/>
+          <a:ext cx="4237781" cy="3072384"/>
+        </p:xfrm>
+        <a:graphic>
+          <a:graphicData uri="http://schemas.openxmlformats.org/drawingml/2006/table">
+            <a:tbl>
+              <a:tblPr firstRow="1" bandRow="1">
+                <a:tableStyleId>{5C22544A-7EE6-4342-B048-85BDC9FD1C3A}</a:tableStyleId>
+              </a:tblPr>
+              <a:tblGrid>
+                <a:gridCol w="457200"/>
+                <a:gridCol w="2134661"/>
+                <a:gridCol w="777240"/>
+                <a:gridCol w="868680"/>
+              </a:tblGrid>
+              <a:tr h="256032">
+                <a:tc>
+                  <a:txBody>
+                    <a:bodyPr/>
+                    <a:lstStyle/>
+                    <a:p>
+                      <a:pPr algn="ctr"/>
+                      <a:r>
+                        <a:rPr sz="900" b="1">
+                          <a:solidFill>
+                            <a:srgbClr val="FFFFFF"/>
+                          </a:solidFill>
+                          <a:latin typeface="Meiryo"/>
+                          <a:ea typeface="Meiryo"/>
+                        </a:rPr>
+                        <a:t>No</a:t>
+                      </a:r>
+                    </a:p>
+                  </a:txBody>
+                  <a:tcPr marL="36576" marR="36576" marT="9144" marB="9144" anchor="ctr">
+                    <a:solidFill>
+                      <a:srgbClr val="1F2937"/>
+                    </a:solidFill>
+                  </a:tcPr>
+                </a:tc>
+                <a:tc>
+                  <a:txBody>
+                    <a:bodyPr/>
+                    <a:lstStyle/>
+                    <a:p>
+                      <a:pPr algn="ctr"/>
+                      <a:r>
+                        <a:rPr sz="900" b="1">
+                          <a:solidFill>
+                            <a:srgbClr val="FFFFFF"/>
+                          </a:solidFill>
+                          <a:latin typeface="Meiryo"/>
+                          <a:ea typeface="Meiryo"/>
+                        </a:rPr>
+                        <a:t>ホテル名</a:t>
+                      </a:r>
+                    </a:p>
+                  </a:txBody>
+                  <a:tcPr marL="36576" marR="36576" marT="9144" marB="9144" anchor="ctr">
+                    <a:solidFill>
+                      <a:srgbClr val="1F2937"/>
+                    </a:solidFill>
+                  </a:tcPr>
+                </a:tc>
+                <a:tc>
+                  <a:txBody>
+                    <a:bodyPr/>
+                    <a:lstStyle/>
+                    <a:p>
+                      <a:pPr algn="ctr"/>
+                      <a:r>
+                        <a:rPr sz="900" b="1">
+                          <a:solidFill>
+                            <a:srgbClr val="FFFFFF"/>
+                          </a:solidFill>
+                          <a:latin typeface="Meiryo"/>
+                          <a:ea typeface="Meiryo"/>
+                        </a:rPr>
+                        <a:t>客室数</a:t>
+                      </a:r>
+                    </a:p>
+                  </a:txBody>
+                  <a:tcPr marL="36576" marR="36576" marT="9144" marB="9144" anchor="ctr">
+                    <a:solidFill>
+                      <a:srgbClr val="1F2937"/>
+                    </a:solidFill>
+                  </a:tcPr>
+                </a:tc>
+                <a:tc>
+                  <a:txBody>
+                    <a:bodyPr/>
+                    <a:lstStyle/>
+                    <a:p>
+                      <a:pPr algn="ctr"/>
+                      <a:r>
+                        <a:rPr sz="900" b="1">
+                          <a:solidFill>
+                            <a:srgbClr val="FFFFFF"/>
+                          </a:solidFill>
+                          <a:latin typeface="Meiryo"/>
+                          <a:ea typeface="Meiryo"/>
+                        </a:rPr>
+                        <a:t>開業年</a:t>
+                      </a:r>
+                    </a:p>
+                  </a:txBody>
+                  <a:tcPr marL="36576" marR="36576" marT="9144" marB="9144" anchor="ctr">
+                    <a:solidFill>
+                      <a:srgbClr val="1F2937"/>
+                    </a:solidFill>
+                  </a:tcPr>
+                </a:tc>
+              </a:tr>
+              <a:tr h="256032">
+                <a:tc>
+                  <a:txBody>
+                    <a:bodyPr/>
+                    <a:lstStyle/>
+                    <a:p>
+                      <a:pPr algn="ctr"/>
+                      <a:r>
+                        <a:rPr sz="850" b="1">
+                          <a:solidFill>
+                            <a:srgbClr val="FFFFFF"/>
+                          </a:solidFill>
+                          <a:latin typeface="Meiryo"/>
+                          <a:ea typeface="Meiryo"/>
+                        </a:rPr>
+                        <a:t>1</a:t>
+                      </a:r>
+                    </a:p>
+                  </a:txBody>
+                  <a:tcPr marL="36576" marR="36576" marT="9144" marB="9144" anchor="ctr">
+                    <a:solidFill>
+                      <a:srgbClr val="2563EB"/>
+                    </a:solidFill>
+                  </a:tcPr>
+                </a:tc>
+                <a:tc>
+                  <a:txBody>
+                    <a:bodyPr/>
+                    <a:lstStyle/>
+                    <a:p>
+                      <a:pPr algn="l"/>
+                      <a:r>
+                        <a:rPr sz="850" b="0">
+                          <a:solidFill>
+                            <a:srgbClr val="1F2937"/>
+                          </a:solidFill>
+                          <a:latin typeface="Meiryo"/>
+                          <a:ea typeface="Meiryo"/>
+                        </a:rPr>
+                        <a:t>ホテルピースアイランド那覇</a:t>
+                      </a:r>
+                    </a:p>
+                  </a:txBody>
+                  <a:tcPr marL="36576" marR="36576" marT="9144" marB="9144" anchor="ctr">
+                    <a:solidFill>
+                      <a:srgbClr val="FFFFFF"/>
+                    </a:solidFill>
+                  </a:tcPr>
+                </a:tc>
+                <a:tc>
+                  <a:txBody>
+                    <a:bodyPr/>
+                    <a:lstStyle/>
+                    <a:p>
+                      <a:pPr algn="ctr"/>
+                      <a:r>
+                        <a:rPr sz="850" b="0">
+                          <a:solidFill>
+                            <a:srgbClr val="1F2937"/>
+                          </a:solidFill>
+                          <a:latin typeface="Meiryo"/>
+                          <a:ea typeface="Meiryo"/>
+                        </a:rPr>
+                        <a:t>23室</a:t>
+                      </a:r>
+                    </a:p>
+                  </a:txBody>
+                  <a:tcPr marL="36576" marR="36576" marT="9144" marB="9144" anchor="ctr">
+                    <a:solidFill>
+                      <a:srgbClr val="FFFFFF"/>
+                    </a:solidFill>
+                  </a:tcPr>
+                </a:tc>
+                <a:tc>
+                  <a:txBody>
+                    <a:bodyPr/>
+                    <a:lstStyle/>
+                    <a:p>
+                      <a:pPr algn="ctr"/>
+                      <a:r>
+                        <a:rPr sz="850" b="0">
+                          <a:solidFill>
+                            <a:srgbClr val="1F2937"/>
+                          </a:solidFill>
+                          <a:latin typeface="Meiryo"/>
+                          <a:ea typeface="Meiryo"/>
+                        </a:rPr>
+                        <a:t>1988年</a:t>
+                      </a:r>
+                    </a:p>
+                  </a:txBody>
+                  <a:tcPr marL="36576" marR="36576" marT="9144" marB="9144" anchor="ctr">
+                    <a:solidFill>
+                      <a:srgbClr val="FFFFFF"/>
+                    </a:solidFill>
+                  </a:tcPr>
+                </a:tc>
+              </a:tr>
+              <a:tr h="256032">
+                <a:tc>
+                  <a:txBody>
+                    <a:bodyPr/>
+                    <a:lstStyle/>
+                    <a:p>
+                      <a:pPr algn="ctr"/>
+                      <a:r>
+                        <a:rPr sz="850" b="1">
+                          <a:solidFill>
+                            <a:srgbClr val="FFFFFF"/>
+                          </a:solidFill>
+                          <a:latin typeface="Meiryo"/>
+                          <a:ea typeface="Meiryo"/>
+                        </a:rPr>
+                        <a:t>2</a:t>
+                      </a:r>
+                    </a:p>
+                  </a:txBody>
+                  <a:tcPr marL="36576" marR="36576" marT="9144" marB="9144" anchor="ctr">
+                    <a:solidFill>
+                      <a:srgbClr val="2563EB"/>
+                    </a:solidFill>
+                  </a:tcPr>
+                </a:tc>
+                <a:tc>
+                  <a:txBody>
+                    <a:bodyPr/>
+                    <a:lstStyle/>
+                    <a:p>
+                      <a:pPr algn="l"/>
+                      <a:r>
+                        <a:rPr sz="850" b="0">
+                          <a:solidFill>
+                            <a:srgbClr val="1F2937"/>
+                          </a:solidFill>
+                          <a:latin typeface="Meiryo"/>
+                          <a:ea typeface="Meiryo"/>
+                        </a:rPr>
+                        <a:t>コスモスおもろまちステーション</a:t>
+                      </a:r>
+                    </a:p>
+                  </a:txBody>
+                  <a:tcPr marL="36576" marR="36576" marT="9144" marB="9144" anchor="ctr">
+                    <a:solidFill>
+                      <a:srgbClr val="F3F4F6"/>
+                    </a:solidFill>
+                  </a:tcPr>
+                </a:tc>
+                <a:tc>
+                  <a:txBody>
+                    <a:bodyPr/>
+                    <a:lstStyle/>
+                    <a:p>
+                      <a:pPr algn="ctr"/>
+                      <a:r>
+                        <a:rPr sz="850" b="0">
+                          <a:solidFill>
+                            <a:srgbClr val="1F2937"/>
+                          </a:solidFill>
+                          <a:latin typeface="Meiryo"/>
+                          <a:ea typeface="Meiryo"/>
+                        </a:rPr>
+                        <a:t>24室</a:t>
+                      </a:r>
+                    </a:p>
+                  </a:txBody>
+                  <a:tcPr marL="36576" marR="36576" marT="9144" marB="9144" anchor="ctr">
+                    <a:solidFill>
+                      <a:srgbClr val="F3F4F6"/>
+                    </a:solidFill>
+                  </a:tcPr>
+                </a:tc>
+                <a:tc>
+                  <a:txBody>
+                    <a:bodyPr/>
+                    <a:lstStyle/>
+                    <a:p>
+                      <a:pPr algn="ctr"/>
+                      <a:r>
+                        <a:rPr sz="850" b="0">
+                          <a:solidFill>
+                            <a:srgbClr val="1F2937"/>
+                          </a:solidFill>
+                          <a:latin typeface="Meiryo"/>
+                          <a:ea typeface="Meiryo"/>
+                        </a:rPr>
+                        <a:t>2016年</a:t>
+                      </a:r>
+                    </a:p>
+                  </a:txBody>
+                  <a:tcPr marL="36576" marR="36576" marT="9144" marB="9144" anchor="ctr">
+                    <a:solidFill>
+                      <a:srgbClr val="F3F4F6"/>
+                    </a:solidFill>
+                  </a:tcPr>
+                </a:tc>
+              </a:tr>
+              <a:tr h="256032">
+                <a:tc>
+                  <a:txBody>
+                    <a:bodyPr/>
+                    <a:lstStyle/>
+                    <a:p>
+                      <a:pPr algn="ctr"/>
+                      <a:r>
+                        <a:rPr sz="850" b="1">
+                          <a:solidFill>
+                            <a:srgbClr val="FFFFFF"/>
+                          </a:solidFill>
+                          <a:latin typeface="Meiryo"/>
+                          <a:ea typeface="Meiryo"/>
+                        </a:rPr>
+                        <a:t>3</a:t>
+                      </a:r>
+                    </a:p>
+                  </a:txBody>
+                  <a:tcPr marL="36576" marR="36576" marT="9144" marB="9144" anchor="ctr">
+                    <a:solidFill>
+                      <a:srgbClr val="2563EB"/>
+                    </a:solidFill>
+                  </a:tcPr>
+                </a:tc>
+                <a:tc>
+                  <a:txBody>
+                    <a:bodyPr/>
+                    <a:lstStyle/>
+                    <a:p>
+                      <a:pPr algn="l"/>
+                      <a:r>
+                        <a:rPr sz="850" b="0">
+                          <a:solidFill>
+                            <a:srgbClr val="1F2937"/>
+                          </a:solidFill>
+                          <a:latin typeface="Meiryo"/>
+                          <a:ea typeface="Meiryo"/>
+                        </a:rPr>
+                        <a:t>沖縄国際ユースホステル</a:t>
+                      </a:r>
+                    </a:p>
+                  </a:txBody>
+                  <a:tcPr marL="36576" marR="36576" marT="9144" marB="9144" anchor="ctr">
+                    <a:solidFill>
+                      <a:srgbClr val="FFFFFF"/>
+                    </a:solidFill>
+                  </a:tcPr>
+                </a:tc>
+                <a:tc>
+                  <a:txBody>
+                    <a:bodyPr/>
+                    <a:lstStyle/>
+                    <a:p>
+                      <a:pPr algn="ctr"/>
+                      <a:r>
+                        <a:rPr sz="850" b="0">
+                          <a:solidFill>
+                            <a:srgbClr val="1F2937"/>
+                          </a:solidFill>
+                          <a:latin typeface="Meiryo"/>
+                          <a:ea typeface="Meiryo"/>
+                        </a:rPr>
+                        <a:t>38室</a:t>
+                      </a:r>
+                    </a:p>
+                  </a:txBody>
+                  <a:tcPr marL="36576" marR="36576" marT="9144" marB="9144" anchor="ctr">
+                    <a:solidFill>
+                      <a:srgbClr val="FFFFFF"/>
+                    </a:solidFill>
+                  </a:tcPr>
+                </a:tc>
+                <a:tc>
+                  <a:txBody>
+                    <a:bodyPr/>
+                    <a:lstStyle/>
+                    <a:p>
+                      <a:pPr algn="ctr"/>
+                      <a:r>
+                        <a:rPr sz="850" b="0">
+                          <a:solidFill>
+                            <a:srgbClr val="1F2937"/>
+                          </a:solidFill>
+                          <a:latin typeface="Meiryo"/>
+                          <a:ea typeface="Meiryo"/>
+                        </a:rPr>
+                        <a:t>1995年</a:t>
+                      </a:r>
+                    </a:p>
+                  </a:txBody>
+                  <a:tcPr marL="36576" marR="36576" marT="9144" marB="9144" anchor="ctr">
+                    <a:solidFill>
+                      <a:srgbClr val="FFFFFF"/>
+                    </a:solidFill>
+                  </a:tcPr>
+                </a:tc>
+              </a:tr>
+              <a:tr h="256032">
+                <a:tc>
+                  <a:txBody>
+                    <a:bodyPr/>
+                    <a:lstStyle/>
+                    <a:p>
+                      <a:pPr algn="ctr"/>
+                      <a:r>
+                        <a:rPr sz="850" b="1">
+                          <a:solidFill>
+                            <a:srgbClr val="FFFFFF"/>
+                          </a:solidFill>
+                          <a:latin typeface="Meiryo"/>
+                          <a:ea typeface="Meiryo"/>
+                        </a:rPr>
+                        <a:t>4</a:t>
+                      </a:r>
+                    </a:p>
+                  </a:txBody>
+                  <a:tcPr marL="36576" marR="36576" marT="9144" marB="9144" anchor="ctr">
+                    <a:solidFill>
+                      <a:srgbClr val="2563EB"/>
+                    </a:solidFill>
+                  </a:tcPr>
+                </a:tc>
+                <a:tc>
+                  <a:txBody>
+                    <a:bodyPr/>
+                    <a:lstStyle/>
+                    <a:p>
+                      <a:pPr algn="l"/>
+                      <a:r>
+                        <a:rPr sz="850" b="0">
+                          <a:solidFill>
+                            <a:srgbClr val="1F2937"/>
+                          </a:solidFill>
+                          <a:latin typeface="Meiryo"/>
+                          <a:ea typeface="Meiryo"/>
+                        </a:rPr>
+                        <a:t>ホテル サン・クイーン</a:t>
+                      </a:r>
+                    </a:p>
+                  </a:txBody>
+                  <a:tcPr marL="36576" marR="36576" marT="9144" marB="9144" anchor="ctr">
+                    <a:solidFill>
+                      <a:srgbClr val="F3F4F6"/>
+                    </a:solidFill>
+                  </a:tcPr>
+                </a:tc>
+                <a:tc>
+                  <a:txBody>
+                    <a:bodyPr/>
+                    <a:lstStyle/>
+                    <a:p>
+                      <a:pPr algn="ctr"/>
+                      <a:r>
+                        <a:rPr sz="850" b="0">
+                          <a:solidFill>
+                            <a:srgbClr val="1F2937"/>
+                          </a:solidFill>
+                          <a:latin typeface="Meiryo"/>
+                          <a:ea typeface="Meiryo"/>
+                        </a:rPr>
+                        <a:t>60室</a:t>
+                      </a:r>
+                    </a:p>
+                  </a:txBody>
+                  <a:tcPr marL="36576" marR="36576" marT="9144" marB="9144" anchor="ctr">
+                    <a:solidFill>
+                      <a:srgbClr val="F3F4F6"/>
+                    </a:solidFill>
+                  </a:tcPr>
+                </a:tc>
+                <a:tc>
+                  <a:txBody>
+                    <a:bodyPr/>
+                    <a:lstStyle/>
+                    <a:p>
+                      <a:pPr algn="ctr"/>
+                      <a:r>
+                        <a:rPr sz="850" b="0">
+                          <a:solidFill>
+                            <a:srgbClr val="1F2937"/>
+                          </a:solidFill>
+                          <a:latin typeface="Meiryo"/>
+                          <a:ea typeface="Meiryo"/>
+                        </a:rPr>
+                        <a:t>2006年</a:t>
+                      </a:r>
+                    </a:p>
+                  </a:txBody>
+                  <a:tcPr marL="36576" marR="36576" marT="9144" marB="9144" anchor="ctr">
+                    <a:solidFill>
+                      <a:srgbClr val="F3F4F6"/>
+                    </a:solidFill>
+                  </a:tcPr>
+                </a:tc>
+              </a:tr>
+              <a:tr h="256032">
+                <a:tc>
+                  <a:txBody>
+                    <a:bodyPr/>
+                    <a:lstStyle/>
+                    <a:p>
+                      <a:pPr algn="ctr"/>
+                      <a:r>
+                        <a:rPr sz="850" b="1">
+                          <a:solidFill>
+                            <a:srgbClr val="FFFFFF"/>
+                          </a:solidFill>
+                          <a:latin typeface="Meiryo"/>
+                          <a:ea typeface="Meiryo"/>
+                        </a:rPr>
+                        <a:t>5</a:t>
+                      </a:r>
+                    </a:p>
+                  </a:txBody>
+                  <a:tcPr marL="36576" marR="36576" marT="9144" marB="9144" anchor="ctr">
+                    <a:solidFill>
+                      <a:srgbClr val="2563EB"/>
+                    </a:solidFill>
+                  </a:tcPr>
+                </a:tc>
+                <a:tc>
+                  <a:txBody>
+                    <a:bodyPr/>
+                    <a:lstStyle/>
+                    <a:p>
+                      <a:pPr algn="l"/>
+                      <a:r>
+                        <a:rPr sz="850" b="0">
+                          <a:solidFill>
+                            <a:srgbClr val="1F2937"/>
+                          </a:solidFill>
+                          <a:latin typeface="Meiryo"/>
+                          <a:ea typeface="Meiryo"/>
+                        </a:rPr>
+                        <a:t>ホテル山の内</a:t>
+                      </a:r>
+                    </a:p>
+                  </a:txBody>
+                  <a:tcPr marL="36576" marR="36576" marT="9144" marB="9144" anchor="ctr">
+                    <a:solidFill>
+                      <a:srgbClr val="FFFFFF"/>
+                    </a:solidFill>
+                  </a:tcPr>
+                </a:tc>
+                <a:tc>
+                  <a:txBody>
+                    <a:bodyPr/>
+                    <a:lstStyle/>
+                    <a:p>
+                      <a:pPr algn="ctr"/>
+                      <a:r>
+                        <a:rPr sz="850" b="0">
+                          <a:solidFill>
+                            <a:srgbClr val="1F2937"/>
+                          </a:solidFill>
+                          <a:latin typeface="Meiryo"/>
+                          <a:ea typeface="Meiryo"/>
+                        </a:rPr>
+                        <a:t>63室</a:t>
+                      </a:r>
+                    </a:p>
+                  </a:txBody>
+                  <a:tcPr marL="36576" marR="36576" marT="9144" marB="9144" anchor="ctr">
+                    <a:solidFill>
+                      <a:srgbClr val="FFFFFF"/>
+                    </a:solidFill>
+                  </a:tcPr>
+                </a:tc>
+                <a:tc>
+                  <a:txBody>
+                    <a:bodyPr/>
+                    <a:lstStyle/>
+                    <a:p>
+                      <a:pPr algn="ctr"/>
+                      <a:r>
+                        <a:rPr sz="850" b="0">
+                          <a:solidFill>
+                            <a:srgbClr val="1F2937"/>
+                          </a:solidFill>
+                          <a:latin typeface="Meiryo"/>
+                          <a:ea typeface="Meiryo"/>
+                        </a:rPr>
+                        <a:t>1973年</a:t>
+                      </a:r>
+                    </a:p>
+                  </a:txBody>
+                  <a:tcPr marL="36576" marR="36576" marT="9144" marB="9144" anchor="ctr">
+                    <a:solidFill>
+                      <a:srgbClr val="FFFFFF"/>
+                    </a:solidFill>
+                  </a:tcPr>
+                </a:tc>
+              </a:tr>
+              <a:tr h="256032">
+                <a:tc>
+                  <a:txBody>
+                    <a:bodyPr/>
+                    <a:lstStyle/>
+                    <a:p>
+                      <a:pPr algn="ctr"/>
+                      <a:r>
+                        <a:rPr sz="850" b="1">
+                          <a:solidFill>
+                            <a:srgbClr val="FFFFFF"/>
+                          </a:solidFill>
+                          <a:latin typeface="Meiryo"/>
+                          <a:ea typeface="Meiryo"/>
+                        </a:rPr>
+                        <a:t>6</a:t>
+                      </a:r>
+                    </a:p>
+                  </a:txBody>
+                  <a:tcPr marL="36576" marR="36576" marT="9144" marB="9144" anchor="ctr">
+                    <a:solidFill>
+                      <a:srgbClr val="2563EB"/>
+                    </a:solidFill>
+                  </a:tcPr>
+                </a:tc>
+                <a:tc>
+                  <a:txBody>
+                    <a:bodyPr/>
+                    <a:lstStyle/>
+                    <a:p>
+                      <a:pPr algn="l"/>
+                      <a:r>
+                        <a:rPr sz="850" b="0">
+                          <a:solidFill>
+                            <a:srgbClr val="1F2937"/>
+                          </a:solidFill>
+                          <a:latin typeface="Meiryo"/>
+                          <a:ea typeface="Meiryo"/>
+                        </a:rPr>
+                        <a:t>ホテルリゾネックス那覇</a:t>
+                      </a:r>
+                    </a:p>
+                  </a:txBody>
+                  <a:tcPr marL="36576" marR="36576" marT="9144" marB="9144" anchor="ctr">
+                    <a:solidFill>
+                      <a:srgbClr val="F3F4F6"/>
+                    </a:solidFill>
+                  </a:tcPr>
+                </a:tc>
+                <a:tc>
+                  <a:txBody>
+                    <a:bodyPr/>
+                    <a:lstStyle/>
+                    <a:p>
+                      <a:pPr algn="ctr"/>
+                      <a:r>
+                        <a:rPr sz="850" b="0">
+                          <a:solidFill>
+                            <a:srgbClr val="1F2937"/>
+                          </a:solidFill>
+                          <a:latin typeface="Meiryo"/>
+                          <a:ea typeface="Meiryo"/>
+                        </a:rPr>
+                        <a:t>84室</a:t>
+                      </a:r>
+                    </a:p>
+                  </a:txBody>
+                  <a:tcPr marL="36576" marR="36576" marT="9144" marB="9144" anchor="ctr">
+                    <a:solidFill>
+                      <a:srgbClr val="F3F4F6"/>
+                    </a:solidFill>
+                  </a:tcPr>
+                </a:tc>
+                <a:tc>
+                  <a:txBody>
+                    <a:bodyPr/>
+                    <a:lstStyle/>
+                    <a:p>
+                      <a:pPr algn="ctr"/>
+                      <a:r>
+                        <a:rPr sz="850" b="0">
+                          <a:solidFill>
+                            <a:srgbClr val="1F2937"/>
+                          </a:solidFill>
+                          <a:latin typeface="Meiryo"/>
+                          <a:ea typeface="Meiryo"/>
+                        </a:rPr>
+                        <a:t>2014年</a:t>
+                      </a:r>
+                    </a:p>
+                  </a:txBody>
+                  <a:tcPr marL="36576" marR="36576" marT="9144" marB="9144" anchor="ctr">
+                    <a:solidFill>
+                      <a:srgbClr val="F3F4F6"/>
+                    </a:solidFill>
+                  </a:tcPr>
+                </a:tc>
+              </a:tr>
+              <a:tr h="256032">
+                <a:tc>
+                  <a:txBody>
+                    <a:bodyPr/>
+                    <a:lstStyle/>
+                    <a:p>
+                      <a:pPr algn="ctr"/>
+                      <a:r>
+                        <a:rPr sz="850" b="1">
+                          <a:solidFill>
+                            <a:srgbClr val="FFFFFF"/>
+                          </a:solidFill>
+                          <a:latin typeface="Meiryo"/>
+                          <a:ea typeface="Meiryo"/>
+                        </a:rPr>
+                        <a:t>7</a:t>
+                      </a:r>
+                    </a:p>
+                  </a:txBody>
+                  <a:tcPr marL="36576" marR="36576" marT="9144" marB="9144" anchor="ctr">
+                    <a:solidFill>
+                      <a:srgbClr val="2563EB"/>
+                    </a:solidFill>
+                  </a:tcPr>
+                </a:tc>
+                <a:tc>
+                  <a:txBody>
+                    <a:bodyPr/>
+                    <a:lstStyle/>
+                    <a:p>
+                      <a:pPr algn="l"/>
+                      <a:r>
+                        <a:rPr sz="850" b="0">
+                          <a:solidFill>
+                            <a:srgbClr val="1F2937"/>
+                          </a:solidFill>
+                          <a:latin typeface="Meiryo"/>
+                          <a:ea typeface="Meiryo"/>
+                        </a:rPr>
+                        <a:t>東横INN那覇国際通り美栄橋駅</a:t>
+                      </a:r>
+                    </a:p>
+                  </a:txBody>
+                  <a:tcPr marL="36576" marR="36576" marT="9144" marB="9144" anchor="ctr">
+                    <a:solidFill>
+                      <a:srgbClr val="FFFFFF"/>
+                    </a:solidFill>
+                  </a:tcPr>
+                </a:tc>
+                <a:tc>
+                  <a:txBody>
+                    <a:bodyPr/>
+                    <a:lstStyle/>
+                    <a:p>
+                      <a:pPr algn="ctr"/>
+                      <a:r>
+                        <a:rPr sz="850" b="0">
+                          <a:solidFill>
+                            <a:srgbClr val="1F2937"/>
+                          </a:solidFill>
+                          <a:latin typeface="Meiryo"/>
+                          <a:ea typeface="Meiryo"/>
+                        </a:rPr>
+                        <a:t>94室</a:t>
+                      </a:r>
+                    </a:p>
+                  </a:txBody>
+                  <a:tcPr marL="36576" marR="36576" marT="9144" marB="9144" anchor="ctr">
+                    <a:solidFill>
+                      <a:srgbClr val="FFFFFF"/>
+                    </a:solidFill>
+                  </a:tcPr>
+                </a:tc>
+                <a:tc>
+                  <a:txBody>
+                    <a:bodyPr/>
+                    <a:lstStyle/>
+                    <a:p>
+                      <a:pPr algn="ctr"/>
+                      <a:r>
+                        <a:rPr sz="850" b="0">
+                          <a:solidFill>
+                            <a:srgbClr val="1F2937"/>
+                          </a:solidFill>
+                          <a:latin typeface="Meiryo"/>
+                          <a:ea typeface="Meiryo"/>
+                        </a:rPr>
+                        <a:t>2002年</a:t>
+                      </a:r>
+                    </a:p>
+                  </a:txBody>
+                  <a:tcPr marL="36576" marR="36576" marT="9144" marB="9144" anchor="ctr">
+                    <a:solidFill>
+                      <a:srgbClr val="FFFFFF"/>
+                    </a:solidFill>
+                  </a:tcPr>
+                </a:tc>
+              </a:tr>
+              <a:tr h="256032">
+                <a:tc>
+                  <a:txBody>
+                    <a:bodyPr/>
+                    <a:lstStyle/>
+                    <a:p>
+                      <a:pPr algn="ctr"/>
+                      <a:r>
+                        <a:rPr sz="850" b="1">
+                          <a:solidFill>
+                            <a:srgbClr val="FFFFFF"/>
+                          </a:solidFill>
+                          <a:latin typeface="Meiryo"/>
+                          <a:ea typeface="Meiryo"/>
+                        </a:rPr>
+                        <a:t>8</a:t>
+                      </a:r>
+                    </a:p>
+                  </a:txBody>
+                  <a:tcPr marL="36576" marR="36576" marT="9144" marB="9144" anchor="ctr">
+                    <a:solidFill>
+                      <a:srgbClr val="2563EB"/>
+                    </a:solidFill>
+                  </a:tcPr>
+                </a:tc>
+                <a:tc>
+                  <a:txBody>
+                    <a:bodyPr/>
+                    <a:lstStyle/>
+                    <a:p>
+                      <a:pPr algn="l"/>
+                      <a:r>
+                        <a:rPr sz="850" b="0">
+                          <a:solidFill>
+                            <a:srgbClr val="1F2937"/>
+                          </a:solidFill>
+                          <a:latin typeface="Meiryo"/>
+                          <a:ea typeface="Meiryo"/>
+                        </a:rPr>
+                        <a:t>ホテルルートイン那覇旭橋駅東</a:t>
+                      </a:r>
+                    </a:p>
+                  </a:txBody>
+                  <a:tcPr marL="36576" marR="36576" marT="9144" marB="9144" anchor="ctr">
+                    <a:solidFill>
+                      <a:srgbClr val="F3F4F6"/>
+                    </a:solidFill>
+                  </a:tcPr>
+                </a:tc>
+                <a:tc>
+                  <a:txBody>
+                    <a:bodyPr/>
+                    <a:lstStyle/>
+                    <a:p>
+                      <a:pPr algn="ctr"/>
+                      <a:r>
+                        <a:rPr sz="850" b="0">
+                          <a:solidFill>
+                            <a:srgbClr val="1F2937"/>
+                          </a:solidFill>
+                          <a:latin typeface="Meiryo"/>
+                          <a:ea typeface="Meiryo"/>
+                        </a:rPr>
+                        <a:t>118室</a:t>
+                      </a:r>
+                    </a:p>
+                  </a:txBody>
+                  <a:tcPr marL="36576" marR="36576" marT="9144" marB="9144" anchor="ctr">
+                    <a:solidFill>
+                      <a:srgbClr val="F3F4F6"/>
+                    </a:solidFill>
+                  </a:tcPr>
+                </a:tc>
+                <a:tc>
+                  <a:txBody>
+                    <a:bodyPr/>
+                    <a:lstStyle/>
+                    <a:p>
+                      <a:pPr algn="ctr"/>
+                      <a:r>
+                        <a:rPr sz="850" b="0">
+                          <a:solidFill>
+                            <a:srgbClr val="1F2937"/>
+                          </a:solidFill>
+                          <a:latin typeface="Meiryo"/>
+                          <a:ea typeface="Meiryo"/>
+                        </a:rPr>
+                        <a:t>2002年</a:t>
+                      </a:r>
+                    </a:p>
+                  </a:txBody>
+                  <a:tcPr marL="36576" marR="36576" marT="9144" marB="9144" anchor="ctr">
+                    <a:solidFill>
+                      <a:srgbClr val="F3F4F6"/>
+                    </a:solidFill>
+                  </a:tcPr>
+                </a:tc>
+              </a:tr>
+              <a:tr h="256032">
+                <a:tc>
+                  <a:txBody>
+                    <a:bodyPr/>
+                    <a:lstStyle/>
+                    <a:p>
+                      <a:pPr algn="ctr"/>
+                      <a:r>
+                        <a:rPr sz="850" b="1">
+                          <a:solidFill>
+                            <a:srgbClr val="FFFFFF"/>
+                          </a:solidFill>
+                          <a:latin typeface="Meiryo"/>
+                          <a:ea typeface="Meiryo"/>
+                        </a:rPr>
+                        <a:t>9</a:t>
+                      </a:r>
+                    </a:p>
+                  </a:txBody>
+                  <a:tcPr marL="36576" marR="36576" marT="9144" marB="9144" anchor="ctr">
+                    <a:solidFill>
+                      <a:srgbClr val="2563EB"/>
+                    </a:solidFill>
+                  </a:tcPr>
+                </a:tc>
+                <a:tc>
+                  <a:txBody>
+                    <a:bodyPr/>
+                    <a:lstStyle/>
+                    <a:p>
+                      <a:pPr algn="l"/>
+                      <a:r>
+                        <a:rPr sz="850" b="0">
+                          <a:solidFill>
+                            <a:srgbClr val="1F2937"/>
+                          </a:solidFill>
+                          <a:latin typeface="Meiryo"/>
+                          <a:ea typeface="Meiryo"/>
+                        </a:rPr>
+                        <a:t>ルートイングランティア那覇</a:t>
+                      </a:r>
+                    </a:p>
+                  </a:txBody>
+                  <a:tcPr marL="36576" marR="36576" marT="9144" marB="9144" anchor="ctr">
+                    <a:solidFill>
+                      <a:srgbClr val="FFFFFF"/>
+                    </a:solidFill>
+                  </a:tcPr>
+                </a:tc>
+                <a:tc>
+                  <a:txBody>
+                    <a:bodyPr/>
+                    <a:lstStyle/>
+                    <a:p>
+                      <a:pPr algn="ctr"/>
+                      <a:r>
+                        <a:rPr sz="850" b="0">
+                          <a:solidFill>
+                            <a:srgbClr val="1F2937"/>
+                          </a:solidFill>
+                          <a:latin typeface="Meiryo"/>
+                          <a:ea typeface="Meiryo"/>
+                        </a:rPr>
+                        <a:t>120室</a:t>
+                      </a:r>
+                    </a:p>
+                  </a:txBody>
+                  <a:tcPr marL="36576" marR="36576" marT="9144" marB="9144" anchor="ctr">
+                    <a:solidFill>
+                      <a:srgbClr val="FFFFFF"/>
+                    </a:solidFill>
+                  </a:tcPr>
+                </a:tc>
+                <a:tc>
+                  <a:txBody>
+                    <a:bodyPr/>
+                    <a:lstStyle/>
+                    <a:p>
+                      <a:pPr algn="ctr"/>
+                      <a:r>
+                        <a:rPr sz="850" b="0">
+                          <a:solidFill>
+                            <a:srgbClr val="1F2937"/>
+                          </a:solidFill>
+                          <a:latin typeface="Meiryo"/>
+                          <a:ea typeface="Meiryo"/>
+                        </a:rPr>
+                        <a:t>2000年</a:t>
+                      </a:r>
+                    </a:p>
+                  </a:txBody>
+                  <a:tcPr marL="36576" marR="36576" marT="9144" marB="9144" anchor="ctr">
+                    <a:solidFill>
+                      <a:srgbClr val="FFFFFF"/>
+                    </a:solidFill>
+                  </a:tcPr>
+                </a:tc>
+              </a:tr>
+              <a:tr h="256032">
+                <a:tc>
+                  <a:txBody>
+                    <a:bodyPr/>
+                    <a:lstStyle/>
+                    <a:p>
+                      <a:pPr algn="ctr"/>
+                      <a:r>
+                        <a:rPr sz="850" b="1">
+                          <a:solidFill>
+                            <a:srgbClr val="FFFFFF"/>
+                          </a:solidFill>
+                          <a:latin typeface="Meiryo"/>
+                          <a:ea typeface="Meiryo"/>
+                        </a:rPr>
+                        <a:t>10</a:t>
+                      </a:r>
+                    </a:p>
+                  </a:txBody>
+                  <a:tcPr marL="36576" marR="36576" marT="9144" marB="9144" anchor="ctr">
+                    <a:solidFill>
+                      <a:srgbClr val="2563EB"/>
+                    </a:solidFill>
+                  </a:tcPr>
+                </a:tc>
+                <a:tc>
+                  <a:txBody>
+                    <a:bodyPr/>
+                    <a:lstStyle/>
+                    <a:p>
+                      <a:pPr algn="l"/>
+                      <a:r>
+                        <a:rPr sz="850" b="0">
+                          <a:solidFill>
+                            <a:srgbClr val="1F2937"/>
+                          </a:solidFill>
+                          <a:latin typeface="Meiryo"/>
+                          <a:ea typeface="Meiryo"/>
+                        </a:rPr>
+                        <a:t>ロコイン沖縄</a:t>
+                      </a:r>
+                    </a:p>
+                  </a:txBody>
+                  <a:tcPr marL="36576" marR="36576" marT="9144" marB="9144" anchor="ctr">
+                    <a:solidFill>
+                      <a:srgbClr val="F3F4F6"/>
+                    </a:solidFill>
+                  </a:tcPr>
+                </a:tc>
+                <a:tc>
+                  <a:txBody>
+                    <a:bodyPr/>
+                    <a:lstStyle/>
+                    <a:p>
+                      <a:pPr algn="ctr"/>
+                      <a:r>
+                        <a:rPr sz="850" b="0">
+                          <a:solidFill>
+                            <a:srgbClr val="1F2937"/>
+                          </a:solidFill>
+                          <a:latin typeface="Meiryo"/>
+                          <a:ea typeface="Meiryo"/>
+                        </a:rPr>
+                        <a:t>128室</a:t>
+                      </a:r>
+                    </a:p>
+                  </a:txBody>
+                  <a:tcPr marL="36576" marR="36576" marT="9144" marB="9144" anchor="ctr">
+                    <a:solidFill>
+                      <a:srgbClr val="F3F4F6"/>
+                    </a:solidFill>
+                  </a:tcPr>
+                </a:tc>
+                <a:tc>
+                  <a:txBody>
+                    <a:bodyPr/>
+                    <a:lstStyle/>
+                    <a:p>
+                      <a:pPr algn="ctr"/>
+                      <a:r>
+                        <a:rPr sz="850" b="0">
+                          <a:solidFill>
+                            <a:srgbClr val="1F2937"/>
+                          </a:solidFill>
+                          <a:latin typeface="Meiryo"/>
+                          <a:ea typeface="Meiryo"/>
+                        </a:rPr>
+                        <a:t>2001年</a:t>
+                      </a:r>
+                    </a:p>
+                  </a:txBody>
+                  <a:tcPr marL="36576" marR="36576" marT="9144" marB="9144" anchor="ctr">
+                    <a:solidFill>
+                      <a:srgbClr val="F3F4F6"/>
+                    </a:solidFill>
+                  </a:tcPr>
+                </a:tc>
+              </a:tr>
+              <a:tr h="256032">
+                <a:tc>
+                  <a:txBody>
+                    <a:bodyPr/>
+                    <a:lstStyle/>
+                    <a:p>
+                      <a:pPr algn="ctr"/>
+                      <a:r>
+                        <a:rPr sz="850" b="1">
+                          <a:solidFill>
+                            <a:srgbClr val="FFFFFF"/>
+                          </a:solidFill>
+                          <a:latin typeface="Meiryo"/>
+                          <a:ea typeface="Meiryo"/>
+                        </a:rPr>
+                        <a:t>11</a:t>
+                      </a:r>
+                    </a:p>
+                  </a:txBody>
+                  <a:tcPr marL="36576" marR="36576" marT="9144" marB="9144" anchor="ctr">
+                    <a:solidFill>
+                      <a:srgbClr val="2563EB"/>
+                    </a:solidFill>
+                  </a:tcPr>
+                </a:tc>
+                <a:tc>
+                  <a:txBody>
+                    <a:bodyPr/>
+                    <a:lstStyle/>
+                    <a:p>
+                      <a:pPr algn="l"/>
+                      <a:r>
+                        <a:rPr sz="850" b="0">
+                          <a:solidFill>
+                            <a:srgbClr val="1F2937"/>
+                          </a:solidFill>
+                          <a:latin typeface="Meiryo"/>
+                          <a:ea typeface="Meiryo"/>
+                        </a:rPr>
+                        <a:t>スマイルホテル沖縄那覇</a:t>
+                      </a:r>
+                    </a:p>
+                  </a:txBody>
+                  <a:tcPr marL="36576" marR="36576" marT="9144" marB="9144" anchor="ctr">
+                    <a:solidFill>
+                      <a:srgbClr val="FFFFFF"/>
+                    </a:solidFill>
+                  </a:tcPr>
+                </a:tc>
+                <a:tc>
+                  <a:txBody>
+                    <a:bodyPr/>
+                    <a:lstStyle/>
+                    <a:p>
+                      <a:pPr algn="ctr"/>
+                      <a:r>
+                        <a:rPr sz="850" b="0">
+                          <a:solidFill>
+                            <a:srgbClr val="1F2937"/>
+                          </a:solidFill>
+                          <a:latin typeface="Meiryo"/>
+                          <a:ea typeface="Meiryo"/>
+                        </a:rPr>
+                        <a:t>128室</a:t>
+                      </a:r>
+                    </a:p>
+                  </a:txBody>
+                  <a:tcPr marL="36576" marR="36576" marT="9144" marB="9144" anchor="ctr">
+                    <a:solidFill>
+                      <a:srgbClr val="FFFFFF"/>
+                    </a:solidFill>
+                  </a:tcPr>
+                </a:tc>
+                <a:tc>
+                  <a:txBody>
+                    <a:bodyPr/>
+                    <a:lstStyle/>
+                    <a:p>
+                      <a:pPr algn="ctr"/>
+                      <a:r>
+                        <a:rPr sz="850" b="0">
+                          <a:solidFill>
+                            <a:srgbClr val="1F2937"/>
+                          </a:solidFill>
+                          <a:latin typeface="Meiryo"/>
+                          <a:ea typeface="Meiryo"/>
+                        </a:rPr>
+                        <a:t>2007年</a:t>
+                      </a:r>
+                    </a:p>
+                  </a:txBody>
+                  <a:tcPr marL="36576" marR="36576" marT="9144" marB="9144" anchor="ctr">
+                    <a:solidFill>
+                      <a:srgbClr val="FFFFFF"/>
+                    </a:solidFill>
+                  </a:tcPr>
+                </a:tc>
+              </a:tr>
+            </a:tbl>
+          </a:graphicData>
+        </a:graphic>
+      </p:graphicFrame>
     </p:spTree>
   </p:cSld>
   <p:clrMapOvr>

--- a/output/benchmark_hotels.pptx
+++ b/output/benchmark_hotels.pptx
@@ -3200,7 +3200,7 @@
                 <a:latin typeface="Meiryo"/>
                 <a:ea typeface="Meiryo"/>
               </a:rPr>
-              <a:t>対象マーケットにおけるベンチマークホテルの分布と概要（11施設）</a:t>
+              <a:t>対象マーケットにおけるベンチマークホテルの分布と概要（18施設）</a:t>
             </a:r>
           </a:p>
         </p:txBody>
@@ -3361,7 +3361,7 @@
         <p:spPr>
           <a:xfrm>
             <a:off x="228600" y="914400"/>
-            <a:ext cx="7313833" cy="5669280"/>
+            <a:ext cx="7314033" cy="5669280"/>
           </a:xfrm>
           <a:prstGeom prst="rect">
             <a:avLst/>
@@ -3376,7 +3376,7 @@
         </p:nvSpPr>
         <p:spPr>
           <a:xfrm>
-            <a:off x="3400597" y="2146988"/>
+            <a:off x="6331851" y="3655307"/>
             <a:ext cx="274320" cy="274320"/>
           </a:xfrm>
           <a:prstGeom prst="ellipse">
@@ -3432,7 +3432,7 @@
         </p:nvSpPr>
         <p:spPr>
           <a:xfrm>
-            <a:off x="6561036" y="1935300"/>
+            <a:off x="3816965" y="3592277"/>
             <a:ext cx="274320" cy="274320"/>
           </a:xfrm>
           <a:prstGeom prst="ellipse">
@@ -3488,7 +3488,7 @@
         </p:nvSpPr>
         <p:spPr>
           <a:xfrm>
-            <a:off x="2172175" y="5288459"/>
+            <a:off x="6561102" y="3773614"/>
             <a:ext cx="274320" cy="274320"/>
           </a:xfrm>
           <a:prstGeom prst="ellipse">
@@ -3544,7 +3544,7 @@
         </p:nvSpPr>
         <p:spPr>
           <a:xfrm>
-            <a:off x="5709362" y="3181187"/>
+            <a:off x="4682449" y="3785916"/>
             <a:ext cx="274320" cy="274320"/>
           </a:xfrm>
           <a:prstGeom prst="ellipse">
@@ -3600,7 +3600,7 @@
         </p:nvSpPr>
         <p:spPr>
           <a:xfrm>
-            <a:off x="4485068" y="3612740"/>
+            <a:off x="5442923" y="3636095"/>
             <a:ext cx="274320" cy="274320"/>
           </a:xfrm>
           <a:prstGeom prst="ellipse">
@@ -3656,7 +3656,7 @@
         </p:nvSpPr>
         <p:spPr>
           <a:xfrm>
-            <a:off x="3358058" y="2474919"/>
+            <a:off x="5774937" y="3782040"/>
             <a:ext cx="274320" cy="274320"/>
           </a:xfrm>
           <a:prstGeom prst="ellipse">
@@ -3712,7 +3712,7 @@
         </p:nvSpPr>
         <p:spPr>
           <a:xfrm>
-            <a:off x="3818267" y="3130168"/>
+            <a:off x="6254779" y="4563649"/>
             <a:ext cx="274320" cy="274320"/>
           </a:xfrm>
           <a:prstGeom prst="ellipse">
@@ -3768,7 +3768,7 @@
         </p:nvSpPr>
         <p:spPr>
           <a:xfrm>
-            <a:off x="2887079" y="4730900"/>
+            <a:off x="3930538" y="3836643"/>
             <a:ext cx="274320" cy="274320"/>
           </a:xfrm>
           <a:prstGeom prst="ellipse">
@@ -3824,7 +3824,7 @@
         </p:nvSpPr>
         <p:spPr>
           <a:xfrm>
-            <a:off x="935676" y="3955056"/>
+            <a:off x="5192333" y="3726763"/>
             <a:ext cx="274320" cy="274320"/>
           </a:xfrm>
           <a:prstGeom prst="ellipse">
@@ -3880,7 +3880,7 @@
         </p:nvSpPr>
         <p:spPr>
           <a:xfrm>
-            <a:off x="2843284" y="2766032"/>
+            <a:off x="4528164" y="2660110"/>
             <a:ext cx="274320" cy="274320"/>
           </a:xfrm>
           <a:prstGeom prst="ellipse">
@@ -3936,7 +3936,7 @@
         </p:nvSpPr>
         <p:spPr>
           <a:xfrm>
-            <a:off x="3815395" y="2236824"/>
+            <a:off x="2784562" y="3385995"/>
             <a:ext cx="274320" cy="274320"/>
           </a:xfrm>
           <a:prstGeom prst="ellipse">
@@ -3984,17 +3984,409 @@
           </a:p>
         </p:txBody>
       </p:sp>
+      <p:sp>
+        <p:nvSpPr>
+          <p:cNvPr id="16" name="Oval 15"/>
+          <p:cNvSpPr/>
+          <p:nvPr/>
+        </p:nvSpPr>
+        <p:spPr>
+          <a:xfrm>
+            <a:off x="2510387" y="3765861"/>
+            <a:ext cx="274320" cy="274320"/>
+          </a:xfrm>
+          <a:prstGeom prst="ellipse">
+            <a:avLst/>
+          </a:prstGeom>
+          <a:solidFill>
+            <a:srgbClr val="2563EB"/>
+          </a:solidFill>
+          <a:ln w="15875">
+            <a:solidFill>
+              <a:srgbClr val="FFFFFF"/>
+            </a:solidFill>
+          </a:ln>
+          <a:effectLst/>
+        </p:spPr>
+        <p:style>
+          <a:lnRef idx="1">
+            <a:schemeClr val="accent1"/>
+          </a:lnRef>
+          <a:fillRef idx="3">
+            <a:schemeClr val="accent1"/>
+          </a:fillRef>
+          <a:effectRef idx="2">
+            <a:schemeClr val="accent1"/>
+          </a:effectRef>
+          <a:fontRef idx="minor">
+            <a:schemeClr val="lt1"/>
+          </a:fontRef>
+        </p:style>
+        <p:txBody>
+          <a:bodyPr rtlCol="0" anchor="ctr" lIns="0" rIns="0" tIns="0" bIns="0" wrap="none"/>
+          <a:lstStyle/>
+          <a:p>
+            <a:pPr algn="ctr"/>
+            <a:r>
+              <a:rPr sz="1000" b="1">
+                <a:solidFill>
+                  <a:srgbClr val="FFFFFF"/>
+                </a:solidFill>
+                <a:latin typeface="Meiryo"/>
+                <a:ea typeface="Meiryo"/>
+              </a:rPr>
+              <a:t>12</a:t>
+            </a:r>
+          </a:p>
+        </p:txBody>
+      </p:sp>
+      <p:sp>
+        <p:nvSpPr>
+          <p:cNvPr id="17" name="Oval 16"/>
+          <p:cNvSpPr/>
+          <p:nvPr/>
+        </p:nvSpPr>
+        <p:spPr>
+          <a:xfrm>
+            <a:off x="3844902" y="2952019"/>
+            <a:ext cx="274320" cy="274320"/>
+          </a:xfrm>
+          <a:prstGeom prst="ellipse">
+            <a:avLst/>
+          </a:prstGeom>
+          <a:solidFill>
+            <a:srgbClr val="2563EB"/>
+          </a:solidFill>
+          <a:ln w="15875">
+            <a:solidFill>
+              <a:srgbClr val="FFFFFF"/>
+            </a:solidFill>
+          </a:ln>
+          <a:effectLst/>
+        </p:spPr>
+        <p:style>
+          <a:lnRef idx="1">
+            <a:schemeClr val="accent1"/>
+          </a:lnRef>
+          <a:fillRef idx="3">
+            <a:schemeClr val="accent1"/>
+          </a:fillRef>
+          <a:effectRef idx="2">
+            <a:schemeClr val="accent1"/>
+          </a:effectRef>
+          <a:fontRef idx="minor">
+            <a:schemeClr val="lt1"/>
+          </a:fontRef>
+        </p:style>
+        <p:txBody>
+          <a:bodyPr rtlCol="0" anchor="ctr" lIns="0" rIns="0" tIns="0" bIns="0" wrap="none"/>
+          <a:lstStyle/>
+          <a:p>
+            <a:pPr algn="ctr"/>
+            <a:r>
+              <a:rPr sz="1000" b="1">
+                <a:solidFill>
+                  <a:srgbClr val="FFFFFF"/>
+                </a:solidFill>
+                <a:latin typeface="Meiryo"/>
+                <a:ea typeface="Meiryo"/>
+              </a:rPr>
+              <a:t>13</a:t>
+            </a:r>
+          </a:p>
+        </p:txBody>
+      </p:sp>
+      <p:sp>
+        <p:nvSpPr>
+          <p:cNvPr id="18" name="Oval 17"/>
+          <p:cNvSpPr/>
+          <p:nvPr/>
+        </p:nvSpPr>
+        <p:spPr>
+          <a:xfrm>
+            <a:off x="3300764" y="3653453"/>
+            <a:ext cx="274320" cy="274320"/>
+          </a:xfrm>
+          <a:prstGeom prst="ellipse">
+            <a:avLst/>
+          </a:prstGeom>
+          <a:solidFill>
+            <a:srgbClr val="2563EB"/>
+          </a:solidFill>
+          <a:ln w="15875">
+            <a:solidFill>
+              <a:srgbClr val="FFFFFF"/>
+            </a:solidFill>
+          </a:ln>
+          <a:effectLst/>
+        </p:spPr>
+        <p:style>
+          <a:lnRef idx="1">
+            <a:schemeClr val="accent1"/>
+          </a:lnRef>
+          <a:fillRef idx="3">
+            <a:schemeClr val="accent1"/>
+          </a:fillRef>
+          <a:effectRef idx="2">
+            <a:schemeClr val="accent1"/>
+          </a:effectRef>
+          <a:fontRef idx="minor">
+            <a:schemeClr val="lt1"/>
+          </a:fontRef>
+        </p:style>
+        <p:txBody>
+          <a:bodyPr rtlCol="0" anchor="ctr" lIns="0" rIns="0" tIns="0" bIns="0" wrap="none"/>
+          <a:lstStyle/>
+          <a:p>
+            <a:pPr algn="ctr"/>
+            <a:r>
+              <a:rPr sz="1000" b="1">
+                <a:solidFill>
+                  <a:srgbClr val="FFFFFF"/>
+                </a:solidFill>
+                <a:latin typeface="Meiryo"/>
+                <a:ea typeface="Meiryo"/>
+              </a:rPr>
+              <a:t>14</a:t>
+            </a:r>
+          </a:p>
+        </p:txBody>
+      </p:sp>
+      <p:sp>
+        <p:nvSpPr>
+          <p:cNvPr id="19" name="Oval 18"/>
+          <p:cNvSpPr/>
+          <p:nvPr/>
+        </p:nvSpPr>
+        <p:spPr>
+          <a:xfrm>
+            <a:off x="2940953" y="3636095"/>
+            <a:ext cx="274320" cy="274320"/>
+          </a:xfrm>
+          <a:prstGeom prst="ellipse">
+            <a:avLst/>
+          </a:prstGeom>
+          <a:solidFill>
+            <a:srgbClr val="2563EB"/>
+          </a:solidFill>
+          <a:ln w="15875">
+            <a:solidFill>
+              <a:srgbClr val="FFFFFF"/>
+            </a:solidFill>
+          </a:ln>
+          <a:effectLst/>
+        </p:spPr>
+        <p:style>
+          <a:lnRef idx="1">
+            <a:schemeClr val="accent1"/>
+          </a:lnRef>
+          <a:fillRef idx="3">
+            <a:schemeClr val="accent1"/>
+          </a:fillRef>
+          <a:effectRef idx="2">
+            <a:schemeClr val="accent1"/>
+          </a:effectRef>
+          <a:fontRef idx="minor">
+            <a:schemeClr val="lt1"/>
+          </a:fontRef>
+        </p:style>
+        <p:txBody>
+          <a:bodyPr rtlCol="0" anchor="ctr" lIns="0" rIns="0" tIns="0" bIns="0" wrap="none"/>
+          <a:lstStyle/>
+          <a:p>
+            <a:pPr algn="ctr"/>
+            <a:r>
+              <a:rPr sz="1000" b="1">
+                <a:solidFill>
+                  <a:srgbClr val="FFFFFF"/>
+                </a:solidFill>
+                <a:latin typeface="Meiryo"/>
+                <a:ea typeface="Meiryo"/>
+              </a:rPr>
+              <a:t>15</a:t>
+            </a:r>
+          </a:p>
+        </p:txBody>
+      </p:sp>
+      <p:sp>
+        <p:nvSpPr>
+          <p:cNvPr id="20" name="Oval 19"/>
+          <p:cNvSpPr/>
+          <p:nvPr/>
+        </p:nvSpPr>
+        <p:spPr>
+          <a:xfrm>
+            <a:off x="5123684" y="3610310"/>
+            <a:ext cx="274320" cy="274320"/>
+          </a:xfrm>
+          <a:prstGeom prst="ellipse">
+            <a:avLst/>
+          </a:prstGeom>
+          <a:solidFill>
+            <a:srgbClr val="2563EB"/>
+          </a:solidFill>
+          <a:ln w="15875">
+            <a:solidFill>
+              <a:srgbClr val="FFFFFF"/>
+            </a:solidFill>
+          </a:ln>
+          <a:effectLst/>
+        </p:spPr>
+        <p:style>
+          <a:lnRef idx="1">
+            <a:schemeClr val="accent1"/>
+          </a:lnRef>
+          <a:fillRef idx="3">
+            <a:schemeClr val="accent1"/>
+          </a:fillRef>
+          <a:effectRef idx="2">
+            <a:schemeClr val="accent1"/>
+          </a:effectRef>
+          <a:fontRef idx="minor">
+            <a:schemeClr val="lt1"/>
+          </a:fontRef>
+        </p:style>
+        <p:txBody>
+          <a:bodyPr rtlCol="0" anchor="ctr" lIns="0" rIns="0" tIns="0" bIns="0" wrap="none"/>
+          <a:lstStyle/>
+          <a:p>
+            <a:pPr algn="ctr"/>
+            <a:r>
+              <a:rPr sz="1000" b="1">
+                <a:solidFill>
+                  <a:srgbClr val="FFFFFF"/>
+                </a:solidFill>
+                <a:latin typeface="Meiryo"/>
+                <a:ea typeface="Meiryo"/>
+              </a:rPr>
+              <a:t>16</a:t>
+            </a:r>
+          </a:p>
+        </p:txBody>
+      </p:sp>
+      <p:sp>
+        <p:nvSpPr>
+          <p:cNvPr id="21" name="Oval 20"/>
+          <p:cNvSpPr/>
+          <p:nvPr/>
+        </p:nvSpPr>
+        <p:spPr>
+          <a:xfrm>
+            <a:off x="3446485" y="3602557"/>
+            <a:ext cx="274320" cy="274320"/>
+          </a:xfrm>
+          <a:prstGeom prst="ellipse">
+            <a:avLst/>
+          </a:prstGeom>
+          <a:solidFill>
+            <a:srgbClr val="2563EB"/>
+          </a:solidFill>
+          <a:ln w="15875">
+            <a:solidFill>
+              <a:srgbClr val="FFFFFF"/>
+            </a:solidFill>
+          </a:ln>
+          <a:effectLst/>
+        </p:spPr>
+        <p:style>
+          <a:lnRef idx="1">
+            <a:schemeClr val="accent1"/>
+          </a:lnRef>
+          <a:fillRef idx="3">
+            <a:schemeClr val="accent1"/>
+          </a:fillRef>
+          <a:effectRef idx="2">
+            <a:schemeClr val="accent1"/>
+          </a:effectRef>
+          <a:fontRef idx="minor">
+            <a:schemeClr val="lt1"/>
+          </a:fontRef>
+        </p:style>
+        <p:txBody>
+          <a:bodyPr rtlCol="0" anchor="ctr" lIns="0" rIns="0" tIns="0" bIns="0" wrap="none"/>
+          <a:lstStyle/>
+          <a:p>
+            <a:pPr algn="ctr"/>
+            <a:r>
+              <a:rPr sz="1000" b="1">
+                <a:solidFill>
+                  <a:srgbClr val="FFFFFF"/>
+                </a:solidFill>
+                <a:latin typeface="Meiryo"/>
+                <a:ea typeface="Meiryo"/>
+              </a:rPr>
+              <a:t>17</a:t>
+            </a:r>
+          </a:p>
+        </p:txBody>
+      </p:sp>
+      <p:sp>
+        <p:nvSpPr>
+          <p:cNvPr id="22" name="Oval 21"/>
+          <p:cNvSpPr/>
+          <p:nvPr/>
+        </p:nvSpPr>
+        <p:spPr>
+          <a:xfrm>
+            <a:off x="935811" y="3922760"/>
+            <a:ext cx="274320" cy="274320"/>
+          </a:xfrm>
+          <a:prstGeom prst="ellipse">
+            <a:avLst/>
+          </a:prstGeom>
+          <a:solidFill>
+            <a:srgbClr val="2563EB"/>
+          </a:solidFill>
+          <a:ln w="15875">
+            <a:solidFill>
+              <a:srgbClr val="FFFFFF"/>
+            </a:solidFill>
+          </a:ln>
+          <a:effectLst/>
+        </p:spPr>
+        <p:style>
+          <a:lnRef idx="1">
+            <a:schemeClr val="accent1"/>
+          </a:lnRef>
+          <a:fillRef idx="3">
+            <a:schemeClr val="accent1"/>
+          </a:fillRef>
+          <a:effectRef idx="2">
+            <a:schemeClr val="accent1"/>
+          </a:effectRef>
+          <a:fontRef idx="minor">
+            <a:schemeClr val="lt1"/>
+          </a:fontRef>
+        </p:style>
+        <p:txBody>
+          <a:bodyPr rtlCol="0" anchor="ctr" lIns="0" rIns="0" tIns="0" bIns="0" wrap="none"/>
+          <a:lstStyle/>
+          <a:p>
+            <a:pPr algn="ctr"/>
+            <a:r>
+              <a:rPr sz="1000" b="1">
+                <a:solidFill>
+                  <a:srgbClr val="FFFFFF"/>
+                </a:solidFill>
+                <a:latin typeface="Meiryo"/>
+                <a:ea typeface="Meiryo"/>
+              </a:rPr>
+              <a:t>18</a:t>
+            </a:r>
+          </a:p>
+        </p:txBody>
+      </p:sp>
       <p:graphicFrame>
         <p:nvGraphicFramePr>
-          <p:cNvPr id="16" name="Table 15"/>
+          <p:cNvPr id="23" name="Table 22"/>
           <p:cNvGraphicFramePr>
             <a:graphicFrameLocks noGrp="1"/>
           </p:cNvGraphicFramePr>
           <p:nvPr/>
         </p:nvGraphicFramePr>
         <p:xfrm>
-          <a:off x="7771033" y="914400"/>
-          <a:ext cx="4237781" cy="3072384"/>
+          <a:off x="7771233" y="914400"/>
+          <a:ext cx="4237581" cy="4864608"/>
         </p:xfrm>
         <a:graphic>
           <a:graphicData uri="http://schemas.openxmlformats.org/drawingml/2006/table">
@@ -4004,7 +4396,7 @@
               </a:tblPr>
               <a:tblGrid>
                 <a:gridCol w="457200"/>
-                <a:gridCol w="2134661"/>
+                <a:gridCol w="2134461"/>
                 <a:gridCol w="777240"/>
                 <a:gridCol w="868680"/>
               </a:tblGrid>
@@ -4145,7 +4537,7 @@
                           <a:latin typeface="Meiryo"/>
                           <a:ea typeface="Meiryo"/>
                         </a:rPr>
-                        <a:t>ホテルピースアイランド那覇</a:t>
+                        <a:t>オリエンタルホテル福岡 博多ステーション</a:t>
                       </a:r>
                     </a:p>
                   </a:txBody>
@@ -4169,7 +4561,7 @@
                           <a:latin typeface="Meiryo"/>
                           <a:ea typeface="Meiryo"/>
                         </a:rPr>
-                        <a:t>23室</a:t>
+                        <a:t>227室</a:t>
                       </a:r>
                     </a:p>
                   </a:txBody>
@@ -4193,7 +4585,7 @@
                           <a:latin typeface="Meiryo"/>
                           <a:ea typeface="Meiryo"/>
                         </a:rPr>
-                        <a:t>1988年</a:t>
+                        <a:t>1985年</a:t>
                       </a:r>
                     </a:p>
                   </a:txBody>
@@ -4243,7 +4635,7 @@
                           <a:latin typeface="Meiryo"/>
                           <a:ea typeface="Meiryo"/>
                         </a:rPr>
-                        <a:t>コスモスおもろまちステーション</a:t>
+                        <a:t>福岡オリエンタルホテル</a:t>
                       </a:r>
                     </a:p>
                   </a:txBody>
@@ -4267,7 +4659,7 @@
                           <a:latin typeface="Meiryo"/>
                           <a:ea typeface="Meiryo"/>
                         </a:rPr>
-                        <a:t>24室</a:t>
+                        <a:t>108室</a:t>
                       </a:r>
                     </a:p>
                   </a:txBody>
@@ -4291,7 +4683,7 @@
                           <a:latin typeface="Meiryo"/>
                           <a:ea typeface="Meiryo"/>
                         </a:rPr>
-                        <a:t>2016年</a:t>
+                        <a:t>1990年</a:t>
                       </a:r>
                     </a:p>
                   </a:txBody>
@@ -4341,7 +4733,7 @@
                           <a:latin typeface="Meiryo"/>
                           <a:ea typeface="Meiryo"/>
                         </a:rPr>
-                        <a:t>沖縄国際ユースホステル</a:t>
+                        <a:t>JR九州ホテルブラッサム福岡</a:t>
                       </a:r>
                     </a:p>
                   </a:txBody>
@@ -4365,7 +4757,7 @@
                           <a:latin typeface="Meiryo"/>
                           <a:ea typeface="Meiryo"/>
                         </a:rPr>
-                        <a:t>38室</a:t>
+                        <a:t>90室</a:t>
                       </a:r>
                     </a:p>
                   </a:txBody>
@@ -4389,7 +4781,7 @@
                           <a:latin typeface="Meiryo"/>
                           <a:ea typeface="Meiryo"/>
                         </a:rPr>
-                        <a:t>1995年</a:t>
+                        <a:t>1992年</a:t>
                       </a:r>
                     </a:p>
                   </a:txBody>
@@ -4439,7 +4831,7 @@
                           <a:latin typeface="Meiryo"/>
                           <a:ea typeface="Meiryo"/>
                         </a:rPr>
-                        <a:t>ホテル サン・クイーン</a:t>
+                        <a:t>グランドハイアット福岡</a:t>
                       </a:r>
                     </a:p>
                   </a:txBody>
@@ -4463,7 +4855,7 @@
                           <a:latin typeface="Meiryo"/>
                           <a:ea typeface="Meiryo"/>
                         </a:rPr>
-                        <a:t>60室</a:t>
+                        <a:t>372室</a:t>
                       </a:r>
                     </a:p>
                   </a:txBody>
@@ -4487,7 +4879,7 @@
                           <a:latin typeface="Meiryo"/>
                           <a:ea typeface="Meiryo"/>
                         </a:rPr>
-                        <a:t>2006年</a:t>
+                        <a:t>1996年</a:t>
                       </a:r>
                     </a:p>
                   </a:txBody>
@@ -4537,7 +4929,7 @@
                           <a:latin typeface="Meiryo"/>
                           <a:ea typeface="Meiryo"/>
                         </a:rPr>
-                        <a:t>ホテル山の内</a:t>
+                        <a:t>ザ ロイヤルパークホテル 福岡</a:t>
                       </a:r>
                     </a:p>
                   </a:txBody>
@@ -4561,7 +4953,7 @@
                           <a:latin typeface="Meiryo"/>
                           <a:ea typeface="Meiryo"/>
                         </a:rPr>
-                        <a:t>63室</a:t>
+                        <a:t>174室</a:t>
                       </a:r>
                     </a:p>
                   </a:txBody>
@@ -4585,7 +4977,7 @@
                           <a:latin typeface="Meiryo"/>
                           <a:ea typeface="Meiryo"/>
                         </a:rPr>
-                        <a:t>1973年</a:t>
+                        <a:t>2011年</a:t>
                       </a:r>
                     </a:p>
                   </a:txBody>
@@ -4635,7 +5027,7 @@
                           <a:latin typeface="Meiryo"/>
                           <a:ea typeface="Meiryo"/>
                         </a:rPr>
-                        <a:t>ホテルリゾネックス那覇</a:t>
+                        <a:t>JR九州ホテル ブラッサム博多中央</a:t>
                       </a:r>
                     </a:p>
                   </a:txBody>
@@ -4659,7 +5051,7 @@
                           <a:latin typeface="Meiryo"/>
                           <a:ea typeface="Meiryo"/>
                         </a:rPr>
-                        <a:t>84室</a:t>
+                        <a:t>247室</a:t>
                       </a:r>
                     </a:p>
                   </a:txBody>
@@ -4683,7 +5075,7 @@
                           <a:latin typeface="Meiryo"/>
                           <a:ea typeface="Meiryo"/>
                         </a:rPr>
-                        <a:t>2014年</a:t>
+                        <a:t>2013年</a:t>
                       </a:r>
                     </a:p>
                   </a:txBody>
@@ -4733,7 +5125,7 @@
                           <a:latin typeface="Meiryo"/>
                           <a:ea typeface="Meiryo"/>
                         </a:rPr>
-                        <a:t>東横INN那覇国際通り美栄橋駅</a:t>
+                        <a:t>東急ステイ博多</a:t>
                       </a:r>
                     </a:p>
                   </a:txBody>
@@ -4757,7 +5149,7 @@
                           <a:latin typeface="Meiryo"/>
                           <a:ea typeface="Meiryo"/>
                         </a:rPr>
-                        <a:t>94室</a:t>
+                        <a:t>216室</a:t>
                       </a:r>
                     </a:p>
                   </a:txBody>
@@ -4781,7 +5173,7 @@
                           <a:latin typeface="Meiryo"/>
                           <a:ea typeface="Meiryo"/>
                         </a:rPr>
-                        <a:t>2002年</a:t>
+                        <a:t>2018年</a:t>
                       </a:r>
                     </a:p>
                   </a:txBody>
@@ -4831,7 +5223,7 @@
                           <a:latin typeface="Meiryo"/>
                           <a:ea typeface="Meiryo"/>
                         </a:rPr>
-                        <a:t>ホテルルートイン那覇旭橋駅東</a:t>
+                        <a:t>東急ステイ福岡天神</a:t>
                       </a:r>
                     </a:p>
                   </a:txBody>
@@ -4855,7 +5247,7 @@
                           <a:latin typeface="Meiryo"/>
                           <a:ea typeface="Meiryo"/>
                         </a:rPr>
-                        <a:t>118室</a:t>
+                        <a:t>252室</a:t>
                       </a:r>
                     </a:p>
                   </a:txBody>
@@ -4879,7 +5271,7 @@
                           <a:latin typeface="Meiryo"/>
                           <a:ea typeface="Meiryo"/>
                         </a:rPr>
-                        <a:t>2002年</a:t>
+                        <a:t>2019年</a:t>
                       </a:r>
                     </a:p>
                   </a:txBody>
@@ -4929,7 +5321,7 @@
                           <a:latin typeface="Meiryo"/>
                           <a:ea typeface="Meiryo"/>
                         </a:rPr>
-                        <a:t>ルートイングランティア那覇</a:t>
+                        <a:t>ザ ブラッサム博多プレミア</a:t>
                       </a:r>
                     </a:p>
                   </a:txBody>
@@ -4953,7 +5345,7 @@
                           <a:latin typeface="Meiryo"/>
                           <a:ea typeface="Meiryo"/>
                         </a:rPr>
-                        <a:t>120室</a:t>
+                        <a:t>238室</a:t>
                       </a:r>
                     </a:p>
                   </a:txBody>
@@ -4977,7 +5369,7 @@
                           <a:latin typeface="Meiryo"/>
                           <a:ea typeface="Meiryo"/>
                         </a:rPr>
-                        <a:t>2000年</a:t>
+                        <a:t>2019年</a:t>
                       </a:r>
                     </a:p>
                   </a:txBody>
@@ -5027,7 +5419,7 @@
                           <a:latin typeface="Meiryo"/>
                           <a:ea typeface="Meiryo"/>
                         </a:rPr>
-                        <a:t>ロコイン沖縄</a:t>
+                        <a:t>ホテルオリエンタルエクスプレス福岡中洲川端</a:t>
                       </a:r>
                     </a:p>
                   </a:txBody>
@@ -5051,7 +5443,7 @@
                           <a:latin typeface="Meiryo"/>
                           <a:ea typeface="Meiryo"/>
                         </a:rPr>
-                        <a:t>128室</a:t>
+                        <a:t>183室</a:t>
                       </a:r>
                     </a:p>
                   </a:txBody>
@@ -5075,7 +5467,7 @@
                           <a:latin typeface="Meiryo"/>
                           <a:ea typeface="Meiryo"/>
                         </a:rPr>
-                        <a:t>2001年</a:t>
+                        <a:t>2021年</a:t>
                       </a:r>
                     </a:p>
                   </a:txBody>
@@ -5125,7 +5517,7 @@
                           <a:latin typeface="Meiryo"/>
                           <a:ea typeface="Meiryo"/>
                         </a:rPr>
-                        <a:t>スマイルホテル沖縄那覇</a:t>
+                        <a:t>ホテルオリエンタルエクスプレス福岡天神</a:t>
                       </a:r>
                     </a:p>
                   </a:txBody>
@@ -5149,7 +5541,7 @@
                           <a:latin typeface="Meiryo"/>
                           <a:ea typeface="Meiryo"/>
                         </a:rPr>
-                        <a:t>128室</a:t>
+                        <a:t>263室</a:t>
                       </a:r>
                     </a:p>
                   </a:txBody>
@@ -5173,13 +5565,699 @@
                           <a:latin typeface="Meiryo"/>
                           <a:ea typeface="Meiryo"/>
                         </a:rPr>
-                        <a:t>2007年</a:t>
+                        <a:t>2021年</a:t>
                       </a:r>
                     </a:p>
                   </a:txBody>
                   <a:tcPr marL="36576" marR="36576" marT="9144" marB="9144" anchor="ctr">
                     <a:solidFill>
                       <a:srgbClr val="FFFFFF"/>
+                    </a:solidFill>
+                  </a:tcPr>
+                </a:tc>
+              </a:tr>
+              <a:tr h="256032">
+                <a:tc>
+                  <a:txBody>
+                    <a:bodyPr/>
+                    <a:lstStyle/>
+                    <a:p>
+                      <a:pPr algn="ctr"/>
+                      <a:r>
+                        <a:rPr sz="850" b="1">
+                          <a:solidFill>
+                            <a:srgbClr val="FFFFFF"/>
+                          </a:solidFill>
+                          <a:latin typeface="Meiryo"/>
+                          <a:ea typeface="Meiryo"/>
+                        </a:rPr>
+                        <a:t>12</a:t>
+                      </a:r>
+                    </a:p>
+                  </a:txBody>
+                  <a:tcPr marL="36576" marR="36576" marT="9144" marB="9144" anchor="ctr">
+                    <a:solidFill>
+                      <a:srgbClr val="2563EB"/>
+                    </a:solidFill>
+                  </a:tcPr>
+                </a:tc>
+                <a:tc>
+                  <a:txBody>
+                    <a:bodyPr/>
+                    <a:lstStyle/>
+                    <a:p>
+                      <a:pPr algn="l"/>
+                      <a:r>
+                        <a:rPr sz="850" b="0">
+                          <a:solidFill>
+                            <a:srgbClr val="1F2937"/>
+                          </a:solidFill>
+                          <a:latin typeface="Meiryo"/>
+                          <a:ea typeface="Meiryo"/>
+                        </a:rPr>
+                        <a:t>ザ・リッツ・カールトン福岡</a:t>
+                      </a:r>
+                    </a:p>
+                  </a:txBody>
+                  <a:tcPr marL="36576" marR="36576" marT="9144" marB="9144" anchor="ctr">
+                    <a:solidFill>
+                      <a:srgbClr val="F3F4F6"/>
+                    </a:solidFill>
+                  </a:tcPr>
+                </a:tc>
+                <a:tc>
+                  <a:txBody>
+                    <a:bodyPr/>
+                    <a:lstStyle/>
+                    <a:p>
+                      <a:pPr algn="ctr"/>
+                      <a:r>
+                        <a:rPr sz="850" b="0">
+                          <a:solidFill>
+                            <a:srgbClr val="1F2937"/>
+                          </a:solidFill>
+                          <a:latin typeface="Meiryo"/>
+                          <a:ea typeface="Meiryo"/>
+                        </a:rPr>
+                        <a:t>167室</a:t>
+                      </a:r>
+                    </a:p>
+                  </a:txBody>
+                  <a:tcPr marL="36576" marR="36576" marT="9144" marB="9144" anchor="ctr">
+                    <a:solidFill>
+                      <a:srgbClr val="F3F4F6"/>
+                    </a:solidFill>
+                  </a:tcPr>
+                </a:tc>
+                <a:tc>
+                  <a:txBody>
+                    <a:bodyPr/>
+                    <a:lstStyle/>
+                    <a:p>
+                      <a:pPr algn="ctr"/>
+                      <a:r>
+                        <a:rPr sz="850" b="0">
+                          <a:solidFill>
+                            <a:srgbClr val="1F2937"/>
+                          </a:solidFill>
+                          <a:latin typeface="Meiryo"/>
+                          <a:ea typeface="Meiryo"/>
+                        </a:rPr>
+                        <a:t>2023年</a:t>
+                      </a:r>
+                    </a:p>
+                  </a:txBody>
+                  <a:tcPr marL="36576" marR="36576" marT="9144" marB="9144" anchor="ctr">
+                    <a:solidFill>
+                      <a:srgbClr val="F3F4F6"/>
+                    </a:solidFill>
+                  </a:tcPr>
+                </a:tc>
+              </a:tr>
+              <a:tr h="256032">
+                <a:tc>
+                  <a:txBody>
+                    <a:bodyPr/>
+                    <a:lstStyle/>
+                    <a:p>
+                      <a:pPr algn="ctr"/>
+                      <a:r>
+                        <a:rPr sz="850" b="1">
+                          <a:solidFill>
+                            <a:srgbClr val="FFFFFF"/>
+                          </a:solidFill>
+                          <a:latin typeface="Meiryo"/>
+                          <a:ea typeface="Meiryo"/>
+                        </a:rPr>
+                        <a:t>13</a:t>
+                      </a:r>
+                    </a:p>
+                  </a:txBody>
+                  <a:tcPr marL="36576" marR="36576" marT="9144" marB="9144" anchor="ctr">
+                    <a:solidFill>
+                      <a:srgbClr val="2563EB"/>
+                    </a:solidFill>
+                  </a:tcPr>
+                </a:tc>
+                <a:tc>
+                  <a:txBody>
+                    <a:bodyPr/>
+                    <a:lstStyle/>
+                    <a:p>
+                      <a:pPr algn="l"/>
+                      <a:r>
+                        <a:rPr sz="850" b="0">
+                          <a:solidFill>
+                            <a:srgbClr val="1F2937"/>
+                          </a:solidFill>
+                          <a:latin typeface="Meiryo"/>
+                          <a:ea typeface="Meiryo"/>
+                        </a:rPr>
+                        <a:t>ザ ロイヤルパーク キャンバス 福岡中洲</a:t>
+                      </a:r>
+                    </a:p>
+                  </a:txBody>
+                  <a:tcPr marL="36576" marR="36576" marT="9144" marB="9144" anchor="ctr">
+                    <a:solidFill>
+                      <a:srgbClr val="FFFFFF"/>
+                    </a:solidFill>
+                  </a:tcPr>
+                </a:tc>
+                <a:tc>
+                  <a:txBody>
+                    <a:bodyPr/>
+                    <a:lstStyle/>
+                    <a:p>
+                      <a:pPr algn="ctr"/>
+                      <a:r>
+                        <a:rPr sz="850" b="0">
+                          <a:solidFill>
+                            <a:srgbClr val="1F2937"/>
+                          </a:solidFill>
+                          <a:latin typeface="Meiryo"/>
+                          <a:ea typeface="Meiryo"/>
+                        </a:rPr>
+                        <a:t>255室</a:t>
+                      </a:r>
+                    </a:p>
+                  </a:txBody>
+                  <a:tcPr marL="36576" marR="36576" marT="9144" marB="9144" anchor="ctr">
+                    <a:solidFill>
+                      <a:srgbClr val="FFFFFF"/>
+                    </a:solidFill>
+                  </a:tcPr>
+                </a:tc>
+                <a:tc>
+                  <a:txBody>
+                    <a:bodyPr/>
+                    <a:lstStyle/>
+                    <a:p>
+                      <a:pPr algn="ctr"/>
+                      <a:r>
+                        <a:rPr sz="850" b="0">
+                          <a:solidFill>
+                            <a:srgbClr val="1F2937"/>
+                          </a:solidFill>
+                          <a:latin typeface="Meiryo"/>
+                          <a:ea typeface="Meiryo"/>
+                        </a:rPr>
+                        <a:t>2023年</a:t>
+                      </a:r>
+                    </a:p>
+                  </a:txBody>
+                  <a:tcPr marL="36576" marR="36576" marT="9144" marB="9144" anchor="ctr">
+                    <a:solidFill>
+                      <a:srgbClr val="FFFFFF"/>
+                    </a:solidFill>
+                  </a:tcPr>
+                </a:tc>
+              </a:tr>
+              <a:tr h="256032">
+                <a:tc>
+                  <a:txBody>
+                    <a:bodyPr/>
+                    <a:lstStyle/>
+                    <a:p>
+                      <a:pPr algn="ctr"/>
+                      <a:r>
+                        <a:rPr sz="850" b="1">
+                          <a:solidFill>
+                            <a:srgbClr val="FFFFFF"/>
+                          </a:solidFill>
+                          <a:latin typeface="Meiryo"/>
+                          <a:ea typeface="Meiryo"/>
+                        </a:rPr>
+                        <a:t>14</a:t>
+                      </a:r>
+                    </a:p>
+                  </a:txBody>
+                  <a:tcPr marL="36576" marR="36576" marT="9144" marB="9144" anchor="ctr">
+                    <a:solidFill>
+                      <a:srgbClr val="2563EB"/>
+                    </a:solidFill>
+                  </a:tcPr>
+                </a:tc>
+                <a:tc>
+                  <a:txBody>
+                    <a:bodyPr/>
+                    <a:lstStyle/>
+                    <a:p>
+                      <a:pPr algn="l"/>
+                      <a:r>
+                        <a:rPr sz="850" b="0">
+                          <a:solidFill>
+                            <a:srgbClr val="1F2937"/>
+                          </a:solidFill>
+                          <a:latin typeface="Meiryo"/>
+                          <a:ea typeface="Meiryo"/>
+                        </a:rPr>
+                        <a:t>ONE FUKUOKA HOTEL</a:t>
+                      </a:r>
+                    </a:p>
+                  </a:txBody>
+                  <a:tcPr marL="36576" marR="36576" marT="9144" marB="9144" anchor="ctr">
+                    <a:solidFill>
+                      <a:srgbClr val="F3F4F6"/>
+                    </a:solidFill>
+                  </a:tcPr>
+                </a:tc>
+                <a:tc>
+                  <a:txBody>
+                    <a:bodyPr/>
+                    <a:lstStyle/>
+                    <a:p>
+                      <a:pPr algn="ctr"/>
+                      <a:r>
+                        <a:rPr sz="850" b="0">
+                          <a:solidFill>
+                            <a:srgbClr val="1F2937"/>
+                          </a:solidFill>
+                          <a:latin typeface="Meiryo"/>
+                          <a:ea typeface="Meiryo"/>
+                        </a:rPr>
+                        <a:t>41室</a:t>
+                      </a:r>
+                    </a:p>
+                  </a:txBody>
+                  <a:tcPr marL="36576" marR="36576" marT="9144" marB="9144" anchor="ctr">
+                    <a:solidFill>
+                      <a:srgbClr val="F3F4F6"/>
+                    </a:solidFill>
+                  </a:tcPr>
+                </a:tc>
+                <a:tc>
+                  <a:txBody>
+                    <a:bodyPr/>
+                    <a:lstStyle/>
+                    <a:p>
+                      <a:pPr algn="ctr"/>
+                      <a:r>
+                        <a:rPr sz="850" b="0">
+                          <a:solidFill>
+                            <a:srgbClr val="1F2937"/>
+                          </a:solidFill>
+                          <a:latin typeface="Meiryo"/>
+                          <a:ea typeface="Meiryo"/>
+                        </a:rPr>
+                        <a:t>2025年</a:t>
+                      </a:r>
+                    </a:p>
+                  </a:txBody>
+                  <a:tcPr marL="36576" marR="36576" marT="9144" marB="9144" anchor="ctr">
+                    <a:solidFill>
+                      <a:srgbClr val="F3F4F6"/>
+                    </a:solidFill>
+                  </a:tcPr>
+                </a:tc>
+              </a:tr>
+              <a:tr h="256032">
+                <a:tc>
+                  <a:txBody>
+                    <a:bodyPr/>
+                    <a:lstStyle/>
+                    <a:p>
+                      <a:pPr algn="ctr"/>
+                      <a:r>
+                        <a:rPr sz="850" b="1">
+                          <a:solidFill>
+                            <a:srgbClr val="FFFFFF"/>
+                          </a:solidFill>
+                          <a:latin typeface="Meiryo"/>
+                          <a:ea typeface="Meiryo"/>
+                        </a:rPr>
+                        <a:t>15</a:t>
+                      </a:r>
+                    </a:p>
+                  </a:txBody>
+                  <a:tcPr marL="36576" marR="36576" marT="9144" marB="9144" anchor="ctr">
+                    <a:solidFill>
+                      <a:srgbClr val="2563EB"/>
+                    </a:solidFill>
+                  </a:tcPr>
+                </a:tc>
+                <a:tc>
+                  <a:txBody>
+                    <a:bodyPr/>
+                    <a:lstStyle/>
+                    <a:p>
+                      <a:pPr algn="l"/>
+                      <a:r>
+                        <a:rPr sz="850" b="0">
+                          <a:solidFill>
+                            <a:srgbClr val="1F2937"/>
+                          </a:solidFill>
+                          <a:latin typeface="Meiryo"/>
+                          <a:ea typeface="Meiryo"/>
+                        </a:rPr>
+                        <a:t>ザ・ゲートホテル福岡 by HULIC</a:t>
+                      </a:r>
+                    </a:p>
+                  </a:txBody>
+                  <a:tcPr marL="36576" marR="36576" marT="9144" marB="9144" anchor="ctr">
+                    <a:solidFill>
+                      <a:srgbClr val="FFFFFF"/>
+                    </a:solidFill>
+                  </a:tcPr>
+                </a:tc>
+                <a:tc>
+                  <a:txBody>
+                    <a:bodyPr/>
+                    <a:lstStyle/>
+                    <a:p>
+                      <a:pPr algn="ctr"/>
+                      <a:r>
+                        <a:rPr sz="850" b="0">
+                          <a:solidFill>
+                            <a:srgbClr val="1F2937"/>
+                          </a:solidFill>
+                          <a:latin typeface="Meiryo"/>
+                          <a:ea typeface="Meiryo"/>
+                        </a:rPr>
+                        <a:t>171室</a:t>
+                      </a:r>
+                    </a:p>
+                  </a:txBody>
+                  <a:tcPr marL="36576" marR="36576" marT="9144" marB="9144" anchor="ctr">
+                    <a:solidFill>
+                      <a:srgbClr val="FFFFFF"/>
+                    </a:solidFill>
+                  </a:tcPr>
+                </a:tc>
+                <a:tc>
+                  <a:txBody>
+                    <a:bodyPr/>
+                    <a:lstStyle/>
+                    <a:p>
+                      <a:pPr algn="ctr"/>
+                      <a:r>
+                        <a:rPr sz="850" b="0">
+                          <a:solidFill>
+                            <a:srgbClr val="1F2937"/>
+                          </a:solidFill>
+                          <a:latin typeface="Meiryo"/>
+                          <a:ea typeface="Meiryo"/>
+                        </a:rPr>
+                        <a:t>2025年</a:t>
+                      </a:r>
+                    </a:p>
+                  </a:txBody>
+                  <a:tcPr marL="36576" marR="36576" marT="9144" marB="9144" anchor="ctr">
+                    <a:solidFill>
+                      <a:srgbClr val="FFFFFF"/>
+                    </a:solidFill>
+                  </a:tcPr>
+                </a:tc>
+              </a:tr>
+              <a:tr h="256032">
+                <a:tc>
+                  <a:txBody>
+                    <a:bodyPr/>
+                    <a:lstStyle/>
+                    <a:p>
+                      <a:pPr algn="ctr"/>
+                      <a:r>
+                        <a:rPr sz="850" b="1">
+                          <a:solidFill>
+                            <a:srgbClr val="FFFFFF"/>
+                          </a:solidFill>
+                          <a:latin typeface="Meiryo"/>
+                          <a:ea typeface="Meiryo"/>
+                        </a:rPr>
+                        <a:t>16</a:t>
+                      </a:r>
+                    </a:p>
+                  </a:txBody>
+                  <a:tcPr marL="36576" marR="36576" marT="9144" marB="9144" anchor="ctr">
+                    <a:solidFill>
+                      <a:srgbClr val="2563EB"/>
+                    </a:solidFill>
+                  </a:tcPr>
+                </a:tc>
+                <a:tc>
+                  <a:txBody>
+                    <a:bodyPr/>
+                    <a:lstStyle/>
+                    <a:p>
+                      <a:pPr algn="l"/>
+                      <a:r>
+                        <a:rPr sz="850" b="0">
+                          <a:solidFill>
+                            <a:srgbClr val="1F2937"/>
+                          </a:solidFill>
+                          <a:latin typeface="Meiryo"/>
+                          <a:ea typeface="Meiryo"/>
+                        </a:rPr>
+                        <a:t>バウンシー・バイ・リーガ　福岡博多</a:t>
+                      </a:r>
+                    </a:p>
+                  </a:txBody>
+                  <a:tcPr marL="36576" marR="36576" marT="9144" marB="9144" anchor="ctr">
+                    <a:solidFill>
+                      <a:srgbClr val="F3F4F6"/>
+                    </a:solidFill>
+                  </a:tcPr>
+                </a:tc>
+                <a:tc>
+                  <a:txBody>
+                    <a:bodyPr/>
+                    <a:lstStyle/>
+                    <a:p>
+                      <a:pPr algn="ctr"/>
+                      <a:r>
+                        <a:rPr sz="850" b="0">
+                          <a:solidFill>
+                            <a:srgbClr val="1F2937"/>
+                          </a:solidFill>
+                          <a:latin typeface="Meiryo"/>
+                          <a:ea typeface="Meiryo"/>
+                        </a:rPr>
+                        <a:t>117室</a:t>
+                      </a:r>
+                    </a:p>
+                  </a:txBody>
+                  <a:tcPr marL="36576" marR="36576" marT="9144" marB="9144" anchor="ctr">
+                    <a:solidFill>
+                      <a:srgbClr val="F3F4F6"/>
+                    </a:solidFill>
+                  </a:tcPr>
+                </a:tc>
+                <a:tc>
+                  <a:txBody>
+                    <a:bodyPr/>
+                    <a:lstStyle/>
+                    <a:p>
+                      <a:pPr algn="ctr"/>
+                      <a:r>
+                        <a:rPr sz="850" b="0">
+                          <a:solidFill>
+                            <a:srgbClr val="1F2937"/>
+                          </a:solidFill>
+                          <a:latin typeface="Meiryo"/>
+                          <a:ea typeface="Meiryo"/>
+                        </a:rPr>
+                        <a:t>2026年</a:t>
+                      </a:r>
+                    </a:p>
+                  </a:txBody>
+                  <a:tcPr marL="36576" marR="36576" marT="9144" marB="9144" anchor="ctr">
+                    <a:solidFill>
+                      <a:srgbClr val="F3F4F6"/>
+                    </a:solidFill>
+                  </a:tcPr>
+                </a:tc>
+              </a:tr>
+              <a:tr h="256032">
+                <a:tc>
+                  <a:txBody>
+                    <a:bodyPr/>
+                    <a:lstStyle/>
+                    <a:p>
+                      <a:pPr algn="ctr"/>
+                      <a:r>
+                        <a:rPr sz="850" b="1">
+                          <a:solidFill>
+                            <a:srgbClr val="FFFFFF"/>
+                          </a:solidFill>
+                          <a:latin typeface="Meiryo"/>
+                          <a:ea typeface="Meiryo"/>
+                        </a:rPr>
+                        <a:t>17</a:t>
+                      </a:r>
+                    </a:p>
+                  </a:txBody>
+                  <a:tcPr marL="36576" marR="36576" marT="9144" marB="9144" anchor="ctr">
+                    <a:solidFill>
+                      <a:srgbClr val="2563EB"/>
+                    </a:solidFill>
+                  </a:tcPr>
+                </a:tc>
+                <a:tc>
+                  <a:txBody>
+                    <a:bodyPr/>
+                    <a:lstStyle/>
+                    <a:p>
+                      <a:pPr algn="l"/>
+                      <a:r>
+                        <a:rPr sz="850" b="0">
+                          <a:solidFill>
+                            <a:srgbClr val="1F2937"/>
+                          </a:solidFill>
+                          <a:latin typeface="Meiryo"/>
+                          <a:ea typeface="Meiryo"/>
+                        </a:rPr>
+                        <a:t>エースホテル福岡</a:t>
+                      </a:r>
+                    </a:p>
+                  </a:txBody>
+                  <a:tcPr marL="36576" marR="36576" marT="9144" marB="9144" anchor="ctr">
+                    <a:solidFill>
+                      <a:srgbClr val="FFFFFF"/>
+                    </a:solidFill>
+                  </a:tcPr>
+                </a:tc>
+                <a:tc>
+                  <a:txBody>
+                    <a:bodyPr/>
+                    <a:lstStyle/>
+                    <a:p>
+                      <a:pPr algn="ctr"/>
+                      <a:r>
+                        <a:rPr sz="850" b="0">
+                          <a:solidFill>
+                            <a:srgbClr val="1F2937"/>
+                          </a:solidFill>
+                          <a:latin typeface="Meiryo"/>
+                          <a:ea typeface="Meiryo"/>
+                        </a:rPr>
+                        <a:t>192室</a:t>
+                      </a:r>
+                    </a:p>
+                  </a:txBody>
+                  <a:tcPr marL="36576" marR="36576" marT="9144" marB="9144" anchor="ctr">
+                    <a:solidFill>
+                      <a:srgbClr val="FFFFFF"/>
+                    </a:solidFill>
+                  </a:tcPr>
+                </a:tc>
+                <a:tc>
+                  <a:txBody>
+                    <a:bodyPr/>
+                    <a:lstStyle/>
+                    <a:p>
+                      <a:pPr algn="ctr"/>
+                      <a:r>
+                        <a:rPr sz="850" b="0">
+                          <a:solidFill>
+                            <a:srgbClr val="1F2937"/>
+                          </a:solidFill>
+                          <a:latin typeface="Meiryo"/>
+                          <a:ea typeface="Meiryo"/>
+                        </a:rPr>
+                        <a:t>2027年</a:t>
+                      </a:r>
+                    </a:p>
+                  </a:txBody>
+                  <a:tcPr marL="36576" marR="36576" marT="9144" marB="9144" anchor="ctr">
+                    <a:solidFill>
+                      <a:srgbClr val="FFFFFF"/>
+                    </a:solidFill>
+                  </a:tcPr>
+                </a:tc>
+              </a:tr>
+              <a:tr h="256032">
+                <a:tc>
+                  <a:txBody>
+                    <a:bodyPr/>
+                    <a:lstStyle/>
+                    <a:p>
+                      <a:pPr algn="ctr"/>
+                      <a:r>
+                        <a:rPr sz="850" b="1">
+                          <a:solidFill>
+                            <a:srgbClr val="FFFFFF"/>
+                          </a:solidFill>
+                          <a:latin typeface="Meiryo"/>
+                          <a:ea typeface="Meiryo"/>
+                        </a:rPr>
+                        <a:t>18</a:t>
+                      </a:r>
+                    </a:p>
+                  </a:txBody>
+                  <a:tcPr marL="36576" marR="36576" marT="9144" marB="9144" anchor="ctr">
+                    <a:solidFill>
+                      <a:srgbClr val="2563EB"/>
+                    </a:solidFill>
+                  </a:tcPr>
+                </a:tc>
+                <a:tc>
+                  <a:txBody>
+                    <a:bodyPr/>
+                    <a:lstStyle/>
+                    <a:p>
+                      <a:pPr algn="l"/>
+                      <a:r>
+                        <a:rPr sz="850" b="0">
+                          <a:solidFill>
+                            <a:srgbClr val="1F2937"/>
+                          </a:solidFill>
+                          <a:latin typeface="Meiryo"/>
+                          <a:ea typeface="Meiryo"/>
+                        </a:rPr>
+                        <a:t>(仮称) 福岡家裁跡インターコンチネンタルホテルズ＆リゾーツ</a:t>
+                      </a:r>
+                    </a:p>
+                  </a:txBody>
+                  <a:tcPr marL="36576" marR="36576" marT="9144" marB="9144" anchor="ctr">
+                    <a:solidFill>
+                      <a:srgbClr val="F3F4F6"/>
+                    </a:solidFill>
+                  </a:tcPr>
+                </a:tc>
+                <a:tc>
+                  <a:txBody>
+                    <a:bodyPr/>
+                    <a:lstStyle/>
+                    <a:p>
+                      <a:pPr algn="ctr"/>
+                      <a:r>
+                        <a:rPr sz="850" b="0">
+                          <a:solidFill>
+                            <a:srgbClr val="1F2937"/>
+                          </a:solidFill>
+                          <a:latin typeface="Meiryo"/>
+                          <a:ea typeface="Meiryo"/>
+                        </a:rPr>
+                        <a:t>117室</a:t>
+                      </a:r>
+                    </a:p>
+                  </a:txBody>
+                  <a:tcPr marL="36576" marR="36576" marT="9144" marB="9144" anchor="ctr">
+                    <a:solidFill>
+                      <a:srgbClr val="F3F4F6"/>
+                    </a:solidFill>
+                  </a:tcPr>
+                </a:tc>
+                <a:tc>
+                  <a:txBody>
+                    <a:bodyPr/>
+                    <a:lstStyle/>
+                    <a:p>
+                      <a:pPr algn="ctr"/>
+                      <a:r>
+                        <a:rPr sz="850" b="0">
+                          <a:solidFill>
+                            <a:srgbClr val="1F2937"/>
+                          </a:solidFill>
+                          <a:latin typeface="Meiryo"/>
+                          <a:ea typeface="Meiryo"/>
+                        </a:rPr>
+                        <a:t>2030年</a:t>
+                      </a:r>
+                    </a:p>
+                  </a:txBody>
+                  <a:tcPr marL="36576" marR="36576" marT="9144" marB="9144" anchor="ctr">
+                    <a:solidFill>
+                      <a:srgbClr val="F3F4F6"/>
                     </a:solidFill>
                   </a:tcPr>
                 </a:tc>
@@ -5252,7 +6330,7 @@
         </p:nvGraphicFramePr>
         <p:xfrm>
           <a:off x="228600" y="868680"/>
-          <a:ext cx="11704320" cy="3511296"/>
+          <a:ext cx="10789920" cy="5559552"/>
         </p:xfrm>
         <a:graphic>
           <a:graphicData uri="http://schemas.openxmlformats.org/drawingml/2006/table">
@@ -5262,12 +6340,11 @@
               </a:tblPr>
               <a:tblGrid>
                 <a:gridCol w="457200"/>
-                <a:gridCol w="2743200"/>
+                <a:gridCol w="3383280"/>
                 <a:gridCol w="1280160"/>
                 <a:gridCol w="731520"/>
                 <a:gridCol w="822960"/>
-                <a:gridCol w="1828800"/>
-                <a:gridCol w="3840480"/>
+                <a:gridCol w="4114800"/>
               </a:tblGrid>
               <a:tr h="292608">
                 <a:tc>
@@ -5404,30 +6481,6 @@
                           <a:latin typeface="Meiryo"/>
                           <a:ea typeface="Meiryo"/>
                         </a:rPr>
-                        <a:t>プライス・インデックス(円)</a:t>
-                      </a:r>
-                    </a:p>
-                  </a:txBody>
-                  <a:tcPr anchor="ctr">
-                    <a:solidFill>
-                      <a:srgbClr val="1F2937"/>
-                    </a:solidFill>
-                  </a:tcPr>
-                </a:tc>
-                <a:tc>
-                  <a:txBody>
-                    <a:bodyPr/>
-                    <a:lstStyle/>
-                    <a:p>
-                      <a:pPr algn="ctr"/>
-                      <a:r>
-                        <a:rPr sz="950" b="1">
-                          <a:solidFill>
-                            <a:srgbClr val="FFFFFF"/>
-                          </a:solidFill>
-                          <a:latin typeface="Meiryo"/>
-                          <a:ea typeface="Meiryo"/>
-                        </a:rPr>
                         <a:t>住所</a:t>
                       </a:r>
                     </a:p>
@@ -5478,7 +6531,7 @@
                           <a:latin typeface="Meiryo"/>
                           <a:ea typeface="Meiryo"/>
                         </a:rPr>
-                        <a:t>ホテルピースアイランド那覇</a:t>
+                        <a:t>オリエンタルホテル福岡 博多ステーション</a:t>
                       </a:r>
                     </a:p>
                   </a:txBody>
@@ -5493,6 +6546,78 @@
                     <a:bodyPr/>
                     <a:lstStyle/>
                     <a:p>
+                      <a:pPr algn="ctr"/>
+                      <a:r>
+                        <a:rPr sz="900" b="0">
+                          <a:solidFill>
+                            <a:srgbClr val="1F2937"/>
+                          </a:solidFill>
+                          <a:latin typeface="Meiryo"/>
+                          <a:ea typeface="Meiryo"/>
+                        </a:rPr>
+                        <a:t>シティホテル</a:t>
+                      </a:r>
+                    </a:p>
+                  </a:txBody>
+                  <a:tcPr anchor="ctr">
+                    <a:solidFill>
+                      <a:srgbClr val="FFFFFF"/>
+                    </a:solidFill>
+                  </a:tcPr>
+                </a:tc>
+                <a:tc>
+                  <a:txBody>
+                    <a:bodyPr/>
+                    <a:lstStyle/>
+                    <a:p>
+                      <a:pPr algn="ctr"/>
+                      <a:r>
+                        <a:rPr sz="900" b="0">
+                          <a:solidFill>
+                            <a:srgbClr val="1F2937"/>
+                          </a:solidFill>
+                          <a:latin typeface="Meiryo"/>
+                          <a:ea typeface="Meiryo"/>
+                        </a:rPr>
+                        <a:t>227</a:t>
+                      </a:r>
+                    </a:p>
+                  </a:txBody>
+                  <a:tcPr anchor="ctr">
+                    <a:solidFill>
+                      <a:srgbClr val="FFFFFF"/>
+                    </a:solidFill>
+                  </a:tcPr>
+                </a:tc>
+                <a:tc>
+                  <a:txBody>
+                    <a:bodyPr/>
+                    <a:lstStyle/>
+                    <a:p>
+                      <a:pPr algn="ctr"/>
+                      <a:r>
+                        <a:rPr sz="900" b="0">
+                          <a:solidFill>
+                            <a:srgbClr val="1F2937"/>
+                          </a:solidFill>
+                          <a:latin typeface="Meiryo"/>
+                          <a:ea typeface="Meiryo"/>
+                        </a:rPr>
+                        <a:t>1985年</a:t>
+                      </a:r>
+                    </a:p>
+                  </a:txBody>
+                  <a:tcPr anchor="ctr">
+                    <a:solidFill>
+                      <a:srgbClr val="FFFFFF"/>
+                    </a:solidFill>
+                  </a:tcPr>
+                </a:tc>
+                <a:tc>
+                  <a:txBody>
+                    <a:bodyPr/>
+                    <a:lstStyle/>
+                    <a:p>
                       <a:pPr algn="l"/>
                       <a:r>
                         <a:rPr sz="900" b="0">
@@ -5502,103 +6627,7 @@
                           <a:latin typeface="Meiryo"/>
                           <a:ea typeface="Meiryo"/>
                         </a:rPr>
-                        <a:t>ビジネスホテル</a:t>
-                      </a:r>
-                    </a:p>
-                  </a:txBody>
-                  <a:tcPr anchor="ctr">
-                    <a:solidFill>
-                      <a:srgbClr val="FFFFFF"/>
-                    </a:solidFill>
-                  </a:tcPr>
-                </a:tc>
-                <a:tc>
-                  <a:txBody>
-                    <a:bodyPr/>
-                    <a:lstStyle/>
-                    <a:p>
-                      <a:pPr algn="ctr"/>
-                      <a:r>
-                        <a:rPr sz="900" b="0">
-                          <a:solidFill>
-                            <a:srgbClr val="1F2937"/>
-                          </a:solidFill>
-                          <a:latin typeface="Meiryo"/>
-                          <a:ea typeface="Meiryo"/>
-                        </a:rPr>
-                        <a:t>23</a:t>
-                      </a:r>
-                    </a:p>
-                  </a:txBody>
-                  <a:tcPr anchor="ctr">
-                    <a:solidFill>
-                      <a:srgbClr val="FFFFFF"/>
-                    </a:solidFill>
-                  </a:tcPr>
-                </a:tc>
-                <a:tc>
-                  <a:txBody>
-                    <a:bodyPr/>
-                    <a:lstStyle/>
-                    <a:p>
-                      <a:pPr algn="ctr"/>
-                      <a:r>
-                        <a:rPr sz="900" b="0">
-                          <a:solidFill>
-                            <a:srgbClr val="1F2937"/>
-                          </a:solidFill>
-                          <a:latin typeface="Meiryo"/>
-                          <a:ea typeface="Meiryo"/>
-                        </a:rPr>
-                        <a:t>1988年</a:t>
-                      </a:r>
-                    </a:p>
-                  </a:txBody>
-                  <a:tcPr anchor="ctr">
-                    <a:solidFill>
-                      <a:srgbClr val="FFFFFF"/>
-                    </a:solidFill>
-                  </a:tcPr>
-                </a:tc>
-                <a:tc>
-                  <a:txBody>
-                    <a:bodyPr/>
-                    <a:lstStyle/>
-                    <a:p>
-                      <a:pPr algn="l"/>
-                      <a:r>
-                        <a:rPr sz="900" b="0">
-                          <a:solidFill>
-                            <a:srgbClr val="1F2937"/>
-                          </a:solidFill>
-                          <a:latin typeface="Meiryo"/>
-                          <a:ea typeface="Meiryo"/>
-                        </a:rPr>
-                        <a:t>7,501 - 10,000</a:t>
-                      </a:r>
-                    </a:p>
-                  </a:txBody>
-                  <a:tcPr anchor="ctr">
-                    <a:solidFill>
-                      <a:srgbClr val="FFFFFF"/>
-                    </a:solidFill>
-                  </a:tcPr>
-                </a:tc>
-                <a:tc>
-                  <a:txBody>
-                    <a:bodyPr/>
-                    <a:lstStyle/>
-                    <a:p>
-                      <a:pPr algn="l"/>
-                      <a:r>
-                        <a:rPr sz="900" b="0">
-                          <a:solidFill>
-                            <a:srgbClr val="1F2937"/>
-                          </a:solidFill>
-                          <a:latin typeface="Meiryo"/>
-                          <a:ea typeface="Meiryo"/>
-                        </a:rPr>
-                        <a:t>〒900-0016 沖縄県那覇市前島3-23</a:t>
+                        <a:t>〒812-0012 福岡県福岡市博多区博多駅中央街4-23</a:t>
                       </a:r>
                     </a:p>
                   </a:txBody>
@@ -5648,7 +6677,7 @@
                           <a:latin typeface="Meiryo"/>
                           <a:ea typeface="Meiryo"/>
                         </a:rPr>
-                        <a:t>コスモスおもろまちステーション</a:t>
+                        <a:t>福岡オリエンタルホテル</a:t>
                       </a:r>
                     </a:p>
                   </a:txBody>
@@ -5663,6 +6692,78 @@
                     <a:bodyPr/>
                     <a:lstStyle/>
                     <a:p>
+                      <a:pPr algn="ctr"/>
+                      <a:r>
+                        <a:rPr sz="900" b="0">
+                          <a:solidFill>
+                            <a:srgbClr val="1F2937"/>
+                          </a:solidFill>
+                          <a:latin typeface="Meiryo"/>
+                          <a:ea typeface="Meiryo"/>
+                        </a:rPr>
+                        <a:t>ビジネスホテル</a:t>
+                      </a:r>
+                    </a:p>
+                  </a:txBody>
+                  <a:tcPr anchor="ctr">
+                    <a:solidFill>
+                      <a:srgbClr val="F3F4F6"/>
+                    </a:solidFill>
+                  </a:tcPr>
+                </a:tc>
+                <a:tc>
+                  <a:txBody>
+                    <a:bodyPr/>
+                    <a:lstStyle/>
+                    <a:p>
+                      <a:pPr algn="ctr"/>
+                      <a:r>
+                        <a:rPr sz="900" b="0">
+                          <a:solidFill>
+                            <a:srgbClr val="1F2937"/>
+                          </a:solidFill>
+                          <a:latin typeface="Meiryo"/>
+                          <a:ea typeface="Meiryo"/>
+                        </a:rPr>
+                        <a:t>108</a:t>
+                      </a:r>
+                    </a:p>
+                  </a:txBody>
+                  <a:tcPr anchor="ctr">
+                    <a:solidFill>
+                      <a:srgbClr val="F3F4F6"/>
+                    </a:solidFill>
+                  </a:tcPr>
+                </a:tc>
+                <a:tc>
+                  <a:txBody>
+                    <a:bodyPr/>
+                    <a:lstStyle/>
+                    <a:p>
+                      <a:pPr algn="ctr"/>
+                      <a:r>
+                        <a:rPr sz="900" b="0">
+                          <a:solidFill>
+                            <a:srgbClr val="1F2937"/>
+                          </a:solidFill>
+                          <a:latin typeface="Meiryo"/>
+                          <a:ea typeface="Meiryo"/>
+                        </a:rPr>
+                        <a:t>1990年</a:t>
+                      </a:r>
+                    </a:p>
+                  </a:txBody>
+                  <a:tcPr anchor="ctr">
+                    <a:solidFill>
+                      <a:srgbClr val="F3F4F6"/>
+                    </a:solidFill>
+                  </a:tcPr>
+                </a:tc>
+                <a:tc>
+                  <a:txBody>
+                    <a:bodyPr/>
+                    <a:lstStyle/>
+                    <a:p>
                       <a:pPr algn="l"/>
                       <a:r>
                         <a:rPr sz="900" b="0">
@@ -5672,103 +6773,7 @@
                           <a:latin typeface="Meiryo"/>
                           <a:ea typeface="Meiryo"/>
                         </a:rPr>
-                        <a:t>ホステル</a:t>
-                      </a:r>
-                    </a:p>
-                  </a:txBody>
-                  <a:tcPr anchor="ctr">
-                    <a:solidFill>
-                      <a:srgbClr val="F3F4F6"/>
-                    </a:solidFill>
-                  </a:tcPr>
-                </a:tc>
-                <a:tc>
-                  <a:txBody>
-                    <a:bodyPr/>
-                    <a:lstStyle/>
-                    <a:p>
-                      <a:pPr algn="ctr"/>
-                      <a:r>
-                        <a:rPr sz="900" b="0">
-                          <a:solidFill>
-                            <a:srgbClr val="1F2937"/>
-                          </a:solidFill>
-                          <a:latin typeface="Meiryo"/>
-                          <a:ea typeface="Meiryo"/>
-                        </a:rPr>
-                        <a:t>24</a:t>
-                      </a:r>
-                    </a:p>
-                  </a:txBody>
-                  <a:tcPr anchor="ctr">
-                    <a:solidFill>
-                      <a:srgbClr val="F3F4F6"/>
-                    </a:solidFill>
-                  </a:tcPr>
-                </a:tc>
-                <a:tc>
-                  <a:txBody>
-                    <a:bodyPr/>
-                    <a:lstStyle/>
-                    <a:p>
-                      <a:pPr algn="ctr"/>
-                      <a:r>
-                        <a:rPr sz="900" b="0">
-                          <a:solidFill>
-                            <a:srgbClr val="1F2937"/>
-                          </a:solidFill>
-                          <a:latin typeface="Meiryo"/>
-                          <a:ea typeface="Meiryo"/>
-                        </a:rPr>
-                        <a:t>2016年</a:t>
-                      </a:r>
-                    </a:p>
-                  </a:txBody>
-                  <a:tcPr anchor="ctr">
-                    <a:solidFill>
-                      <a:srgbClr val="F3F4F6"/>
-                    </a:solidFill>
-                  </a:tcPr>
-                </a:tc>
-                <a:tc>
-                  <a:txBody>
-                    <a:bodyPr/>
-                    <a:lstStyle/>
-                    <a:p>
-                      <a:pPr algn="l"/>
-                      <a:r>
-                        <a:rPr sz="900" b="0">
-                          <a:solidFill>
-                            <a:srgbClr val="1F2937"/>
-                          </a:solidFill>
-                          <a:latin typeface="Meiryo"/>
-                          <a:ea typeface="Meiryo"/>
-                        </a:rPr>
-                        <a:t>7,501 - 10,000</a:t>
-                      </a:r>
-                    </a:p>
-                  </a:txBody>
-                  <a:tcPr anchor="ctr">
-                    <a:solidFill>
-                      <a:srgbClr val="F3F4F6"/>
-                    </a:solidFill>
-                  </a:tcPr>
-                </a:tc>
-                <a:tc>
-                  <a:txBody>
-                    <a:bodyPr/>
-                    <a:lstStyle/>
-                    <a:p>
-                      <a:pPr algn="l"/>
-                      <a:r>
-                        <a:rPr sz="900" b="0">
-                          <a:solidFill>
-                            <a:srgbClr val="1F2937"/>
-                          </a:solidFill>
-                          <a:latin typeface="Meiryo"/>
-                          <a:ea typeface="Meiryo"/>
-                        </a:rPr>
-                        <a:t>〒902-0068 沖縄県那覇市真嘉比1丁目10-1</a:t>
+                        <a:t>〒810-0002 福岡県福岡市中央区西中洲12-17</a:t>
                       </a:r>
                     </a:p>
                   </a:txBody>
@@ -5818,7 +6823,7 @@
                           <a:latin typeface="Meiryo"/>
                           <a:ea typeface="Meiryo"/>
                         </a:rPr>
-                        <a:t>沖縄国際ユースホステル</a:t>
+                        <a:t>JR九州ホテルブラッサム福岡</a:t>
                       </a:r>
                     </a:p>
                   </a:txBody>
@@ -5833,6 +6838,78 @@
                     <a:bodyPr/>
                     <a:lstStyle/>
                     <a:p>
+                      <a:pPr algn="ctr"/>
+                      <a:r>
+                        <a:rPr sz="900" b="0">
+                          <a:solidFill>
+                            <a:srgbClr val="1F2937"/>
+                          </a:solidFill>
+                          <a:latin typeface="Meiryo"/>
+                          <a:ea typeface="Meiryo"/>
+                        </a:rPr>
+                        <a:t>ビジネスホテル</a:t>
+                      </a:r>
+                    </a:p>
+                  </a:txBody>
+                  <a:tcPr anchor="ctr">
+                    <a:solidFill>
+                      <a:srgbClr val="FFFFFF"/>
+                    </a:solidFill>
+                  </a:tcPr>
+                </a:tc>
+                <a:tc>
+                  <a:txBody>
+                    <a:bodyPr/>
+                    <a:lstStyle/>
+                    <a:p>
+                      <a:pPr algn="ctr"/>
+                      <a:r>
+                        <a:rPr sz="900" b="0">
+                          <a:solidFill>
+                            <a:srgbClr val="1F2937"/>
+                          </a:solidFill>
+                          <a:latin typeface="Meiryo"/>
+                          <a:ea typeface="Meiryo"/>
+                        </a:rPr>
+                        <a:t>90</a:t>
+                      </a:r>
+                    </a:p>
+                  </a:txBody>
+                  <a:tcPr anchor="ctr">
+                    <a:solidFill>
+                      <a:srgbClr val="FFFFFF"/>
+                    </a:solidFill>
+                  </a:tcPr>
+                </a:tc>
+                <a:tc>
+                  <a:txBody>
+                    <a:bodyPr/>
+                    <a:lstStyle/>
+                    <a:p>
+                      <a:pPr algn="ctr"/>
+                      <a:r>
+                        <a:rPr sz="900" b="0">
+                          <a:solidFill>
+                            <a:srgbClr val="1F2937"/>
+                          </a:solidFill>
+                          <a:latin typeface="Meiryo"/>
+                          <a:ea typeface="Meiryo"/>
+                        </a:rPr>
+                        <a:t>1992年</a:t>
+                      </a:r>
+                    </a:p>
+                  </a:txBody>
+                  <a:tcPr anchor="ctr">
+                    <a:solidFill>
+                      <a:srgbClr val="FFFFFF"/>
+                    </a:solidFill>
+                  </a:tcPr>
+                </a:tc>
+                <a:tc>
+                  <a:txBody>
+                    <a:bodyPr/>
+                    <a:lstStyle/>
+                    <a:p>
                       <a:pPr algn="l"/>
                       <a:r>
                         <a:rPr sz="900" b="0">
@@ -5842,103 +6919,7 @@
                           <a:latin typeface="Meiryo"/>
                           <a:ea typeface="Meiryo"/>
                         </a:rPr>
-                        <a:t>ホステル</a:t>
-                      </a:r>
-                    </a:p>
-                  </a:txBody>
-                  <a:tcPr anchor="ctr">
-                    <a:solidFill>
-                      <a:srgbClr val="FFFFFF"/>
-                    </a:solidFill>
-                  </a:tcPr>
-                </a:tc>
-                <a:tc>
-                  <a:txBody>
-                    <a:bodyPr/>
-                    <a:lstStyle/>
-                    <a:p>
-                      <a:pPr algn="ctr"/>
-                      <a:r>
-                        <a:rPr sz="900" b="0">
-                          <a:solidFill>
-                            <a:srgbClr val="1F2937"/>
-                          </a:solidFill>
-                          <a:latin typeface="Meiryo"/>
-                          <a:ea typeface="Meiryo"/>
-                        </a:rPr>
-                        <a:t>38</a:t>
-                      </a:r>
-                    </a:p>
-                  </a:txBody>
-                  <a:tcPr anchor="ctr">
-                    <a:solidFill>
-                      <a:srgbClr val="FFFFFF"/>
-                    </a:solidFill>
-                  </a:tcPr>
-                </a:tc>
-                <a:tc>
-                  <a:txBody>
-                    <a:bodyPr/>
-                    <a:lstStyle/>
-                    <a:p>
-                      <a:pPr algn="ctr"/>
-                      <a:r>
-                        <a:rPr sz="900" b="0">
-                          <a:solidFill>
-                            <a:srgbClr val="1F2937"/>
-                          </a:solidFill>
-                          <a:latin typeface="Meiryo"/>
-                          <a:ea typeface="Meiryo"/>
-                        </a:rPr>
-                        <a:t>1995年</a:t>
-                      </a:r>
-                    </a:p>
-                  </a:txBody>
-                  <a:tcPr anchor="ctr">
-                    <a:solidFill>
-                      <a:srgbClr val="FFFFFF"/>
-                    </a:solidFill>
-                  </a:tcPr>
-                </a:tc>
-                <a:tc>
-                  <a:txBody>
-                    <a:bodyPr/>
-                    <a:lstStyle/>
-                    <a:p>
-                      <a:pPr algn="l"/>
-                      <a:r>
-                        <a:rPr sz="900" b="0">
-                          <a:solidFill>
-                            <a:srgbClr val="1F2937"/>
-                          </a:solidFill>
-                          <a:latin typeface="Meiryo"/>
-                          <a:ea typeface="Meiryo"/>
-                        </a:rPr>
-                        <a:t>7,501 - 10,000</a:t>
-                      </a:r>
-                    </a:p>
-                  </a:txBody>
-                  <a:tcPr anchor="ctr">
-                    <a:solidFill>
-                      <a:srgbClr val="FFFFFF"/>
-                    </a:solidFill>
-                  </a:tcPr>
-                </a:tc>
-                <a:tc>
-                  <a:txBody>
-                    <a:bodyPr/>
-                    <a:lstStyle/>
-                    <a:p>
-                      <a:pPr algn="l"/>
-                      <a:r>
-                        <a:rPr sz="900" b="0">
-                          <a:solidFill>
-                            <a:srgbClr val="1F2937"/>
-                          </a:solidFill>
-                          <a:latin typeface="Meiryo"/>
-                          <a:ea typeface="Meiryo"/>
-                        </a:rPr>
-                        <a:t>〒900-0026 沖縄県那覇市奥武山町51</a:t>
+                        <a:t>〒812-0013 福岡県福岡市博多区博多駅東2丁目2-4</a:t>
                       </a:r>
                     </a:p>
                   </a:txBody>
@@ -5988,7 +6969,7 @@
                           <a:latin typeface="Meiryo"/>
                           <a:ea typeface="Meiryo"/>
                         </a:rPr>
-                        <a:t>ホテル サン・クイーン</a:t>
+                        <a:t>グランドハイアット福岡</a:t>
                       </a:r>
                     </a:p>
                   </a:txBody>
@@ -6003,6 +6984,78 @@
                     <a:bodyPr/>
                     <a:lstStyle/>
                     <a:p>
+                      <a:pPr algn="ctr"/>
+                      <a:r>
+                        <a:rPr sz="900" b="0">
+                          <a:solidFill>
+                            <a:srgbClr val="1F2937"/>
+                          </a:solidFill>
+                          <a:latin typeface="Meiryo"/>
+                          <a:ea typeface="Meiryo"/>
+                        </a:rPr>
+                        <a:t>シティホテル</a:t>
+                      </a:r>
+                    </a:p>
+                  </a:txBody>
+                  <a:tcPr anchor="ctr">
+                    <a:solidFill>
+                      <a:srgbClr val="F3F4F6"/>
+                    </a:solidFill>
+                  </a:tcPr>
+                </a:tc>
+                <a:tc>
+                  <a:txBody>
+                    <a:bodyPr/>
+                    <a:lstStyle/>
+                    <a:p>
+                      <a:pPr algn="ctr"/>
+                      <a:r>
+                        <a:rPr sz="900" b="0">
+                          <a:solidFill>
+                            <a:srgbClr val="1F2937"/>
+                          </a:solidFill>
+                          <a:latin typeface="Meiryo"/>
+                          <a:ea typeface="Meiryo"/>
+                        </a:rPr>
+                        <a:t>372</a:t>
+                      </a:r>
+                    </a:p>
+                  </a:txBody>
+                  <a:tcPr anchor="ctr">
+                    <a:solidFill>
+                      <a:srgbClr val="F3F4F6"/>
+                    </a:solidFill>
+                  </a:tcPr>
+                </a:tc>
+                <a:tc>
+                  <a:txBody>
+                    <a:bodyPr/>
+                    <a:lstStyle/>
+                    <a:p>
+                      <a:pPr algn="ctr"/>
+                      <a:r>
+                        <a:rPr sz="900" b="0">
+                          <a:solidFill>
+                            <a:srgbClr val="1F2937"/>
+                          </a:solidFill>
+                          <a:latin typeface="Meiryo"/>
+                          <a:ea typeface="Meiryo"/>
+                        </a:rPr>
+                        <a:t>1996年</a:t>
+                      </a:r>
+                    </a:p>
+                  </a:txBody>
+                  <a:tcPr anchor="ctr">
+                    <a:solidFill>
+                      <a:srgbClr val="F3F4F6"/>
+                    </a:solidFill>
+                  </a:tcPr>
+                </a:tc>
+                <a:tc>
+                  <a:txBody>
+                    <a:bodyPr/>
+                    <a:lstStyle/>
+                    <a:p>
                       <a:pPr algn="l"/>
                       <a:r>
                         <a:rPr sz="900" b="0">
@@ -6012,103 +7065,7 @@
                           <a:latin typeface="Meiryo"/>
                           <a:ea typeface="Meiryo"/>
                         </a:rPr>
-                        <a:t>ビジネスホテル</a:t>
-                      </a:r>
-                    </a:p>
-                  </a:txBody>
-                  <a:tcPr anchor="ctr">
-                    <a:solidFill>
-                      <a:srgbClr val="F3F4F6"/>
-                    </a:solidFill>
-                  </a:tcPr>
-                </a:tc>
-                <a:tc>
-                  <a:txBody>
-                    <a:bodyPr/>
-                    <a:lstStyle/>
-                    <a:p>
-                      <a:pPr algn="ctr"/>
-                      <a:r>
-                        <a:rPr sz="900" b="0">
-                          <a:solidFill>
-                            <a:srgbClr val="1F2937"/>
-                          </a:solidFill>
-                          <a:latin typeface="Meiryo"/>
-                          <a:ea typeface="Meiryo"/>
-                        </a:rPr>
-                        <a:t>60</a:t>
-                      </a:r>
-                    </a:p>
-                  </a:txBody>
-                  <a:tcPr anchor="ctr">
-                    <a:solidFill>
-                      <a:srgbClr val="F3F4F6"/>
-                    </a:solidFill>
-                  </a:tcPr>
-                </a:tc>
-                <a:tc>
-                  <a:txBody>
-                    <a:bodyPr/>
-                    <a:lstStyle/>
-                    <a:p>
-                      <a:pPr algn="ctr"/>
-                      <a:r>
-                        <a:rPr sz="900" b="0">
-                          <a:solidFill>
-                            <a:srgbClr val="1F2937"/>
-                          </a:solidFill>
-                          <a:latin typeface="Meiryo"/>
-                          <a:ea typeface="Meiryo"/>
-                        </a:rPr>
-                        <a:t>2006年</a:t>
-                      </a:r>
-                    </a:p>
-                  </a:txBody>
-                  <a:tcPr anchor="ctr">
-                    <a:solidFill>
-                      <a:srgbClr val="F3F4F6"/>
-                    </a:solidFill>
-                  </a:tcPr>
-                </a:tc>
-                <a:tc>
-                  <a:txBody>
-                    <a:bodyPr/>
-                    <a:lstStyle/>
-                    <a:p>
-                      <a:pPr algn="l"/>
-                      <a:r>
-                        <a:rPr sz="900" b="0">
-                          <a:solidFill>
-                            <a:srgbClr val="1F2937"/>
-                          </a:solidFill>
-                          <a:latin typeface="Meiryo"/>
-                          <a:ea typeface="Meiryo"/>
-                        </a:rPr>
-                        <a:t>7,501 - 10,000</a:t>
-                      </a:r>
-                    </a:p>
-                  </a:txBody>
-                  <a:tcPr anchor="ctr">
-                    <a:solidFill>
-                      <a:srgbClr val="F3F4F6"/>
-                    </a:solidFill>
-                  </a:tcPr>
-                </a:tc>
-                <a:tc>
-                  <a:txBody>
-                    <a:bodyPr/>
-                    <a:lstStyle/>
-                    <a:p>
-                      <a:pPr algn="l"/>
-                      <a:r>
-                        <a:rPr sz="900" b="0">
-                          <a:solidFill>
-                            <a:srgbClr val="1F2937"/>
-                          </a:solidFill>
-                          <a:latin typeface="Meiryo"/>
-                          <a:ea typeface="Meiryo"/>
-                        </a:rPr>
-                        <a:t>〒902-0067 沖縄県那覇市安里2丁目4-2-1</a:t>
+                        <a:t>〒812-0018 福岡県福岡市博多区住吉1丁目2-82</a:t>
                       </a:r>
                     </a:p>
                   </a:txBody>
@@ -6158,7 +7115,7 @@
                           <a:latin typeface="Meiryo"/>
                           <a:ea typeface="Meiryo"/>
                         </a:rPr>
-                        <a:t>ホテル山の内</a:t>
+                        <a:t>ザ ロイヤルパークホテル 福岡</a:t>
                       </a:r>
                     </a:p>
                   </a:txBody>
@@ -6173,6 +7130,78 @@
                     <a:bodyPr/>
                     <a:lstStyle/>
                     <a:p>
+                      <a:pPr algn="ctr"/>
+                      <a:r>
+                        <a:rPr sz="900" b="0">
+                          <a:solidFill>
+                            <a:srgbClr val="1F2937"/>
+                          </a:solidFill>
+                          <a:latin typeface="Meiryo"/>
+                          <a:ea typeface="Meiryo"/>
+                        </a:rPr>
+                        <a:t>ビジネスホテル</a:t>
+                      </a:r>
+                    </a:p>
+                  </a:txBody>
+                  <a:tcPr anchor="ctr">
+                    <a:solidFill>
+                      <a:srgbClr val="FFFFFF"/>
+                    </a:solidFill>
+                  </a:tcPr>
+                </a:tc>
+                <a:tc>
+                  <a:txBody>
+                    <a:bodyPr/>
+                    <a:lstStyle/>
+                    <a:p>
+                      <a:pPr algn="ctr"/>
+                      <a:r>
+                        <a:rPr sz="900" b="0">
+                          <a:solidFill>
+                            <a:srgbClr val="1F2937"/>
+                          </a:solidFill>
+                          <a:latin typeface="Meiryo"/>
+                          <a:ea typeface="Meiryo"/>
+                        </a:rPr>
+                        <a:t>174</a:t>
+                      </a:r>
+                    </a:p>
+                  </a:txBody>
+                  <a:tcPr anchor="ctr">
+                    <a:solidFill>
+                      <a:srgbClr val="FFFFFF"/>
+                    </a:solidFill>
+                  </a:tcPr>
+                </a:tc>
+                <a:tc>
+                  <a:txBody>
+                    <a:bodyPr/>
+                    <a:lstStyle/>
+                    <a:p>
+                      <a:pPr algn="ctr"/>
+                      <a:r>
+                        <a:rPr sz="900" b="0">
+                          <a:solidFill>
+                            <a:srgbClr val="1F2937"/>
+                          </a:solidFill>
+                          <a:latin typeface="Meiryo"/>
+                          <a:ea typeface="Meiryo"/>
+                        </a:rPr>
+                        <a:t>2011年</a:t>
+                      </a:r>
+                    </a:p>
+                  </a:txBody>
+                  <a:tcPr anchor="ctr">
+                    <a:solidFill>
+                      <a:srgbClr val="FFFFFF"/>
+                    </a:solidFill>
+                  </a:tcPr>
+                </a:tc>
+                <a:tc>
+                  <a:txBody>
+                    <a:bodyPr/>
+                    <a:lstStyle/>
+                    <a:p>
                       <a:pPr algn="l"/>
                       <a:r>
                         <a:rPr sz="900" b="0">
@@ -6182,103 +7211,7 @@
                           <a:latin typeface="Meiryo"/>
                           <a:ea typeface="Meiryo"/>
                         </a:rPr>
-                        <a:t>ビジネスホテル</a:t>
-                      </a:r>
-                    </a:p>
-                  </a:txBody>
-                  <a:tcPr anchor="ctr">
-                    <a:solidFill>
-                      <a:srgbClr val="FFFFFF"/>
-                    </a:solidFill>
-                  </a:tcPr>
-                </a:tc>
-                <a:tc>
-                  <a:txBody>
-                    <a:bodyPr/>
-                    <a:lstStyle/>
-                    <a:p>
-                      <a:pPr algn="ctr"/>
-                      <a:r>
-                        <a:rPr sz="900" b="0">
-                          <a:solidFill>
-                            <a:srgbClr val="1F2937"/>
-                          </a:solidFill>
-                          <a:latin typeface="Meiryo"/>
-                          <a:ea typeface="Meiryo"/>
-                        </a:rPr>
-                        <a:t>63</a:t>
-                      </a:r>
-                    </a:p>
-                  </a:txBody>
-                  <a:tcPr anchor="ctr">
-                    <a:solidFill>
-                      <a:srgbClr val="FFFFFF"/>
-                    </a:solidFill>
-                  </a:tcPr>
-                </a:tc>
-                <a:tc>
-                  <a:txBody>
-                    <a:bodyPr/>
-                    <a:lstStyle/>
-                    <a:p>
-                      <a:pPr algn="ctr"/>
-                      <a:r>
-                        <a:rPr sz="900" b="0">
-                          <a:solidFill>
-                            <a:srgbClr val="1F2937"/>
-                          </a:solidFill>
-                          <a:latin typeface="Meiryo"/>
-                          <a:ea typeface="Meiryo"/>
-                        </a:rPr>
-                        <a:t>1973年</a:t>
-                      </a:r>
-                    </a:p>
-                  </a:txBody>
-                  <a:tcPr anchor="ctr">
-                    <a:solidFill>
-                      <a:srgbClr val="FFFFFF"/>
-                    </a:solidFill>
-                  </a:tcPr>
-                </a:tc>
-                <a:tc>
-                  <a:txBody>
-                    <a:bodyPr/>
-                    <a:lstStyle/>
-                    <a:p>
-                      <a:pPr algn="l"/>
-                      <a:r>
-                        <a:rPr sz="900" b="0">
-                          <a:solidFill>
-                            <a:srgbClr val="1F2937"/>
-                          </a:solidFill>
-                          <a:latin typeface="Meiryo"/>
-                          <a:ea typeface="Meiryo"/>
-                        </a:rPr>
-                        <a:t>7,501 - 10,000</a:t>
-                      </a:r>
-                    </a:p>
-                  </a:txBody>
-                  <a:tcPr anchor="ctr">
-                    <a:solidFill>
-                      <a:srgbClr val="FFFFFF"/>
-                    </a:solidFill>
-                  </a:tcPr>
-                </a:tc>
-                <a:tc>
-                  <a:txBody>
-                    <a:bodyPr/>
-                    <a:lstStyle/>
-                    <a:p>
-                      <a:pPr algn="l"/>
-                      <a:r>
-                        <a:rPr sz="900" b="0">
-                          <a:solidFill>
-                            <a:srgbClr val="1F2937"/>
-                          </a:solidFill>
-                          <a:latin typeface="Meiryo"/>
-                          <a:ea typeface="Meiryo"/>
-                        </a:rPr>
-                        <a:t>〒900-0013 沖縄県那覇市牧志1丁目3-55</a:t>
+                        <a:t>〒812-0011 福岡県福岡市博多区博多駅前2丁目14-15</a:t>
                       </a:r>
                     </a:p>
                   </a:txBody>
@@ -6328,7 +7261,7 @@
                           <a:latin typeface="Meiryo"/>
                           <a:ea typeface="Meiryo"/>
                         </a:rPr>
-                        <a:t>ホテルリゾネックス那覇</a:t>
+                        <a:t>JR九州ホテル ブラッサム博多中央</a:t>
                       </a:r>
                     </a:p>
                   </a:txBody>
@@ -6343,6 +7276,78 @@
                     <a:bodyPr/>
                     <a:lstStyle/>
                     <a:p>
+                      <a:pPr algn="ctr"/>
+                      <a:r>
+                        <a:rPr sz="900" b="0">
+                          <a:solidFill>
+                            <a:srgbClr val="1F2937"/>
+                          </a:solidFill>
+                          <a:latin typeface="Meiryo"/>
+                          <a:ea typeface="Meiryo"/>
+                        </a:rPr>
+                        <a:t>ビジネスホテル</a:t>
+                      </a:r>
+                    </a:p>
+                  </a:txBody>
+                  <a:tcPr anchor="ctr">
+                    <a:solidFill>
+                      <a:srgbClr val="F3F4F6"/>
+                    </a:solidFill>
+                  </a:tcPr>
+                </a:tc>
+                <a:tc>
+                  <a:txBody>
+                    <a:bodyPr/>
+                    <a:lstStyle/>
+                    <a:p>
+                      <a:pPr algn="ctr"/>
+                      <a:r>
+                        <a:rPr sz="900" b="0">
+                          <a:solidFill>
+                            <a:srgbClr val="1F2937"/>
+                          </a:solidFill>
+                          <a:latin typeface="Meiryo"/>
+                          <a:ea typeface="Meiryo"/>
+                        </a:rPr>
+                        <a:t>247</a:t>
+                      </a:r>
+                    </a:p>
+                  </a:txBody>
+                  <a:tcPr anchor="ctr">
+                    <a:solidFill>
+                      <a:srgbClr val="F3F4F6"/>
+                    </a:solidFill>
+                  </a:tcPr>
+                </a:tc>
+                <a:tc>
+                  <a:txBody>
+                    <a:bodyPr/>
+                    <a:lstStyle/>
+                    <a:p>
+                      <a:pPr algn="ctr"/>
+                      <a:r>
+                        <a:rPr sz="900" b="0">
+                          <a:solidFill>
+                            <a:srgbClr val="1F2937"/>
+                          </a:solidFill>
+                          <a:latin typeface="Meiryo"/>
+                          <a:ea typeface="Meiryo"/>
+                        </a:rPr>
+                        <a:t>2013年</a:t>
+                      </a:r>
+                    </a:p>
+                  </a:txBody>
+                  <a:tcPr anchor="ctr">
+                    <a:solidFill>
+                      <a:srgbClr val="F3F4F6"/>
+                    </a:solidFill>
+                  </a:tcPr>
+                </a:tc>
+                <a:tc>
+                  <a:txBody>
+                    <a:bodyPr/>
+                    <a:lstStyle/>
+                    <a:p>
                       <a:pPr algn="l"/>
                       <a:r>
                         <a:rPr sz="900" b="0">
@@ -6352,103 +7357,7 @@
                           <a:latin typeface="Meiryo"/>
                           <a:ea typeface="Meiryo"/>
                         </a:rPr>
-                        <a:t>ビジネスホテル</a:t>
-                      </a:r>
-                    </a:p>
-                  </a:txBody>
-                  <a:tcPr anchor="ctr">
-                    <a:solidFill>
-                      <a:srgbClr val="F3F4F6"/>
-                    </a:solidFill>
-                  </a:tcPr>
-                </a:tc>
-                <a:tc>
-                  <a:txBody>
-                    <a:bodyPr/>
-                    <a:lstStyle/>
-                    <a:p>
-                      <a:pPr algn="ctr"/>
-                      <a:r>
-                        <a:rPr sz="900" b="0">
-                          <a:solidFill>
-                            <a:srgbClr val="1F2937"/>
-                          </a:solidFill>
-                          <a:latin typeface="Meiryo"/>
-                          <a:ea typeface="Meiryo"/>
-                        </a:rPr>
-                        <a:t>84</a:t>
-                      </a:r>
-                    </a:p>
-                  </a:txBody>
-                  <a:tcPr anchor="ctr">
-                    <a:solidFill>
-                      <a:srgbClr val="F3F4F6"/>
-                    </a:solidFill>
-                  </a:tcPr>
-                </a:tc>
-                <a:tc>
-                  <a:txBody>
-                    <a:bodyPr/>
-                    <a:lstStyle/>
-                    <a:p>
-                      <a:pPr algn="ctr"/>
-                      <a:r>
-                        <a:rPr sz="900" b="0">
-                          <a:solidFill>
-                            <a:srgbClr val="1F2937"/>
-                          </a:solidFill>
-                          <a:latin typeface="Meiryo"/>
-                          <a:ea typeface="Meiryo"/>
-                        </a:rPr>
-                        <a:t>2014年</a:t>
-                      </a:r>
-                    </a:p>
-                  </a:txBody>
-                  <a:tcPr anchor="ctr">
-                    <a:solidFill>
-                      <a:srgbClr val="F3F4F6"/>
-                    </a:solidFill>
-                  </a:tcPr>
-                </a:tc>
-                <a:tc>
-                  <a:txBody>
-                    <a:bodyPr/>
-                    <a:lstStyle/>
-                    <a:p>
-                      <a:pPr algn="l"/>
-                      <a:r>
-                        <a:rPr sz="900" b="0">
-                          <a:solidFill>
-                            <a:srgbClr val="1F2937"/>
-                          </a:solidFill>
-                          <a:latin typeface="Meiryo"/>
-                          <a:ea typeface="Meiryo"/>
-                        </a:rPr>
-                        <a:t>7,501 - 10,000</a:t>
-                      </a:r>
-                    </a:p>
-                  </a:txBody>
-                  <a:tcPr anchor="ctr">
-                    <a:solidFill>
-                      <a:srgbClr val="F3F4F6"/>
-                    </a:solidFill>
-                  </a:tcPr>
-                </a:tc>
-                <a:tc>
-                  <a:txBody>
-                    <a:bodyPr/>
-                    <a:lstStyle/>
-                    <a:p>
-                      <a:pPr algn="l"/>
-                      <a:r>
-                        <a:rPr sz="900" b="0">
-                          <a:solidFill>
-                            <a:srgbClr val="1F2937"/>
-                          </a:solidFill>
-                          <a:latin typeface="Meiryo"/>
-                          <a:ea typeface="Meiryo"/>
-                        </a:rPr>
-                        <a:t>〒900-0016 沖縄県那覇市前島3丁目11-1</a:t>
+                        <a:t>〒812-0011 福岡県福岡市博多区博多駅前2丁目2-11</a:t>
                       </a:r>
                     </a:p>
                   </a:txBody>
@@ -6498,7 +7407,7 @@
                           <a:latin typeface="Meiryo"/>
                           <a:ea typeface="Meiryo"/>
                         </a:rPr>
-                        <a:t>東横INN那覇国際通り美栄橋駅</a:t>
+                        <a:t>東急ステイ博多</a:t>
                       </a:r>
                     </a:p>
                   </a:txBody>
@@ -6513,6 +7422,78 @@
                     <a:bodyPr/>
                     <a:lstStyle/>
                     <a:p>
+                      <a:pPr algn="ctr"/>
+                      <a:r>
+                        <a:rPr sz="900" b="0">
+                          <a:solidFill>
+                            <a:srgbClr val="1F2937"/>
+                          </a:solidFill>
+                          <a:latin typeface="Meiryo"/>
+                          <a:ea typeface="Meiryo"/>
+                        </a:rPr>
+                        <a:t>ビジネスホテル</a:t>
+                      </a:r>
+                    </a:p>
+                  </a:txBody>
+                  <a:tcPr anchor="ctr">
+                    <a:solidFill>
+                      <a:srgbClr val="FFFFFF"/>
+                    </a:solidFill>
+                  </a:tcPr>
+                </a:tc>
+                <a:tc>
+                  <a:txBody>
+                    <a:bodyPr/>
+                    <a:lstStyle/>
+                    <a:p>
+                      <a:pPr algn="ctr"/>
+                      <a:r>
+                        <a:rPr sz="900" b="0">
+                          <a:solidFill>
+                            <a:srgbClr val="1F2937"/>
+                          </a:solidFill>
+                          <a:latin typeface="Meiryo"/>
+                          <a:ea typeface="Meiryo"/>
+                        </a:rPr>
+                        <a:t>216</a:t>
+                      </a:r>
+                    </a:p>
+                  </a:txBody>
+                  <a:tcPr anchor="ctr">
+                    <a:solidFill>
+                      <a:srgbClr val="FFFFFF"/>
+                    </a:solidFill>
+                  </a:tcPr>
+                </a:tc>
+                <a:tc>
+                  <a:txBody>
+                    <a:bodyPr/>
+                    <a:lstStyle/>
+                    <a:p>
+                      <a:pPr algn="ctr"/>
+                      <a:r>
+                        <a:rPr sz="900" b="0">
+                          <a:solidFill>
+                            <a:srgbClr val="1F2937"/>
+                          </a:solidFill>
+                          <a:latin typeface="Meiryo"/>
+                          <a:ea typeface="Meiryo"/>
+                        </a:rPr>
+                        <a:t>2018年</a:t>
+                      </a:r>
+                    </a:p>
+                  </a:txBody>
+                  <a:tcPr anchor="ctr">
+                    <a:solidFill>
+                      <a:srgbClr val="FFFFFF"/>
+                    </a:solidFill>
+                  </a:tcPr>
+                </a:tc>
+                <a:tc>
+                  <a:txBody>
+                    <a:bodyPr/>
+                    <a:lstStyle/>
+                    <a:p>
                       <a:pPr algn="l"/>
                       <a:r>
                         <a:rPr sz="900" b="0">
@@ -6522,103 +7503,7 @@
                           <a:latin typeface="Meiryo"/>
                           <a:ea typeface="Meiryo"/>
                         </a:rPr>
-                        <a:t>ビジネスホテル</a:t>
-                      </a:r>
-                    </a:p>
-                  </a:txBody>
-                  <a:tcPr anchor="ctr">
-                    <a:solidFill>
-                      <a:srgbClr val="FFFFFF"/>
-                    </a:solidFill>
-                  </a:tcPr>
-                </a:tc>
-                <a:tc>
-                  <a:txBody>
-                    <a:bodyPr/>
-                    <a:lstStyle/>
-                    <a:p>
-                      <a:pPr algn="ctr"/>
-                      <a:r>
-                        <a:rPr sz="900" b="0">
-                          <a:solidFill>
-                            <a:srgbClr val="1F2937"/>
-                          </a:solidFill>
-                          <a:latin typeface="Meiryo"/>
-                          <a:ea typeface="Meiryo"/>
-                        </a:rPr>
-                        <a:t>94</a:t>
-                      </a:r>
-                    </a:p>
-                  </a:txBody>
-                  <a:tcPr anchor="ctr">
-                    <a:solidFill>
-                      <a:srgbClr val="FFFFFF"/>
-                    </a:solidFill>
-                  </a:tcPr>
-                </a:tc>
-                <a:tc>
-                  <a:txBody>
-                    <a:bodyPr/>
-                    <a:lstStyle/>
-                    <a:p>
-                      <a:pPr algn="ctr"/>
-                      <a:r>
-                        <a:rPr sz="900" b="0">
-                          <a:solidFill>
-                            <a:srgbClr val="1F2937"/>
-                          </a:solidFill>
-                          <a:latin typeface="Meiryo"/>
-                          <a:ea typeface="Meiryo"/>
-                        </a:rPr>
-                        <a:t>2002年</a:t>
-                      </a:r>
-                    </a:p>
-                  </a:txBody>
-                  <a:tcPr anchor="ctr">
-                    <a:solidFill>
-                      <a:srgbClr val="FFFFFF"/>
-                    </a:solidFill>
-                  </a:tcPr>
-                </a:tc>
-                <a:tc>
-                  <a:txBody>
-                    <a:bodyPr/>
-                    <a:lstStyle/>
-                    <a:p>
-                      <a:pPr algn="l"/>
-                      <a:r>
-                        <a:rPr sz="900" b="0">
-                          <a:solidFill>
-                            <a:srgbClr val="1F2937"/>
-                          </a:solidFill>
-                          <a:latin typeface="Meiryo"/>
-                          <a:ea typeface="Meiryo"/>
-                        </a:rPr>
-                        <a:t>7,501 - 10,000</a:t>
-                      </a:r>
-                    </a:p>
-                  </a:txBody>
-                  <a:tcPr anchor="ctr">
-                    <a:solidFill>
-                      <a:srgbClr val="FFFFFF"/>
-                    </a:solidFill>
-                  </a:tcPr>
-                </a:tc>
-                <a:tc>
-                  <a:txBody>
-                    <a:bodyPr/>
-                    <a:lstStyle/>
-                    <a:p>
-                      <a:pPr algn="l"/>
-                      <a:r>
-                        <a:rPr sz="900" b="0">
-                          <a:solidFill>
-                            <a:srgbClr val="1F2937"/>
-                          </a:solidFill>
-                          <a:latin typeface="Meiryo"/>
-                          <a:ea typeface="Meiryo"/>
-                        </a:rPr>
-                        <a:t>〒900-0013 沖縄県那覇市牧志1丁目20-1</a:t>
+                        <a:t>福岡県福岡市博多区博多駅南一丁目１１番１１号</a:t>
                       </a:r>
                     </a:p>
                   </a:txBody>
@@ -6668,7 +7553,7 @@
                           <a:latin typeface="Meiryo"/>
                           <a:ea typeface="Meiryo"/>
                         </a:rPr>
-                        <a:t>ホテルルートイン那覇旭橋駅東</a:t>
+                        <a:t>東急ステイ福岡天神</a:t>
                       </a:r>
                     </a:p>
                   </a:txBody>
@@ -6683,6 +7568,78 @@
                     <a:bodyPr/>
                     <a:lstStyle/>
                     <a:p>
+                      <a:pPr algn="ctr"/>
+                      <a:r>
+                        <a:rPr sz="900" b="0">
+                          <a:solidFill>
+                            <a:srgbClr val="1F2937"/>
+                          </a:solidFill>
+                          <a:latin typeface="Meiryo"/>
+                          <a:ea typeface="Meiryo"/>
+                        </a:rPr>
+                        <a:t>ビジネスホテル</a:t>
+                      </a:r>
+                    </a:p>
+                  </a:txBody>
+                  <a:tcPr anchor="ctr">
+                    <a:solidFill>
+                      <a:srgbClr val="F3F4F6"/>
+                    </a:solidFill>
+                  </a:tcPr>
+                </a:tc>
+                <a:tc>
+                  <a:txBody>
+                    <a:bodyPr/>
+                    <a:lstStyle/>
+                    <a:p>
+                      <a:pPr algn="ctr"/>
+                      <a:r>
+                        <a:rPr sz="900" b="0">
+                          <a:solidFill>
+                            <a:srgbClr val="1F2937"/>
+                          </a:solidFill>
+                          <a:latin typeface="Meiryo"/>
+                          <a:ea typeface="Meiryo"/>
+                        </a:rPr>
+                        <a:t>252</a:t>
+                      </a:r>
+                    </a:p>
+                  </a:txBody>
+                  <a:tcPr anchor="ctr">
+                    <a:solidFill>
+                      <a:srgbClr val="F3F4F6"/>
+                    </a:solidFill>
+                  </a:tcPr>
+                </a:tc>
+                <a:tc>
+                  <a:txBody>
+                    <a:bodyPr/>
+                    <a:lstStyle/>
+                    <a:p>
+                      <a:pPr algn="ctr"/>
+                      <a:r>
+                        <a:rPr sz="900" b="0">
+                          <a:solidFill>
+                            <a:srgbClr val="1F2937"/>
+                          </a:solidFill>
+                          <a:latin typeface="Meiryo"/>
+                          <a:ea typeface="Meiryo"/>
+                        </a:rPr>
+                        <a:t>2019年</a:t>
+                      </a:r>
+                    </a:p>
+                  </a:txBody>
+                  <a:tcPr anchor="ctr">
+                    <a:solidFill>
+                      <a:srgbClr val="F3F4F6"/>
+                    </a:solidFill>
+                  </a:tcPr>
+                </a:tc>
+                <a:tc>
+                  <a:txBody>
+                    <a:bodyPr/>
+                    <a:lstStyle/>
+                    <a:p>
                       <a:pPr algn="l"/>
                       <a:r>
                         <a:rPr sz="900" b="0">
@@ -6692,103 +7649,7 @@
                           <a:latin typeface="Meiryo"/>
                           <a:ea typeface="Meiryo"/>
                         </a:rPr>
-                        <a:t>ビジネスホテル</a:t>
-                      </a:r>
-                    </a:p>
-                  </a:txBody>
-                  <a:tcPr anchor="ctr">
-                    <a:solidFill>
-                      <a:srgbClr val="F3F4F6"/>
-                    </a:solidFill>
-                  </a:tcPr>
-                </a:tc>
-                <a:tc>
-                  <a:txBody>
-                    <a:bodyPr/>
-                    <a:lstStyle/>
-                    <a:p>
-                      <a:pPr algn="ctr"/>
-                      <a:r>
-                        <a:rPr sz="900" b="0">
-                          <a:solidFill>
-                            <a:srgbClr val="1F2937"/>
-                          </a:solidFill>
-                          <a:latin typeface="Meiryo"/>
-                          <a:ea typeface="Meiryo"/>
-                        </a:rPr>
-                        <a:t>118</a:t>
-                      </a:r>
-                    </a:p>
-                  </a:txBody>
-                  <a:tcPr anchor="ctr">
-                    <a:solidFill>
-                      <a:srgbClr val="F3F4F6"/>
-                    </a:solidFill>
-                  </a:tcPr>
-                </a:tc>
-                <a:tc>
-                  <a:txBody>
-                    <a:bodyPr/>
-                    <a:lstStyle/>
-                    <a:p>
-                      <a:pPr algn="ctr"/>
-                      <a:r>
-                        <a:rPr sz="900" b="0">
-                          <a:solidFill>
-                            <a:srgbClr val="1F2937"/>
-                          </a:solidFill>
-                          <a:latin typeface="Meiryo"/>
-                          <a:ea typeface="Meiryo"/>
-                        </a:rPr>
-                        <a:t>2002年</a:t>
-                      </a:r>
-                    </a:p>
-                  </a:txBody>
-                  <a:tcPr anchor="ctr">
-                    <a:solidFill>
-                      <a:srgbClr val="F3F4F6"/>
-                    </a:solidFill>
-                  </a:tcPr>
-                </a:tc>
-                <a:tc>
-                  <a:txBody>
-                    <a:bodyPr/>
-                    <a:lstStyle/>
-                    <a:p>
-                      <a:pPr algn="l"/>
-                      <a:r>
-                        <a:rPr sz="900" b="0">
-                          <a:solidFill>
-                            <a:srgbClr val="1F2937"/>
-                          </a:solidFill>
-                          <a:latin typeface="Meiryo"/>
-                          <a:ea typeface="Meiryo"/>
-                        </a:rPr>
-                        <a:t>7,501 - 10,000</a:t>
-                      </a:r>
-                    </a:p>
-                  </a:txBody>
-                  <a:tcPr anchor="ctr">
-                    <a:solidFill>
-                      <a:srgbClr val="F3F4F6"/>
-                    </a:solidFill>
-                  </a:tcPr>
-                </a:tc>
-                <a:tc>
-                  <a:txBody>
-                    <a:bodyPr/>
-                    <a:lstStyle/>
-                    <a:p>
-                      <a:pPr algn="l"/>
-                      <a:r>
-                        <a:rPr sz="900" b="0">
-                          <a:solidFill>
-                            <a:srgbClr val="1F2937"/>
-                          </a:solidFill>
-                          <a:latin typeface="Meiryo"/>
-                          <a:ea typeface="Meiryo"/>
-                        </a:rPr>
-                        <a:t>〒900-0021 沖縄県那覇市泉崎1丁目19-12</a:t>
+                        <a:t>〒810-0003 福岡県福岡市中央区春吉3丁目21-24</a:t>
                       </a:r>
                     </a:p>
                   </a:txBody>
@@ -6838,7 +7699,7 @@
                           <a:latin typeface="Meiryo"/>
                           <a:ea typeface="Meiryo"/>
                         </a:rPr>
-                        <a:t>ルートイングランティア那覇</a:t>
+                        <a:t>ザ ブラッサム博多プレミア</a:t>
                       </a:r>
                     </a:p>
                   </a:txBody>
@@ -6853,6 +7714,78 @@
                     <a:bodyPr/>
                     <a:lstStyle/>
                     <a:p>
+                      <a:pPr algn="ctr"/>
+                      <a:r>
+                        <a:rPr sz="900" b="0">
+                          <a:solidFill>
+                            <a:srgbClr val="1F2937"/>
+                          </a:solidFill>
+                          <a:latin typeface="Meiryo"/>
+                          <a:ea typeface="Meiryo"/>
+                        </a:rPr>
+                        <a:t>ビジネスホテル</a:t>
+                      </a:r>
+                    </a:p>
+                  </a:txBody>
+                  <a:tcPr anchor="ctr">
+                    <a:solidFill>
+                      <a:srgbClr val="FFFFFF"/>
+                    </a:solidFill>
+                  </a:tcPr>
+                </a:tc>
+                <a:tc>
+                  <a:txBody>
+                    <a:bodyPr/>
+                    <a:lstStyle/>
+                    <a:p>
+                      <a:pPr algn="ctr"/>
+                      <a:r>
+                        <a:rPr sz="900" b="0">
+                          <a:solidFill>
+                            <a:srgbClr val="1F2937"/>
+                          </a:solidFill>
+                          <a:latin typeface="Meiryo"/>
+                          <a:ea typeface="Meiryo"/>
+                        </a:rPr>
+                        <a:t>238</a:t>
+                      </a:r>
+                    </a:p>
+                  </a:txBody>
+                  <a:tcPr anchor="ctr">
+                    <a:solidFill>
+                      <a:srgbClr val="FFFFFF"/>
+                    </a:solidFill>
+                  </a:tcPr>
+                </a:tc>
+                <a:tc>
+                  <a:txBody>
+                    <a:bodyPr/>
+                    <a:lstStyle/>
+                    <a:p>
+                      <a:pPr algn="ctr"/>
+                      <a:r>
+                        <a:rPr sz="900" b="0">
+                          <a:solidFill>
+                            <a:srgbClr val="1F2937"/>
+                          </a:solidFill>
+                          <a:latin typeface="Meiryo"/>
+                          <a:ea typeface="Meiryo"/>
+                        </a:rPr>
+                        <a:t>2019年</a:t>
+                      </a:r>
+                    </a:p>
+                  </a:txBody>
+                  <a:tcPr anchor="ctr">
+                    <a:solidFill>
+                      <a:srgbClr val="FFFFFF"/>
+                    </a:solidFill>
+                  </a:tcPr>
+                </a:tc>
+                <a:tc>
+                  <a:txBody>
+                    <a:bodyPr/>
+                    <a:lstStyle/>
+                    <a:p>
                       <a:pPr algn="l"/>
                       <a:r>
                         <a:rPr sz="900" b="0">
@@ -6862,103 +7795,7 @@
                           <a:latin typeface="Meiryo"/>
                           <a:ea typeface="Meiryo"/>
                         </a:rPr>
-                        <a:t>ビジネスホテル</a:t>
-                      </a:r>
-                    </a:p>
-                  </a:txBody>
-                  <a:tcPr anchor="ctr">
-                    <a:solidFill>
-                      <a:srgbClr val="FFFFFF"/>
-                    </a:solidFill>
-                  </a:tcPr>
-                </a:tc>
-                <a:tc>
-                  <a:txBody>
-                    <a:bodyPr/>
-                    <a:lstStyle/>
-                    <a:p>
-                      <a:pPr algn="ctr"/>
-                      <a:r>
-                        <a:rPr sz="900" b="0">
-                          <a:solidFill>
-                            <a:srgbClr val="1F2937"/>
-                          </a:solidFill>
-                          <a:latin typeface="Meiryo"/>
-                          <a:ea typeface="Meiryo"/>
-                        </a:rPr>
-                        <a:t>120</a:t>
-                      </a:r>
-                    </a:p>
-                  </a:txBody>
-                  <a:tcPr anchor="ctr">
-                    <a:solidFill>
-                      <a:srgbClr val="FFFFFF"/>
-                    </a:solidFill>
-                  </a:tcPr>
-                </a:tc>
-                <a:tc>
-                  <a:txBody>
-                    <a:bodyPr/>
-                    <a:lstStyle/>
-                    <a:p>
-                      <a:pPr algn="ctr"/>
-                      <a:r>
-                        <a:rPr sz="900" b="0">
-                          <a:solidFill>
-                            <a:srgbClr val="1F2937"/>
-                          </a:solidFill>
-                          <a:latin typeface="Meiryo"/>
-                          <a:ea typeface="Meiryo"/>
-                        </a:rPr>
-                        <a:t>2000年</a:t>
-                      </a:r>
-                    </a:p>
-                  </a:txBody>
-                  <a:tcPr anchor="ctr">
-                    <a:solidFill>
-                      <a:srgbClr val="FFFFFF"/>
-                    </a:solidFill>
-                  </a:tcPr>
-                </a:tc>
-                <a:tc>
-                  <a:txBody>
-                    <a:bodyPr/>
-                    <a:lstStyle/>
-                    <a:p>
-                      <a:pPr algn="l"/>
-                      <a:r>
-                        <a:rPr sz="900" b="0">
-                          <a:solidFill>
-                            <a:srgbClr val="1F2937"/>
-                          </a:solidFill>
-                          <a:latin typeface="Meiryo"/>
-                          <a:ea typeface="Meiryo"/>
-                        </a:rPr>
-                        <a:t>7,501 - 10,000</a:t>
-                      </a:r>
-                    </a:p>
-                  </a:txBody>
-                  <a:tcPr anchor="ctr">
-                    <a:solidFill>
-                      <a:srgbClr val="FFFFFF"/>
-                    </a:solidFill>
-                  </a:tcPr>
-                </a:tc>
-                <a:tc>
-                  <a:txBody>
-                    <a:bodyPr/>
-                    <a:lstStyle/>
-                    <a:p>
-                      <a:pPr algn="l"/>
-                      <a:r>
-                        <a:rPr sz="900" b="0">
-                          <a:solidFill>
-                            <a:srgbClr val="1F2937"/>
-                          </a:solidFill>
-                          <a:latin typeface="Meiryo"/>
-                          <a:ea typeface="Meiryo"/>
-                        </a:rPr>
-                        <a:t>〒900-0036 沖縄県那覇市西2丁目25-12</a:t>
+                        <a:t>〒812-0011 福岡県福岡市博多区博多駅前2丁目8-12</a:t>
                       </a:r>
                     </a:p>
                   </a:txBody>
@@ -7008,7 +7845,7 @@
                           <a:latin typeface="Meiryo"/>
                           <a:ea typeface="Meiryo"/>
                         </a:rPr>
-                        <a:t>ロコイン沖縄</a:t>
+                        <a:t>ホテルオリエンタルエクスプレス福岡中洲川端</a:t>
                       </a:r>
                     </a:p>
                   </a:txBody>
@@ -7023,6 +7860,78 @@
                     <a:bodyPr/>
                     <a:lstStyle/>
                     <a:p>
+                      <a:pPr algn="ctr"/>
+                      <a:r>
+                        <a:rPr sz="900" b="0">
+                          <a:solidFill>
+                            <a:srgbClr val="1F2937"/>
+                          </a:solidFill>
+                          <a:latin typeface="Meiryo"/>
+                          <a:ea typeface="Meiryo"/>
+                        </a:rPr>
+                        <a:t>ビジネスホテル</a:t>
+                      </a:r>
+                    </a:p>
+                  </a:txBody>
+                  <a:tcPr anchor="ctr">
+                    <a:solidFill>
+                      <a:srgbClr val="F3F4F6"/>
+                    </a:solidFill>
+                  </a:tcPr>
+                </a:tc>
+                <a:tc>
+                  <a:txBody>
+                    <a:bodyPr/>
+                    <a:lstStyle/>
+                    <a:p>
+                      <a:pPr algn="ctr"/>
+                      <a:r>
+                        <a:rPr sz="900" b="0">
+                          <a:solidFill>
+                            <a:srgbClr val="1F2937"/>
+                          </a:solidFill>
+                          <a:latin typeface="Meiryo"/>
+                          <a:ea typeface="Meiryo"/>
+                        </a:rPr>
+                        <a:t>183</a:t>
+                      </a:r>
+                    </a:p>
+                  </a:txBody>
+                  <a:tcPr anchor="ctr">
+                    <a:solidFill>
+                      <a:srgbClr val="F3F4F6"/>
+                    </a:solidFill>
+                  </a:tcPr>
+                </a:tc>
+                <a:tc>
+                  <a:txBody>
+                    <a:bodyPr/>
+                    <a:lstStyle/>
+                    <a:p>
+                      <a:pPr algn="ctr"/>
+                      <a:r>
+                        <a:rPr sz="900" b="0">
+                          <a:solidFill>
+                            <a:srgbClr val="1F2937"/>
+                          </a:solidFill>
+                          <a:latin typeface="Meiryo"/>
+                          <a:ea typeface="Meiryo"/>
+                        </a:rPr>
+                        <a:t>2021年</a:t>
+                      </a:r>
+                    </a:p>
+                  </a:txBody>
+                  <a:tcPr anchor="ctr">
+                    <a:solidFill>
+                      <a:srgbClr val="F3F4F6"/>
+                    </a:solidFill>
+                  </a:tcPr>
+                </a:tc>
+                <a:tc>
+                  <a:txBody>
+                    <a:bodyPr/>
+                    <a:lstStyle/>
+                    <a:p>
                       <a:pPr algn="l"/>
                       <a:r>
                         <a:rPr sz="900" b="0">
@@ -7032,103 +7941,7 @@
                           <a:latin typeface="Meiryo"/>
                           <a:ea typeface="Meiryo"/>
                         </a:rPr>
-                        <a:t>ビジネスホテル</a:t>
-                      </a:r>
-                    </a:p>
-                  </a:txBody>
-                  <a:tcPr anchor="ctr">
-                    <a:solidFill>
-                      <a:srgbClr val="F3F4F6"/>
-                    </a:solidFill>
-                  </a:tcPr>
-                </a:tc>
-                <a:tc>
-                  <a:txBody>
-                    <a:bodyPr/>
-                    <a:lstStyle/>
-                    <a:p>
-                      <a:pPr algn="ctr"/>
-                      <a:r>
-                        <a:rPr sz="900" b="0">
-                          <a:solidFill>
-                            <a:srgbClr val="1F2937"/>
-                          </a:solidFill>
-                          <a:latin typeface="Meiryo"/>
-                          <a:ea typeface="Meiryo"/>
-                        </a:rPr>
-                        <a:t>128</a:t>
-                      </a:r>
-                    </a:p>
-                  </a:txBody>
-                  <a:tcPr anchor="ctr">
-                    <a:solidFill>
-                      <a:srgbClr val="F3F4F6"/>
-                    </a:solidFill>
-                  </a:tcPr>
-                </a:tc>
-                <a:tc>
-                  <a:txBody>
-                    <a:bodyPr/>
-                    <a:lstStyle/>
-                    <a:p>
-                      <a:pPr algn="ctr"/>
-                      <a:r>
-                        <a:rPr sz="900" b="0">
-                          <a:solidFill>
-                            <a:srgbClr val="1F2937"/>
-                          </a:solidFill>
-                          <a:latin typeface="Meiryo"/>
-                          <a:ea typeface="Meiryo"/>
-                        </a:rPr>
-                        <a:t>2001年</a:t>
-                      </a:r>
-                    </a:p>
-                  </a:txBody>
-                  <a:tcPr anchor="ctr">
-                    <a:solidFill>
-                      <a:srgbClr val="F3F4F6"/>
-                    </a:solidFill>
-                  </a:tcPr>
-                </a:tc>
-                <a:tc>
-                  <a:txBody>
-                    <a:bodyPr/>
-                    <a:lstStyle/>
-                    <a:p>
-                      <a:pPr algn="l"/>
-                      <a:r>
-                        <a:rPr sz="900" b="0">
-                          <a:solidFill>
-                            <a:srgbClr val="1F2937"/>
-                          </a:solidFill>
-                          <a:latin typeface="Meiryo"/>
-                          <a:ea typeface="Meiryo"/>
-                        </a:rPr>
-                        <a:t>7,501 - 10,000</a:t>
-                      </a:r>
-                    </a:p>
-                  </a:txBody>
-                  <a:tcPr anchor="ctr">
-                    <a:solidFill>
-                      <a:srgbClr val="F3F4F6"/>
-                    </a:solidFill>
-                  </a:tcPr>
-                </a:tc>
-                <a:tc>
-                  <a:txBody>
-                    <a:bodyPr/>
-                    <a:lstStyle/>
-                    <a:p>
-                      <a:pPr algn="l"/>
-                      <a:r>
-                        <a:rPr sz="900" b="0">
-                          <a:solidFill>
-                            <a:srgbClr val="1F2937"/>
-                          </a:solidFill>
-                          <a:latin typeface="Meiryo"/>
-                          <a:ea typeface="Meiryo"/>
-                        </a:rPr>
-                        <a:t>〒900-0032 沖縄県那覇市松山1丁目27-11</a:t>
+                        <a:t>〒812-0025 福岡県福岡市博多区店屋町6-26</a:t>
                       </a:r>
                     </a:p>
                   </a:txBody>
@@ -7178,7 +7991,7 @@
                           <a:latin typeface="Meiryo"/>
                           <a:ea typeface="Meiryo"/>
                         </a:rPr>
-                        <a:t>スマイルホテル沖縄那覇</a:t>
+                        <a:t>ホテルオリエンタルエクスプレス福岡天神</a:t>
                       </a:r>
                     </a:p>
                   </a:txBody>
@@ -7193,6 +8006,78 @@
                     <a:bodyPr/>
                     <a:lstStyle/>
                     <a:p>
+                      <a:pPr algn="ctr"/>
+                      <a:r>
+                        <a:rPr sz="900" b="0">
+                          <a:solidFill>
+                            <a:srgbClr val="1F2937"/>
+                          </a:solidFill>
+                          <a:latin typeface="Meiryo"/>
+                          <a:ea typeface="Meiryo"/>
+                        </a:rPr>
+                        <a:t>ビジネスホテル</a:t>
+                      </a:r>
+                    </a:p>
+                  </a:txBody>
+                  <a:tcPr anchor="ctr">
+                    <a:solidFill>
+                      <a:srgbClr val="FFFFFF"/>
+                    </a:solidFill>
+                  </a:tcPr>
+                </a:tc>
+                <a:tc>
+                  <a:txBody>
+                    <a:bodyPr/>
+                    <a:lstStyle/>
+                    <a:p>
+                      <a:pPr algn="ctr"/>
+                      <a:r>
+                        <a:rPr sz="900" b="0">
+                          <a:solidFill>
+                            <a:srgbClr val="1F2937"/>
+                          </a:solidFill>
+                          <a:latin typeface="Meiryo"/>
+                          <a:ea typeface="Meiryo"/>
+                        </a:rPr>
+                        <a:t>263</a:t>
+                      </a:r>
+                    </a:p>
+                  </a:txBody>
+                  <a:tcPr anchor="ctr">
+                    <a:solidFill>
+                      <a:srgbClr val="FFFFFF"/>
+                    </a:solidFill>
+                  </a:tcPr>
+                </a:tc>
+                <a:tc>
+                  <a:txBody>
+                    <a:bodyPr/>
+                    <a:lstStyle/>
+                    <a:p>
+                      <a:pPr algn="ctr"/>
+                      <a:r>
+                        <a:rPr sz="900" b="0">
+                          <a:solidFill>
+                            <a:srgbClr val="1F2937"/>
+                          </a:solidFill>
+                          <a:latin typeface="Meiryo"/>
+                          <a:ea typeface="Meiryo"/>
+                        </a:rPr>
+                        <a:t>2021年</a:t>
+                      </a:r>
+                    </a:p>
+                  </a:txBody>
+                  <a:tcPr anchor="ctr">
+                    <a:solidFill>
+                      <a:srgbClr val="FFFFFF"/>
+                    </a:solidFill>
+                  </a:tcPr>
+                </a:tc>
+                <a:tc>
+                  <a:txBody>
+                    <a:bodyPr/>
+                    <a:lstStyle/>
+                    <a:p>
                       <a:pPr algn="l"/>
                       <a:r>
                         <a:rPr sz="900" b="0">
@@ -7202,6 +8087,226 @@
                           <a:latin typeface="Meiryo"/>
                           <a:ea typeface="Meiryo"/>
                         </a:rPr>
+                        <a:t>〒810-0001 福岡県福岡市中央区天神3丁目3-14</a:t>
+                      </a:r>
+                    </a:p>
+                  </a:txBody>
+                  <a:tcPr anchor="ctr">
+                    <a:solidFill>
+                      <a:srgbClr val="FFFFFF"/>
+                    </a:solidFill>
+                  </a:tcPr>
+                </a:tc>
+              </a:tr>
+              <a:tr h="292608">
+                <a:tc>
+                  <a:txBody>
+                    <a:bodyPr/>
+                    <a:lstStyle/>
+                    <a:p>
+                      <a:pPr algn="ctr"/>
+                      <a:r>
+                        <a:rPr sz="900" b="0">
+                          <a:solidFill>
+                            <a:srgbClr val="1F2937"/>
+                          </a:solidFill>
+                          <a:latin typeface="Meiryo"/>
+                          <a:ea typeface="Meiryo"/>
+                        </a:rPr>
+                        <a:t>12</a:t>
+                      </a:r>
+                    </a:p>
+                  </a:txBody>
+                  <a:tcPr anchor="ctr">
+                    <a:solidFill>
+                      <a:srgbClr val="F3F4F6"/>
+                    </a:solidFill>
+                  </a:tcPr>
+                </a:tc>
+                <a:tc>
+                  <a:txBody>
+                    <a:bodyPr/>
+                    <a:lstStyle/>
+                    <a:p>
+                      <a:pPr algn="l"/>
+                      <a:r>
+                        <a:rPr sz="900" b="0">
+                          <a:solidFill>
+                            <a:srgbClr val="1F2937"/>
+                          </a:solidFill>
+                          <a:latin typeface="Meiryo"/>
+                          <a:ea typeface="Meiryo"/>
+                        </a:rPr>
+                        <a:t>ザ・リッツ・カールトン福岡</a:t>
+                      </a:r>
+                    </a:p>
+                  </a:txBody>
+                  <a:tcPr anchor="ctr">
+                    <a:solidFill>
+                      <a:srgbClr val="F3F4F6"/>
+                    </a:solidFill>
+                  </a:tcPr>
+                </a:tc>
+                <a:tc>
+                  <a:txBody>
+                    <a:bodyPr/>
+                    <a:lstStyle/>
+                    <a:p>
+                      <a:pPr algn="ctr"/>
+                      <a:r>
+                        <a:rPr sz="900" b="0">
+                          <a:solidFill>
+                            <a:srgbClr val="1F2937"/>
+                          </a:solidFill>
+                          <a:latin typeface="Meiryo"/>
+                          <a:ea typeface="Meiryo"/>
+                        </a:rPr>
+                        <a:t>シティホテル</a:t>
+                      </a:r>
+                    </a:p>
+                  </a:txBody>
+                  <a:tcPr anchor="ctr">
+                    <a:solidFill>
+                      <a:srgbClr val="F3F4F6"/>
+                    </a:solidFill>
+                  </a:tcPr>
+                </a:tc>
+                <a:tc>
+                  <a:txBody>
+                    <a:bodyPr/>
+                    <a:lstStyle/>
+                    <a:p>
+                      <a:pPr algn="ctr"/>
+                      <a:r>
+                        <a:rPr sz="900" b="0">
+                          <a:solidFill>
+                            <a:srgbClr val="1F2937"/>
+                          </a:solidFill>
+                          <a:latin typeface="Meiryo"/>
+                          <a:ea typeface="Meiryo"/>
+                        </a:rPr>
+                        <a:t>167</a:t>
+                      </a:r>
+                    </a:p>
+                  </a:txBody>
+                  <a:tcPr anchor="ctr">
+                    <a:solidFill>
+                      <a:srgbClr val="F3F4F6"/>
+                    </a:solidFill>
+                  </a:tcPr>
+                </a:tc>
+                <a:tc>
+                  <a:txBody>
+                    <a:bodyPr/>
+                    <a:lstStyle/>
+                    <a:p>
+                      <a:pPr algn="ctr"/>
+                      <a:r>
+                        <a:rPr sz="900" b="0">
+                          <a:solidFill>
+                            <a:srgbClr val="1F2937"/>
+                          </a:solidFill>
+                          <a:latin typeface="Meiryo"/>
+                          <a:ea typeface="Meiryo"/>
+                        </a:rPr>
+                        <a:t>2023年</a:t>
+                      </a:r>
+                    </a:p>
+                  </a:txBody>
+                  <a:tcPr anchor="ctr">
+                    <a:solidFill>
+                      <a:srgbClr val="F3F4F6"/>
+                    </a:solidFill>
+                  </a:tcPr>
+                </a:tc>
+                <a:tc>
+                  <a:txBody>
+                    <a:bodyPr/>
+                    <a:lstStyle/>
+                    <a:p>
+                      <a:pPr algn="l"/>
+                      <a:r>
+                        <a:rPr sz="900" b="0">
+                          <a:solidFill>
+                            <a:srgbClr val="1F2937"/>
+                          </a:solidFill>
+                          <a:latin typeface="Meiryo"/>
+                          <a:ea typeface="Meiryo"/>
+                        </a:rPr>
+                        <a:t>〒810-0041 福岡県福岡市中央区大名2丁目6-50</a:t>
+                      </a:r>
+                    </a:p>
+                  </a:txBody>
+                  <a:tcPr anchor="ctr">
+                    <a:solidFill>
+                      <a:srgbClr val="F3F4F6"/>
+                    </a:solidFill>
+                  </a:tcPr>
+                </a:tc>
+              </a:tr>
+              <a:tr h="292608">
+                <a:tc>
+                  <a:txBody>
+                    <a:bodyPr/>
+                    <a:lstStyle/>
+                    <a:p>
+                      <a:pPr algn="ctr"/>
+                      <a:r>
+                        <a:rPr sz="900" b="0">
+                          <a:solidFill>
+                            <a:srgbClr val="1F2937"/>
+                          </a:solidFill>
+                          <a:latin typeface="Meiryo"/>
+                          <a:ea typeface="Meiryo"/>
+                        </a:rPr>
+                        <a:t>13</a:t>
+                      </a:r>
+                    </a:p>
+                  </a:txBody>
+                  <a:tcPr anchor="ctr">
+                    <a:solidFill>
+                      <a:srgbClr val="FFFFFF"/>
+                    </a:solidFill>
+                  </a:tcPr>
+                </a:tc>
+                <a:tc>
+                  <a:txBody>
+                    <a:bodyPr/>
+                    <a:lstStyle/>
+                    <a:p>
+                      <a:pPr algn="l"/>
+                      <a:r>
+                        <a:rPr sz="900" b="0">
+                          <a:solidFill>
+                            <a:srgbClr val="1F2937"/>
+                          </a:solidFill>
+                          <a:latin typeface="Meiryo"/>
+                          <a:ea typeface="Meiryo"/>
+                        </a:rPr>
+                        <a:t>ザ ロイヤルパーク キャンバス 福岡中洲</a:t>
+                      </a:r>
+                    </a:p>
+                  </a:txBody>
+                  <a:tcPr anchor="ctr">
+                    <a:solidFill>
+                      <a:srgbClr val="FFFFFF"/>
+                    </a:solidFill>
+                  </a:tcPr>
+                </a:tc>
+                <a:tc>
+                  <a:txBody>
+                    <a:bodyPr/>
+                    <a:lstStyle/>
+                    <a:p>
+                      <a:pPr algn="ctr"/>
+                      <a:r>
+                        <a:rPr sz="900" b="0">
+                          <a:solidFill>
+                            <a:srgbClr val="1F2937"/>
+                          </a:solidFill>
+                          <a:latin typeface="Meiryo"/>
+                          <a:ea typeface="Meiryo"/>
+                        </a:rPr>
                         <a:t>ビジネスホテル</a:t>
                       </a:r>
                     </a:p>
@@ -7226,7 +8331,7 @@
                           <a:latin typeface="Meiryo"/>
                           <a:ea typeface="Meiryo"/>
                         </a:rPr>
-                        <a:t>128</a:t>
+                        <a:t>255</a:t>
                       </a:r>
                     </a:p>
                   </a:txBody>
@@ -7250,7 +8355,7 @@
                           <a:latin typeface="Meiryo"/>
                           <a:ea typeface="Meiryo"/>
                         </a:rPr>
-                        <a:t>2007年</a:t>
+                        <a:t>2023年</a:t>
                       </a:r>
                     </a:p>
                   </a:txBody>
@@ -7274,7 +8379,7 @@
                           <a:latin typeface="Meiryo"/>
                           <a:ea typeface="Meiryo"/>
                         </a:rPr>
-                        <a:t>7,501 - 10,000</a:t>
+                        <a:t>〒810-0801 福岡県福岡市博多区中洲5丁目6</a:t>
                       </a:r>
                     </a:p>
                   </a:txBody>
@@ -7284,6 +8389,32 @@
                     </a:solidFill>
                   </a:tcPr>
                 </a:tc>
+              </a:tr>
+              <a:tr h="292608">
+                <a:tc>
+                  <a:txBody>
+                    <a:bodyPr/>
+                    <a:lstStyle/>
+                    <a:p>
+                      <a:pPr algn="ctr"/>
+                      <a:r>
+                        <a:rPr sz="900" b="0">
+                          <a:solidFill>
+                            <a:srgbClr val="1F2937"/>
+                          </a:solidFill>
+                          <a:latin typeface="Meiryo"/>
+                          <a:ea typeface="Meiryo"/>
+                        </a:rPr>
+                        <a:t>14</a:t>
+                      </a:r>
+                    </a:p>
+                  </a:txBody>
+                  <a:tcPr anchor="ctr">
+                    <a:solidFill>
+                      <a:srgbClr val="F3F4F6"/>
+                    </a:solidFill>
+                  </a:tcPr>
+                </a:tc>
                 <a:tc>
                   <a:txBody>
                     <a:bodyPr/>
@@ -7298,13 +8429,693 @@
                           <a:latin typeface="Meiryo"/>
                           <a:ea typeface="Meiryo"/>
                         </a:rPr>
-                        <a:t>〒900-0016 沖縄県那覇市前島3丁目24-1</a:t>
+                        <a:t>ONE FUKUOKA HOTEL</a:t>
+                      </a:r>
+                    </a:p>
+                  </a:txBody>
+                  <a:tcPr anchor="ctr">
+                    <a:solidFill>
+                      <a:srgbClr val="F3F4F6"/>
+                    </a:solidFill>
+                  </a:tcPr>
+                </a:tc>
+                <a:tc>
+                  <a:txBody>
+                    <a:bodyPr/>
+                    <a:lstStyle/>
+                    <a:p>
+                      <a:pPr algn="ctr"/>
+                      <a:r>
+                        <a:rPr sz="900" b="0">
+                          <a:solidFill>
+                            <a:srgbClr val="1F2937"/>
+                          </a:solidFill>
+                          <a:latin typeface="Meiryo"/>
+                          <a:ea typeface="Meiryo"/>
+                        </a:rPr>
+                        <a:t>シティホテル</a:t>
+                      </a:r>
+                    </a:p>
+                  </a:txBody>
+                  <a:tcPr anchor="ctr">
+                    <a:solidFill>
+                      <a:srgbClr val="F3F4F6"/>
+                    </a:solidFill>
+                  </a:tcPr>
+                </a:tc>
+                <a:tc>
+                  <a:txBody>
+                    <a:bodyPr/>
+                    <a:lstStyle/>
+                    <a:p>
+                      <a:pPr algn="ctr"/>
+                      <a:r>
+                        <a:rPr sz="900" b="0">
+                          <a:solidFill>
+                            <a:srgbClr val="1F2937"/>
+                          </a:solidFill>
+                          <a:latin typeface="Meiryo"/>
+                          <a:ea typeface="Meiryo"/>
+                        </a:rPr>
+                        <a:t>41</a:t>
+                      </a:r>
+                    </a:p>
+                  </a:txBody>
+                  <a:tcPr anchor="ctr">
+                    <a:solidFill>
+                      <a:srgbClr val="F3F4F6"/>
+                    </a:solidFill>
+                  </a:tcPr>
+                </a:tc>
+                <a:tc>
+                  <a:txBody>
+                    <a:bodyPr/>
+                    <a:lstStyle/>
+                    <a:p>
+                      <a:pPr algn="ctr"/>
+                      <a:r>
+                        <a:rPr sz="900" b="0">
+                          <a:solidFill>
+                            <a:srgbClr val="1F2937"/>
+                          </a:solidFill>
+                          <a:latin typeface="Meiryo"/>
+                          <a:ea typeface="Meiryo"/>
+                        </a:rPr>
+                        <a:t>2025年</a:t>
+                      </a:r>
+                    </a:p>
+                  </a:txBody>
+                  <a:tcPr anchor="ctr">
+                    <a:solidFill>
+                      <a:srgbClr val="F3F4F6"/>
+                    </a:solidFill>
+                  </a:tcPr>
+                </a:tc>
+                <a:tc>
+                  <a:txBody>
+                    <a:bodyPr/>
+                    <a:lstStyle/>
+                    <a:p>
+                      <a:pPr algn="l"/>
+                      <a:r>
+                        <a:rPr sz="900" b="0">
+                          <a:solidFill>
+                            <a:srgbClr val="1F2937"/>
+                          </a:solidFill>
+                          <a:latin typeface="Meiryo"/>
+                          <a:ea typeface="Meiryo"/>
+                        </a:rPr>
+                        <a:t>〒810-0001 福岡県福岡市中央区天神1丁目11-1</a:t>
+                      </a:r>
+                    </a:p>
+                  </a:txBody>
+                  <a:tcPr anchor="ctr">
+                    <a:solidFill>
+                      <a:srgbClr val="F3F4F6"/>
+                    </a:solidFill>
+                  </a:tcPr>
+                </a:tc>
+              </a:tr>
+              <a:tr h="292608">
+                <a:tc>
+                  <a:txBody>
+                    <a:bodyPr/>
+                    <a:lstStyle/>
+                    <a:p>
+                      <a:pPr algn="ctr"/>
+                      <a:r>
+                        <a:rPr sz="900" b="0">
+                          <a:solidFill>
+                            <a:srgbClr val="1F2937"/>
+                          </a:solidFill>
+                          <a:latin typeface="Meiryo"/>
+                          <a:ea typeface="Meiryo"/>
+                        </a:rPr>
+                        <a:t>15</a:t>
                       </a:r>
                     </a:p>
                   </a:txBody>
                   <a:tcPr anchor="ctr">
                     <a:solidFill>
                       <a:srgbClr val="FFFFFF"/>
+                    </a:solidFill>
+                  </a:tcPr>
+                </a:tc>
+                <a:tc>
+                  <a:txBody>
+                    <a:bodyPr/>
+                    <a:lstStyle/>
+                    <a:p>
+                      <a:pPr algn="l"/>
+                      <a:r>
+                        <a:rPr sz="900" b="0">
+                          <a:solidFill>
+                            <a:srgbClr val="1F2937"/>
+                          </a:solidFill>
+                          <a:latin typeface="Meiryo"/>
+                          <a:ea typeface="Meiryo"/>
+                        </a:rPr>
+                        <a:t>ザ・ゲートホテル福岡 by HULIC</a:t>
+                      </a:r>
+                    </a:p>
+                  </a:txBody>
+                  <a:tcPr anchor="ctr">
+                    <a:solidFill>
+                      <a:srgbClr val="FFFFFF"/>
+                    </a:solidFill>
+                  </a:tcPr>
+                </a:tc>
+                <a:tc>
+                  <a:txBody>
+                    <a:bodyPr/>
+                    <a:lstStyle/>
+                    <a:p>
+                      <a:pPr algn="ctr"/>
+                      <a:r>
+                        <a:rPr sz="900" b="0">
+                          <a:solidFill>
+                            <a:srgbClr val="1F2937"/>
+                          </a:solidFill>
+                          <a:latin typeface="Meiryo"/>
+                          <a:ea typeface="Meiryo"/>
+                        </a:rPr>
+                        <a:t>シティホテル</a:t>
+                      </a:r>
+                    </a:p>
+                  </a:txBody>
+                  <a:tcPr anchor="ctr">
+                    <a:solidFill>
+                      <a:srgbClr val="FFFFFF"/>
+                    </a:solidFill>
+                  </a:tcPr>
+                </a:tc>
+                <a:tc>
+                  <a:txBody>
+                    <a:bodyPr/>
+                    <a:lstStyle/>
+                    <a:p>
+                      <a:pPr algn="ctr"/>
+                      <a:r>
+                        <a:rPr sz="900" b="0">
+                          <a:solidFill>
+                            <a:srgbClr val="1F2937"/>
+                          </a:solidFill>
+                          <a:latin typeface="Meiryo"/>
+                          <a:ea typeface="Meiryo"/>
+                        </a:rPr>
+                        <a:t>171</a:t>
+                      </a:r>
+                    </a:p>
+                  </a:txBody>
+                  <a:tcPr anchor="ctr">
+                    <a:solidFill>
+                      <a:srgbClr val="FFFFFF"/>
+                    </a:solidFill>
+                  </a:tcPr>
+                </a:tc>
+                <a:tc>
+                  <a:txBody>
+                    <a:bodyPr/>
+                    <a:lstStyle/>
+                    <a:p>
+                      <a:pPr algn="ctr"/>
+                      <a:r>
+                        <a:rPr sz="900" b="0">
+                          <a:solidFill>
+                            <a:srgbClr val="1F2937"/>
+                          </a:solidFill>
+                          <a:latin typeface="Meiryo"/>
+                          <a:ea typeface="Meiryo"/>
+                        </a:rPr>
+                        <a:t>2025年</a:t>
+                      </a:r>
+                    </a:p>
+                  </a:txBody>
+                  <a:tcPr anchor="ctr">
+                    <a:solidFill>
+                      <a:srgbClr val="FFFFFF"/>
+                    </a:solidFill>
+                  </a:tcPr>
+                </a:tc>
+                <a:tc>
+                  <a:txBody>
+                    <a:bodyPr/>
+                    <a:lstStyle/>
+                    <a:p>
+                      <a:pPr algn="l"/>
+                      <a:r>
+                        <a:rPr sz="900" b="0">
+                          <a:solidFill>
+                            <a:srgbClr val="1F2937"/>
+                          </a:solidFill>
+                          <a:latin typeface="Meiryo"/>
+                          <a:ea typeface="Meiryo"/>
+                        </a:rPr>
+                        <a:t>〒810-0001 福岡県福岡市中央区天神2丁目8-49</a:t>
+                      </a:r>
+                    </a:p>
+                  </a:txBody>
+                  <a:tcPr anchor="ctr">
+                    <a:solidFill>
+                      <a:srgbClr val="FFFFFF"/>
+                    </a:solidFill>
+                  </a:tcPr>
+                </a:tc>
+              </a:tr>
+              <a:tr h="292608">
+                <a:tc>
+                  <a:txBody>
+                    <a:bodyPr/>
+                    <a:lstStyle/>
+                    <a:p>
+                      <a:pPr algn="ctr"/>
+                      <a:r>
+                        <a:rPr sz="900" b="0">
+                          <a:solidFill>
+                            <a:srgbClr val="1F2937"/>
+                          </a:solidFill>
+                          <a:latin typeface="Meiryo"/>
+                          <a:ea typeface="Meiryo"/>
+                        </a:rPr>
+                        <a:t>16</a:t>
+                      </a:r>
+                    </a:p>
+                  </a:txBody>
+                  <a:tcPr anchor="ctr">
+                    <a:solidFill>
+                      <a:srgbClr val="F3F4F6"/>
+                    </a:solidFill>
+                  </a:tcPr>
+                </a:tc>
+                <a:tc>
+                  <a:txBody>
+                    <a:bodyPr/>
+                    <a:lstStyle/>
+                    <a:p>
+                      <a:pPr algn="l"/>
+                      <a:r>
+                        <a:rPr sz="900" b="0">
+                          <a:solidFill>
+                            <a:srgbClr val="1F2937"/>
+                          </a:solidFill>
+                          <a:latin typeface="Meiryo"/>
+                          <a:ea typeface="Meiryo"/>
+                        </a:rPr>
+                        <a:t>バウンシー・バイ・リーガ　福岡博多</a:t>
+                      </a:r>
+                    </a:p>
+                  </a:txBody>
+                  <a:tcPr anchor="ctr">
+                    <a:solidFill>
+                      <a:srgbClr val="F3F4F6"/>
+                    </a:solidFill>
+                  </a:tcPr>
+                </a:tc>
+                <a:tc>
+                  <a:txBody>
+                    <a:bodyPr/>
+                    <a:lstStyle/>
+                    <a:p>
+                      <a:pPr algn="ctr"/>
+                      <a:r>
+                        <a:rPr sz="900" b="0">
+                          <a:solidFill>
+                            <a:srgbClr val="1F2937"/>
+                          </a:solidFill>
+                          <a:latin typeface="Meiryo"/>
+                          <a:ea typeface="Meiryo"/>
+                        </a:rPr>
+                        <a:t>シティホテル</a:t>
+                      </a:r>
+                    </a:p>
+                  </a:txBody>
+                  <a:tcPr anchor="ctr">
+                    <a:solidFill>
+                      <a:srgbClr val="F3F4F6"/>
+                    </a:solidFill>
+                  </a:tcPr>
+                </a:tc>
+                <a:tc>
+                  <a:txBody>
+                    <a:bodyPr/>
+                    <a:lstStyle/>
+                    <a:p>
+                      <a:pPr algn="ctr"/>
+                      <a:r>
+                        <a:rPr sz="900" b="0">
+                          <a:solidFill>
+                            <a:srgbClr val="1F2937"/>
+                          </a:solidFill>
+                          <a:latin typeface="Meiryo"/>
+                          <a:ea typeface="Meiryo"/>
+                        </a:rPr>
+                        <a:t>117</a:t>
+                      </a:r>
+                    </a:p>
+                  </a:txBody>
+                  <a:tcPr anchor="ctr">
+                    <a:solidFill>
+                      <a:srgbClr val="F3F4F6"/>
+                    </a:solidFill>
+                  </a:tcPr>
+                </a:tc>
+                <a:tc>
+                  <a:txBody>
+                    <a:bodyPr/>
+                    <a:lstStyle/>
+                    <a:p>
+                      <a:pPr algn="ctr"/>
+                      <a:r>
+                        <a:rPr sz="900" b="0">
+                          <a:solidFill>
+                            <a:srgbClr val="1F2937"/>
+                          </a:solidFill>
+                          <a:latin typeface="Meiryo"/>
+                          <a:ea typeface="Meiryo"/>
+                        </a:rPr>
+                        <a:t>2026年</a:t>
+                      </a:r>
+                    </a:p>
+                  </a:txBody>
+                  <a:tcPr anchor="ctr">
+                    <a:solidFill>
+                      <a:srgbClr val="F3F4F6"/>
+                    </a:solidFill>
+                  </a:tcPr>
+                </a:tc>
+                <a:tc>
+                  <a:txBody>
+                    <a:bodyPr/>
+                    <a:lstStyle/>
+                    <a:p>
+                      <a:pPr algn="l"/>
+                      <a:r>
+                        <a:rPr sz="900" b="0">
+                          <a:solidFill>
+                            <a:srgbClr val="1F2937"/>
+                          </a:solidFill>
+                          <a:latin typeface="Meiryo"/>
+                          <a:ea typeface="Meiryo"/>
+                        </a:rPr>
+                        <a:t>福岡県福岡市博多区祇園町5-1</a:t>
+                      </a:r>
+                    </a:p>
+                  </a:txBody>
+                  <a:tcPr anchor="ctr">
+                    <a:solidFill>
+                      <a:srgbClr val="F3F4F6"/>
+                    </a:solidFill>
+                  </a:tcPr>
+                </a:tc>
+              </a:tr>
+              <a:tr h="292608">
+                <a:tc>
+                  <a:txBody>
+                    <a:bodyPr/>
+                    <a:lstStyle/>
+                    <a:p>
+                      <a:pPr algn="ctr"/>
+                      <a:r>
+                        <a:rPr sz="900" b="0">
+                          <a:solidFill>
+                            <a:srgbClr val="1F2937"/>
+                          </a:solidFill>
+                          <a:latin typeface="Meiryo"/>
+                          <a:ea typeface="Meiryo"/>
+                        </a:rPr>
+                        <a:t>17</a:t>
+                      </a:r>
+                    </a:p>
+                  </a:txBody>
+                  <a:tcPr anchor="ctr">
+                    <a:solidFill>
+                      <a:srgbClr val="FFFFFF"/>
+                    </a:solidFill>
+                  </a:tcPr>
+                </a:tc>
+                <a:tc>
+                  <a:txBody>
+                    <a:bodyPr/>
+                    <a:lstStyle/>
+                    <a:p>
+                      <a:pPr algn="l"/>
+                      <a:r>
+                        <a:rPr sz="900" b="0">
+                          <a:solidFill>
+                            <a:srgbClr val="1F2937"/>
+                          </a:solidFill>
+                          <a:latin typeface="Meiryo"/>
+                          <a:ea typeface="Meiryo"/>
+                        </a:rPr>
+                        <a:t>エースホテル福岡</a:t>
+                      </a:r>
+                    </a:p>
+                  </a:txBody>
+                  <a:tcPr anchor="ctr">
+                    <a:solidFill>
+                      <a:srgbClr val="FFFFFF"/>
+                    </a:solidFill>
+                  </a:tcPr>
+                </a:tc>
+                <a:tc>
+                  <a:txBody>
+                    <a:bodyPr/>
+                    <a:lstStyle/>
+                    <a:p>
+                      <a:pPr algn="ctr"/>
+                      <a:r>
+                        <a:rPr sz="900" b="0">
+                          <a:solidFill>
+                            <a:srgbClr val="1F2937"/>
+                          </a:solidFill>
+                          <a:latin typeface="Meiryo"/>
+                          <a:ea typeface="Meiryo"/>
+                        </a:rPr>
+                        <a:t>シティホテル</a:t>
+                      </a:r>
+                    </a:p>
+                  </a:txBody>
+                  <a:tcPr anchor="ctr">
+                    <a:solidFill>
+                      <a:srgbClr val="FFFFFF"/>
+                    </a:solidFill>
+                  </a:tcPr>
+                </a:tc>
+                <a:tc>
+                  <a:txBody>
+                    <a:bodyPr/>
+                    <a:lstStyle/>
+                    <a:p>
+                      <a:pPr algn="ctr"/>
+                      <a:r>
+                        <a:rPr sz="900" b="0">
+                          <a:solidFill>
+                            <a:srgbClr val="1F2937"/>
+                          </a:solidFill>
+                          <a:latin typeface="Meiryo"/>
+                          <a:ea typeface="Meiryo"/>
+                        </a:rPr>
+                        <a:t>192</a:t>
+                      </a:r>
+                    </a:p>
+                  </a:txBody>
+                  <a:tcPr anchor="ctr">
+                    <a:solidFill>
+                      <a:srgbClr val="FFFFFF"/>
+                    </a:solidFill>
+                  </a:tcPr>
+                </a:tc>
+                <a:tc>
+                  <a:txBody>
+                    <a:bodyPr/>
+                    <a:lstStyle/>
+                    <a:p>
+                      <a:pPr algn="ctr"/>
+                      <a:r>
+                        <a:rPr sz="900" b="0">
+                          <a:solidFill>
+                            <a:srgbClr val="1F2937"/>
+                          </a:solidFill>
+                          <a:latin typeface="Meiryo"/>
+                          <a:ea typeface="Meiryo"/>
+                        </a:rPr>
+                        <a:t>2027年</a:t>
+                      </a:r>
+                    </a:p>
+                  </a:txBody>
+                  <a:tcPr anchor="ctr">
+                    <a:solidFill>
+                      <a:srgbClr val="FFFFFF"/>
+                    </a:solidFill>
+                  </a:tcPr>
+                </a:tc>
+                <a:tc>
+                  <a:txBody>
+                    <a:bodyPr/>
+                    <a:lstStyle/>
+                    <a:p>
+                      <a:pPr algn="l"/>
+                      <a:r>
+                        <a:rPr sz="900" b="0">
+                          <a:solidFill>
+                            <a:srgbClr val="1F2937"/>
+                          </a:solidFill>
+                          <a:latin typeface="Meiryo"/>
+                          <a:ea typeface="Meiryo"/>
+                        </a:rPr>
+                        <a:t>福岡県福岡市中央区天神1丁目326番1他</a:t>
+                      </a:r>
+                    </a:p>
+                  </a:txBody>
+                  <a:tcPr anchor="ctr">
+                    <a:solidFill>
+                      <a:srgbClr val="FFFFFF"/>
+                    </a:solidFill>
+                  </a:tcPr>
+                </a:tc>
+              </a:tr>
+              <a:tr h="292608">
+                <a:tc>
+                  <a:txBody>
+                    <a:bodyPr/>
+                    <a:lstStyle/>
+                    <a:p>
+                      <a:pPr algn="ctr"/>
+                      <a:r>
+                        <a:rPr sz="900" b="0">
+                          <a:solidFill>
+                            <a:srgbClr val="1F2937"/>
+                          </a:solidFill>
+                          <a:latin typeface="Meiryo"/>
+                          <a:ea typeface="Meiryo"/>
+                        </a:rPr>
+                        <a:t>18</a:t>
+                      </a:r>
+                    </a:p>
+                  </a:txBody>
+                  <a:tcPr anchor="ctr">
+                    <a:solidFill>
+                      <a:srgbClr val="F3F4F6"/>
+                    </a:solidFill>
+                  </a:tcPr>
+                </a:tc>
+                <a:tc>
+                  <a:txBody>
+                    <a:bodyPr/>
+                    <a:lstStyle/>
+                    <a:p>
+                      <a:pPr algn="l"/>
+                      <a:r>
+                        <a:rPr sz="900" b="0">
+                          <a:solidFill>
+                            <a:srgbClr val="1F2937"/>
+                          </a:solidFill>
+                          <a:latin typeface="Meiryo"/>
+                          <a:ea typeface="Meiryo"/>
+                        </a:rPr>
+                        <a:t>(仮称) 福岡家裁跡インターコンチネンタルホテルズ＆リゾーツ</a:t>
+                      </a:r>
+                    </a:p>
+                  </a:txBody>
+                  <a:tcPr anchor="ctr">
+                    <a:solidFill>
+                      <a:srgbClr val="F3F4F6"/>
+                    </a:solidFill>
+                  </a:tcPr>
+                </a:tc>
+                <a:tc>
+                  <a:txBody>
+                    <a:bodyPr/>
+                    <a:lstStyle/>
+                    <a:p>
+                      <a:pPr algn="ctr"/>
+                      <a:r>
+                        <a:rPr sz="900" b="0">
+                          <a:solidFill>
+                            <a:srgbClr val="1F2937"/>
+                          </a:solidFill>
+                          <a:latin typeface="Meiryo"/>
+                          <a:ea typeface="Meiryo"/>
+                        </a:rPr>
+                        <a:t>シティホテル</a:t>
+                      </a:r>
+                    </a:p>
+                  </a:txBody>
+                  <a:tcPr anchor="ctr">
+                    <a:solidFill>
+                      <a:srgbClr val="F3F4F6"/>
+                    </a:solidFill>
+                  </a:tcPr>
+                </a:tc>
+                <a:tc>
+                  <a:txBody>
+                    <a:bodyPr/>
+                    <a:lstStyle/>
+                    <a:p>
+                      <a:pPr algn="ctr"/>
+                      <a:r>
+                        <a:rPr sz="900" b="0">
+                          <a:solidFill>
+                            <a:srgbClr val="1F2937"/>
+                          </a:solidFill>
+                          <a:latin typeface="Meiryo"/>
+                          <a:ea typeface="Meiryo"/>
+                        </a:rPr>
+                        <a:t>117</a:t>
+                      </a:r>
+                    </a:p>
+                  </a:txBody>
+                  <a:tcPr anchor="ctr">
+                    <a:solidFill>
+                      <a:srgbClr val="F3F4F6"/>
+                    </a:solidFill>
+                  </a:tcPr>
+                </a:tc>
+                <a:tc>
+                  <a:txBody>
+                    <a:bodyPr/>
+                    <a:lstStyle/>
+                    <a:p>
+                      <a:pPr algn="ctr"/>
+                      <a:r>
+                        <a:rPr sz="900" b="0">
+                          <a:solidFill>
+                            <a:srgbClr val="1F2937"/>
+                          </a:solidFill>
+                          <a:latin typeface="Meiryo"/>
+                          <a:ea typeface="Meiryo"/>
+                        </a:rPr>
+                        <a:t>2030年</a:t>
+                      </a:r>
+                    </a:p>
+                  </a:txBody>
+                  <a:tcPr anchor="ctr">
+                    <a:solidFill>
+                      <a:srgbClr val="F3F4F6"/>
+                    </a:solidFill>
+                  </a:tcPr>
+                </a:tc>
+                <a:tc>
+                  <a:txBody>
+                    <a:bodyPr/>
+                    <a:lstStyle/>
+                    <a:p>
+                      <a:pPr algn="l"/>
+                      <a:r>
+                        <a:rPr sz="900" b="0">
+                          <a:solidFill>
+                            <a:srgbClr val="1F2937"/>
+                          </a:solidFill>
+                          <a:latin typeface="Meiryo"/>
+                          <a:ea typeface="Meiryo"/>
+                        </a:rPr>
+                        <a:t>福岡県福岡市中央区大手門1丁目7-1</a:t>
+                      </a:r>
+                    </a:p>
+                  </a:txBody>
+                  <a:tcPr anchor="ctr">
+                    <a:solidFill>
+                      <a:srgbClr val="F3F4F6"/>
                     </a:solidFill>
                   </a:tcPr>
                 </a:tc>
@@ -7344,7 +9155,7 @@
                 <a:latin typeface="Meiryo"/>
                 <a:ea typeface="Meiryo"/>
               </a:rPr>
-              <a:t>出典: 各施設公表情報等 ／ プライス・インデックスは調査時点の参考価格帯</a:t>
+              <a:t>出典: 各施設公表情報等</a:t>
             </a:r>
           </a:p>
         </p:txBody>

--- a/output/benchmark_hotels.pptx
+++ b/output/benchmark_hotels.pptx
@@ -3164,7 +3164,7 @@
                 <a:latin typeface="Meiryo"/>
                 <a:ea typeface="Meiryo"/>
               </a:rPr>
-              <a:t>那覇市　ベンチマークホテル マップ</a:t>
+              <a:t>軽井沢町　ベンチマークホテル マップ</a:t>
             </a:r>
           </a:p>
         </p:txBody>
@@ -3200,7 +3200,7 @@
                 <a:latin typeface="Meiryo"/>
                 <a:ea typeface="Meiryo"/>
               </a:rPr>
-              <a:t>対象マーケットにおけるベンチマークホテルの分布と概要（18施設）</a:t>
+              <a:t>対象マーケットにおけるベンチマークホテルの分布と概要（12施設）</a:t>
             </a:r>
           </a:p>
         </p:txBody>
@@ -3236,7 +3236,7 @@
                 <a:latin typeface="Meiryo"/>
                 <a:ea typeface="Meiryo"/>
               </a:rPr>
-              <a:t>作成日: 2026-07-06</a:t>
+              <a:t>作成日: 2026-07-07</a:t>
             </a:r>
           </a:p>
           <a:p>
@@ -3303,7 +3303,7 @@
                 <a:latin typeface="Meiryo"/>
                 <a:ea typeface="Meiryo"/>
               </a:rPr>
-              <a:t>那覇市｜ベンチマークホテル分布マップ</a:t>
+              <a:t>軽井沢町｜ベンチマークホテル分布マップ</a:t>
             </a:r>
           </a:p>
         </p:txBody>
@@ -3361,7 +3361,7 @@
         <p:spPr>
           <a:xfrm>
             <a:off x="228600" y="914400"/>
-            <a:ext cx="7314033" cy="5669280"/>
+            <a:ext cx="7314803" cy="5669280"/>
           </a:xfrm>
           <a:prstGeom prst="rect">
             <a:avLst/>
@@ -3376,7 +3376,7 @@
         </p:nvSpPr>
         <p:spPr>
           <a:xfrm>
-            <a:off x="6331851" y="3655307"/>
+            <a:off x="6562509" y="2019163"/>
             <a:ext cx="274320" cy="274320"/>
           </a:xfrm>
           <a:prstGeom prst="ellipse">
@@ -3432,7 +3432,7 @@
         </p:nvSpPr>
         <p:spPr>
           <a:xfrm>
-            <a:off x="3816965" y="3592277"/>
+            <a:off x="5820248" y="2371320"/>
             <a:ext cx="274320" cy="274320"/>
           </a:xfrm>
           <a:prstGeom prst="ellipse">
@@ -3488,7 +3488,7 @@
         </p:nvSpPr>
         <p:spPr>
           <a:xfrm>
-            <a:off x="6561102" y="3773614"/>
+            <a:off x="6272882" y="3962651"/>
             <a:ext cx="274320" cy="274320"/>
           </a:xfrm>
           <a:prstGeom prst="ellipse">
@@ -3544,7 +3544,7 @@
         </p:nvSpPr>
         <p:spPr>
           <a:xfrm>
-            <a:off x="4682449" y="3785916"/>
+            <a:off x="4236767" y="2518642"/>
             <a:ext cx="274320" cy="274320"/>
           </a:xfrm>
           <a:prstGeom prst="ellipse">
@@ -3600,7 +3600,7 @@
         </p:nvSpPr>
         <p:spPr>
           <a:xfrm>
-            <a:off x="5442923" y="3636095"/>
+            <a:off x="3230346" y="2916824"/>
             <a:ext cx="274320" cy="274320"/>
           </a:xfrm>
           <a:prstGeom prst="ellipse">
@@ -3656,7 +3656,7 @@
         </p:nvSpPr>
         <p:spPr>
           <a:xfrm>
-            <a:off x="5774937" y="3782040"/>
+            <a:off x="935174" y="3619199"/>
             <a:ext cx="274320" cy="274320"/>
           </a:xfrm>
           <a:prstGeom prst="ellipse">
@@ -3712,7 +3712,7 @@
         </p:nvSpPr>
         <p:spPr>
           <a:xfrm>
-            <a:off x="6254779" y="4563649"/>
+            <a:off x="5932322" y="2270360"/>
             <a:ext cx="274320" cy="274320"/>
           </a:xfrm>
           <a:prstGeom prst="ellipse">
@@ -3768,7 +3768,7 @@
         </p:nvSpPr>
         <p:spPr>
           <a:xfrm>
-            <a:off x="3930538" y="3836643"/>
+            <a:off x="5238085" y="5204596"/>
             <a:ext cx="274320" cy="274320"/>
           </a:xfrm>
           <a:prstGeom prst="ellipse">
@@ -3824,7 +3824,7 @@
         </p:nvSpPr>
         <p:spPr>
           <a:xfrm>
-            <a:off x="5192333" y="3726763"/>
+            <a:off x="5820248" y="2371320"/>
             <a:ext cx="274320" cy="274320"/>
           </a:xfrm>
           <a:prstGeom prst="ellipse">
@@ -3880,7 +3880,7 @@
         </p:nvSpPr>
         <p:spPr>
           <a:xfrm>
-            <a:off x="4528164" y="2660110"/>
+            <a:off x="3955152" y="3076028"/>
             <a:ext cx="274320" cy="274320"/>
           </a:xfrm>
           <a:prstGeom prst="ellipse">
@@ -3936,7 +3936,7 @@
         </p:nvSpPr>
         <p:spPr>
           <a:xfrm>
-            <a:off x="2784562" y="3385995"/>
+            <a:off x="4626116" y="3458830"/>
             <a:ext cx="274320" cy="274320"/>
           </a:xfrm>
           <a:prstGeom prst="ellipse">
@@ -3992,7 +3992,7 @@
         </p:nvSpPr>
         <p:spPr>
           <a:xfrm>
-            <a:off x="2510387" y="3765861"/>
+            <a:off x="5675458" y="2446343"/>
             <a:ext cx="274320" cy="274320"/>
           </a:xfrm>
           <a:prstGeom prst="ellipse">
@@ -4040,353 +4040,17 @@
           </a:p>
         </p:txBody>
       </p:sp>
-      <p:sp>
-        <p:nvSpPr>
-          <p:cNvPr id="17" name="Oval 16"/>
-          <p:cNvSpPr/>
-          <p:nvPr/>
-        </p:nvSpPr>
-        <p:spPr>
-          <a:xfrm>
-            <a:off x="3844902" y="2952019"/>
-            <a:ext cx="274320" cy="274320"/>
-          </a:xfrm>
-          <a:prstGeom prst="ellipse">
-            <a:avLst/>
-          </a:prstGeom>
-          <a:solidFill>
-            <a:srgbClr val="2563EB"/>
-          </a:solidFill>
-          <a:ln w="15875">
-            <a:solidFill>
-              <a:srgbClr val="FFFFFF"/>
-            </a:solidFill>
-          </a:ln>
-          <a:effectLst/>
-        </p:spPr>
-        <p:style>
-          <a:lnRef idx="1">
-            <a:schemeClr val="accent1"/>
-          </a:lnRef>
-          <a:fillRef idx="3">
-            <a:schemeClr val="accent1"/>
-          </a:fillRef>
-          <a:effectRef idx="2">
-            <a:schemeClr val="accent1"/>
-          </a:effectRef>
-          <a:fontRef idx="minor">
-            <a:schemeClr val="lt1"/>
-          </a:fontRef>
-        </p:style>
-        <p:txBody>
-          <a:bodyPr rtlCol="0" anchor="ctr" lIns="0" rIns="0" tIns="0" bIns="0" wrap="none"/>
-          <a:lstStyle/>
-          <a:p>
-            <a:pPr algn="ctr"/>
-            <a:r>
-              <a:rPr sz="1000" b="1">
-                <a:solidFill>
-                  <a:srgbClr val="FFFFFF"/>
-                </a:solidFill>
-                <a:latin typeface="Meiryo"/>
-                <a:ea typeface="Meiryo"/>
-              </a:rPr>
-              <a:t>13</a:t>
-            </a:r>
-          </a:p>
-        </p:txBody>
-      </p:sp>
-      <p:sp>
-        <p:nvSpPr>
-          <p:cNvPr id="18" name="Oval 17"/>
-          <p:cNvSpPr/>
-          <p:nvPr/>
-        </p:nvSpPr>
-        <p:spPr>
-          <a:xfrm>
-            <a:off x="3300764" y="3653453"/>
-            <a:ext cx="274320" cy="274320"/>
-          </a:xfrm>
-          <a:prstGeom prst="ellipse">
-            <a:avLst/>
-          </a:prstGeom>
-          <a:solidFill>
-            <a:srgbClr val="2563EB"/>
-          </a:solidFill>
-          <a:ln w="15875">
-            <a:solidFill>
-              <a:srgbClr val="FFFFFF"/>
-            </a:solidFill>
-          </a:ln>
-          <a:effectLst/>
-        </p:spPr>
-        <p:style>
-          <a:lnRef idx="1">
-            <a:schemeClr val="accent1"/>
-          </a:lnRef>
-          <a:fillRef idx="3">
-            <a:schemeClr val="accent1"/>
-          </a:fillRef>
-          <a:effectRef idx="2">
-            <a:schemeClr val="accent1"/>
-          </a:effectRef>
-          <a:fontRef idx="minor">
-            <a:schemeClr val="lt1"/>
-          </a:fontRef>
-        </p:style>
-        <p:txBody>
-          <a:bodyPr rtlCol="0" anchor="ctr" lIns="0" rIns="0" tIns="0" bIns="0" wrap="none"/>
-          <a:lstStyle/>
-          <a:p>
-            <a:pPr algn="ctr"/>
-            <a:r>
-              <a:rPr sz="1000" b="1">
-                <a:solidFill>
-                  <a:srgbClr val="FFFFFF"/>
-                </a:solidFill>
-                <a:latin typeface="Meiryo"/>
-                <a:ea typeface="Meiryo"/>
-              </a:rPr>
-              <a:t>14</a:t>
-            </a:r>
-          </a:p>
-        </p:txBody>
-      </p:sp>
-      <p:sp>
-        <p:nvSpPr>
-          <p:cNvPr id="19" name="Oval 18"/>
-          <p:cNvSpPr/>
-          <p:nvPr/>
-        </p:nvSpPr>
-        <p:spPr>
-          <a:xfrm>
-            <a:off x="2940953" y="3636095"/>
-            <a:ext cx="274320" cy="274320"/>
-          </a:xfrm>
-          <a:prstGeom prst="ellipse">
-            <a:avLst/>
-          </a:prstGeom>
-          <a:solidFill>
-            <a:srgbClr val="2563EB"/>
-          </a:solidFill>
-          <a:ln w="15875">
-            <a:solidFill>
-              <a:srgbClr val="FFFFFF"/>
-            </a:solidFill>
-          </a:ln>
-          <a:effectLst/>
-        </p:spPr>
-        <p:style>
-          <a:lnRef idx="1">
-            <a:schemeClr val="accent1"/>
-          </a:lnRef>
-          <a:fillRef idx="3">
-            <a:schemeClr val="accent1"/>
-          </a:fillRef>
-          <a:effectRef idx="2">
-            <a:schemeClr val="accent1"/>
-          </a:effectRef>
-          <a:fontRef idx="minor">
-            <a:schemeClr val="lt1"/>
-          </a:fontRef>
-        </p:style>
-        <p:txBody>
-          <a:bodyPr rtlCol="0" anchor="ctr" lIns="0" rIns="0" tIns="0" bIns="0" wrap="none"/>
-          <a:lstStyle/>
-          <a:p>
-            <a:pPr algn="ctr"/>
-            <a:r>
-              <a:rPr sz="1000" b="1">
-                <a:solidFill>
-                  <a:srgbClr val="FFFFFF"/>
-                </a:solidFill>
-                <a:latin typeface="Meiryo"/>
-                <a:ea typeface="Meiryo"/>
-              </a:rPr>
-              <a:t>15</a:t>
-            </a:r>
-          </a:p>
-        </p:txBody>
-      </p:sp>
-      <p:sp>
-        <p:nvSpPr>
-          <p:cNvPr id="20" name="Oval 19"/>
-          <p:cNvSpPr/>
-          <p:nvPr/>
-        </p:nvSpPr>
-        <p:spPr>
-          <a:xfrm>
-            <a:off x="5123684" y="3610310"/>
-            <a:ext cx="274320" cy="274320"/>
-          </a:xfrm>
-          <a:prstGeom prst="ellipse">
-            <a:avLst/>
-          </a:prstGeom>
-          <a:solidFill>
-            <a:srgbClr val="2563EB"/>
-          </a:solidFill>
-          <a:ln w="15875">
-            <a:solidFill>
-              <a:srgbClr val="FFFFFF"/>
-            </a:solidFill>
-          </a:ln>
-          <a:effectLst/>
-        </p:spPr>
-        <p:style>
-          <a:lnRef idx="1">
-            <a:schemeClr val="accent1"/>
-          </a:lnRef>
-          <a:fillRef idx="3">
-            <a:schemeClr val="accent1"/>
-          </a:fillRef>
-          <a:effectRef idx="2">
-            <a:schemeClr val="accent1"/>
-          </a:effectRef>
-          <a:fontRef idx="minor">
-            <a:schemeClr val="lt1"/>
-          </a:fontRef>
-        </p:style>
-        <p:txBody>
-          <a:bodyPr rtlCol="0" anchor="ctr" lIns="0" rIns="0" tIns="0" bIns="0" wrap="none"/>
-          <a:lstStyle/>
-          <a:p>
-            <a:pPr algn="ctr"/>
-            <a:r>
-              <a:rPr sz="1000" b="1">
-                <a:solidFill>
-                  <a:srgbClr val="FFFFFF"/>
-                </a:solidFill>
-                <a:latin typeface="Meiryo"/>
-                <a:ea typeface="Meiryo"/>
-              </a:rPr>
-              <a:t>16</a:t>
-            </a:r>
-          </a:p>
-        </p:txBody>
-      </p:sp>
-      <p:sp>
-        <p:nvSpPr>
-          <p:cNvPr id="21" name="Oval 20"/>
-          <p:cNvSpPr/>
-          <p:nvPr/>
-        </p:nvSpPr>
-        <p:spPr>
-          <a:xfrm>
-            <a:off x="3446485" y="3602557"/>
-            <a:ext cx="274320" cy="274320"/>
-          </a:xfrm>
-          <a:prstGeom prst="ellipse">
-            <a:avLst/>
-          </a:prstGeom>
-          <a:solidFill>
-            <a:srgbClr val="2563EB"/>
-          </a:solidFill>
-          <a:ln w="15875">
-            <a:solidFill>
-              <a:srgbClr val="FFFFFF"/>
-            </a:solidFill>
-          </a:ln>
-          <a:effectLst/>
-        </p:spPr>
-        <p:style>
-          <a:lnRef idx="1">
-            <a:schemeClr val="accent1"/>
-          </a:lnRef>
-          <a:fillRef idx="3">
-            <a:schemeClr val="accent1"/>
-          </a:fillRef>
-          <a:effectRef idx="2">
-            <a:schemeClr val="accent1"/>
-          </a:effectRef>
-          <a:fontRef idx="minor">
-            <a:schemeClr val="lt1"/>
-          </a:fontRef>
-        </p:style>
-        <p:txBody>
-          <a:bodyPr rtlCol="0" anchor="ctr" lIns="0" rIns="0" tIns="0" bIns="0" wrap="none"/>
-          <a:lstStyle/>
-          <a:p>
-            <a:pPr algn="ctr"/>
-            <a:r>
-              <a:rPr sz="1000" b="1">
-                <a:solidFill>
-                  <a:srgbClr val="FFFFFF"/>
-                </a:solidFill>
-                <a:latin typeface="Meiryo"/>
-                <a:ea typeface="Meiryo"/>
-              </a:rPr>
-              <a:t>17</a:t>
-            </a:r>
-          </a:p>
-        </p:txBody>
-      </p:sp>
-      <p:sp>
-        <p:nvSpPr>
-          <p:cNvPr id="22" name="Oval 21"/>
-          <p:cNvSpPr/>
-          <p:nvPr/>
-        </p:nvSpPr>
-        <p:spPr>
-          <a:xfrm>
-            <a:off x="935811" y="3922760"/>
-            <a:ext cx="274320" cy="274320"/>
-          </a:xfrm>
-          <a:prstGeom prst="ellipse">
-            <a:avLst/>
-          </a:prstGeom>
-          <a:solidFill>
-            <a:srgbClr val="2563EB"/>
-          </a:solidFill>
-          <a:ln w="15875">
-            <a:solidFill>
-              <a:srgbClr val="FFFFFF"/>
-            </a:solidFill>
-          </a:ln>
-          <a:effectLst/>
-        </p:spPr>
-        <p:style>
-          <a:lnRef idx="1">
-            <a:schemeClr val="accent1"/>
-          </a:lnRef>
-          <a:fillRef idx="3">
-            <a:schemeClr val="accent1"/>
-          </a:fillRef>
-          <a:effectRef idx="2">
-            <a:schemeClr val="accent1"/>
-          </a:effectRef>
-          <a:fontRef idx="minor">
-            <a:schemeClr val="lt1"/>
-          </a:fontRef>
-        </p:style>
-        <p:txBody>
-          <a:bodyPr rtlCol="0" anchor="ctr" lIns="0" rIns="0" tIns="0" bIns="0" wrap="none"/>
-          <a:lstStyle/>
-          <a:p>
-            <a:pPr algn="ctr"/>
-            <a:r>
-              <a:rPr sz="1000" b="1">
-                <a:solidFill>
-                  <a:srgbClr val="FFFFFF"/>
-                </a:solidFill>
-                <a:latin typeface="Meiryo"/>
-                <a:ea typeface="Meiryo"/>
-              </a:rPr>
-              <a:t>18</a:t>
-            </a:r>
-          </a:p>
-        </p:txBody>
-      </p:sp>
       <p:graphicFrame>
         <p:nvGraphicFramePr>
-          <p:cNvPr id="23" name="Table 22"/>
+          <p:cNvPr id="17" name="Table 16"/>
           <p:cNvGraphicFramePr>
             <a:graphicFrameLocks noGrp="1"/>
           </p:cNvGraphicFramePr>
           <p:nvPr/>
         </p:nvGraphicFramePr>
         <p:xfrm>
-          <a:off x="7771233" y="914400"/>
-          <a:ext cx="4237581" cy="4864608"/>
+          <a:off x="7772003" y="914400"/>
+          <a:ext cx="4236811" cy="3328416"/>
         </p:xfrm>
         <a:graphic>
           <a:graphicData uri="http://schemas.openxmlformats.org/drawingml/2006/table">
@@ -4396,7 +4060,7 @@
               </a:tblPr>
               <a:tblGrid>
                 <a:gridCol w="457200"/>
-                <a:gridCol w="2134461"/>
+                <a:gridCol w="2133691"/>
                 <a:gridCol w="777240"/>
                 <a:gridCol w="868680"/>
               </a:tblGrid>
@@ -4537,7 +4201,7 @@
                           <a:latin typeface="Meiryo"/>
                           <a:ea typeface="Meiryo"/>
                         </a:rPr>
-                        <a:t>オリエンタルホテル福岡 博多ステーション</a:t>
+                        <a:t>万平ホテル</a:t>
                       </a:r>
                     </a:p>
                   </a:txBody>
@@ -4561,7 +4225,7 @@
                           <a:latin typeface="Meiryo"/>
                           <a:ea typeface="Meiryo"/>
                         </a:rPr>
-                        <a:t>227室</a:t>
+                        <a:t>109室</a:t>
                       </a:r>
                     </a:p>
                   </a:txBody>
@@ -4585,7 +4249,7 @@
                           <a:latin typeface="Meiryo"/>
                           <a:ea typeface="Meiryo"/>
                         </a:rPr>
-                        <a:t>1985年</a:t>
+                        <a:t>1894年</a:t>
                       </a:r>
                     </a:p>
                   </a:txBody>
@@ -4635,7 +4299,7 @@
                           <a:latin typeface="Meiryo"/>
                           <a:ea typeface="Meiryo"/>
                         </a:rPr>
-                        <a:t>福岡オリエンタルホテル</a:t>
+                        <a:t>軽井沢プリンスホテル ウエスト</a:t>
                       </a:r>
                     </a:p>
                   </a:txBody>
@@ -4659,7 +4323,7 @@
                           <a:latin typeface="Meiryo"/>
                           <a:ea typeface="Meiryo"/>
                         </a:rPr>
-                        <a:t>108室</a:t>
+                        <a:t>395室</a:t>
                       </a:r>
                     </a:p>
                   </a:txBody>
@@ -4683,7 +4347,7 @@
                           <a:latin typeface="Meiryo"/>
                           <a:ea typeface="Meiryo"/>
                         </a:rPr>
-                        <a:t>1990年</a:t>
+                        <a:t>1973年</a:t>
                       </a:r>
                     </a:p>
                   </a:txBody>
@@ -4733,7 +4397,7 @@
                           <a:latin typeface="Meiryo"/>
                           <a:ea typeface="Meiryo"/>
                         </a:rPr>
-                        <a:t>JR九州ホテルブラッサム福岡</a:t>
+                        <a:t>ザ・プリンス 軽井沢</a:t>
                       </a:r>
                     </a:p>
                   </a:txBody>
@@ -4757,7 +4421,7 @@
                           <a:latin typeface="Meiryo"/>
                           <a:ea typeface="Meiryo"/>
                         </a:rPr>
-                        <a:t>90室</a:t>
+                        <a:t>100室</a:t>
                       </a:r>
                     </a:p>
                   </a:txBody>
@@ -4781,7 +4445,7 @@
                           <a:latin typeface="Meiryo"/>
                           <a:ea typeface="Meiryo"/>
                         </a:rPr>
-                        <a:t>1992年</a:t>
+                        <a:t>1982年</a:t>
                       </a:r>
                     </a:p>
                   </a:txBody>
@@ -4831,7 +4495,7 @@
                           <a:latin typeface="Meiryo"/>
                           <a:ea typeface="Meiryo"/>
                         </a:rPr>
-                        <a:t>グランドハイアット福岡</a:t>
+                        <a:t>星のや軽井沢</a:t>
                       </a:r>
                     </a:p>
                   </a:txBody>
@@ -4855,7 +4519,7 @@
                           <a:latin typeface="Meiryo"/>
                           <a:ea typeface="Meiryo"/>
                         </a:rPr>
-                        <a:t>372室</a:t>
+                        <a:t>77室</a:t>
                       </a:r>
                     </a:p>
                   </a:txBody>
@@ -4879,7 +4543,7 @@
                           <a:latin typeface="Meiryo"/>
                           <a:ea typeface="Meiryo"/>
                         </a:rPr>
-                        <a:t>1996年</a:t>
+                        <a:t>2005年</a:t>
                       </a:r>
                     </a:p>
                   </a:txBody>
@@ -4929,7 +4593,7 @@
                           <a:latin typeface="Meiryo"/>
                           <a:ea typeface="Meiryo"/>
                         </a:rPr>
-                        <a:t>ザ ロイヤルパークホテル 福岡</a:t>
+                        <a:t>軽井沢マリオットホテル</a:t>
                       </a:r>
                     </a:p>
                   </a:txBody>
@@ -4953,7 +4617,7 @@
                           <a:latin typeface="Meiryo"/>
                           <a:ea typeface="Meiryo"/>
                         </a:rPr>
-                        <a:t>174室</a:t>
+                        <a:t>142室</a:t>
                       </a:r>
                     </a:p>
                   </a:txBody>
@@ -4977,7 +4641,7 @@
                           <a:latin typeface="Meiryo"/>
                           <a:ea typeface="Meiryo"/>
                         </a:rPr>
-                        <a:t>2011年</a:t>
+                        <a:t>2016年</a:t>
                       </a:r>
                     </a:p>
                   </a:txBody>
@@ -5027,7 +4691,7 @@
                           <a:latin typeface="Meiryo"/>
                           <a:ea typeface="Meiryo"/>
                         </a:rPr>
-                        <a:t>JR九州ホテル ブラッサム博多中央</a:t>
+                        <a:t>レジーナリゾート軽井沢御影用水</a:t>
                       </a:r>
                     </a:p>
                   </a:txBody>
@@ -5051,7 +4715,7 @@
                           <a:latin typeface="Meiryo"/>
                           <a:ea typeface="Meiryo"/>
                         </a:rPr>
-                        <a:t>247室</a:t>
+                        <a:t>26室</a:t>
                       </a:r>
                     </a:p>
                   </a:txBody>
@@ -5075,7 +4739,7 @@
                           <a:latin typeface="Meiryo"/>
                           <a:ea typeface="Meiryo"/>
                         </a:rPr>
-                        <a:t>2013年</a:t>
+                        <a:t>2017年</a:t>
                       </a:r>
                     </a:p>
                   </a:txBody>
@@ -5125,7 +4789,7 @@
                           <a:latin typeface="Meiryo"/>
                           <a:ea typeface="Meiryo"/>
                         </a:rPr>
-                        <a:t>東急ステイ博多</a:t>
+                        <a:t>旧軽井沢KIKYOキュリオ・コレクションbyヒルトン</a:t>
                       </a:r>
                     </a:p>
                   </a:txBody>
@@ -5149,7 +4813,7 @@
                           <a:latin typeface="Meiryo"/>
                           <a:ea typeface="Meiryo"/>
                         </a:rPr>
-                        <a:t>216室</a:t>
+                        <a:t>50室</a:t>
                       </a:r>
                     </a:p>
                   </a:txBody>
@@ -5223,7 +4887,7 @@
                           <a:latin typeface="Meiryo"/>
                           <a:ea typeface="Meiryo"/>
                         </a:rPr>
-                        <a:t>東急ステイ福岡天神</a:t>
+                        <a:t>ルグラン軽井沢ホテル＆リゾート</a:t>
                       </a:r>
                     </a:p>
                   </a:txBody>
@@ -5247,7 +4911,7 @@
                           <a:latin typeface="Meiryo"/>
                           <a:ea typeface="Meiryo"/>
                         </a:rPr>
-                        <a:t>252室</a:t>
+                        <a:t>58室</a:t>
                       </a:r>
                     </a:p>
                   </a:txBody>
@@ -5271,7 +4935,7 @@
                           <a:latin typeface="Meiryo"/>
                           <a:ea typeface="Meiryo"/>
                         </a:rPr>
-                        <a:t>2019年</a:t>
+                        <a:t>2018年</a:t>
                       </a:r>
                     </a:p>
                   </a:txBody>
@@ -5321,7 +4985,7 @@
                           <a:latin typeface="Meiryo"/>
                           <a:ea typeface="Meiryo"/>
                         </a:rPr>
-                        <a:t>ザ ブラッサム博多プレミア</a:t>
+                        <a:t>軽井沢プリンスホテル イースト</a:t>
                       </a:r>
                     </a:p>
                   </a:txBody>
@@ -5345,7 +5009,7 @@
                           <a:latin typeface="Meiryo"/>
                           <a:ea typeface="Meiryo"/>
                         </a:rPr>
-                        <a:t>238室</a:t>
+                        <a:t>159室</a:t>
                       </a:r>
                     </a:p>
                   </a:txBody>
@@ -5369,7 +5033,7 @@
                           <a:latin typeface="Meiryo"/>
                           <a:ea typeface="Meiryo"/>
                         </a:rPr>
-                        <a:t>2019年</a:t>
+                        <a:t>2020年</a:t>
                       </a:r>
                     </a:p>
                   </a:txBody>
@@ -5419,7 +5083,7 @@
                           <a:latin typeface="Meiryo"/>
                           <a:ea typeface="Meiryo"/>
                         </a:rPr>
-                        <a:t>ホテルオリエンタルエクスプレス福岡中洲川端</a:t>
+                        <a:t>ホテルインディゴ軽井沢</a:t>
                       </a:r>
                     </a:p>
                   </a:txBody>
@@ -5443,7 +5107,7 @@
                           <a:latin typeface="Meiryo"/>
                           <a:ea typeface="Meiryo"/>
                         </a:rPr>
-                        <a:t>183室</a:t>
+                        <a:t>155室</a:t>
                       </a:r>
                     </a:p>
                   </a:txBody>
@@ -5467,7 +5131,7 @@
                           <a:latin typeface="Meiryo"/>
                           <a:ea typeface="Meiryo"/>
                         </a:rPr>
-                        <a:t>2021年</a:t>
+                        <a:t>2022年</a:t>
                       </a:r>
                     </a:p>
                   </a:txBody>
@@ -5517,7 +5181,7 @@
                           <a:latin typeface="Meiryo"/>
                           <a:ea typeface="Meiryo"/>
                         </a:rPr>
-                        <a:t>ホテルオリエンタルエクスプレス福岡天神</a:t>
+                        <a:t>ふふ 軽井沢ー陽光の風ー</a:t>
                       </a:r>
                     </a:p>
                   </a:txBody>
@@ -5541,7 +5205,7 @@
                           <a:latin typeface="Meiryo"/>
                           <a:ea typeface="Meiryo"/>
                         </a:rPr>
-                        <a:t>263室</a:t>
+                        <a:t>24室</a:t>
                       </a:r>
                     </a:p>
                   </a:txBody>
@@ -5565,7 +5229,7 @@
                           <a:latin typeface="Meiryo"/>
                           <a:ea typeface="Meiryo"/>
                         </a:rPr>
-                        <a:t>2021年</a:t>
+                        <a:t>2023年</a:t>
                       </a:r>
                     </a:p>
                   </a:txBody>
@@ -5615,7 +5279,7 @@
                           <a:latin typeface="Meiryo"/>
                           <a:ea typeface="Meiryo"/>
                         </a:rPr>
-                        <a:t>ザ・リッツ・カールトン福岡</a:t>
+                        <a:t>ふふ 旧軽井沢ー静養の森ー</a:t>
                       </a:r>
                     </a:p>
                   </a:txBody>
@@ -5639,7 +5303,7 @@
                           <a:latin typeface="Meiryo"/>
                           <a:ea typeface="Meiryo"/>
                         </a:rPr>
-                        <a:t>167室</a:t>
+                        <a:t>20室</a:t>
                       </a:r>
                     </a:p>
                   </a:txBody>
@@ -5664,594 +5328,6 @@
                           <a:ea typeface="Meiryo"/>
                         </a:rPr>
                         <a:t>2023年</a:t>
-                      </a:r>
-                    </a:p>
-                  </a:txBody>
-                  <a:tcPr marL="36576" marR="36576" marT="9144" marB="9144" anchor="ctr">
-                    <a:solidFill>
-                      <a:srgbClr val="F3F4F6"/>
-                    </a:solidFill>
-                  </a:tcPr>
-                </a:tc>
-              </a:tr>
-              <a:tr h="256032">
-                <a:tc>
-                  <a:txBody>
-                    <a:bodyPr/>
-                    <a:lstStyle/>
-                    <a:p>
-                      <a:pPr algn="ctr"/>
-                      <a:r>
-                        <a:rPr sz="850" b="1">
-                          <a:solidFill>
-                            <a:srgbClr val="FFFFFF"/>
-                          </a:solidFill>
-                          <a:latin typeface="Meiryo"/>
-                          <a:ea typeface="Meiryo"/>
-                        </a:rPr>
-                        <a:t>13</a:t>
-                      </a:r>
-                    </a:p>
-                  </a:txBody>
-                  <a:tcPr marL="36576" marR="36576" marT="9144" marB="9144" anchor="ctr">
-                    <a:solidFill>
-                      <a:srgbClr val="2563EB"/>
-                    </a:solidFill>
-                  </a:tcPr>
-                </a:tc>
-                <a:tc>
-                  <a:txBody>
-                    <a:bodyPr/>
-                    <a:lstStyle/>
-                    <a:p>
-                      <a:pPr algn="l"/>
-                      <a:r>
-                        <a:rPr sz="850" b="0">
-                          <a:solidFill>
-                            <a:srgbClr val="1F2937"/>
-                          </a:solidFill>
-                          <a:latin typeface="Meiryo"/>
-                          <a:ea typeface="Meiryo"/>
-                        </a:rPr>
-                        <a:t>ザ ロイヤルパーク キャンバス 福岡中洲</a:t>
-                      </a:r>
-                    </a:p>
-                  </a:txBody>
-                  <a:tcPr marL="36576" marR="36576" marT="9144" marB="9144" anchor="ctr">
-                    <a:solidFill>
-                      <a:srgbClr val="FFFFFF"/>
-                    </a:solidFill>
-                  </a:tcPr>
-                </a:tc>
-                <a:tc>
-                  <a:txBody>
-                    <a:bodyPr/>
-                    <a:lstStyle/>
-                    <a:p>
-                      <a:pPr algn="ctr"/>
-                      <a:r>
-                        <a:rPr sz="850" b="0">
-                          <a:solidFill>
-                            <a:srgbClr val="1F2937"/>
-                          </a:solidFill>
-                          <a:latin typeface="Meiryo"/>
-                          <a:ea typeface="Meiryo"/>
-                        </a:rPr>
-                        <a:t>255室</a:t>
-                      </a:r>
-                    </a:p>
-                  </a:txBody>
-                  <a:tcPr marL="36576" marR="36576" marT="9144" marB="9144" anchor="ctr">
-                    <a:solidFill>
-                      <a:srgbClr val="FFFFFF"/>
-                    </a:solidFill>
-                  </a:tcPr>
-                </a:tc>
-                <a:tc>
-                  <a:txBody>
-                    <a:bodyPr/>
-                    <a:lstStyle/>
-                    <a:p>
-                      <a:pPr algn="ctr"/>
-                      <a:r>
-                        <a:rPr sz="850" b="0">
-                          <a:solidFill>
-                            <a:srgbClr val="1F2937"/>
-                          </a:solidFill>
-                          <a:latin typeface="Meiryo"/>
-                          <a:ea typeface="Meiryo"/>
-                        </a:rPr>
-                        <a:t>2023年</a:t>
-                      </a:r>
-                    </a:p>
-                  </a:txBody>
-                  <a:tcPr marL="36576" marR="36576" marT="9144" marB="9144" anchor="ctr">
-                    <a:solidFill>
-                      <a:srgbClr val="FFFFFF"/>
-                    </a:solidFill>
-                  </a:tcPr>
-                </a:tc>
-              </a:tr>
-              <a:tr h="256032">
-                <a:tc>
-                  <a:txBody>
-                    <a:bodyPr/>
-                    <a:lstStyle/>
-                    <a:p>
-                      <a:pPr algn="ctr"/>
-                      <a:r>
-                        <a:rPr sz="850" b="1">
-                          <a:solidFill>
-                            <a:srgbClr val="FFFFFF"/>
-                          </a:solidFill>
-                          <a:latin typeface="Meiryo"/>
-                          <a:ea typeface="Meiryo"/>
-                        </a:rPr>
-                        <a:t>14</a:t>
-                      </a:r>
-                    </a:p>
-                  </a:txBody>
-                  <a:tcPr marL="36576" marR="36576" marT="9144" marB="9144" anchor="ctr">
-                    <a:solidFill>
-                      <a:srgbClr val="2563EB"/>
-                    </a:solidFill>
-                  </a:tcPr>
-                </a:tc>
-                <a:tc>
-                  <a:txBody>
-                    <a:bodyPr/>
-                    <a:lstStyle/>
-                    <a:p>
-                      <a:pPr algn="l"/>
-                      <a:r>
-                        <a:rPr sz="850" b="0">
-                          <a:solidFill>
-                            <a:srgbClr val="1F2937"/>
-                          </a:solidFill>
-                          <a:latin typeface="Meiryo"/>
-                          <a:ea typeface="Meiryo"/>
-                        </a:rPr>
-                        <a:t>ONE FUKUOKA HOTEL</a:t>
-                      </a:r>
-                    </a:p>
-                  </a:txBody>
-                  <a:tcPr marL="36576" marR="36576" marT="9144" marB="9144" anchor="ctr">
-                    <a:solidFill>
-                      <a:srgbClr val="F3F4F6"/>
-                    </a:solidFill>
-                  </a:tcPr>
-                </a:tc>
-                <a:tc>
-                  <a:txBody>
-                    <a:bodyPr/>
-                    <a:lstStyle/>
-                    <a:p>
-                      <a:pPr algn="ctr"/>
-                      <a:r>
-                        <a:rPr sz="850" b="0">
-                          <a:solidFill>
-                            <a:srgbClr val="1F2937"/>
-                          </a:solidFill>
-                          <a:latin typeface="Meiryo"/>
-                          <a:ea typeface="Meiryo"/>
-                        </a:rPr>
-                        <a:t>41室</a:t>
-                      </a:r>
-                    </a:p>
-                  </a:txBody>
-                  <a:tcPr marL="36576" marR="36576" marT="9144" marB="9144" anchor="ctr">
-                    <a:solidFill>
-                      <a:srgbClr val="F3F4F6"/>
-                    </a:solidFill>
-                  </a:tcPr>
-                </a:tc>
-                <a:tc>
-                  <a:txBody>
-                    <a:bodyPr/>
-                    <a:lstStyle/>
-                    <a:p>
-                      <a:pPr algn="ctr"/>
-                      <a:r>
-                        <a:rPr sz="850" b="0">
-                          <a:solidFill>
-                            <a:srgbClr val="1F2937"/>
-                          </a:solidFill>
-                          <a:latin typeface="Meiryo"/>
-                          <a:ea typeface="Meiryo"/>
-                        </a:rPr>
-                        <a:t>2025年</a:t>
-                      </a:r>
-                    </a:p>
-                  </a:txBody>
-                  <a:tcPr marL="36576" marR="36576" marT="9144" marB="9144" anchor="ctr">
-                    <a:solidFill>
-                      <a:srgbClr val="F3F4F6"/>
-                    </a:solidFill>
-                  </a:tcPr>
-                </a:tc>
-              </a:tr>
-              <a:tr h="256032">
-                <a:tc>
-                  <a:txBody>
-                    <a:bodyPr/>
-                    <a:lstStyle/>
-                    <a:p>
-                      <a:pPr algn="ctr"/>
-                      <a:r>
-                        <a:rPr sz="850" b="1">
-                          <a:solidFill>
-                            <a:srgbClr val="FFFFFF"/>
-                          </a:solidFill>
-                          <a:latin typeface="Meiryo"/>
-                          <a:ea typeface="Meiryo"/>
-                        </a:rPr>
-                        <a:t>15</a:t>
-                      </a:r>
-                    </a:p>
-                  </a:txBody>
-                  <a:tcPr marL="36576" marR="36576" marT="9144" marB="9144" anchor="ctr">
-                    <a:solidFill>
-                      <a:srgbClr val="2563EB"/>
-                    </a:solidFill>
-                  </a:tcPr>
-                </a:tc>
-                <a:tc>
-                  <a:txBody>
-                    <a:bodyPr/>
-                    <a:lstStyle/>
-                    <a:p>
-                      <a:pPr algn="l"/>
-                      <a:r>
-                        <a:rPr sz="850" b="0">
-                          <a:solidFill>
-                            <a:srgbClr val="1F2937"/>
-                          </a:solidFill>
-                          <a:latin typeface="Meiryo"/>
-                          <a:ea typeface="Meiryo"/>
-                        </a:rPr>
-                        <a:t>ザ・ゲートホテル福岡 by HULIC</a:t>
-                      </a:r>
-                    </a:p>
-                  </a:txBody>
-                  <a:tcPr marL="36576" marR="36576" marT="9144" marB="9144" anchor="ctr">
-                    <a:solidFill>
-                      <a:srgbClr val="FFFFFF"/>
-                    </a:solidFill>
-                  </a:tcPr>
-                </a:tc>
-                <a:tc>
-                  <a:txBody>
-                    <a:bodyPr/>
-                    <a:lstStyle/>
-                    <a:p>
-                      <a:pPr algn="ctr"/>
-                      <a:r>
-                        <a:rPr sz="850" b="0">
-                          <a:solidFill>
-                            <a:srgbClr val="1F2937"/>
-                          </a:solidFill>
-                          <a:latin typeface="Meiryo"/>
-                          <a:ea typeface="Meiryo"/>
-                        </a:rPr>
-                        <a:t>171室</a:t>
-                      </a:r>
-                    </a:p>
-                  </a:txBody>
-                  <a:tcPr marL="36576" marR="36576" marT="9144" marB="9144" anchor="ctr">
-                    <a:solidFill>
-                      <a:srgbClr val="FFFFFF"/>
-                    </a:solidFill>
-                  </a:tcPr>
-                </a:tc>
-                <a:tc>
-                  <a:txBody>
-                    <a:bodyPr/>
-                    <a:lstStyle/>
-                    <a:p>
-                      <a:pPr algn="ctr"/>
-                      <a:r>
-                        <a:rPr sz="850" b="0">
-                          <a:solidFill>
-                            <a:srgbClr val="1F2937"/>
-                          </a:solidFill>
-                          <a:latin typeface="Meiryo"/>
-                          <a:ea typeface="Meiryo"/>
-                        </a:rPr>
-                        <a:t>2025年</a:t>
-                      </a:r>
-                    </a:p>
-                  </a:txBody>
-                  <a:tcPr marL="36576" marR="36576" marT="9144" marB="9144" anchor="ctr">
-                    <a:solidFill>
-                      <a:srgbClr val="FFFFFF"/>
-                    </a:solidFill>
-                  </a:tcPr>
-                </a:tc>
-              </a:tr>
-              <a:tr h="256032">
-                <a:tc>
-                  <a:txBody>
-                    <a:bodyPr/>
-                    <a:lstStyle/>
-                    <a:p>
-                      <a:pPr algn="ctr"/>
-                      <a:r>
-                        <a:rPr sz="850" b="1">
-                          <a:solidFill>
-                            <a:srgbClr val="FFFFFF"/>
-                          </a:solidFill>
-                          <a:latin typeface="Meiryo"/>
-                          <a:ea typeface="Meiryo"/>
-                        </a:rPr>
-                        <a:t>16</a:t>
-                      </a:r>
-                    </a:p>
-                  </a:txBody>
-                  <a:tcPr marL="36576" marR="36576" marT="9144" marB="9144" anchor="ctr">
-                    <a:solidFill>
-                      <a:srgbClr val="2563EB"/>
-                    </a:solidFill>
-                  </a:tcPr>
-                </a:tc>
-                <a:tc>
-                  <a:txBody>
-                    <a:bodyPr/>
-                    <a:lstStyle/>
-                    <a:p>
-                      <a:pPr algn="l"/>
-                      <a:r>
-                        <a:rPr sz="850" b="0">
-                          <a:solidFill>
-                            <a:srgbClr val="1F2937"/>
-                          </a:solidFill>
-                          <a:latin typeface="Meiryo"/>
-                          <a:ea typeface="Meiryo"/>
-                        </a:rPr>
-                        <a:t>バウンシー・バイ・リーガ　福岡博多</a:t>
-                      </a:r>
-                    </a:p>
-                  </a:txBody>
-                  <a:tcPr marL="36576" marR="36576" marT="9144" marB="9144" anchor="ctr">
-                    <a:solidFill>
-                      <a:srgbClr val="F3F4F6"/>
-                    </a:solidFill>
-                  </a:tcPr>
-                </a:tc>
-                <a:tc>
-                  <a:txBody>
-                    <a:bodyPr/>
-                    <a:lstStyle/>
-                    <a:p>
-                      <a:pPr algn="ctr"/>
-                      <a:r>
-                        <a:rPr sz="850" b="0">
-                          <a:solidFill>
-                            <a:srgbClr val="1F2937"/>
-                          </a:solidFill>
-                          <a:latin typeface="Meiryo"/>
-                          <a:ea typeface="Meiryo"/>
-                        </a:rPr>
-                        <a:t>117室</a:t>
-                      </a:r>
-                    </a:p>
-                  </a:txBody>
-                  <a:tcPr marL="36576" marR="36576" marT="9144" marB="9144" anchor="ctr">
-                    <a:solidFill>
-                      <a:srgbClr val="F3F4F6"/>
-                    </a:solidFill>
-                  </a:tcPr>
-                </a:tc>
-                <a:tc>
-                  <a:txBody>
-                    <a:bodyPr/>
-                    <a:lstStyle/>
-                    <a:p>
-                      <a:pPr algn="ctr"/>
-                      <a:r>
-                        <a:rPr sz="850" b="0">
-                          <a:solidFill>
-                            <a:srgbClr val="1F2937"/>
-                          </a:solidFill>
-                          <a:latin typeface="Meiryo"/>
-                          <a:ea typeface="Meiryo"/>
-                        </a:rPr>
-                        <a:t>2026年</a:t>
-                      </a:r>
-                    </a:p>
-                  </a:txBody>
-                  <a:tcPr marL="36576" marR="36576" marT="9144" marB="9144" anchor="ctr">
-                    <a:solidFill>
-                      <a:srgbClr val="F3F4F6"/>
-                    </a:solidFill>
-                  </a:tcPr>
-                </a:tc>
-              </a:tr>
-              <a:tr h="256032">
-                <a:tc>
-                  <a:txBody>
-                    <a:bodyPr/>
-                    <a:lstStyle/>
-                    <a:p>
-                      <a:pPr algn="ctr"/>
-                      <a:r>
-                        <a:rPr sz="850" b="1">
-                          <a:solidFill>
-                            <a:srgbClr val="FFFFFF"/>
-                          </a:solidFill>
-                          <a:latin typeface="Meiryo"/>
-                          <a:ea typeface="Meiryo"/>
-                        </a:rPr>
-                        <a:t>17</a:t>
-                      </a:r>
-                    </a:p>
-                  </a:txBody>
-                  <a:tcPr marL="36576" marR="36576" marT="9144" marB="9144" anchor="ctr">
-                    <a:solidFill>
-                      <a:srgbClr val="2563EB"/>
-                    </a:solidFill>
-                  </a:tcPr>
-                </a:tc>
-                <a:tc>
-                  <a:txBody>
-                    <a:bodyPr/>
-                    <a:lstStyle/>
-                    <a:p>
-                      <a:pPr algn="l"/>
-                      <a:r>
-                        <a:rPr sz="850" b="0">
-                          <a:solidFill>
-                            <a:srgbClr val="1F2937"/>
-                          </a:solidFill>
-                          <a:latin typeface="Meiryo"/>
-                          <a:ea typeface="Meiryo"/>
-                        </a:rPr>
-                        <a:t>エースホテル福岡</a:t>
-                      </a:r>
-                    </a:p>
-                  </a:txBody>
-                  <a:tcPr marL="36576" marR="36576" marT="9144" marB="9144" anchor="ctr">
-                    <a:solidFill>
-                      <a:srgbClr val="FFFFFF"/>
-                    </a:solidFill>
-                  </a:tcPr>
-                </a:tc>
-                <a:tc>
-                  <a:txBody>
-                    <a:bodyPr/>
-                    <a:lstStyle/>
-                    <a:p>
-                      <a:pPr algn="ctr"/>
-                      <a:r>
-                        <a:rPr sz="850" b="0">
-                          <a:solidFill>
-                            <a:srgbClr val="1F2937"/>
-                          </a:solidFill>
-                          <a:latin typeface="Meiryo"/>
-                          <a:ea typeface="Meiryo"/>
-                        </a:rPr>
-                        <a:t>192室</a:t>
-                      </a:r>
-                    </a:p>
-                  </a:txBody>
-                  <a:tcPr marL="36576" marR="36576" marT="9144" marB="9144" anchor="ctr">
-                    <a:solidFill>
-                      <a:srgbClr val="FFFFFF"/>
-                    </a:solidFill>
-                  </a:tcPr>
-                </a:tc>
-                <a:tc>
-                  <a:txBody>
-                    <a:bodyPr/>
-                    <a:lstStyle/>
-                    <a:p>
-                      <a:pPr algn="ctr"/>
-                      <a:r>
-                        <a:rPr sz="850" b="0">
-                          <a:solidFill>
-                            <a:srgbClr val="1F2937"/>
-                          </a:solidFill>
-                          <a:latin typeface="Meiryo"/>
-                          <a:ea typeface="Meiryo"/>
-                        </a:rPr>
-                        <a:t>2027年</a:t>
-                      </a:r>
-                    </a:p>
-                  </a:txBody>
-                  <a:tcPr marL="36576" marR="36576" marT="9144" marB="9144" anchor="ctr">
-                    <a:solidFill>
-                      <a:srgbClr val="FFFFFF"/>
-                    </a:solidFill>
-                  </a:tcPr>
-                </a:tc>
-              </a:tr>
-              <a:tr h="256032">
-                <a:tc>
-                  <a:txBody>
-                    <a:bodyPr/>
-                    <a:lstStyle/>
-                    <a:p>
-                      <a:pPr algn="ctr"/>
-                      <a:r>
-                        <a:rPr sz="850" b="1">
-                          <a:solidFill>
-                            <a:srgbClr val="FFFFFF"/>
-                          </a:solidFill>
-                          <a:latin typeface="Meiryo"/>
-                          <a:ea typeface="Meiryo"/>
-                        </a:rPr>
-                        <a:t>18</a:t>
-                      </a:r>
-                    </a:p>
-                  </a:txBody>
-                  <a:tcPr marL="36576" marR="36576" marT="9144" marB="9144" anchor="ctr">
-                    <a:solidFill>
-                      <a:srgbClr val="2563EB"/>
-                    </a:solidFill>
-                  </a:tcPr>
-                </a:tc>
-                <a:tc>
-                  <a:txBody>
-                    <a:bodyPr/>
-                    <a:lstStyle/>
-                    <a:p>
-                      <a:pPr algn="l"/>
-                      <a:r>
-                        <a:rPr sz="850" b="0">
-                          <a:solidFill>
-                            <a:srgbClr val="1F2937"/>
-                          </a:solidFill>
-                          <a:latin typeface="Meiryo"/>
-                          <a:ea typeface="Meiryo"/>
-                        </a:rPr>
-                        <a:t>(仮称) 福岡家裁跡インターコンチネンタルホテルズ＆リゾーツ</a:t>
-                      </a:r>
-                    </a:p>
-                  </a:txBody>
-                  <a:tcPr marL="36576" marR="36576" marT="9144" marB="9144" anchor="ctr">
-                    <a:solidFill>
-                      <a:srgbClr val="F3F4F6"/>
-                    </a:solidFill>
-                  </a:tcPr>
-                </a:tc>
-                <a:tc>
-                  <a:txBody>
-                    <a:bodyPr/>
-                    <a:lstStyle/>
-                    <a:p>
-                      <a:pPr algn="ctr"/>
-                      <a:r>
-                        <a:rPr sz="850" b="0">
-                          <a:solidFill>
-                            <a:srgbClr val="1F2937"/>
-                          </a:solidFill>
-                          <a:latin typeface="Meiryo"/>
-                          <a:ea typeface="Meiryo"/>
-                        </a:rPr>
-                        <a:t>117室</a:t>
-                      </a:r>
-                    </a:p>
-                  </a:txBody>
-                  <a:tcPr marL="36576" marR="36576" marT="9144" marB="9144" anchor="ctr">
-                    <a:solidFill>
-                      <a:srgbClr val="F3F4F6"/>
-                    </a:solidFill>
-                  </a:tcPr>
-                </a:tc>
-                <a:tc>
-                  <a:txBody>
-                    <a:bodyPr/>
-                    <a:lstStyle/>
-                    <a:p>
-                      <a:pPr algn="ctr"/>
-                      <a:r>
-                        <a:rPr sz="850" b="0">
-                          <a:solidFill>
-                            <a:srgbClr val="1F2937"/>
-                          </a:solidFill>
-                          <a:latin typeface="Meiryo"/>
-                          <a:ea typeface="Meiryo"/>
-                        </a:rPr>
-                        <a:t>2030年</a:t>
                       </a:r>
                     </a:p>
                   </a:txBody>
@@ -6315,7 +5391,7 @@
                 <a:latin typeface="Meiryo"/>
                 <a:ea typeface="Meiryo"/>
               </a:rPr>
-              <a:t>那覇市｜ベンチマークホテル一覧</a:t>
+              <a:t>軽井沢町｜ベンチマークホテル一覧</a:t>
             </a:r>
           </a:p>
         </p:txBody>
@@ -6330,7 +5406,7 @@
         </p:nvGraphicFramePr>
         <p:xfrm>
           <a:off x="228600" y="868680"/>
-          <a:ext cx="10789920" cy="5559552"/>
+          <a:ext cx="11704320" cy="3803904"/>
         </p:xfrm>
         <a:graphic>
           <a:graphicData uri="http://schemas.openxmlformats.org/drawingml/2006/table">
@@ -6340,11 +5416,12 @@
               </a:tblPr>
               <a:tblGrid>
                 <a:gridCol w="457200"/>
-                <a:gridCol w="3383280"/>
+                <a:gridCol w="2743200"/>
                 <a:gridCol w="1280160"/>
                 <a:gridCol w="731520"/>
                 <a:gridCol w="822960"/>
-                <a:gridCol w="4114800"/>
+                <a:gridCol w="1828800"/>
+                <a:gridCol w="3840480"/>
               </a:tblGrid>
               <a:tr h="292608">
                 <a:tc>
@@ -6481,6 +5558,30 @@
                           <a:latin typeface="Meiryo"/>
                           <a:ea typeface="Meiryo"/>
                         </a:rPr>
+                        <a:t>プライス・インデックス(円)</a:t>
+                      </a:r>
+                    </a:p>
+                  </a:txBody>
+                  <a:tcPr anchor="ctr">
+                    <a:solidFill>
+                      <a:srgbClr val="1F2937"/>
+                    </a:solidFill>
+                  </a:tcPr>
+                </a:tc>
+                <a:tc>
+                  <a:txBody>
+                    <a:bodyPr/>
+                    <a:lstStyle/>
+                    <a:p>
+                      <a:pPr algn="ctr"/>
+                      <a:r>
+                        <a:rPr sz="950" b="1">
+                          <a:solidFill>
+                            <a:srgbClr val="FFFFFF"/>
+                          </a:solidFill>
+                          <a:latin typeface="Meiryo"/>
+                          <a:ea typeface="Meiryo"/>
+                        </a:rPr>
                         <a:t>住所</a:t>
                       </a:r>
                     </a:p>
@@ -6531,7 +5632,7 @@
                           <a:latin typeface="Meiryo"/>
                           <a:ea typeface="Meiryo"/>
                         </a:rPr>
-                        <a:t>オリエンタルホテル福岡 博多ステーション</a:t>
+                        <a:t>万平ホテル</a:t>
                       </a:r>
                     </a:p>
                   </a:txBody>
@@ -6555,7 +5656,7 @@
                           <a:latin typeface="Meiryo"/>
                           <a:ea typeface="Meiryo"/>
                         </a:rPr>
-                        <a:t>シティホテル</a:t>
+                        <a:t>リゾートホテル</a:t>
                       </a:r>
                     </a:p>
                   </a:txBody>
@@ -6579,7 +5680,7 @@
                           <a:latin typeface="Meiryo"/>
                           <a:ea typeface="Meiryo"/>
                         </a:rPr>
-                        <a:t>227</a:t>
+                        <a:t>109</a:t>
                       </a:r>
                     </a:p>
                   </a:txBody>
@@ -6603,7 +5704,7 @@
                           <a:latin typeface="Meiryo"/>
                           <a:ea typeface="Meiryo"/>
                         </a:rPr>
-                        <a:t>1985年</a:t>
+                        <a:t>1894年</a:t>
                       </a:r>
                     </a:p>
                   </a:txBody>
@@ -6627,7 +5728,31 @@
                           <a:latin typeface="Meiryo"/>
                           <a:ea typeface="Meiryo"/>
                         </a:rPr>
-                        <a:t>〒812-0012 福岡県福岡市博多区博多駅中央街4-23</a:t>
+                        <a:t>50,001 - 55,000</a:t>
+                      </a:r>
+                    </a:p>
+                  </a:txBody>
+                  <a:tcPr anchor="ctr">
+                    <a:solidFill>
+                      <a:srgbClr val="FFFFFF"/>
+                    </a:solidFill>
+                  </a:tcPr>
+                </a:tc>
+                <a:tc>
+                  <a:txBody>
+                    <a:bodyPr/>
+                    <a:lstStyle/>
+                    <a:p>
+                      <a:pPr algn="l"/>
+                      <a:r>
+                        <a:rPr sz="900" b="0">
+                          <a:solidFill>
+                            <a:srgbClr val="1F2937"/>
+                          </a:solidFill>
+                          <a:latin typeface="Meiryo"/>
+                          <a:ea typeface="Meiryo"/>
+                        </a:rPr>
+                        <a:t>〒389-0102 長野県北佐久郡軽井沢町軽井沢925</a:t>
                       </a:r>
                     </a:p>
                   </a:txBody>
@@ -6677,7 +5802,7 @@
                           <a:latin typeface="Meiryo"/>
                           <a:ea typeface="Meiryo"/>
                         </a:rPr>
-                        <a:t>福岡オリエンタルホテル</a:t>
+                        <a:t>軽井沢プリンスホテル ウエスト</a:t>
                       </a:r>
                     </a:p>
                   </a:txBody>
@@ -6701,7 +5826,7 @@
                           <a:latin typeface="Meiryo"/>
                           <a:ea typeface="Meiryo"/>
                         </a:rPr>
-                        <a:t>ビジネスホテル</a:t>
+                        <a:t>リゾートホテル</a:t>
                       </a:r>
                     </a:p>
                   </a:txBody>
@@ -6725,7 +5850,7 @@
                           <a:latin typeface="Meiryo"/>
                           <a:ea typeface="Meiryo"/>
                         </a:rPr>
-                        <a:t>108</a:t>
+                        <a:t>395</a:t>
                       </a:r>
                     </a:p>
                   </a:txBody>
@@ -6749,7 +5874,7 @@
                           <a:latin typeface="Meiryo"/>
                           <a:ea typeface="Meiryo"/>
                         </a:rPr>
-                        <a:t>1990年</a:t>
+                        <a:t>1973年</a:t>
                       </a:r>
                     </a:p>
                   </a:txBody>
@@ -6773,7 +5898,31 @@
                           <a:latin typeface="Meiryo"/>
                           <a:ea typeface="Meiryo"/>
                         </a:rPr>
-                        <a:t>〒810-0002 福岡県福岡市中央区西中洲12-17</a:t>
+                        <a:t>110,001 - 115,000</a:t>
+                      </a:r>
+                    </a:p>
+                  </a:txBody>
+                  <a:tcPr anchor="ctr">
+                    <a:solidFill>
+                      <a:srgbClr val="F3F4F6"/>
+                    </a:solidFill>
+                  </a:tcPr>
+                </a:tc>
+                <a:tc>
+                  <a:txBody>
+                    <a:bodyPr/>
+                    <a:lstStyle/>
+                    <a:p>
+                      <a:pPr algn="l"/>
+                      <a:r>
+                        <a:rPr sz="900" b="0">
+                          <a:solidFill>
+                            <a:srgbClr val="1F2937"/>
+                          </a:solidFill>
+                          <a:latin typeface="Meiryo"/>
+                          <a:ea typeface="Meiryo"/>
+                        </a:rPr>
+                        <a:t>長野県軽井沢町軽井沢</a:t>
                       </a:r>
                     </a:p>
                   </a:txBody>
@@ -6823,7 +5972,7 @@
                           <a:latin typeface="Meiryo"/>
                           <a:ea typeface="Meiryo"/>
                         </a:rPr>
-                        <a:t>JR九州ホテルブラッサム福岡</a:t>
+                        <a:t>ザ・プリンス 軽井沢</a:t>
                       </a:r>
                     </a:p>
                   </a:txBody>
@@ -6847,7 +5996,7 @@
                           <a:latin typeface="Meiryo"/>
                           <a:ea typeface="Meiryo"/>
                         </a:rPr>
-                        <a:t>ビジネスホテル</a:t>
+                        <a:t>リゾートホテル</a:t>
                       </a:r>
                     </a:p>
                   </a:txBody>
@@ -6871,7 +6020,7 @@
                           <a:latin typeface="Meiryo"/>
                           <a:ea typeface="Meiryo"/>
                         </a:rPr>
-                        <a:t>90</a:t>
+                        <a:t>100</a:t>
                       </a:r>
                     </a:p>
                   </a:txBody>
@@ -6895,7 +6044,7 @@
                           <a:latin typeface="Meiryo"/>
                           <a:ea typeface="Meiryo"/>
                         </a:rPr>
-                        <a:t>1992年</a:t>
+                        <a:t>1982年</a:t>
                       </a:r>
                     </a:p>
                   </a:txBody>
@@ -6919,7 +6068,31 @@
                           <a:latin typeface="Meiryo"/>
                           <a:ea typeface="Meiryo"/>
                         </a:rPr>
-                        <a:t>〒812-0013 福岡県福岡市博多区博多駅東2丁目2-4</a:t>
+                        <a:t>35,001 - 40,000</a:t>
+                      </a:r>
+                    </a:p>
+                  </a:txBody>
+                  <a:tcPr anchor="ctr">
+                    <a:solidFill>
+                      <a:srgbClr val="FFFFFF"/>
+                    </a:solidFill>
+                  </a:tcPr>
+                </a:tc>
+                <a:tc>
+                  <a:txBody>
+                    <a:bodyPr/>
+                    <a:lstStyle/>
+                    <a:p>
+                      <a:pPr algn="l"/>
+                      <a:r>
+                        <a:rPr sz="900" b="0">
+                          <a:solidFill>
+                            <a:srgbClr val="1F2937"/>
+                          </a:solidFill>
+                          <a:latin typeface="Meiryo"/>
+                          <a:ea typeface="Meiryo"/>
+                        </a:rPr>
+                        <a:t>〒389-0193 長野県北佐久郡軽井沢町軽井沢1049-1</a:t>
                       </a:r>
                     </a:p>
                   </a:txBody>
@@ -6969,7 +6142,7 @@
                           <a:latin typeface="Meiryo"/>
                           <a:ea typeface="Meiryo"/>
                         </a:rPr>
-                        <a:t>グランドハイアット福岡</a:t>
+                        <a:t>星のや軽井沢</a:t>
                       </a:r>
                     </a:p>
                   </a:txBody>
@@ -6993,7 +6166,7 @@
                           <a:latin typeface="Meiryo"/>
                           <a:ea typeface="Meiryo"/>
                         </a:rPr>
-                        <a:t>シティホテル</a:t>
+                        <a:t>リゾートホテル</a:t>
                       </a:r>
                     </a:p>
                   </a:txBody>
@@ -7017,7 +6190,7 @@
                           <a:latin typeface="Meiryo"/>
                           <a:ea typeface="Meiryo"/>
                         </a:rPr>
-                        <a:t>372</a:t>
+                        <a:t>77</a:t>
                       </a:r>
                     </a:p>
                   </a:txBody>
@@ -7041,7 +6214,7 @@
                           <a:latin typeface="Meiryo"/>
                           <a:ea typeface="Meiryo"/>
                         </a:rPr>
-                        <a:t>1996年</a:t>
+                        <a:t>2005年</a:t>
                       </a:r>
                     </a:p>
                   </a:txBody>
@@ -7065,7 +6238,31 @@
                           <a:latin typeface="Meiryo"/>
                           <a:ea typeface="Meiryo"/>
                         </a:rPr>
-                        <a:t>〒812-0018 福岡県福岡市博多区住吉1丁目2-82</a:t>
+                        <a:t>175,001 - 180,000</a:t>
+                      </a:r>
+                    </a:p>
+                  </a:txBody>
+                  <a:tcPr anchor="ctr">
+                    <a:solidFill>
+                      <a:srgbClr val="F3F4F6"/>
+                    </a:solidFill>
+                  </a:tcPr>
+                </a:tc>
+                <a:tc>
+                  <a:txBody>
+                    <a:bodyPr/>
+                    <a:lstStyle/>
+                    <a:p>
+                      <a:pPr algn="l"/>
+                      <a:r>
+                        <a:rPr sz="900" b="0">
+                          <a:solidFill>
+                            <a:srgbClr val="1F2937"/>
+                          </a:solidFill>
+                          <a:latin typeface="Meiryo"/>
+                          <a:ea typeface="Meiryo"/>
+                        </a:rPr>
+                        <a:t>長野県北佐久郡軽井沢町</a:t>
                       </a:r>
                     </a:p>
                   </a:txBody>
@@ -7115,7 +6312,7 @@
                           <a:latin typeface="Meiryo"/>
                           <a:ea typeface="Meiryo"/>
                         </a:rPr>
-                        <a:t>ザ ロイヤルパークホテル 福岡</a:t>
+                        <a:t>軽井沢マリオットホテル</a:t>
                       </a:r>
                     </a:p>
                   </a:txBody>
@@ -7139,7 +6336,7 @@
                           <a:latin typeface="Meiryo"/>
                           <a:ea typeface="Meiryo"/>
                         </a:rPr>
-                        <a:t>ビジネスホテル</a:t>
+                        <a:t>リゾートホテル</a:t>
                       </a:r>
                     </a:p>
                   </a:txBody>
@@ -7163,7 +6360,7 @@
                           <a:latin typeface="Meiryo"/>
                           <a:ea typeface="Meiryo"/>
                         </a:rPr>
-                        <a:t>174</a:t>
+                        <a:t>142</a:t>
                       </a:r>
                     </a:p>
                   </a:txBody>
@@ -7187,7 +6384,7 @@
                           <a:latin typeface="Meiryo"/>
                           <a:ea typeface="Meiryo"/>
                         </a:rPr>
-                        <a:t>2011年</a:t>
+                        <a:t>2016年</a:t>
                       </a:r>
                     </a:p>
                   </a:txBody>
@@ -7211,7 +6408,31 @@
                           <a:latin typeface="Meiryo"/>
                           <a:ea typeface="Meiryo"/>
                         </a:rPr>
-                        <a:t>〒812-0011 福岡県福岡市博多区博多駅前2丁目14-15</a:t>
+                        <a:t>85,001 - 90,000</a:t>
+                      </a:r>
+                    </a:p>
+                  </a:txBody>
+                  <a:tcPr anchor="ctr">
+                    <a:solidFill>
+                      <a:srgbClr val="FFFFFF"/>
+                    </a:solidFill>
+                  </a:tcPr>
+                </a:tc>
+                <a:tc>
+                  <a:txBody>
+                    <a:bodyPr/>
+                    <a:lstStyle/>
+                    <a:p>
+                      <a:pPr algn="l"/>
+                      <a:r>
+                        <a:rPr sz="900" b="0">
+                          <a:solidFill>
+                            <a:srgbClr val="1F2937"/>
+                          </a:solidFill>
+                          <a:latin typeface="Meiryo"/>
+                          <a:ea typeface="Meiryo"/>
+                        </a:rPr>
+                        <a:t>〒389-0111 長野県北佐久郡軽井沢町長倉4339</a:t>
                       </a:r>
                     </a:p>
                   </a:txBody>
@@ -7261,7 +6482,7 @@
                           <a:latin typeface="Meiryo"/>
                           <a:ea typeface="Meiryo"/>
                         </a:rPr>
-                        <a:t>JR九州ホテル ブラッサム博多中央</a:t>
+                        <a:t>レジーナリゾート軽井沢御影用水</a:t>
                       </a:r>
                     </a:p>
                   </a:txBody>
@@ -7285,7 +6506,7 @@
                           <a:latin typeface="Meiryo"/>
                           <a:ea typeface="Meiryo"/>
                         </a:rPr>
-                        <a:t>ビジネスホテル</a:t>
+                        <a:t>リゾートホテル</a:t>
                       </a:r>
                     </a:p>
                   </a:txBody>
@@ -7309,7 +6530,7 @@
                           <a:latin typeface="Meiryo"/>
                           <a:ea typeface="Meiryo"/>
                         </a:rPr>
-                        <a:t>247</a:t>
+                        <a:t>26</a:t>
                       </a:r>
                     </a:p>
                   </a:txBody>
@@ -7333,7 +6554,7 @@
                           <a:latin typeface="Meiryo"/>
                           <a:ea typeface="Meiryo"/>
                         </a:rPr>
-                        <a:t>2013年</a:t>
+                        <a:t>2017年</a:t>
                       </a:r>
                     </a:p>
                   </a:txBody>
@@ -7357,7 +6578,31 @@
                           <a:latin typeface="Meiryo"/>
                           <a:ea typeface="Meiryo"/>
                         </a:rPr>
-                        <a:t>〒812-0011 福岡県福岡市博多区博多駅前2丁目2-11</a:t>
+                        <a:t>50,001 - 55,000</a:t>
+                      </a:r>
+                    </a:p>
+                  </a:txBody>
+                  <a:tcPr anchor="ctr">
+                    <a:solidFill>
+                      <a:srgbClr val="F3F4F6"/>
+                    </a:solidFill>
+                  </a:tcPr>
+                </a:tc>
+                <a:tc>
+                  <a:txBody>
+                    <a:bodyPr/>
+                    <a:lstStyle/>
+                    <a:p>
+                      <a:pPr algn="l"/>
+                      <a:r>
+                        <a:rPr sz="900" b="0">
+                          <a:solidFill>
+                            <a:srgbClr val="1F2937"/>
+                          </a:solidFill>
+                          <a:latin typeface="Meiryo"/>
+                          <a:ea typeface="Meiryo"/>
+                        </a:rPr>
+                        <a:t>〒389-0115 長野県北佐久郡軽井沢町追分49-2</a:t>
                       </a:r>
                     </a:p>
                   </a:txBody>
@@ -7407,7 +6652,7 @@
                           <a:latin typeface="Meiryo"/>
                           <a:ea typeface="Meiryo"/>
                         </a:rPr>
-                        <a:t>東急ステイ博多</a:t>
+                        <a:t>旧軽井沢KIKYOキュリオ・コレクションbyヒルトン</a:t>
                       </a:r>
                     </a:p>
                   </a:txBody>
@@ -7431,7 +6676,7 @@
                           <a:latin typeface="Meiryo"/>
                           <a:ea typeface="Meiryo"/>
                         </a:rPr>
-                        <a:t>ビジネスホテル</a:t>
+                        <a:t>リゾートホテル</a:t>
                       </a:r>
                     </a:p>
                   </a:txBody>
@@ -7455,7 +6700,7 @@
                           <a:latin typeface="Meiryo"/>
                           <a:ea typeface="Meiryo"/>
                         </a:rPr>
-                        <a:t>216</a:t>
+                        <a:t>50</a:t>
                       </a:r>
                     </a:p>
                   </a:txBody>
@@ -7503,7 +6748,31 @@
                           <a:latin typeface="Meiryo"/>
                           <a:ea typeface="Meiryo"/>
                         </a:rPr>
-                        <a:t>福岡県福岡市博多区博多駅南一丁目１１番１１号</a:t>
+                        <a:t>110,001 - 115,000</a:t>
+                      </a:r>
+                    </a:p>
+                  </a:txBody>
+                  <a:tcPr anchor="ctr">
+                    <a:solidFill>
+                      <a:srgbClr val="FFFFFF"/>
+                    </a:solidFill>
+                  </a:tcPr>
+                </a:tc>
+                <a:tc>
+                  <a:txBody>
+                    <a:bodyPr/>
+                    <a:lstStyle/>
+                    <a:p>
+                      <a:pPr algn="l"/>
+                      <a:r>
+                        <a:rPr sz="900" b="0">
+                          <a:solidFill>
+                            <a:srgbClr val="1F2937"/>
+                          </a:solidFill>
+                          <a:latin typeface="Meiryo"/>
+                          <a:ea typeface="Meiryo"/>
+                        </a:rPr>
+                        <a:t>〒389-0102 長野県北佐久郡軽井沢町軽井沢491-5</a:t>
                       </a:r>
                     </a:p>
                   </a:txBody>
@@ -7553,7 +6822,7 @@
                           <a:latin typeface="Meiryo"/>
                           <a:ea typeface="Meiryo"/>
                         </a:rPr>
-                        <a:t>東急ステイ福岡天神</a:t>
+                        <a:t>ルグラン軽井沢ホテル＆リゾート</a:t>
                       </a:r>
                     </a:p>
                   </a:txBody>
@@ -7577,7 +6846,7 @@
                           <a:latin typeface="Meiryo"/>
                           <a:ea typeface="Meiryo"/>
                         </a:rPr>
-                        <a:t>ビジネスホテル</a:t>
+                        <a:t>リゾートホテル</a:t>
                       </a:r>
                     </a:p>
                   </a:txBody>
@@ -7601,7 +6870,7 @@
                           <a:latin typeface="Meiryo"/>
                           <a:ea typeface="Meiryo"/>
                         </a:rPr>
-                        <a:t>252</a:t>
+                        <a:t>58</a:t>
                       </a:r>
                     </a:p>
                   </a:txBody>
@@ -7625,7 +6894,7 @@
                           <a:latin typeface="Meiryo"/>
                           <a:ea typeface="Meiryo"/>
                         </a:rPr>
-                        <a:t>2019年</a:t>
+                        <a:t>2018年</a:t>
                       </a:r>
                     </a:p>
                   </a:txBody>
@@ -7649,7 +6918,31 @@
                           <a:latin typeface="Meiryo"/>
                           <a:ea typeface="Meiryo"/>
                         </a:rPr>
-                        <a:t>〒810-0003 福岡県福岡市中央区春吉3丁目21-24</a:t>
+                        <a:t>85,001 - 90,000</a:t>
+                      </a:r>
+                    </a:p>
+                  </a:txBody>
+                  <a:tcPr anchor="ctr">
+                    <a:solidFill>
+                      <a:srgbClr val="F3F4F6"/>
+                    </a:solidFill>
+                  </a:tcPr>
+                </a:tc>
+                <a:tc>
+                  <a:txBody>
+                    <a:bodyPr/>
+                    <a:lstStyle/>
+                    <a:p>
+                      <a:pPr algn="l"/>
+                      <a:r>
+                        <a:rPr sz="900" b="0">
+                          <a:solidFill>
+                            <a:srgbClr val="1F2937"/>
+                          </a:solidFill>
+                          <a:latin typeface="Meiryo"/>
+                          <a:ea typeface="Meiryo"/>
+                        </a:rPr>
+                        <a:t>長野県軽井沢町発地</a:t>
                       </a:r>
                     </a:p>
                   </a:txBody>
@@ -7699,7 +6992,7 @@
                           <a:latin typeface="Meiryo"/>
                           <a:ea typeface="Meiryo"/>
                         </a:rPr>
-                        <a:t>ザ ブラッサム博多プレミア</a:t>
+                        <a:t>軽井沢プリンスホテル イースト</a:t>
                       </a:r>
                     </a:p>
                   </a:txBody>
@@ -7723,7 +7016,7 @@
                           <a:latin typeface="Meiryo"/>
                           <a:ea typeface="Meiryo"/>
                         </a:rPr>
-                        <a:t>ビジネスホテル</a:t>
+                        <a:t>リゾートホテル</a:t>
                       </a:r>
                     </a:p>
                   </a:txBody>
@@ -7747,7 +7040,7 @@
                           <a:latin typeface="Meiryo"/>
                           <a:ea typeface="Meiryo"/>
                         </a:rPr>
-                        <a:t>238</a:t>
+                        <a:t>159</a:t>
                       </a:r>
                     </a:p>
                   </a:txBody>
@@ -7771,7 +7064,7 @@
                           <a:latin typeface="Meiryo"/>
                           <a:ea typeface="Meiryo"/>
                         </a:rPr>
-                        <a:t>2019年</a:t>
+                        <a:t>2020年</a:t>
                       </a:r>
                     </a:p>
                   </a:txBody>
@@ -7795,7 +7088,31 @@
                           <a:latin typeface="Meiryo"/>
                           <a:ea typeface="Meiryo"/>
                         </a:rPr>
-                        <a:t>〒812-0011 福岡県福岡市博多区博多駅前2丁目8-12</a:t>
+                        <a:t>40,001 - 45,000</a:t>
+                      </a:r>
+                    </a:p>
+                  </a:txBody>
+                  <a:tcPr anchor="ctr">
+                    <a:solidFill>
+                      <a:srgbClr val="FFFFFF"/>
+                    </a:solidFill>
+                  </a:tcPr>
+                </a:tc>
+                <a:tc>
+                  <a:txBody>
+                    <a:bodyPr/>
+                    <a:lstStyle/>
+                    <a:p>
+                      <a:pPr algn="l"/>
+                      <a:r>
+                        <a:rPr sz="900" b="0">
+                          <a:solidFill>
+                            <a:srgbClr val="1F2937"/>
+                          </a:solidFill>
+                          <a:latin typeface="Meiryo"/>
+                          <a:ea typeface="Meiryo"/>
+                        </a:rPr>
+                        <a:t>〒389-0193 長野県北佐久郡軽井沢町軽井沢</a:t>
                       </a:r>
                     </a:p>
                   </a:txBody>
@@ -7845,7 +7162,7 @@
                           <a:latin typeface="Meiryo"/>
                           <a:ea typeface="Meiryo"/>
                         </a:rPr>
-                        <a:t>ホテルオリエンタルエクスプレス福岡中洲川端</a:t>
+                        <a:t>ホテルインディゴ軽井沢</a:t>
                       </a:r>
                     </a:p>
                   </a:txBody>
@@ -7869,7 +7186,7 @@
                           <a:latin typeface="Meiryo"/>
                           <a:ea typeface="Meiryo"/>
                         </a:rPr>
-                        <a:t>ビジネスホテル</a:t>
+                        <a:t>リゾートホテル</a:t>
                       </a:r>
                     </a:p>
                   </a:txBody>
@@ -7893,7 +7210,7 @@
                           <a:latin typeface="Meiryo"/>
                           <a:ea typeface="Meiryo"/>
                         </a:rPr>
-                        <a:t>183</a:t>
+                        <a:t>155</a:t>
                       </a:r>
                     </a:p>
                   </a:txBody>
@@ -7917,7 +7234,7 @@
                           <a:latin typeface="Meiryo"/>
                           <a:ea typeface="Meiryo"/>
                         </a:rPr>
-                        <a:t>2021年</a:t>
+                        <a:t>2022年</a:t>
                       </a:r>
                     </a:p>
                   </a:txBody>
@@ -7941,7 +7258,31 @@
                           <a:latin typeface="Meiryo"/>
                           <a:ea typeface="Meiryo"/>
                         </a:rPr>
-                        <a:t>〒812-0025 福岡県福岡市博多区店屋町6-26</a:t>
+                        <a:t>45,001 - 50,000</a:t>
+                      </a:r>
+                    </a:p>
+                  </a:txBody>
+                  <a:tcPr anchor="ctr">
+                    <a:solidFill>
+                      <a:srgbClr val="F3F4F6"/>
+                    </a:solidFill>
+                  </a:tcPr>
+                </a:tc>
+                <a:tc>
+                  <a:txBody>
+                    <a:bodyPr/>
+                    <a:lstStyle/>
+                    <a:p>
+                      <a:pPr algn="l"/>
+                      <a:r>
+                        <a:rPr sz="900" b="0">
+                          <a:solidFill>
+                            <a:srgbClr val="1F2937"/>
+                          </a:solidFill>
+                          <a:latin typeface="Meiryo"/>
+                          <a:ea typeface="Meiryo"/>
+                        </a:rPr>
+                        <a:t>〒389-0111 長野県北佐久郡軽井沢町大字長倉字屋敷添18番地39</a:t>
                       </a:r>
                     </a:p>
                   </a:txBody>
@@ -7991,7 +7332,7 @@
                           <a:latin typeface="Meiryo"/>
                           <a:ea typeface="Meiryo"/>
                         </a:rPr>
-                        <a:t>ホテルオリエンタルエクスプレス福岡天神</a:t>
+                        <a:t>ふふ 軽井沢ー陽光の風ー</a:t>
                       </a:r>
                     </a:p>
                   </a:txBody>
@@ -8015,7 +7356,7 @@
                           <a:latin typeface="Meiryo"/>
                           <a:ea typeface="Meiryo"/>
                         </a:rPr>
-                        <a:t>ビジネスホテル</a:t>
+                        <a:t>旅館</a:t>
                       </a:r>
                     </a:p>
                   </a:txBody>
@@ -8039,7 +7380,7 @@
                           <a:latin typeface="Meiryo"/>
                           <a:ea typeface="Meiryo"/>
                         </a:rPr>
-                        <a:t>263</a:t>
+                        <a:t>24</a:t>
                       </a:r>
                     </a:p>
                   </a:txBody>
@@ -8063,7 +7404,7 @@
                           <a:latin typeface="Meiryo"/>
                           <a:ea typeface="Meiryo"/>
                         </a:rPr>
-                        <a:t>2021年</a:t>
+                        <a:t>2023年</a:t>
                       </a:r>
                     </a:p>
                   </a:txBody>
@@ -8087,7 +7428,31 @@
                           <a:latin typeface="Meiryo"/>
                           <a:ea typeface="Meiryo"/>
                         </a:rPr>
-                        <a:t>〒810-0001 福岡県福岡市中央区天神3丁目3-14</a:t>
+                        <a:t>155,001 - 160,000</a:t>
+                      </a:r>
+                    </a:p>
+                  </a:txBody>
+                  <a:tcPr anchor="ctr">
+                    <a:solidFill>
+                      <a:srgbClr val="FFFFFF"/>
+                    </a:solidFill>
+                  </a:tcPr>
+                </a:tc>
+                <a:tc>
+                  <a:txBody>
+                    <a:bodyPr/>
+                    <a:lstStyle/>
+                    <a:p>
+                      <a:pPr algn="l"/>
+                      <a:r>
+                        <a:rPr sz="900" b="0">
+                          <a:solidFill>
+                            <a:srgbClr val="1F2937"/>
+                          </a:solidFill>
+                          <a:latin typeface="Meiryo"/>
+                          <a:ea typeface="Meiryo"/>
+                        </a:rPr>
+                        <a:t>〒389-0111長野県北佐久郡軽井沢町大字長倉568-1</a:t>
                       </a:r>
                     </a:p>
                   </a:txBody>
@@ -8137,7 +7502,7 @@
                           <a:latin typeface="Meiryo"/>
                           <a:ea typeface="Meiryo"/>
                         </a:rPr>
-                        <a:t>ザ・リッツ・カールトン福岡</a:t>
+                        <a:t>ふふ 旧軽井沢ー静養の森ー</a:t>
                       </a:r>
                     </a:p>
                   </a:txBody>
@@ -8161,7 +7526,7 @@
                           <a:latin typeface="Meiryo"/>
                           <a:ea typeface="Meiryo"/>
                         </a:rPr>
-                        <a:t>シティホテル</a:t>
+                        <a:t>旅館</a:t>
                       </a:r>
                     </a:p>
                   </a:txBody>
@@ -8185,7 +7550,7 @@
                           <a:latin typeface="Meiryo"/>
                           <a:ea typeface="Meiryo"/>
                         </a:rPr>
-                        <a:t>167</a:t>
+                        <a:t>20</a:t>
                       </a:r>
                     </a:p>
                   </a:txBody>
@@ -8233,7 +7598,7 @@
                           <a:latin typeface="Meiryo"/>
                           <a:ea typeface="Meiryo"/>
                         </a:rPr>
-                        <a:t>〒810-0041 福岡県福岡市中央区大名2丁目6-50</a:t>
+                        <a:t>105,001 - 110,000</a:t>
                       </a:r>
                     </a:p>
                   </a:txBody>
@@ -8243,32 +7608,6 @@
                     </a:solidFill>
                   </a:tcPr>
                 </a:tc>
-              </a:tr>
-              <a:tr h="292608">
-                <a:tc>
-                  <a:txBody>
-                    <a:bodyPr/>
-                    <a:lstStyle/>
-                    <a:p>
-                      <a:pPr algn="ctr"/>
-                      <a:r>
-                        <a:rPr sz="900" b="0">
-                          <a:solidFill>
-                            <a:srgbClr val="1F2937"/>
-                          </a:solidFill>
-                          <a:latin typeface="Meiryo"/>
-                          <a:ea typeface="Meiryo"/>
-                        </a:rPr>
-                        <a:t>13</a:t>
-                      </a:r>
-                    </a:p>
-                  </a:txBody>
-                  <a:tcPr anchor="ctr">
-                    <a:solidFill>
-                      <a:srgbClr val="FFFFFF"/>
-                    </a:solidFill>
-                  </a:tcPr>
-                </a:tc>
                 <a:tc>
                   <a:txBody>
                     <a:bodyPr/>
@@ -8283,833 +7622,7 @@
                           <a:latin typeface="Meiryo"/>
                           <a:ea typeface="Meiryo"/>
                         </a:rPr>
-                        <a:t>ザ ロイヤルパーク キャンバス 福岡中洲</a:t>
-                      </a:r>
-                    </a:p>
-                  </a:txBody>
-                  <a:tcPr anchor="ctr">
-                    <a:solidFill>
-                      <a:srgbClr val="FFFFFF"/>
-                    </a:solidFill>
-                  </a:tcPr>
-                </a:tc>
-                <a:tc>
-                  <a:txBody>
-                    <a:bodyPr/>
-                    <a:lstStyle/>
-                    <a:p>
-                      <a:pPr algn="ctr"/>
-                      <a:r>
-                        <a:rPr sz="900" b="0">
-                          <a:solidFill>
-                            <a:srgbClr val="1F2937"/>
-                          </a:solidFill>
-                          <a:latin typeface="Meiryo"/>
-                          <a:ea typeface="Meiryo"/>
-                        </a:rPr>
-                        <a:t>ビジネスホテル</a:t>
-                      </a:r>
-                    </a:p>
-                  </a:txBody>
-                  <a:tcPr anchor="ctr">
-                    <a:solidFill>
-                      <a:srgbClr val="FFFFFF"/>
-                    </a:solidFill>
-                  </a:tcPr>
-                </a:tc>
-                <a:tc>
-                  <a:txBody>
-                    <a:bodyPr/>
-                    <a:lstStyle/>
-                    <a:p>
-                      <a:pPr algn="ctr"/>
-                      <a:r>
-                        <a:rPr sz="900" b="0">
-                          <a:solidFill>
-                            <a:srgbClr val="1F2937"/>
-                          </a:solidFill>
-                          <a:latin typeface="Meiryo"/>
-                          <a:ea typeface="Meiryo"/>
-                        </a:rPr>
-                        <a:t>255</a:t>
-                      </a:r>
-                    </a:p>
-                  </a:txBody>
-                  <a:tcPr anchor="ctr">
-                    <a:solidFill>
-                      <a:srgbClr val="FFFFFF"/>
-                    </a:solidFill>
-                  </a:tcPr>
-                </a:tc>
-                <a:tc>
-                  <a:txBody>
-                    <a:bodyPr/>
-                    <a:lstStyle/>
-                    <a:p>
-                      <a:pPr algn="ctr"/>
-                      <a:r>
-                        <a:rPr sz="900" b="0">
-                          <a:solidFill>
-                            <a:srgbClr val="1F2937"/>
-                          </a:solidFill>
-                          <a:latin typeface="Meiryo"/>
-                          <a:ea typeface="Meiryo"/>
-                        </a:rPr>
-                        <a:t>2023年</a:t>
-                      </a:r>
-                    </a:p>
-                  </a:txBody>
-                  <a:tcPr anchor="ctr">
-                    <a:solidFill>
-                      <a:srgbClr val="FFFFFF"/>
-                    </a:solidFill>
-                  </a:tcPr>
-                </a:tc>
-                <a:tc>
-                  <a:txBody>
-                    <a:bodyPr/>
-                    <a:lstStyle/>
-                    <a:p>
-                      <a:pPr algn="l"/>
-                      <a:r>
-                        <a:rPr sz="900" b="0">
-                          <a:solidFill>
-                            <a:srgbClr val="1F2937"/>
-                          </a:solidFill>
-                          <a:latin typeface="Meiryo"/>
-                          <a:ea typeface="Meiryo"/>
-                        </a:rPr>
-                        <a:t>〒810-0801 福岡県福岡市博多区中洲5丁目6</a:t>
-                      </a:r>
-                    </a:p>
-                  </a:txBody>
-                  <a:tcPr anchor="ctr">
-                    <a:solidFill>
-                      <a:srgbClr val="FFFFFF"/>
-                    </a:solidFill>
-                  </a:tcPr>
-                </a:tc>
-              </a:tr>
-              <a:tr h="292608">
-                <a:tc>
-                  <a:txBody>
-                    <a:bodyPr/>
-                    <a:lstStyle/>
-                    <a:p>
-                      <a:pPr algn="ctr"/>
-                      <a:r>
-                        <a:rPr sz="900" b="0">
-                          <a:solidFill>
-                            <a:srgbClr val="1F2937"/>
-                          </a:solidFill>
-                          <a:latin typeface="Meiryo"/>
-                          <a:ea typeface="Meiryo"/>
-                        </a:rPr>
-                        <a:t>14</a:t>
-                      </a:r>
-                    </a:p>
-                  </a:txBody>
-                  <a:tcPr anchor="ctr">
-                    <a:solidFill>
-                      <a:srgbClr val="F3F4F6"/>
-                    </a:solidFill>
-                  </a:tcPr>
-                </a:tc>
-                <a:tc>
-                  <a:txBody>
-                    <a:bodyPr/>
-                    <a:lstStyle/>
-                    <a:p>
-                      <a:pPr algn="l"/>
-                      <a:r>
-                        <a:rPr sz="900" b="0">
-                          <a:solidFill>
-                            <a:srgbClr val="1F2937"/>
-                          </a:solidFill>
-                          <a:latin typeface="Meiryo"/>
-                          <a:ea typeface="Meiryo"/>
-                        </a:rPr>
-                        <a:t>ONE FUKUOKA HOTEL</a:t>
-                      </a:r>
-                    </a:p>
-                  </a:txBody>
-                  <a:tcPr anchor="ctr">
-                    <a:solidFill>
-                      <a:srgbClr val="F3F4F6"/>
-                    </a:solidFill>
-                  </a:tcPr>
-                </a:tc>
-                <a:tc>
-                  <a:txBody>
-                    <a:bodyPr/>
-                    <a:lstStyle/>
-                    <a:p>
-                      <a:pPr algn="ctr"/>
-                      <a:r>
-                        <a:rPr sz="900" b="0">
-                          <a:solidFill>
-                            <a:srgbClr val="1F2937"/>
-                          </a:solidFill>
-                          <a:latin typeface="Meiryo"/>
-                          <a:ea typeface="Meiryo"/>
-                        </a:rPr>
-                        <a:t>シティホテル</a:t>
-                      </a:r>
-                    </a:p>
-                  </a:txBody>
-                  <a:tcPr anchor="ctr">
-                    <a:solidFill>
-                      <a:srgbClr val="F3F4F6"/>
-                    </a:solidFill>
-                  </a:tcPr>
-                </a:tc>
-                <a:tc>
-                  <a:txBody>
-                    <a:bodyPr/>
-                    <a:lstStyle/>
-                    <a:p>
-                      <a:pPr algn="ctr"/>
-                      <a:r>
-                        <a:rPr sz="900" b="0">
-                          <a:solidFill>
-                            <a:srgbClr val="1F2937"/>
-                          </a:solidFill>
-                          <a:latin typeface="Meiryo"/>
-                          <a:ea typeface="Meiryo"/>
-                        </a:rPr>
-                        <a:t>41</a:t>
-                      </a:r>
-                    </a:p>
-                  </a:txBody>
-                  <a:tcPr anchor="ctr">
-                    <a:solidFill>
-                      <a:srgbClr val="F3F4F6"/>
-                    </a:solidFill>
-                  </a:tcPr>
-                </a:tc>
-                <a:tc>
-                  <a:txBody>
-                    <a:bodyPr/>
-                    <a:lstStyle/>
-                    <a:p>
-                      <a:pPr algn="ctr"/>
-                      <a:r>
-                        <a:rPr sz="900" b="0">
-                          <a:solidFill>
-                            <a:srgbClr val="1F2937"/>
-                          </a:solidFill>
-                          <a:latin typeface="Meiryo"/>
-                          <a:ea typeface="Meiryo"/>
-                        </a:rPr>
-                        <a:t>2025年</a:t>
-                      </a:r>
-                    </a:p>
-                  </a:txBody>
-                  <a:tcPr anchor="ctr">
-                    <a:solidFill>
-                      <a:srgbClr val="F3F4F6"/>
-                    </a:solidFill>
-                  </a:tcPr>
-                </a:tc>
-                <a:tc>
-                  <a:txBody>
-                    <a:bodyPr/>
-                    <a:lstStyle/>
-                    <a:p>
-                      <a:pPr algn="l"/>
-                      <a:r>
-                        <a:rPr sz="900" b="0">
-                          <a:solidFill>
-                            <a:srgbClr val="1F2937"/>
-                          </a:solidFill>
-                          <a:latin typeface="Meiryo"/>
-                          <a:ea typeface="Meiryo"/>
-                        </a:rPr>
-                        <a:t>〒810-0001 福岡県福岡市中央区天神1丁目11-1</a:t>
-                      </a:r>
-                    </a:p>
-                  </a:txBody>
-                  <a:tcPr anchor="ctr">
-                    <a:solidFill>
-                      <a:srgbClr val="F3F4F6"/>
-                    </a:solidFill>
-                  </a:tcPr>
-                </a:tc>
-              </a:tr>
-              <a:tr h="292608">
-                <a:tc>
-                  <a:txBody>
-                    <a:bodyPr/>
-                    <a:lstStyle/>
-                    <a:p>
-                      <a:pPr algn="ctr"/>
-                      <a:r>
-                        <a:rPr sz="900" b="0">
-                          <a:solidFill>
-                            <a:srgbClr val="1F2937"/>
-                          </a:solidFill>
-                          <a:latin typeface="Meiryo"/>
-                          <a:ea typeface="Meiryo"/>
-                        </a:rPr>
-                        <a:t>15</a:t>
-                      </a:r>
-                    </a:p>
-                  </a:txBody>
-                  <a:tcPr anchor="ctr">
-                    <a:solidFill>
-                      <a:srgbClr val="FFFFFF"/>
-                    </a:solidFill>
-                  </a:tcPr>
-                </a:tc>
-                <a:tc>
-                  <a:txBody>
-                    <a:bodyPr/>
-                    <a:lstStyle/>
-                    <a:p>
-                      <a:pPr algn="l"/>
-                      <a:r>
-                        <a:rPr sz="900" b="0">
-                          <a:solidFill>
-                            <a:srgbClr val="1F2937"/>
-                          </a:solidFill>
-                          <a:latin typeface="Meiryo"/>
-                          <a:ea typeface="Meiryo"/>
-                        </a:rPr>
-                        <a:t>ザ・ゲートホテル福岡 by HULIC</a:t>
-                      </a:r>
-                    </a:p>
-                  </a:txBody>
-                  <a:tcPr anchor="ctr">
-                    <a:solidFill>
-                      <a:srgbClr val="FFFFFF"/>
-                    </a:solidFill>
-                  </a:tcPr>
-                </a:tc>
-                <a:tc>
-                  <a:txBody>
-                    <a:bodyPr/>
-                    <a:lstStyle/>
-                    <a:p>
-                      <a:pPr algn="ctr"/>
-                      <a:r>
-                        <a:rPr sz="900" b="0">
-                          <a:solidFill>
-                            <a:srgbClr val="1F2937"/>
-                          </a:solidFill>
-                          <a:latin typeface="Meiryo"/>
-                          <a:ea typeface="Meiryo"/>
-                        </a:rPr>
-                        <a:t>シティホテル</a:t>
-                      </a:r>
-                    </a:p>
-                  </a:txBody>
-                  <a:tcPr anchor="ctr">
-                    <a:solidFill>
-                      <a:srgbClr val="FFFFFF"/>
-                    </a:solidFill>
-                  </a:tcPr>
-                </a:tc>
-                <a:tc>
-                  <a:txBody>
-                    <a:bodyPr/>
-                    <a:lstStyle/>
-                    <a:p>
-                      <a:pPr algn="ctr"/>
-                      <a:r>
-                        <a:rPr sz="900" b="0">
-                          <a:solidFill>
-                            <a:srgbClr val="1F2937"/>
-                          </a:solidFill>
-                          <a:latin typeface="Meiryo"/>
-                          <a:ea typeface="Meiryo"/>
-                        </a:rPr>
-                        <a:t>171</a:t>
-                      </a:r>
-                    </a:p>
-                  </a:txBody>
-                  <a:tcPr anchor="ctr">
-                    <a:solidFill>
-                      <a:srgbClr val="FFFFFF"/>
-                    </a:solidFill>
-                  </a:tcPr>
-                </a:tc>
-                <a:tc>
-                  <a:txBody>
-                    <a:bodyPr/>
-                    <a:lstStyle/>
-                    <a:p>
-                      <a:pPr algn="ctr"/>
-                      <a:r>
-                        <a:rPr sz="900" b="0">
-                          <a:solidFill>
-                            <a:srgbClr val="1F2937"/>
-                          </a:solidFill>
-                          <a:latin typeface="Meiryo"/>
-                          <a:ea typeface="Meiryo"/>
-                        </a:rPr>
-                        <a:t>2025年</a:t>
-                      </a:r>
-                    </a:p>
-                  </a:txBody>
-                  <a:tcPr anchor="ctr">
-                    <a:solidFill>
-                      <a:srgbClr val="FFFFFF"/>
-                    </a:solidFill>
-                  </a:tcPr>
-                </a:tc>
-                <a:tc>
-                  <a:txBody>
-                    <a:bodyPr/>
-                    <a:lstStyle/>
-                    <a:p>
-                      <a:pPr algn="l"/>
-                      <a:r>
-                        <a:rPr sz="900" b="0">
-                          <a:solidFill>
-                            <a:srgbClr val="1F2937"/>
-                          </a:solidFill>
-                          <a:latin typeface="Meiryo"/>
-                          <a:ea typeface="Meiryo"/>
-                        </a:rPr>
-                        <a:t>〒810-0001 福岡県福岡市中央区天神2丁目8-49</a:t>
-                      </a:r>
-                    </a:p>
-                  </a:txBody>
-                  <a:tcPr anchor="ctr">
-                    <a:solidFill>
-                      <a:srgbClr val="FFFFFF"/>
-                    </a:solidFill>
-                  </a:tcPr>
-                </a:tc>
-              </a:tr>
-              <a:tr h="292608">
-                <a:tc>
-                  <a:txBody>
-                    <a:bodyPr/>
-                    <a:lstStyle/>
-                    <a:p>
-                      <a:pPr algn="ctr"/>
-                      <a:r>
-                        <a:rPr sz="900" b="0">
-                          <a:solidFill>
-                            <a:srgbClr val="1F2937"/>
-                          </a:solidFill>
-                          <a:latin typeface="Meiryo"/>
-                          <a:ea typeface="Meiryo"/>
-                        </a:rPr>
-                        <a:t>16</a:t>
-                      </a:r>
-                    </a:p>
-                  </a:txBody>
-                  <a:tcPr anchor="ctr">
-                    <a:solidFill>
-                      <a:srgbClr val="F3F4F6"/>
-                    </a:solidFill>
-                  </a:tcPr>
-                </a:tc>
-                <a:tc>
-                  <a:txBody>
-                    <a:bodyPr/>
-                    <a:lstStyle/>
-                    <a:p>
-                      <a:pPr algn="l"/>
-                      <a:r>
-                        <a:rPr sz="900" b="0">
-                          <a:solidFill>
-                            <a:srgbClr val="1F2937"/>
-                          </a:solidFill>
-                          <a:latin typeface="Meiryo"/>
-                          <a:ea typeface="Meiryo"/>
-                        </a:rPr>
-                        <a:t>バウンシー・バイ・リーガ　福岡博多</a:t>
-                      </a:r>
-                    </a:p>
-                  </a:txBody>
-                  <a:tcPr anchor="ctr">
-                    <a:solidFill>
-                      <a:srgbClr val="F3F4F6"/>
-                    </a:solidFill>
-                  </a:tcPr>
-                </a:tc>
-                <a:tc>
-                  <a:txBody>
-                    <a:bodyPr/>
-                    <a:lstStyle/>
-                    <a:p>
-                      <a:pPr algn="ctr"/>
-                      <a:r>
-                        <a:rPr sz="900" b="0">
-                          <a:solidFill>
-                            <a:srgbClr val="1F2937"/>
-                          </a:solidFill>
-                          <a:latin typeface="Meiryo"/>
-                          <a:ea typeface="Meiryo"/>
-                        </a:rPr>
-                        <a:t>シティホテル</a:t>
-                      </a:r>
-                    </a:p>
-                  </a:txBody>
-                  <a:tcPr anchor="ctr">
-                    <a:solidFill>
-                      <a:srgbClr val="F3F4F6"/>
-                    </a:solidFill>
-                  </a:tcPr>
-                </a:tc>
-                <a:tc>
-                  <a:txBody>
-                    <a:bodyPr/>
-                    <a:lstStyle/>
-                    <a:p>
-                      <a:pPr algn="ctr"/>
-                      <a:r>
-                        <a:rPr sz="900" b="0">
-                          <a:solidFill>
-                            <a:srgbClr val="1F2937"/>
-                          </a:solidFill>
-                          <a:latin typeface="Meiryo"/>
-                          <a:ea typeface="Meiryo"/>
-                        </a:rPr>
-                        <a:t>117</a:t>
-                      </a:r>
-                    </a:p>
-                  </a:txBody>
-                  <a:tcPr anchor="ctr">
-                    <a:solidFill>
-                      <a:srgbClr val="F3F4F6"/>
-                    </a:solidFill>
-                  </a:tcPr>
-                </a:tc>
-                <a:tc>
-                  <a:txBody>
-                    <a:bodyPr/>
-                    <a:lstStyle/>
-                    <a:p>
-                      <a:pPr algn="ctr"/>
-                      <a:r>
-                        <a:rPr sz="900" b="0">
-                          <a:solidFill>
-                            <a:srgbClr val="1F2937"/>
-                          </a:solidFill>
-                          <a:latin typeface="Meiryo"/>
-                          <a:ea typeface="Meiryo"/>
-                        </a:rPr>
-                        <a:t>2026年</a:t>
-                      </a:r>
-                    </a:p>
-                  </a:txBody>
-                  <a:tcPr anchor="ctr">
-                    <a:solidFill>
-                      <a:srgbClr val="F3F4F6"/>
-                    </a:solidFill>
-                  </a:tcPr>
-                </a:tc>
-                <a:tc>
-                  <a:txBody>
-                    <a:bodyPr/>
-                    <a:lstStyle/>
-                    <a:p>
-                      <a:pPr algn="l"/>
-                      <a:r>
-                        <a:rPr sz="900" b="0">
-                          <a:solidFill>
-                            <a:srgbClr val="1F2937"/>
-                          </a:solidFill>
-                          <a:latin typeface="Meiryo"/>
-                          <a:ea typeface="Meiryo"/>
-                        </a:rPr>
-                        <a:t>福岡県福岡市博多区祇園町5-1</a:t>
-                      </a:r>
-                    </a:p>
-                  </a:txBody>
-                  <a:tcPr anchor="ctr">
-                    <a:solidFill>
-                      <a:srgbClr val="F3F4F6"/>
-                    </a:solidFill>
-                  </a:tcPr>
-                </a:tc>
-              </a:tr>
-              <a:tr h="292608">
-                <a:tc>
-                  <a:txBody>
-                    <a:bodyPr/>
-                    <a:lstStyle/>
-                    <a:p>
-                      <a:pPr algn="ctr"/>
-                      <a:r>
-                        <a:rPr sz="900" b="0">
-                          <a:solidFill>
-                            <a:srgbClr val="1F2937"/>
-                          </a:solidFill>
-                          <a:latin typeface="Meiryo"/>
-                          <a:ea typeface="Meiryo"/>
-                        </a:rPr>
-                        <a:t>17</a:t>
-                      </a:r>
-                    </a:p>
-                  </a:txBody>
-                  <a:tcPr anchor="ctr">
-                    <a:solidFill>
-                      <a:srgbClr val="FFFFFF"/>
-                    </a:solidFill>
-                  </a:tcPr>
-                </a:tc>
-                <a:tc>
-                  <a:txBody>
-                    <a:bodyPr/>
-                    <a:lstStyle/>
-                    <a:p>
-                      <a:pPr algn="l"/>
-                      <a:r>
-                        <a:rPr sz="900" b="0">
-                          <a:solidFill>
-                            <a:srgbClr val="1F2937"/>
-                          </a:solidFill>
-                          <a:latin typeface="Meiryo"/>
-                          <a:ea typeface="Meiryo"/>
-                        </a:rPr>
-                        <a:t>エースホテル福岡</a:t>
-                      </a:r>
-                    </a:p>
-                  </a:txBody>
-                  <a:tcPr anchor="ctr">
-                    <a:solidFill>
-                      <a:srgbClr val="FFFFFF"/>
-                    </a:solidFill>
-                  </a:tcPr>
-                </a:tc>
-                <a:tc>
-                  <a:txBody>
-                    <a:bodyPr/>
-                    <a:lstStyle/>
-                    <a:p>
-                      <a:pPr algn="ctr"/>
-                      <a:r>
-                        <a:rPr sz="900" b="0">
-                          <a:solidFill>
-                            <a:srgbClr val="1F2937"/>
-                          </a:solidFill>
-                          <a:latin typeface="Meiryo"/>
-                          <a:ea typeface="Meiryo"/>
-                        </a:rPr>
-                        <a:t>シティホテル</a:t>
-                      </a:r>
-                    </a:p>
-                  </a:txBody>
-                  <a:tcPr anchor="ctr">
-                    <a:solidFill>
-                      <a:srgbClr val="FFFFFF"/>
-                    </a:solidFill>
-                  </a:tcPr>
-                </a:tc>
-                <a:tc>
-                  <a:txBody>
-                    <a:bodyPr/>
-                    <a:lstStyle/>
-                    <a:p>
-                      <a:pPr algn="ctr"/>
-                      <a:r>
-                        <a:rPr sz="900" b="0">
-                          <a:solidFill>
-                            <a:srgbClr val="1F2937"/>
-                          </a:solidFill>
-                          <a:latin typeface="Meiryo"/>
-                          <a:ea typeface="Meiryo"/>
-                        </a:rPr>
-                        <a:t>192</a:t>
-                      </a:r>
-                    </a:p>
-                  </a:txBody>
-                  <a:tcPr anchor="ctr">
-                    <a:solidFill>
-                      <a:srgbClr val="FFFFFF"/>
-                    </a:solidFill>
-                  </a:tcPr>
-                </a:tc>
-                <a:tc>
-                  <a:txBody>
-                    <a:bodyPr/>
-                    <a:lstStyle/>
-                    <a:p>
-                      <a:pPr algn="ctr"/>
-                      <a:r>
-                        <a:rPr sz="900" b="0">
-                          <a:solidFill>
-                            <a:srgbClr val="1F2937"/>
-                          </a:solidFill>
-                          <a:latin typeface="Meiryo"/>
-                          <a:ea typeface="Meiryo"/>
-                        </a:rPr>
-                        <a:t>2027年</a:t>
-                      </a:r>
-                    </a:p>
-                  </a:txBody>
-                  <a:tcPr anchor="ctr">
-                    <a:solidFill>
-                      <a:srgbClr val="FFFFFF"/>
-                    </a:solidFill>
-                  </a:tcPr>
-                </a:tc>
-                <a:tc>
-                  <a:txBody>
-                    <a:bodyPr/>
-                    <a:lstStyle/>
-                    <a:p>
-                      <a:pPr algn="l"/>
-                      <a:r>
-                        <a:rPr sz="900" b="0">
-                          <a:solidFill>
-                            <a:srgbClr val="1F2937"/>
-                          </a:solidFill>
-                          <a:latin typeface="Meiryo"/>
-                          <a:ea typeface="Meiryo"/>
-                        </a:rPr>
-                        <a:t>福岡県福岡市中央区天神1丁目326番1他</a:t>
-                      </a:r>
-                    </a:p>
-                  </a:txBody>
-                  <a:tcPr anchor="ctr">
-                    <a:solidFill>
-                      <a:srgbClr val="FFFFFF"/>
-                    </a:solidFill>
-                  </a:tcPr>
-                </a:tc>
-              </a:tr>
-              <a:tr h="292608">
-                <a:tc>
-                  <a:txBody>
-                    <a:bodyPr/>
-                    <a:lstStyle/>
-                    <a:p>
-                      <a:pPr algn="ctr"/>
-                      <a:r>
-                        <a:rPr sz="900" b="0">
-                          <a:solidFill>
-                            <a:srgbClr val="1F2937"/>
-                          </a:solidFill>
-                          <a:latin typeface="Meiryo"/>
-                          <a:ea typeface="Meiryo"/>
-                        </a:rPr>
-                        <a:t>18</a:t>
-                      </a:r>
-                    </a:p>
-                  </a:txBody>
-                  <a:tcPr anchor="ctr">
-                    <a:solidFill>
-                      <a:srgbClr val="F3F4F6"/>
-                    </a:solidFill>
-                  </a:tcPr>
-                </a:tc>
-                <a:tc>
-                  <a:txBody>
-                    <a:bodyPr/>
-                    <a:lstStyle/>
-                    <a:p>
-                      <a:pPr algn="l"/>
-                      <a:r>
-                        <a:rPr sz="900" b="0">
-                          <a:solidFill>
-                            <a:srgbClr val="1F2937"/>
-                          </a:solidFill>
-                          <a:latin typeface="Meiryo"/>
-                          <a:ea typeface="Meiryo"/>
-                        </a:rPr>
-                        <a:t>(仮称) 福岡家裁跡インターコンチネンタルホテルズ＆リゾーツ</a:t>
-                      </a:r>
-                    </a:p>
-                  </a:txBody>
-                  <a:tcPr anchor="ctr">
-                    <a:solidFill>
-                      <a:srgbClr val="F3F4F6"/>
-                    </a:solidFill>
-                  </a:tcPr>
-                </a:tc>
-                <a:tc>
-                  <a:txBody>
-                    <a:bodyPr/>
-                    <a:lstStyle/>
-                    <a:p>
-                      <a:pPr algn="ctr"/>
-                      <a:r>
-                        <a:rPr sz="900" b="0">
-                          <a:solidFill>
-                            <a:srgbClr val="1F2937"/>
-                          </a:solidFill>
-                          <a:latin typeface="Meiryo"/>
-                          <a:ea typeface="Meiryo"/>
-                        </a:rPr>
-                        <a:t>シティホテル</a:t>
-                      </a:r>
-                    </a:p>
-                  </a:txBody>
-                  <a:tcPr anchor="ctr">
-                    <a:solidFill>
-                      <a:srgbClr val="F3F4F6"/>
-                    </a:solidFill>
-                  </a:tcPr>
-                </a:tc>
-                <a:tc>
-                  <a:txBody>
-                    <a:bodyPr/>
-                    <a:lstStyle/>
-                    <a:p>
-                      <a:pPr algn="ctr"/>
-                      <a:r>
-                        <a:rPr sz="900" b="0">
-                          <a:solidFill>
-                            <a:srgbClr val="1F2937"/>
-                          </a:solidFill>
-                          <a:latin typeface="Meiryo"/>
-                          <a:ea typeface="Meiryo"/>
-                        </a:rPr>
-                        <a:t>117</a:t>
-                      </a:r>
-                    </a:p>
-                  </a:txBody>
-                  <a:tcPr anchor="ctr">
-                    <a:solidFill>
-                      <a:srgbClr val="F3F4F6"/>
-                    </a:solidFill>
-                  </a:tcPr>
-                </a:tc>
-                <a:tc>
-                  <a:txBody>
-                    <a:bodyPr/>
-                    <a:lstStyle/>
-                    <a:p>
-                      <a:pPr algn="ctr"/>
-                      <a:r>
-                        <a:rPr sz="900" b="0">
-                          <a:solidFill>
-                            <a:srgbClr val="1F2937"/>
-                          </a:solidFill>
-                          <a:latin typeface="Meiryo"/>
-                          <a:ea typeface="Meiryo"/>
-                        </a:rPr>
-                        <a:t>2030年</a:t>
-                      </a:r>
-                    </a:p>
-                  </a:txBody>
-                  <a:tcPr anchor="ctr">
-                    <a:solidFill>
-                      <a:srgbClr val="F3F4F6"/>
-                    </a:solidFill>
-                  </a:tcPr>
-                </a:tc>
-                <a:tc>
-                  <a:txBody>
-                    <a:bodyPr/>
-                    <a:lstStyle/>
-                    <a:p>
-                      <a:pPr algn="l"/>
-                      <a:r>
-                        <a:rPr sz="900" b="0">
-                          <a:solidFill>
-                            <a:srgbClr val="1F2937"/>
-                          </a:solidFill>
-                          <a:latin typeface="Meiryo"/>
-                          <a:ea typeface="Meiryo"/>
-                        </a:rPr>
-                        <a:t>福岡県福岡市中央区大手門1丁目7-1</a:t>
+                        <a:t>〒389-0102長野県北佐久郡軽井沢町軽井沢1299-2</a:t>
                       </a:r>
                     </a:p>
                   </a:txBody>
@@ -9155,7 +7668,7 @@
                 <a:latin typeface="Meiryo"/>
                 <a:ea typeface="Meiryo"/>
               </a:rPr>
-              <a:t>出典: 各施設公表情報等</a:t>
+              <a:t>出典: 各施設公表情報等 ／ プライス・インデックスは調査時点の参考価格帯</a:t>
             </a:r>
           </a:p>
         </p:txBody>

--- a/output/benchmark_hotels.pptx
+++ b/output/benchmark_hotels.pptx
@@ -3200,7 +3200,7 @@
                 <a:latin typeface="Meiryo"/>
                 <a:ea typeface="Meiryo"/>
               </a:rPr>
-              <a:t>対象マーケットにおけるベンチマークホテルの分布と概要（12施設）</a:t>
+              <a:t>対象マーケットにおけるベンチマークホテルの分布と概要（13施設）</a:t>
             </a:r>
           </a:p>
         </p:txBody>
@@ -3361,7 +3361,7 @@
         <p:spPr>
           <a:xfrm>
             <a:off x="228600" y="914400"/>
-            <a:ext cx="7314803" cy="5669280"/>
+            <a:ext cx="7311722" cy="5669280"/>
           </a:xfrm>
           <a:prstGeom prst="rect">
             <a:avLst/>
@@ -3376,7 +3376,7 @@
         </p:nvSpPr>
         <p:spPr>
           <a:xfrm>
-            <a:off x="6562509" y="2019163"/>
+            <a:off x="6559808" y="2553246"/>
             <a:ext cx="274320" cy="274320"/>
           </a:xfrm>
           <a:prstGeom prst="ellipse">
@@ -3432,7 +3432,7 @@
         </p:nvSpPr>
         <p:spPr>
           <a:xfrm>
-            <a:off x="5820248" y="2371320"/>
+            <a:off x="5853444" y="3381854"/>
             <a:ext cx="274320" cy="274320"/>
           </a:xfrm>
           <a:prstGeom prst="ellipse">
@@ -3488,7 +3488,7 @@
         </p:nvSpPr>
         <p:spPr>
           <a:xfrm>
-            <a:off x="6272882" y="3962651"/>
+            <a:off x="6335460" y="4058688"/>
             <a:ext cx="274320" cy="274320"/>
           </a:xfrm>
           <a:prstGeom prst="ellipse">
@@ -3544,7 +3544,7 @@
         </p:nvSpPr>
         <p:spPr>
           <a:xfrm>
-            <a:off x="4236767" y="2518642"/>
+            <a:off x="5572686" y="2203050"/>
             <a:ext cx="274320" cy="274320"/>
           </a:xfrm>
           <a:prstGeom prst="ellipse">
@@ -3600,7 +3600,7 @@
         </p:nvSpPr>
         <p:spPr>
           <a:xfrm>
-            <a:off x="3230346" y="2916824"/>
+            <a:off x="3978686" y="3248582"/>
             <a:ext cx="274320" cy="274320"/>
           </a:xfrm>
           <a:prstGeom prst="ellipse">
@@ -3656,7 +3656,7 @@
         </p:nvSpPr>
         <p:spPr>
           <a:xfrm>
-            <a:off x="935174" y="3619199"/>
+            <a:off x="2200826" y="3792647"/>
             <a:ext cx="274320" cy="274320"/>
           </a:xfrm>
           <a:prstGeom prst="ellipse">
@@ -3712,7 +3712,7 @@
         </p:nvSpPr>
         <p:spPr>
           <a:xfrm>
-            <a:off x="5932322" y="2270360"/>
+            <a:off x="6071659" y="2747825"/>
             <a:ext cx="274320" cy="274320"/>
           </a:xfrm>
           <a:prstGeom prst="ellipse">
@@ -3768,7 +3768,7 @@
         </p:nvSpPr>
         <p:spPr>
           <a:xfrm>
-            <a:off x="5238085" y="5204596"/>
+            <a:off x="5533897" y="5020709"/>
             <a:ext cx="274320" cy="274320"/>
           </a:xfrm>
           <a:prstGeom prst="ellipse">
@@ -3824,7 +3824,7 @@
         </p:nvSpPr>
         <p:spPr>
           <a:xfrm>
-            <a:off x="5820248" y="2371320"/>
+            <a:off x="6348464" y="3299305"/>
             <a:ext cx="274320" cy="274320"/>
           </a:xfrm>
           <a:prstGeom prst="ellipse">
@@ -3880,7 +3880,7 @@
         </p:nvSpPr>
         <p:spPr>
           <a:xfrm>
-            <a:off x="3955152" y="3076028"/>
+            <a:off x="934794" y="3033024"/>
             <a:ext cx="274320" cy="274320"/>
           </a:xfrm>
           <a:prstGeom prst="ellipse">
@@ -3936,7 +3936,7 @@
         </p:nvSpPr>
         <p:spPr>
           <a:xfrm>
-            <a:off x="4626116" y="3458830"/>
+            <a:off x="4540127" y="3371903"/>
             <a:ext cx="274320" cy="274320"/>
           </a:xfrm>
           <a:prstGeom prst="ellipse">
@@ -3992,7 +3992,7 @@
         </p:nvSpPr>
         <p:spPr>
           <a:xfrm>
-            <a:off x="5675458" y="2446343"/>
+            <a:off x="5059861" y="3668424"/>
             <a:ext cx="274320" cy="274320"/>
           </a:xfrm>
           <a:prstGeom prst="ellipse">
@@ -4040,17 +4040,73 @@
           </a:p>
         </p:txBody>
       </p:sp>
+      <p:sp>
+        <p:nvSpPr>
+          <p:cNvPr id="17" name="Oval 16"/>
+          <p:cNvSpPr/>
+          <p:nvPr/>
+        </p:nvSpPr>
+        <p:spPr>
+          <a:xfrm>
+            <a:off x="5872691" y="2884143"/>
+            <a:ext cx="274320" cy="274320"/>
+          </a:xfrm>
+          <a:prstGeom prst="ellipse">
+            <a:avLst/>
+          </a:prstGeom>
+          <a:solidFill>
+            <a:srgbClr val="2563EB"/>
+          </a:solidFill>
+          <a:ln w="15875">
+            <a:solidFill>
+              <a:srgbClr val="FFFFFF"/>
+            </a:solidFill>
+          </a:ln>
+          <a:effectLst/>
+        </p:spPr>
+        <p:style>
+          <a:lnRef idx="1">
+            <a:schemeClr val="accent1"/>
+          </a:lnRef>
+          <a:fillRef idx="3">
+            <a:schemeClr val="accent1"/>
+          </a:fillRef>
+          <a:effectRef idx="2">
+            <a:schemeClr val="accent1"/>
+          </a:effectRef>
+          <a:fontRef idx="minor">
+            <a:schemeClr val="lt1"/>
+          </a:fontRef>
+        </p:style>
+        <p:txBody>
+          <a:bodyPr rtlCol="0" anchor="ctr" lIns="0" rIns="0" tIns="0" bIns="0" wrap="none"/>
+          <a:lstStyle/>
+          <a:p>
+            <a:pPr algn="ctr"/>
+            <a:r>
+              <a:rPr sz="1000" b="1">
+                <a:solidFill>
+                  <a:srgbClr val="FFFFFF"/>
+                </a:solidFill>
+                <a:latin typeface="Meiryo"/>
+                <a:ea typeface="Meiryo"/>
+              </a:rPr>
+              <a:t>13</a:t>
+            </a:r>
+          </a:p>
+        </p:txBody>
+      </p:sp>
       <p:graphicFrame>
         <p:nvGraphicFramePr>
-          <p:cNvPr id="17" name="Table 16"/>
+          <p:cNvPr id="18" name="Table 17"/>
           <p:cNvGraphicFramePr>
             <a:graphicFrameLocks noGrp="1"/>
           </p:cNvGraphicFramePr>
           <p:nvPr/>
         </p:nvGraphicFramePr>
         <p:xfrm>
-          <a:off x="7772003" y="914400"/>
-          <a:ext cx="4236811" cy="3328416"/>
+          <a:off x="7768922" y="914400"/>
+          <a:ext cx="4239892" cy="3584448"/>
         </p:xfrm>
         <a:graphic>
           <a:graphicData uri="http://schemas.openxmlformats.org/drawingml/2006/table">
@@ -4060,7 +4116,7 @@
               </a:tblPr>
               <a:tblGrid>
                 <a:gridCol w="457200"/>
-                <a:gridCol w="2133691"/>
+                <a:gridCol w="2136772"/>
                 <a:gridCol w="777240"/>
                 <a:gridCol w="868680"/>
               </a:tblGrid>
@@ -5083,7 +5139,7 @@
                           <a:latin typeface="Meiryo"/>
                           <a:ea typeface="Meiryo"/>
                         </a:rPr>
-                        <a:t>ホテルインディゴ軽井沢</a:t>
+                        <a:t>THE HIRAMATSU 軽井沢御代田</a:t>
                       </a:r>
                     </a:p>
                   </a:txBody>
@@ -5107,7 +5163,7 @@
                           <a:latin typeface="Meiryo"/>
                           <a:ea typeface="Meiryo"/>
                         </a:rPr>
-                        <a:t>155室</a:t>
+                        <a:t>37室</a:t>
                       </a:r>
                     </a:p>
                   </a:txBody>
@@ -5131,7 +5187,7 @@
                           <a:latin typeface="Meiryo"/>
                           <a:ea typeface="Meiryo"/>
                         </a:rPr>
-                        <a:t>2022年</a:t>
+                        <a:t>2021年</a:t>
                       </a:r>
                     </a:p>
                   </a:txBody>
@@ -5181,7 +5237,7 @@
                           <a:latin typeface="Meiryo"/>
                           <a:ea typeface="Meiryo"/>
                         </a:rPr>
-                        <a:t>ふふ 軽井沢ー陽光の風ー</a:t>
+                        <a:t>ホテルインディゴ軽井沢</a:t>
                       </a:r>
                     </a:p>
                   </a:txBody>
@@ -5205,7 +5261,7 @@
                           <a:latin typeface="Meiryo"/>
                           <a:ea typeface="Meiryo"/>
                         </a:rPr>
-                        <a:t>24室</a:t>
+                        <a:t>155室</a:t>
                       </a:r>
                     </a:p>
                   </a:txBody>
@@ -5229,7 +5285,7 @@
                           <a:latin typeface="Meiryo"/>
                           <a:ea typeface="Meiryo"/>
                         </a:rPr>
-                        <a:t>2023年</a:t>
+                        <a:t>2022年</a:t>
                       </a:r>
                     </a:p>
                   </a:txBody>
@@ -5279,13 +5335,111 @@
                           <a:latin typeface="Meiryo"/>
                           <a:ea typeface="Meiryo"/>
                         </a:rPr>
+                        <a:t>ふふ 軽井沢ー陽光の風ー</a:t>
+                      </a:r>
+                    </a:p>
+                  </a:txBody>
+                  <a:tcPr marL="36576" marR="36576" marT="9144" marB="9144" anchor="ctr">
+                    <a:solidFill>
+                      <a:srgbClr val="F3F4F6"/>
+                    </a:solidFill>
+                  </a:tcPr>
+                </a:tc>
+                <a:tc>
+                  <a:txBody>
+                    <a:bodyPr/>
+                    <a:lstStyle/>
+                    <a:p>
+                      <a:pPr algn="ctr"/>
+                      <a:r>
+                        <a:rPr sz="850" b="0">
+                          <a:solidFill>
+                            <a:srgbClr val="1F2937"/>
+                          </a:solidFill>
+                          <a:latin typeface="Meiryo"/>
+                          <a:ea typeface="Meiryo"/>
+                        </a:rPr>
+                        <a:t>24室</a:t>
+                      </a:r>
+                    </a:p>
+                  </a:txBody>
+                  <a:tcPr marL="36576" marR="36576" marT="9144" marB="9144" anchor="ctr">
+                    <a:solidFill>
+                      <a:srgbClr val="F3F4F6"/>
+                    </a:solidFill>
+                  </a:tcPr>
+                </a:tc>
+                <a:tc>
+                  <a:txBody>
+                    <a:bodyPr/>
+                    <a:lstStyle/>
+                    <a:p>
+                      <a:pPr algn="ctr"/>
+                      <a:r>
+                        <a:rPr sz="850" b="0">
+                          <a:solidFill>
+                            <a:srgbClr val="1F2937"/>
+                          </a:solidFill>
+                          <a:latin typeface="Meiryo"/>
+                          <a:ea typeface="Meiryo"/>
+                        </a:rPr>
+                        <a:t>2023年</a:t>
+                      </a:r>
+                    </a:p>
+                  </a:txBody>
+                  <a:tcPr marL="36576" marR="36576" marT="9144" marB="9144" anchor="ctr">
+                    <a:solidFill>
+                      <a:srgbClr val="F3F4F6"/>
+                    </a:solidFill>
+                  </a:tcPr>
+                </a:tc>
+              </a:tr>
+              <a:tr h="256032">
+                <a:tc>
+                  <a:txBody>
+                    <a:bodyPr/>
+                    <a:lstStyle/>
+                    <a:p>
+                      <a:pPr algn="ctr"/>
+                      <a:r>
+                        <a:rPr sz="850" b="1">
+                          <a:solidFill>
+                            <a:srgbClr val="FFFFFF"/>
+                          </a:solidFill>
+                          <a:latin typeface="Meiryo"/>
+                          <a:ea typeface="Meiryo"/>
+                        </a:rPr>
+                        <a:t>13</a:t>
+                      </a:r>
+                    </a:p>
+                  </a:txBody>
+                  <a:tcPr marL="36576" marR="36576" marT="9144" marB="9144" anchor="ctr">
+                    <a:solidFill>
+                      <a:srgbClr val="2563EB"/>
+                    </a:solidFill>
+                  </a:tcPr>
+                </a:tc>
+                <a:tc>
+                  <a:txBody>
+                    <a:bodyPr/>
+                    <a:lstStyle/>
+                    <a:p>
+                      <a:pPr algn="l"/>
+                      <a:r>
+                        <a:rPr sz="850" b="0">
+                          <a:solidFill>
+                            <a:srgbClr val="1F2937"/>
+                          </a:solidFill>
+                          <a:latin typeface="Meiryo"/>
+                          <a:ea typeface="Meiryo"/>
+                        </a:rPr>
                         <a:t>ふふ 旧軽井沢ー静養の森ー</a:t>
                       </a:r>
                     </a:p>
                   </a:txBody>
                   <a:tcPr marL="36576" marR="36576" marT="9144" marB="9144" anchor="ctr">
                     <a:solidFill>
-                      <a:srgbClr val="F3F4F6"/>
+                      <a:srgbClr val="FFFFFF"/>
                     </a:solidFill>
                   </a:tcPr>
                 </a:tc>
@@ -5309,7 +5463,7 @@
                   </a:txBody>
                   <a:tcPr marL="36576" marR="36576" marT="9144" marB="9144" anchor="ctr">
                     <a:solidFill>
-                      <a:srgbClr val="F3F4F6"/>
+                      <a:srgbClr val="FFFFFF"/>
                     </a:solidFill>
                   </a:tcPr>
                 </a:tc>
@@ -5333,7 +5487,7 @@
                   </a:txBody>
                   <a:tcPr marL="36576" marR="36576" marT="9144" marB="9144" anchor="ctr">
                     <a:solidFill>
-                      <a:srgbClr val="F3F4F6"/>
+                      <a:srgbClr val="FFFFFF"/>
                     </a:solidFill>
                   </a:tcPr>
                 </a:tc>
@@ -5406,7 +5560,7 @@
         </p:nvGraphicFramePr>
         <p:xfrm>
           <a:off x="228600" y="868680"/>
-          <a:ext cx="11704320" cy="3803904"/>
+          <a:ext cx="11704320" cy="4096512"/>
         </p:xfrm>
         <a:graphic>
           <a:graphicData uri="http://schemas.openxmlformats.org/drawingml/2006/table">
@@ -7162,7 +7316,7 @@
                           <a:latin typeface="Meiryo"/>
                           <a:ea typeface="Meiryo"/>
                         </a:rPr>
-                        <a:t>ホテルインディゴ軽井沢</a:t>
+                        <a:t>THE HIRAMATSU 軽井沢御代田</a:t>
                       </a:r>
                     </a:p>
                   </a:txBody>
@@ -7186,7 +7340,7 @@
                           <a:latin typeface="Meiryo"/>
                           <a:ea typeface="Meiryo"/>
                         </a:rPr>
-                        <a:t>リゾートホテル</a:t>
+                        <a:t>オーベルジュ</a:t>
                       </a:r>
                     </a:p>
                   </a:txBody>
@@ -7210,7 +7364,7 @@
                           <a:latin typeface="Meiryo"/>
                           <a:ea typeface="Meiryo"/>
                         </a:rPr>
-                        <a:t>155</a:t>
+                        <a:t>37</a:t>
                       </a:r>
                     </a:p>
                   </a:txBody>
@@ -7234,7 +7388,7 @@
                           <a:latin typeface="Meiryo"/>
                           <a:ea typeface="Meiryo"/>
                         </a:rPr>
-                        <a:t>2022年</a:t>
+                        <a:t>2021年</a:t>
                       </a:r>
                     </a:p>
                   </a:txBody>
@@ -7258,7 +7412,7 @@
                           <a:latin typeface="Meiryo"/>
                           <a:ea typeface="Meiryo"/>
                         </a:rPr>
-                        <a:t>45,001 - 50,000</a:t>
+                        <a:t>175,001 - 180,000</a:t>
                       </a:r>
                     </a:p>
                   </a:txBody>
@@ -7282,7 +7436,7 @@
                           <a:latin typeface="Meiryo"/>
                           <a:ea typeface="Meiryo"/>
                         </a:rPr>
-                        <a:t>〒389-0111 長野県北佐久郡軽井沢町大字長倉字屋敷添18番地39</a:t>
+                        <a:t>〒389-0201 長野県北佐久郡御代田町大字塩野375-723</a:t>
                       </a:r>
                     </a:p>
                   </a:txBody>
@@ -7332,7 +7486,7 @@
                           <a:latin typeface="Meiryo"/>
                           <a:ea typeface="Meiryo"/>
                         </a:rPr>
-                        <a:t>ふふ 軽井沢ー陽光の風ー</a:t>
+                        <a:t>ホテルインディゴ軽井沢</a:t>
                       </a:r>
                     </a:p>
                   </a:txBody>
@@ -7356,7 +7510,7 @@
                           <a:latin typeface="Meiryo"/>
                           <a:ea typeface="Meiryo"/>
                         </a:rPr>
-                        <a:t>旅館</a:t>
+                        <a:t>リゾートホテル</a:t>
                       </a:r>
                     </a:p>
                   </a:txBody>
@@ -7380,7 +7534,7 @@
                           <a:latin typeface="Meiryo"/>
                           <a:ea typeface="Meiryo"/>
                         </a:rPr>
-                        <a:t>24</a:t>
+                        <a:t>155</a:t>
                       </a:r>
                     </a:p>
                   </a:txBody>
@@ -7404,7 +7558,7 @@
                           <a:latin typeface="Meiryo"/>
                           <a:ea typeface="Meiryo"/>
                         </a:rPr>
-                        <a:t>2023年</a:t>
+                        <a:t>2022年</a:t>
                       </a:r>
                     </a:p>
                   </a:txBody>
@@ -7428,7 +7582,7 @@
                           <a:latin typeface="Meiryo"/>
                           <a:ea typeface="Meiryo"/>
                         </a:rPr>
-                        <a:t>155,001 - 160,000</a:t>
+                        <a:t>45,001 - 50,000</a:t>
                       </a:r>
                     </a:p>
                   </a:txBody>
@@ -7452,7 +7606,7 @@
                           <a:latin typeface="Meiryo"/>
                           <a:ea typeface="Meiryo"/>
                         </a:rPr>
-                        <a:t>〒389-0111長野県北佐久郡軽井沢町大字長倉568-1</a:t>
+                        <a:t>〒389-0111 長野県北佐久郡軽井沢町大字長倉字屋敷添18番地39</a:t>
                       </a:r>
                     </a:p>
                   </a:txBody>
@@ -7502,13 +7656,183 @@
                           <a:latin typeface="Meiryo"/>
                           <a:ea typeface="Meiryo"/>
                         </a:rPr>
+                        <a:t>ふふ 軽井沢ー陽光の風ー</a:t>
+                      </a:r>
+                    </a:p>
+                  </a:txBody>
+                  <a:tcPr anchor="ctr">
+                    <a:solidFill>
+                      <a:srgbClr val="F3F4F6"/>
+                    </a:solidFill>
+                  </a:tcPr>
+                </a:tc>
+                <a:tc>
+                  <a:txBody>
+                    <a:bodyPr/>
+                    <a:lstStyle/>
+                    <a:p>
+                      <a:pPr algn="ctr"/>
+                      <a:r>
+                        <a:rPr sz="900" b="0">
+                          <a:solidFill>
+                            <a:srgbClr val="1F2937"/>
+                          </a:solidFill>
+                          <a:latin typeface="Meiryo"/>
+                          <a:ea typeface="Meiryo"/>
+                        </a:rPr>
+                        <a:t>旅館</a:t>
+                      </a:r>
+                    </a:p>
+                  </a:txBody>
+                  <a:tcPr anchor="ctr">
+                    <a:solidFill>
+                      <a:srgbClr val="F3F4F6"/>
+                    </a:solidFill>
+                  </a:tcPr>
+                </a:tc>
+                <a:tc>
+                  <a:txBody>
+                    <a:bodyPr/>
+                    <a:lstStyle/>
+                    <a:p>
+                      <a:pPr algn="ctr"/>
+                      <a:r>
+                        <a:rPr sz="900" b="0">
+                          <a:solidFill>
+                            <a:srgbClr val="1F2937"/>
+                          </a:solidFill>
+                          <a:latin typeface="Meiryo"/>
+                          <a:ea typeface="Meiryo"/>
+                        </a:rPr>
+                        <a:t>24</a:t>
+                      </a:r>
+                    </a:p>
+                  </a:txBody>
+                  <a:tcPr anchor="ctr">
+                    <a:solidFill>
+                      <a:srgbClr val="F3F4F6"/>
+                    </a:solidFill>
+                  </a:tcPr>
+                </a:tc>
+                <a:tc>
+                  <a:txBody>
+                    <a:bodyPr/>
+                    <a:lstStyle/>
+                    <a:p>
+                      <a:pPr algn="ctr"/>
+                      <a:r>
+                        <a:rPr sz="900" b="0">
+                          <a:solidFill>
+                            <a:srgbClr val="1F2937"/>
+                          </a:solidFill>
+                          <a:latin typeface="Meiryo"/>
+                          <a:ea typeface="Meiryo"/>
+                        </a:rPr>
+                        <a:t>2023年</a:t>
+                      </a:r>
+                    </a:p>
+                  </a:txBody>
+                  <a:tcPr anchor="ctr">
+                    <a:solidFill>
+                      <a:srgbClr val="F3F4F6"/>
+                    </a:solidFill>
+                  </a:tcPr>
+                </a:tc>
+                <a:tc>
+                  <a:txBody>
+                    <a:bodyPr/>
+                    <a:lstStyle/>
+                    <a:p>
+                      <a:pPr algn="l"/>
+                      <a:r>
+                        <a:rPr sz="900" b="0">
+                          <a:solidFill>
+                            <a:srgbClr val="1F2937"/>
+                          </a:solidFill>
+                          <a:latin typeface="Meiryo"/>
+                          <a:ea typeface="Meiryo"/>
+                        </a:rPr>
+                        <a:t>155,001 - 160,000</a:t>
+                      </a:r>
+                    </a:p>
+                  </a:txBody>
+                  <a:tcPr anchor="ctr">
+                    <a:solidFill>
+                      <a:srgbClr val="F3F4F6"/>
+                    </a:solidFill>
+                  </a:tcPr>
+                </a:tc>
+                <a:tc>
+                  <a:txBody>
+                    <a:bodyPr/>
+                    <a:lstStyle/>
+                    <a:p>
+                      <a:pPr algn="l"/>
+                      <a:r>
+                        <a:rPr sz="900" b="0">
+                          <a:solidFill>
+                            <a:srgbClr val="1F2937"/>
+                          </a:solidFill>
+                          <a:latin typeface="Meiryo"/>
+                          <a:ea typeface="Meiryo"/>
+                        </a:rPr>
+                        <a:t>〒389-0111長野県北佐久郡軽井沢町大字長倉568-1</a:t>
+                      </a:r>
+                    </a:p>
+                  </a:txBody>
+                  <a:tcPr anchor="ctr">
+                    <a:solidFill>
+                      <a:srgbClr val="F3F4F6"/>
+                    </a:solidFill>
+                  </a:tcPr>
+                </a:tc>
+              </a:tr>
+              <a:tr h="292608">
+                <a:tc>
+                  <a:txBody>
+                    <a:bodyPr/>
+                    <a:lstStyle/>
+                    <a:p>
+                      <a:pPr algn="ctr"/>
+                      <a:r>
+                        <a:rPr sz="900" b="0">
+                          <a:solidFill>
+                            <a:srgbClr val="1F2937"/>
+                          </a:solidFill>
+                          <a:latin typeface="Meiryo"/>
+                          <a:ea typeface="Meiryo"/>
+                        </a:rPr>
+                        <a:t>13</a:t>
+                      </a:r>
+                    </a:p>
+                  </a:txBody>
+                  <a:tcPr anchor="ctr">
+                    <a:solidFill>
+                      <a:srgbClr val="FFFFFF"/>
+                    </a:solidFill>
+                  </a:tcPr>
+                </a:tc>
+                <a:tc>
+                  <a:txBody>
+                    <a:bodyPr/>
+                    <a:lstStyle/>
+                    <a:p>
+                      <a:pPr algn="l"/>
+                      <a:r>
+                        <a:rPr sz="900" b="0">
+                          <a:solidFill>
+                            <a:srgbClr val="1F2937"/>
+                          </a:solidFill>
+                          <a:latin typeface="Meiryo"/>
+                          <a:ea typeface="Meiryo"/>
+                        </a:rPr>
                         <a:t>ふふ 旧軽井沢ー静養の森ー</a:t>
                       </a:r>
                     </a:p>
                   </a:txBody>
                   <a:tcPr anchor="ctr">
                     <a:solidFill>
-                      <a:srgbClr val="F3F4F6"/>
+                      <a:srgbClr val="FFFFFF"/>
                     </a:solidFill>
                   </a:tcPr>
                 </a:tc>
@@ -7532,7 +7856,7 @@
                   </a:txBody>
                   <a:tcPr anchor="ctr">
                     <a:solidFill>
-                      <a:srgbClr val="F3F4F6"/>
+                      <a:srgbClr val="FFFFFF"/>
                     </a:solidFill>
                   </a:tcPr>
                 </a:tc>
@@ -7556,7 +7880,7 @@
                   </a:txBody>
                   <a:tcPr anchor="ctr">
                     <a:solidFill>
-                      <a:srgbClr val="F3F4F6"/>
+                      <a:srgbClr val="FFFFFF"/>
                     </a:solidFill>
                   </a:tcPr>
                 </a:tc>
@@ -7580,7 +7904,7 @@
                   </a:txBody>
                   <a:tcPr anchor="ctr">
                     <a:solidFill>
-                      <a:srgbClr val="F3F4F6"/>
+                      <a:srgbClr val="FFFFFF"/>
                     </a:solidFill>
                   </a:tcPr>
                 </a:tc>
@@ -7604,7 +7928,7 @@
                   </a:txBody>
                   <a:tcPr anchor="ctr">
                     <a:solidFill>
-                      <a:srgbClr val="F3F4F6"/>
+                      <a:srgbClr val="FFFFFF"/>
                     </a:solidFill>
                   </a:tcPr>
                 </a:tc>
@@ -7628,7 +7952,7 @@
                   </a:txBody>
                   <a:tcPr anchor="ctr">
                     <a:solidFill>
-                      <a:srgbClr val="F3F4F6"/>
+                      <a:srgbClr val="FFFFFF"/>
                     </a:solidFill>
                   </a:tcPr>
                 </a:tc>

--- a/output/benchmark_hotels.pptx
+++ b/output/benchmark_hotels.pptx
@@ -3376,7 +3376,7 @@
         </p:nvSpPr>
         <p:spPr>
           <a:xfrm>
-            <a:off x="6559808" y="2553246"/>
+            <a:off x="6559808" y="2509665"/>
             <a:ext cx="274320" cy="274320"/>
           </a:xfrm>
           <a:prstGeom prst="ellipse">
@@ -3432,7 +3432,7 @@
         </p:nvSpPr>
         <p:spPr>
           <a:xfrm>
-            <a:off x="5853444" y="3381854"/>
+            <a:off x="5853444" y="3338273"/>
             <a:ext cx="274320" cy="274320"/>
           </a:xfrm>
           <a:prstGeom prst="ellipse">
@@ -3488,7 +3488,7 @@
         </p:nvSpPr>
         <p:spPr>
           <a:xfrm>
-            <a:off x="6335460" y="4058688"/>
+            <a:off x="6335460" y="4015107"/>
             <a:ext cx="274320" cy="274320"/>
           </a:xfrm>
           <a:prstGeom prst="ellipse">
@@ -3544,7 +3544,7 @@
         </p:nvSpPr>
         <p:spPr>
           <a:xfrm>
-            <a:off x="5572686" y="2203050"/>
+            <a:off x="4704555" y="2246631"/>
             <a:ext cx="274320" cy="274320"/>
           </a:xfrm>
           <a:prstGeom prst="ellipse">
@@ -3600,7 +3600,7 @@
         </p:nvSpPr>
         <p:spPr>
           <a:xfrm>
-            <a:off x="3978686" y="3248582"/>
+            <a:off x="3978686" y="3205001"/>
             <a:ext cx="274320" cy="274320"/>
           </a:xfrm>
           <a:prstGeom prst="ellipse">
@@ -3656,7 +3656,7 @@
         </p:nvSpPr>
         <p:spPr>
           <a:xfrm>
-            <a:off x="2200826" y="3792647"/>
+            <a:off x="2200826" y="3749066"/>
             <a:ext cx="274320" cy="274320"/>
           </a:xfrm>
           <a:prstGeom prst="ellipse">
@@ -3712,7 +3712,7 @@
         </p:nvSpPr>
         <p:spPr>
           <a:xfrm>
-            <a:off x="6071659" y="2747825"/>
+            <a:off x="6071659" y="2704244"/>
             <a:ext cx="274320" cy="274320"/>
           </a:xfrm>
           <a:prstGeom prst="ellipse">
@@ -3768,7 +3768,7 @@
         </p:nvSpPr>
         <p:spPr>
           <a:xfrm>
-            <a:off x="5533897" y="5020709"/>
+            <a:off x="5533897" y="4977128"/>
             <a:ext cx="274320" cy="274320"/>
           </a:xfrm>
           <a:prstGeom prst="ellipse">
@@ -3824,7 +3824,7 @@
         </p:nvSpPr>
         <p:spPr>
           <a:xfrm>
-            <a:off x="6348464" y="3299305"/>
+            <a:off x="6348464" y="3255724"/>
             <a:ext cx="274320" cy="274320"/>
           </a:xfrm>
           <a:prstGeom prst="ellipse">
@@ -3880,7 +3880,7 @@
         </p:nvSpPr>
         <p:spPr>
           <a:xfrm>
-            <a:off x="934794" y="3033024"/>
+            <a:off x="934794" y="2989442"/>
             <a:ext cx="274320" cy="274320"/>
           </a:xfrm>
           <a:prstGeom prst="ellipse">
@@ -3936,7 +3936,7 @@
         </p:nvSpPr>
         <p:spPr>
           <a:xfrm>
-            <a:off x="4540127" y="3371903"/>
+            <a:off x="4540127" y="3328321"/>
             <a:ext cx="274320" cy="274320"/>
           </a:xfrm>
           <a:prstGeom prst="ellipse">
@@ -3992,7 +3992,7 @@
         </p:nvSpPr>
         <p:spPr>
           <a:xfrm>
-            <a:off x="5059861" y="3668424"/>
+            <a:off x="5059861" y="3624843"/>
             <a:ext cx="274320" cy="274320"/>
           </a:xfrm>
           <a:prstGeom prst="ellipse">
@@ -4048,7 +4048,7 @@
         </p:nvSpPr>
         <p:spPr>
           <a:xfrm>
-            <a:off x="5872691" y="2884143"/>
+            <a:off x="5872691" y="2840562"/>
             <a:ext cx="274320" cy="274320"/>
           </a:xfrm>
           <a:prstGeom prst="ellipse">
